--- a/docs/MultiThreading_Patterns_PTIT_T45_Editable.pptx
+++ b/docs/MultiThreading_Patterns_PTIT_T45_Editable.pptx
@@ -19390,11 +19390,11 @@
         <p:spPr>
           <a:xfrm>
             <a:off x="777240" y="3145536"/>
-            <a:ext cx="2409444" cy="868680"/>
+            <a:ext cx="4956048" cy="841248"/>
           </a:xfrm>
           <a:prstGeom prst="roundRect">
             <a:avLst>
-              <a:gd name="adj" fmla="val 8421"/>
+              <a:gd name="adj" fmla="val 8696"/>
             </a:avLst>
           </a:prstGeom>
           <a:solidFill>
@@ -19417,42 +19417,42 @@
         <p:spPr>
           <a:xfrm>
             <a:off x="868680" y="3218688"/>
-            <a:ext cx="2226564" cy="722376"/>
-          </a:xfrm>
-          <a:prstGeom prst="rect">
-            <a:avLst/>
-          </a:prstGeom>
-          <a:noFill/>
-          <a:ln/>
-        </p:spPr>
-        <p:txBody>
-          <a:bodyPr wrap="square" lIns="25400" tIns="50800" rIns="50800" bIns="25400" rtlCol="0" anchor="t"/>
-          <a:lstStyle/>
-          <a:p>
-            <a:pPr indent="0" marL="0">
-              <a:buNone/>
-            </a:pPr>
-            <a:r>
-              <a:rPr lang="en-US" sz="1000" b="1" dirty="0">
+            <a:ext cx="4773168" cy="694944"/>
+          </a:xfrm>
+          <a:prstGeom prst="rect">
+            <a:avLst/>
+          </a:prstGeom>
+          <a:noFill/>
+          <a:ln/>
+        </p:spPr>
+        <p:txBody>
+          <a:bodyPr wrap="square" lIns="25400" tIns="76200" rIns="76200" bIns="25400" rtlCol="0" anchor="ctr"/>
+          <a:lstStyle/>
+          <a:p>
+            <a:pPr indent="0" marL="0">
+              <a:buNone/>
+            </a:pPr>
+            <a:r>
+              <a:rPr lang="en-US" sz="1100" b="1" dirty="0">
                 <a:solidFill>
                   <a:srgbClr val="0F172A"/>
                 </a:solidFill>
               </a:rPr>
-              <a:t>💤 Lãng Phí Tài Nguyên
+              <a:t>💤  Lãng Phí Stack 1MB
 </a:t>
             </a:r>
             <a:pPr indent="0" marL="0">
               <a:buNone/>
             </a:pPr>
             <a:r>
-              <a:rPr lang="en-US" sz="850" dirty="0">
+              <a:rPr lang="en-US" sz="920" dirty="0">
                 <a:solidFill>
                   <a:srgbClr val="334155"/>
                 </a:solidFill>
               </a:rPr>
-              <a:t>CPU nhàn rỗi tuyệt đối nhưng bộ nhớ Stack 1MB vẫn bị giam giữ cứng ngắc.</a:t>
-            </a:r>
-            <a:endParaRPr lang="en-US" sz="1000" dirty="0"/>
+              <a:t>CPU nhàn rỗi 96% nhưng vẫn giam cứng 1MB RAM/luồng chỉ để đứng chờ mạng.</a:t>
+            </a:r>
+            <a:endParaRPr lang="en-US" sz="1100" dirty="0"/>
           </a:p>
         </p:txBody>
       </p:sp>
@@ -19464,12 +19464,12 @@
         </p:nvSpPr>
         <p:spPr>
           <a:xfrm>
-            <a:off x="3323844" y="3145536"/>
-            <a:ext cx="2409444" cy="868680"/>
+            <a:off x="777240" y="4078224"/>
+            <a:ext cx="4956048" cy="841248"/>
           </a:xfrm>
           <a:prstGeom prst="roundRect">
             <a:avLst>
-              <a:gd name="adj" fmla="val 8421"/>
+              <a:gd name="adj" fmla="val 8696"/>
             </a:avLst>
           </a:prstGeom>
           <a:solidFill>
@@ -19491,43 +19491,43 @@
         </p:nvSpPr>
         <p:spPr>
           <a:xfrm>
-            <a:off x="3415284" y="3218688"/>
-            <a:ext cx="2226564" cy="722376"/>
-          </a:xfrm>
-          <a:prstGeom prst="rect">
-            <a:avLst/>
-          </a:prstGeom>
-          <a:noFill/>
-          <a:ln/>
-        </p:spPr>
-        <p:txBody>
-          <a:bodyPr wrap="square" lIns="25400" tIns="50800" rIns="50800" bIns="25400" rtlCol="0" anchor="t"/>
-          <a:lstStyle/>
-          <a:p>
-            <a:pPr indent="0" marL="0">
-              <a:buNone/>
-            </a:pPr>
-            <a:r>
-              <a:rPr lang="en-US" sz="1000" b="1" dirty="0">
+            <a:off x="868680" y="4151376"/>
+            <a:ext cx="4773168" cy="694944"/>
+          </a:xfrm>
+          <a:prstGeom prst="rect">
+            <a:avLst/>
+          </a:prstGeom>
+          <a:noFill/>
+          <a:ln/>
+        </p:spPr>
+        <p:txBody>
+          <a:bodyPr wrap="square" lIns="25400" tIns="76200" rIns="76200" bIns="25400" rtlCol="0" anchor="ctr"/>
+          <a:lstStyle/>
+          <a:p>
+            <a:pPr indent="0" marL="0">
+              <a:buNone/>
+            </a:pPr>
+            <a:r>
+              <a:rPr lang="en-US" sz="1100" b="1" dirty="0">
                 <a:solidFill>
                   <a:srgbClr val="0F172A"/>
                 </a:solidFill>
               </a:rPr>
-              <a:t>🧱 Nghẽn Kết Nối C10K
+              <a:t>🧱  Nghẽn C10K Sập Máy Chủ
 </a:t>
             </a:r>
             <a:pPr indent="0" marL="0">
               <a:buNone/>
             </a:pPr>
             <a:r>
-              <a:rPr lang="en-US" sz="850" dirty="0">
+              <a:rPr lang="en-US" sz="920" dirty="0">
                 <a:solidFill>
                   <a:srgbClr val="334155"/>
                 </a:solidFill>
               </a:rPr>
-              <a:t>Tạo 10,000 luồng tương đương ngốn 10GB RAM chỉ để đứng chờ mạng đến.</a:t>
-            </a:r>
-            <a:endParaRPr lang="en-US" sz="1000" dirty="0"/>
+              <a:t>10,000 kết nối ngốn tới 10GB RAM chỉ để ngủ đông, làm kiệt quệ hệ thống.</a:t>
+            </a:r>
+            <a:endParaRPr lang="en-US" sz="1100" dirty="0"/>
           </a:p>
         </p:txBody>
       </p:sp>
@@ -19539,12 +19539,447 @@
         </p:nvSpPr>
         <p:spPr>
           <a:xfrm>
-            <a:off x="777240" y="4105656"/>
-            <a:ext cx="2409444" cy="868680"/>
+            <a:off x="777240" y="5084064"/>
+            <a:ext cx="4956048" cy="365760"/>
           </a:xfrm>
           <a:prstGeom prst="roundRect">
             <a:avLst>
-              <a:gd name="adj" fmla="val 8421"/>
+              <a:gd name="adj" fmla="val 20000"/>
+            </a:avLst>
+          </a:prstGeom>
+          <a:solidFill>
+            <a:srgbClr val="EFF6FF"/>
+          </a:solidFill>
+          <a:ln w="12700">
+            <a:solidFill>
+              <a:srgbClr val="BFDBFE"/>
+            </a:solidFill>
+            <a:prstDash val="solid"/>
+          </a:ln>
+        </p:spPr>
+      </p:sp>
+      <p:sp>
+        <p:nvSpPr>
+          <p:cNvPr id="27" name="Text 25"/>
+          <p:cNvSpPr/>
+          <p:nvPr/>
+        </p:nvSpPr>
+        <p:spPr>
+          <a:xfrm>
+            <a:off x="868680" y="5084064"/>
+            <a:ext cx="4773168" cy="365760"/>
+          </a:xfrm>
+          <a:prstGeom prst="rect">
+            <a:avLst/>
+          </a:prstGeom>
+          <a:noFill/>
+          <a:ln/>
+        </p:spPr>
+        <p:txBody>
+          <a:bodyPr wrap="square" rtlCol="0" anchor="ctr"/>
+          <a:lstStyle/>
+          <a:p>
+            <a:pPr indent="0" marL="0">
+              <a:buNone/>
+            </a:pPr>
+            <a:r>
+              <a:rPr lang="en-US" sz="880" b="1" dirty="0">
+                <a:solidFill>
+                  <a:srgbClr val="1D4ED8"/>
+                </a:solidFill>
+                <a:latin typeface="Arial" pitchFamily="34" charset="0"/>
+                <a:ea typeface="Arial" pitchFamily="34" charset="-122"/>
+                <a:cs typeface="Arial" pitchFamily="34" charset="-120"/>
+              </a:rPr>
+              <a:t>🚀 Sân khấu chính: Nơi Thread Pool &amp; Virtual Threads giải phóng sức mạnh máy chủ</a:t>
+            </a:r>
+            <a:endParaRPr lang="en-US" sz="880" dirty="0"/>
+          </a:p>
+        </p:txBody>
+      </p:sp>
+      <p:sp>
+        <p:nvSpPr>
+          <p:cNvPr id="28" name="Shape 26"/>
+          <p:cNvSpPr/>
+          <p:nvPr/>
+        </p:nvSpPr>
+        <p:spPr>
+          <a:xfrm>
+            <a:off x="6227064" y="1536192"/>
+            <a:ext cx="5413248" cy="4023360"/>
+          </a:xfrm>
+          <a:prstGeom prst="roundRect">
+            <a:avLst>
+              <a:gd name="adj" fmla="val 2273"/>
+            </a:avLst>
+          </a:prstGeom>
+          <a:solidFill>
+            <a:srgbClr val="FFFFFF"/>
+          </a:solidFill>
+          <a:ln w="19050">
+            <a:solidFill>
+              <a:srgbClr val="CBD5E1"/>
+            </a:solidFill>
+            <a:prstDash val="solid"/>
+          </a:ln>
+        </p:spPr>
+      </p:sp>
+      <p:sp>
+        <p:nvSpPr>
+          <p:cNvPr id="29" name="Shape 27"/>
+          <p:cNvSpPr/>
+          <p:nvPr/>
+        </p:nvSpPr>
+        <p:spPr>
+          <a:xfrm>
+            <a:off x="6227064" y="1536192"/>
+            <a:ext cx="5413248" cy="73152"/>
+          </a:xfrm>
+          <a:prstGeom prst="roundRect">
+            <a:avLst/>
+          </a:prstGeom>
+          <a:solidFill>
+            <a:srgbClr val="E11D48"/>
+          </a:solidFill>
+          <a:ln w="12700">
+            <a:solidFill>
+              <a:srgbClr val="E11D48"/>
+            </a:solidFill>
+            <a:prstDash val="solid"/>
+          </a:ln>
+        </p:spPr>
+      </p:sp>
+      <p:sp>
+        <p:nvSpPr>
+          <p:cNvPr id="30" name="Text 28"/>
+          <p:cNvSpPr/>
+          <p:nvPr/>
+        </p:nvSpPr>
+        <p:spPr>
+          <a:xfrm>
+            <a:off x="6455664" y="1673352"/>
+            <a:ext cx="3767328" cy="320040"/>
+          </a:xfrm>
+          <a:prstGeom prst="rect">
+            <a:avLst/>
+          </a:prstGeom>
+          <a:noFill/>
+          <a:ln/>
+        </p:spPr>
+        <p:txBody>
+          <a:bodyPr wrap="square" rtlCol="0" anchor="ctr"/>
+          <a:lstStyle/>
+          <a:p>
+            <a:pPr indent="0" marL="0">
+              <a:buNone/>
+            </a:pPr>
+            <a:r>
+              <a:rPr lang="en-US" sz="1450" b="1" dirty="0">
+                <a:solidFill>
+                  <a:srgbClr val="0F172A"/>
+                </a:solidFill>
+                <a:latin typeface="Arial" pitchFamily="34" charset="0"/>
+                <a:ea typeface="Arial" pitchFamily="34" charset="-122"/>
+                <a:cs typeface="Arial" pitchFamily="34" charset="-120"/>
+              </a:rPr>
+              <a:t>⚙️  Tác Vụ CPU-Bound</a:t>
+            </a:r>
+            <a:endParaRPr lang="en-US" sz="1450" dirty="0"/>
+          </a:p>
+        </p:txBody>
+      </p:sp>
+      <p:sp>
+        <p:nvSpPr>
+          <p:cNvPr id="31" name="Text 29"/>
+          <p:cNvSpPr/>
+          <p:nvPr/>
+        </p:nvSpPr>
+        <p:spPr>
+          <a:xfrm>
+            <a:off x="6455664" y="1993392"/>
+            <a:ext cx="3767328" cy="256032"/>
+          </a:xfrm>
+          <a:prstGeom prst="rect">
+            <a:avLst/>
+          </a:prstGeom>
+          <a:noFill/>
+          <a:ln/>
+        </p:spPr>
+        <p:txBody>
+          <a:bodyPr wrap="square" rtlCol="0" anchor="t"/>
+          <a:lstStyle/>
+          <a:p>
+            <a:pPr indent="0" marL="0">
+              <a:buNone/>
+            </a:pPr>
+            <a:r>
+              <a:rPr lang="en-US" sz="950" b="1" dirty="0">
+                <a:solidFill>
+                  <a:srgbClr val="334155"/>
+                </a:solidFill>
+                <a:latin typeface="Arial" pitchFamily="34" charset="0"/>
+                <a:ea typeface="Arial" pitchFamily="34" charset="-122"/>
+                <a:cs typeface="Arial" pitchFamily="34" charset="-120"/>
+              </a:rPr>
+              <a:t>Mã hóa SSL/TLS, Nén dữ liệu gzip, Thuật toán</a:t>
+            </a:r>
+            <a:endParaRPr lang="en-US" sz="950" dirty="0"/>
+          </a:p>
+        </p:txBody>
+      </p:sp>
+      <p:sp>
+        <p:nvSpPr>
+          <p:cNvPr id="32" name="Shape 30"/>
+          <p:cNvSpPr/>
+          <p:nvPr/>
+        </p:nvSpPr>
+        <p:spPr>
+          <a:xfrm>
+            <a:off x="9948672" y="1719072"/>
+            <a:ext cx="1463040" cy="256032"/>
+          </a:xfrm>
+          <a:prstGeom prst="roundRect">
+            <a:avLst>
+              <a:gd name="adj" fmla="val 35714"/>
+            </a:avLst>
+          </a:prstGeom>
+          <a:solidFill>
+            <a:srgbClr val="FFF1F2"/>
+          </a:solidFill>
+          <a:ln w="12700">
+            <a:solidFill>
+              <a:srgbClr val="FECDD3"/>
+            </a:solidFill>
+            <a:prstDash val="solid"/>
+          </a:ln>
+        </p:spPr>
+      </p:sp>
+      <p:sp>
+        <p:nvSpPr>
+          <p:cNvPr id="33" name="Text 31"/>
+          <p:cNvSpPr/>
+          <p:nvPr/>
+        </p:nvSpPr>
+        <p:spPr>
+          <a:xfrm>
+            <a:off x="9948672" y="1719072"/>
+            <a:ext cx="1463040" cy="256032"/>
+          </a:xfrm>
+          <a:prstGeom prst="rect">
+            <a:avLst/>
+          </a:prstGeom>
+          <a:noFill/>
+          <a:ln/>
+        </p:spPr>
+        <p:txBody>
+          <a:bodyPr wrap="square" rtlCol="0" anchor="ctr"/>
+          <a:lstStyle/>
+          <a:p>
+            <a:pPr algn="ctr" indent="0" marL="0">
+              <a:buNone/>
+            </a:pPr>
+            <a:r>
+              <a:rPr lang="en-US" sz="800" b="1" dirty="0">
+                <a:solidFill>
+                  <a:srgbClr val="E11D48"/>
+                </a:solidFill>
+                <a:latin typeface="Arial" pitchFamily="34" charset="0"/>
+                <a:ea typeface="Arial" pitchFamily="34" charset="-122"/>
+                <a:cs typeface="Arial" pitchFamily="34" charset="-120"/>
+              </a:rPr>
+              <a:t>10% — 20% TẢI MẠNG</a:t>
+            </a:r>
+            <a:endParaRPr lang="en-US" sz="800" dirty="0"/>
+          </a:p>
+        </p:txBody>
+      </p:sp>
+      <p:sp>
+        <p:nvSpPr>
+          <p:cNvPr id="34" name="Shape 32"/>
+          <p:cNvSpPr/>
+          <p:nvPr/>
+        </p:nvSpPr>
+        <p:spPr>
+          <a:xfrm>
+            <a:off x="6455664" y="2286000"/>
+            <a:ext cx="4956048" cy="0"/>
+          </a:xfrm>
+          <a:prstGeom prst="line">
+            <a:avLst/>
+          </a:prstGeom>
+          <a:noFill/>
+          <a:ln w="12700">
+            <a:solidFill>
+              <a:srgbClr val="F1F5F9"/>
+            </a:solidFill>
+            <a:prstDash val="solid"/>
+          </a:ln>
+        </p:spPr>
+      </p:sp>
+      <p:sp>
+        <p:nvSpPr>
+          <p:cNvPr id="35" name="Shape 33"/>
+          <p:cNvSpPr/>
+          <p:nvPr/>
+        </p:nvSpPr>
+        <p:spPr>
+          <a:xfrm>
+            <a:off x="6455664" y="2377440"/>
+            <a:ext cx="2386584" cy="658368"/>
+          </a:xfrm>
+          <a:prstGeom prst="roundRect">
+            <a:avLst>
+              <a:gd name="adj" fmla="val 11111"/>
+            </a:avLst>
+          </a:prstGeom>
+          <a:solidFill>
+            <a:srgbClr val="F8FAFC"/>
+          </a:solidFill>
+          <a:ln w="12700">
+            <a:solidFill>
+              <a:srgbClr val="CBD5E1"/>
+            </a:solidFill>
+            <a:prstDash val="solid"/>
+          </a:ln>
+        </p:spPr>
+      </p:sp>
+      <p:sp>
+        <p:nvSpPr>
+          <p:cNvPr id="36" name="Text 34"/>
+          <p:cNvSpPr/>
+          <p:nvPr/>
+        </p:nvSpPr>
+        <p:spPr>
+          <a:xfrm>
+            <a:off x="6547104" y="2432304"/>
+            <a:ext cx="2203704" cy="548640"/>
+          </a:xfrm>
+          <a:prstGeom prst="rect">
+            <a:avLst/>
+          </a:prstGeom>
+          <a:noFill/>
+          <a:ln/>
+        </p:spPr>
+        <p:txBody>
+          <a:bodyPr wrap="square" rtlCol="0" anchor="ctr"/>
+          <a:lstStyle/>
+          <a:p>
+            <a:pPr indent="0" marL="0">
+              <a:buNone/>
+            </a:pPr>
+            <a:r>
+              <a:rPr lang="en-US" sz="1600" b="1" dirty="0">
+                <a:solidFill>
+                  <a:srgbClr val="E11D48"/>
+                </a:solidFill>
+              </a:rPr>
+              <a:t>100%
+</a:t>
+            </a:r>
+            <a:pPr indent="0" marL="0">
+              <a:buNone/>
+            </a:pPr>
+            <a:r>
+              <a:rPr lang="en-US" sz="850" b="1" dirty="0">
+                <a:solidFill>
+                  <a:srgbClr val="334155"/>
+                </a:solidFill>
+              </a:rPr>
+              <a:t>Xung nhịp CPU hoạt động tối đa</a:t>
+            </a:r>
+            <a:endParaRPr lang="en-US" sz="1600" dirty="0"/>
+          </a:p>
+        </p:txBody>
+      </p:sp>
+      <p:sp>
+        <p:nvSpPr>
+          <p:cNvPr id="37" name="Shape 35"/>
+          <p:cNvSpPr/>
+          <p:nvPr/>
+        </p:nvSpPr>
+        <p:spPr>
+          <a:xfrm>
+            <a:off x="9025128" y="2377440"/>
+            <a:ext cx="2386584" cy="658368"/>
+          </a:xfrm>
+          <a:prstGeom prst="roundRect">
+            <a:avLst>
+              <a:gd name="adj" fmla="val 11111"/>
+            </a:avLst>
+          </a:prstGeom>
+          <a:solidFill>
+            <a:srgbClr val="F8FAFC"/>
+          </a:solidFill>
+          <a:ln w="12700">
+            <a:solidFill>
+              <a:srgbClr val="CBD5E1"/>
+            </a:solidFill>
+            <a:prstDash val="solid"/>
+          </a:ln>
+        </p:spPr>
+      </p:sp>
+      <p:sp>
+        <p:nvSpPr>
+          <p:cNvPr id="38" name="Text 36"/>
+          <p:cNvSpPr/>
+          <p:nvPr/>
+        </p:nvSpPr>
+        <p:spPr>
+          <a:xfrm>
+            <a:off x="9116568" y="2432304"/>
+            <a:ext cx="2203704" cy="548640"/>
+          </a:xfrm>
+          <a:prstGeom prst="rect">
+            <a:avLst/>
+          </a:prstGeom>
+          <a:noFill/>
+          <a:ln/>
+        </p:spPr>
+        <p:txBody>
+          <a:bodyPr wrap="square" rtlCol="0" anchor="ctr"/>
+          <a:lstStyle/>
+          <a:p>
+            <a:pPr indent="0" marL="0">
+              <a:buNone/>
+            </a:pPr>
+            <a:r>
+              <a:rPr lang="en-US" sz="1600" b="1" dirty="0">
+                <a:solidFill>
+                  <a:srgbClr val="E11D48"/>
+                </a:solidFill>
+              </a:rPr>
+              <a:t>N Lõi
+</a:t>
+            </a:r>
+            <a:pPr indent="0" marL="0">
+              <a:buNone/>
+            </a:pPr>
+            <a:r>
+              <a:rPr lang="en-US" sz="850" b="1" dirty="0">
+                <a:solidFill>
+                  <a:srgbClr val="334155"/>
+                </a:solidFill>
+              </a:rPr>
+              <a:t>Trần cứng giới hạn bởi số core vật lý</a:t>
+            </a:r>
+            <a:endParaRPr lang="en-US" sz="1600" dirty="0"/>
+          </a:p>
+        </p:txBody>
+      </p:sp>
+      <p:sp>
+        <p:nvSpPr>
+          <p:cNvPr id="39" name="Shape 37"/>
+          <p:cNvSpPr/>
+          <p:nvPr/>
+        </p:nvSpPr>
+        <p:spPr>
+          <a:xfrm>
+            <a:off x="6455664" y="3145536"/>
+            <a:ext cx="4956048" cy="841248"/>
+          </a:xfrm>
+          <a:prstGeom prst="roundRect">
+            <a:avLst>
+              <a:gd name="adj" fmla="val 8696"/>
             </a:avLst>
           </a:prstGeom>
           <a:solidFill>
@@ -19560,66 +19995,66 @@
       </p:sp>
       <p:sp>
         <p:nvSpPr>
-          <p:cNvPr id="27" name="Text 25"/>
-          <p:cNvSpPr/>
-          <p:nvPr/>
-        </p:nvSpPr>
-        <p:spPr>
-          <a:xfrm>
-            <a:off x="868680" y="4178808"/>
-            <a:ext cx="2226564" cy="722376"/>
-          </a:xfrm>
-          <a:prstGeom prst="rect">
-            <a:avLst/>
-          </a:prstGeom>
-          <a:noFill/>
-          <a:ln/>
-        </p:spPr>
-        <p:txBody>
-          <a:bodyPr wrap="square" lIns="25400" tIns="50800" rIns="50800" bIns="25400" rtlCol="0" anchor="t"/>
-          <a:lstStyle/>
-          <a:p>
-            <a:pPr indent="0" marL="0">
-              <a:buNone/>
-            </a:pPr>
-            <a:r>
-              <a:rPr lang="en-US" sz="1000" b="1" dirty="0">
+          <p:cNvPr id="40" name="Text 38"/>
+          <p:cNvSpPr/>
+          <p:nvPr/>
+        </p:nvSpPr>
+        <p:spPr>
+          <a:xfrm>
+            <a:off x="6547104" y="3218688"/>
+            <a:ext cx="4773168" cy="694944"/>
+          </a:xfrm>
+          <a:prstGeom prst="rect">
+            <a:avLst/>
+          </a:prstGeom>
+          <a:noFill/>
+          <a:ln/>
+        </p:spPr>
+        <p:txBody>
+          <a:bodyPr wrap="square" lIns="25400" tIns="76200" rIns="76200" bIns="25400" rtlCol="0" anchor="ctr"/>
+          <a:lstStyle/>
+          <a:p>
+            <a:pPr indent="0" marL="0">
+              <a:buNone/>
+            </a:pPr>
+            <a:r>
+              <a:rPr lang="en-US" sz="1100" b="1" dirty="0">
                 <a:solidFill>
                   <a:srgbClr val="0F172A"/>
                 </a:solidFill>
               </a:rPr>
-              <a:t>🎯 Mục Tiêu Tối Ưu
+              <a:t>🧱  Trần Lõi Vật Lý (N Core)
 </a:t>
             </a:r>
             <a:pPr indent="0" marL="0">
               <a:buNone/>
             </a:pPr>
             <a:r>
-              <a:rPr lang="en-US" sz="850" dirty="0">
+              <a:rPr lang="en-US" sz="920" dirty="0">
                 <a:solidFill>
                   <a:srgbClr val="334155"/>
                 </a:solidFill>
               </a:rPr>
-              <a:t>Tự động chuyển giao CPU ngay khi vào trạng thái chờ để phục vụ hàng ngàn kết nối.</a:t>
-            </a:r>
-            <a:endParaRPr lang="en-US" sz="1000" dirty="0"/>
-          </a:p>
-        </p:txBody>
-      </p:sp>
-      <p:sp>
-        <p:nvSpPr>
-          <p:cNvPr id="28" name="Shape 26"/>
-          <p:cNvSpPr/>
-          <p:nvPr/>
-        </p:nvSpPr>
-        <p:spPr>
-          <a:xfrm>
-            <a:off x="3323844" y="4105656"/>
-            <a:ext cx="2409444" cy="868680"/>
+              <a:t>Tốc độ phụ thuộc tuyệt đối vào số core CPU; không thể tăng tốc bằng cách đẻ thêm luồng.</a:t>
+            </a:r>
+            <a:endParaRPr lang="en-US" sz="1100" dirty="0"/>
+          </a:p>
+        </p:txBody>
+      </p:sp>
+      <p:sp>
+        <p:nvSpPr>
+          <p:cNvPr id="41" name="Shape 39"/>
+          <p:cNvSpPr/>
+          <p:nvPr/>
+        </p:nvSpPr>
+        <p:spPr>
+          <a:xfrm>
+            <a:off x="6455664" y="4078224"/>
+            <a:ext cx="4956048" cy="841248"/>
           </a:xfrm>
           <a:prstGeom prst="roundRect">
             <a:avLst>
-              <a:gd name="adj" fmla="val 8421"/>
+              <a:gd name="adj" fmla="val 8696"/>
             </a:avLst>
           </a:prstGeom>
           <a:solidFill>
@@ -19635,262 +20070,66 @@
       </p:sp>
       <p:sp>
         <p:nvSpPr>
-          <p:cNvPr id="29" name="Text 27"/>
-          <p:cNvSpPr/>
-          <p:nvPr/>
-        </p:nvSpPr>
-        <p:spPr>
-          <a:xfrm>
-            <a:off x="3415284" y="4178808"/>
-            <a:ext cx="2226564" cy="722376"/>
-          </a:xfrm>
-          <a:prstGeom prst="rect">
-            <a:avLst/>
-          </a:prstGeom>
-          <a:noFill/>
-          <a:ln/>
-        </p:spPr>
-        <p:txBody>
-          <a:bodyPr wrap="square" lIns="25400" tIns="50800" rIns="50800" bIns="25400" rtlCol="0" anchor="t"/>
-          <a:lstStyle/>
-          <a:p>
-            <a:pPr indent="0" marL="0">
-              <a:buNone/>
-            </a:pPr>
-            <a:r>
-              <a:rPr lang="en-US" sz="1000" b="1" dirty="0">
+          <p:cNvPr id="42" name="Text 40"/>
+          <p:cNvSpPr/>
+          <p:nvPr/>
+        </p:nvSpPr>
+        <p:spPr>
+          <a:xfrm>
+            <a:off x="6547104" y="4151376"/>
+            <a:ext cx="4773168" cy="694944"/>
+          </a:xfrm>
+          <a:prstGeom prst="rect">
+            <a:avLst/>
+          </a:prstGeom>
+          <a:noFill/>
+          <a:ln/>
+        </p:spPr>
+        <p:txBody>
+          <a:bodyPr wrap="square" lIns="25400" tIns="76200" rIns="76200" bIns="25400" rtlCol="0" anchor="ctr"/>
+          <a:lstStyle/>
+          <a:p>
+            <a:pPr indent="0" marL="0">
+              <a:buNone/>
+            </a:pPr>
+            <a:r>
+              <a:rPr lang="en-US" sz="1100" b="1" dirty="0">
                 <a:solidFill>
                   <a:srgbClr val="0F172A"/>
                 </a:solidFill>
               </a:rPr>
-              <a:t>⚡ Giải Pháp Đề Tài
+              <a:t>🔄  Tổn Thất Đổi Ngữ Cảnh
 </a:t>
             </a:r>
             <a:pPr indent="0" marL="0">
               <a:buNone/>
             </a:pPr>
             <a:r>
-              <a:rPr lang="en-US" sz="850" dirty="0">
+              <a:rPr lang="en-US" sz="920" dirty="0">
                 <a:solidFill>
                   <a:srgbClr val="334155"/>
                 </a:solidFill>
               </a:rPr>
-              <a:t>Ứng dụng Worker Thread Pool và Java 21 Virtual Threads để giải phóng sức mạnh máy chủ.</a:t>
-            </a:r>
-            <a:endParaRPr lang="en-US" sz="1000" dirty="0"/>
-          </a:p>
-        </p:txBody>
-      </p:sp>
-      <p:sp>
-        <p:nvSpPr>
-          <p:cNvPr id="30" name="Shape 28"/>
-          <p:cNvSpPr/>
-          <p:nvPr/>
-        </p:nvSpPr>
-        <p:spPr>
-          <a:xfrm>
-            <a:off x="777240" y="5084064"/>
+              <a:t>Quá nhiều luồng tranh chấp khiến CPU mất &gt;70% công suất chỉ để tráo Cache L1/L2.</a:t>
+            </a:r>
+            <a:endParaRPr lang="en-US" sz="1100" dirty="0"/>
+          </a:p>
+        </p:txBody>
+      </p:sp>
+      <p:sp>
+        <p:nvSpPr>
+          <p:cNvPr id="43" name="Shape 41"/>
+          <p:cNvSpPr/>
+          <p:nvPr/>
+        </p:nvSpPr>
+        <p:spPr>
+          <a:xfrm>
+            <a:off x="6455664" y="5084064"/>
             <a:ext cx="4956048" cy="365760"/>
           </a:xfrm>
           <a:prstGeom prst="roundRect">
             <a:avLst>
               <a:gd name="adj" fmla="val 20000"/>
-            </a:avLst>
-          </a:prstGeom>
-          <a:solidFill>
-            <a:srgbClr val="EFF6FF"/>
-          </a:solidFill>
-          <a:ln w="12700">
-            <a:solidFill>
-              <a:srgbClr val="BFDBFE"/>
-            </a:solidFill>
-            <a:prstDash val="solid"/>
-          </a:ln>
-        </p:spPr>
-      </p:sp>
-      <p:sp>
-        <p:nvSpPr>
-          <p:cNvPr id="31" name="Text 29"/>
-          <p:cNvSpPr/>
-          <p:nvPr/>
-        </p:nvSpPr>
-        <p:spPr>
-          <a:xfrm>
-            <a:off x="868680" y="5084064"/>
-            <a:ext cx="4773168" cy="365760"/>
-          </a:xfrm>
-          <a:prstGeom prst="rect">
-            <a:avLst/>
-          </a:prstGeom>
-          <a:noFill/>
-          <a:ln/>
-        </p:spPr>
-        <p:txBody>
-          <a:bodyPr wrap="square" rtlCol="0" anchor="ctr"/>
-          <a:lstStyle/>
-          <a:p>
-            <a:pPr indent="0" marL="0">
-              <a:buNone/>
-            </a:pPr>
-            <a:r>
-              <a:rPr lang="en-US" sz="880" b="1" dirty="0">
-                <a:solidFill>
-                  <a:srgbClr val="1D4ED8"/>
-                </a:solidFill>
-                <a:latin typeface="Arial" pitchFamily="34" charset="0"/>
-                <a:ea typeface="Arial" pitchFamily="34" charset="-122"/>
-                <a:cs typeface="Arial" pitchFamily="34" charset="-120"/>
-              </a:rPr>
-              <a:t>🚀 Sân khấu chính: Nơi Thread Pool &amp; Virtual Threads giải phóng sức mạnh máy chủ</a:t>
-            </a:r>
-            <a:endParaRPr lang="en-US" sz="880" dirty="0"/>
-          </a:p>
-        </p:txBody>
-      </p:sp>
-      <p:sp>
-        <p:nvSpPr>
-          <p:cNvPr id="32" name="Shape 30"/>
-          <p:cNvSpPr/>
-          <p:nvPr/>
-        </p:nvSpPr>
-        <p:spPr>
-          <a:xfrm>
-            <a:off x="6227064" y="1536192"/>
-            <a:ext cx="5413248" cy="4023360"/>
-          </a:xfrm>
-          <a:prstGeom prst="roundRect">
-            <a:avLst>
-              <a:gd name="adj" fmla="val 2273"/>
-            </a:avLst>
-          </a:prstGeom>
-          <a:solidFill>
-            <a:srgbClr val="FFFFFF"/>
-          </a:solidFill>
-          <a:ln w="19050">
-            <a:solidFill>
-              <a:srgbClr val="CBD5E1"/>
-            </a:solidFill>
-            <a:prstDash val="solid"/>
-          </a:ln>
-        </p:spPr>
-      </p:sp>
-      <p:sp>
-        <p:nvSpPr>
-          <p:cNvPr id="33" name="Shape 31"/>
-          <p:cNvSpPr/>
-          <p:nvPr/>
-        </p:nvSpPr>
-        <p:spPr>
-          <a:xfrm>
-            <a:off x="6227064" y="1536192"/>
-            <a:ext cx="5413248" cy="73152"/>
-          </a:xfrm>
-          <a:prstGeom prst="roundRect">
-            <a:avLst/>
-          </a:prstGeom>
-          <a:solidFill>
-            <a:srgbClr val="E11D48"/>
-          </a:solidFill>
-          <a:ln w="12700">
-            <a:solidFill>
-              <a:srgbClr val="E11D48"/>
-            </a:solidFill>
-            <a:prstDash val="solid"/>
-          </a:ln>
-        </p:spPr>
-      </p:sp>
-      <p:sp>
-        <p:nvSpPr>
-          <p:cNvPr id="34" name="Text 32"/>
-          <p:cNvSpPr/>
-          <p:nvPr/>
-        </p:nvSpPr>
-        <p:spPr>
-          <a:xfrm>
-            <a:off x="6455664" y="1673352"/>
-            <a:ext cx="3767328" cy="320040"/>
-          </a:xfrm>
-          <a:prstGeom prst="rect">
-            <a:avLst/>
-          </a:prstGeom>
-          <a:noFill/>
-          <a:ln/>
-        </p:spPr>
-        <p:txBody>
-          <a:bodyPr wrap="square" rtlCol="0" anchor="ctr"/>
-          <a:lstStyle/>
-          <a:p>
-            <a:pPr indent="0" marL="0">
-              <a:buNone/>
-            </a:pPr>
-            <a:r>
-              <a:rPr lang="en-US" sz="1450" b="1" dirty="0">
-                <a:solidFill>
-                  <a:srgbClr val="0F172A"/>
-                </a:solidFill>
-                <a:latin typeface="Arial" pitchFamily="34" charset="0"/>
-                <a:ea typeface="Arial" pitchFamily="34" charset="-122"/>
-                <a:cs typeface="Arial" pitchFamily="34" charset="-120"/>
-              </a:rPr>
-              <a:t>⚙️  Tác Vụ CPU-Bound</a:t>
-            </a:r>
-            <a:endParaRPr lang="en-US" sz="1450" dirty="0"/>
-          </a:p>
-        </p:txBody>
-      </p:sp>
-      <p:sp>
-        <p:nvSpPr>
-          <p:cNvPr id="35" name="Text 33"/>
-          <p:cNvSpPr/>
-          <p:nvPr/>
-        </p:nvSpPr>
-        <p:spPr>
-          <a:xfrm>
-            <a:off x="6455664" y="1993392"/>
-            <a:ext cx="3767328" cy="256032"/>
-          </a:xfrm>
-          <a:prstGeom prst="rect">
-            <a:avLst/>
-          </a:prstGeom>
-          <a:noFill/>
-          <a:ln/>
-        </p:spPr>
-        <p:txBody>
-          <a:bodyPr wrap="square" rtlCol="0" anchor="t"/>
-          <a:lstStyle/>
-          <a:p>
-            <a:pPr indent="0" marL="0">
-              <a:buNone/>
-            </a:pPr>
-            <a:r>
-              <a:rPr lang="en-US" sz="950" b="1" dirty="0">
-                <a:solidFill>
-                  <a:srgbClr val="334155"/>
-                </a:solidFill>
-                <a:latin typeface="Arial" pitchFamily="34" charset="0"/>
-                <a:ea typeface="Arial" pitchFamily="34" charset="-122"/>
-                <a:cs typeface="Arial" pitchFamily="34" charset="-120"/>
-              </a:rPr>
-              <a:t>Mã hóa SSL/TLS, Nén dữ liệu gzip, Thuật toán</a:t>
-            </a:r>
-            <a:endParaRPr lang="en-US" sz="950" dirty="0"/>
-          </a:p>
-        </p:txBody>
-      </p:sp>
-      <p:sp>
-        <p:nvSpPr>
-          <p:cNvPr id="36" name="Shape 34"/>
-          <p:cNvSpPr/>
-          <p:nvPr/>
-        </p:nvSpPr>
-        <p:spPr>
-          <a:xfrm>
-            <a:off x="9948672" y="1719072"/>
-            <a:ext cx="1463040" cy="256032"/>
-          </a:xfrm>
-          <a:prstGeom prst="roundRect">
-            <a:avLst>
-              <a:gd name="adj" fmla="val 35714"/>
             </a:avLst>
           </a:prstGeom>
           <a:solidFill>
@@ -19906,14 +20145,14 @@
       </p:sp>
       <p:sp>
         <p:nvSpPr>
-          <p:cNvPr id="37" name="Text 35"/>
-          <p:cNvSpPr/>
-          <p:nvPr/>
-        </p:nvSpPr>
-        <p:spPr>
-          <a:xfrm>
-            <a:off x="9948672" y="1719072"/>
-            <a:ext cx="1463040" cy="256032"/>
+          <p:cNvPr id="44" name="Text 42"/>
+          <p:cNvSpPr/>
+          <p:nvPr/>
+        </p:nvSpPr>
+        <p:spPr>
+          <a:xfrm>
+            <a:off x="6547104" y="5084064"/>
+            <a:ext cx="4773168" cy="365760"/>
           </a:xfrm>
           <a:prstGeom prst="rect">
             <a:avLst/>
@@ -19925,11 +20164,11 @@
           <a:bodyPr wrap="square" rtlCol="0" anchor="ctr"/>
           <a:lstStyle/>
           <a:p>
-            <a:pPr algn="ctr" indent="0" marL="0">
-              <a:buNone/>
-            </a:pPr>
-            <a:r>
-              <a:rPr lang="en-US" sz="800" b="1" dirty="0">
+            <a:pPr indent="0" marL="0">
+              <a:buNone/>
+            </a:pPr>
+            <a:r>
+              <a:rPr lang="en-US" sz="880" b="1" dirty="0">
                 <a:solidFill>
                   <a:srgbClr val="E11D48"/>
                 </a:solidFill>
@@ -19937,554 +20176,15 @@
                 <a:ea typeface="Arial" pitchFamily="34" charset="-122"/>
                 <a:cs typeface="Arial" pitchFamily="34" charset="-120"/>
               </a:rPr>
-              <a:t>10% — 20% TẢI MẠNG</a:t>
-            </a:r>
-            <a:endParaRPr lang="en-US" sz="800" dirty="0"/>
-          </a:p>
-        </p:txBody>
-      </p:sp>
-      <p:sp>
-        <p:nvSpPr>
-          <p:cNvPr id="38" name="Shape 36"/>
-          <p:cNvSpPr/>
-          <p:nvPr/>
-        </p:nvSpPr>
-        <p:spPr>
-          <a:xfrm>
-            <a:off x="6455664" y="2286000"/>
-            <a:ext cx="4956048" cy="0"/>
-          </a:xfrm>
-          <a:prstGeom prst="line">
-            <a:avLst/>
-          </a:prstGeom>
-          <a:noFill/>
-          <a:ln w="12700">
-            <a:solidFill>
-              <a:srgbClr val="F1F5F9"/>
-            </a:solidFill>
-            <a:prstDash val="solid"/>
-          </a:ln>
-        </p:spPr>
-      </p:sp>
-      <p:sp>
-        <p:nvSpPr>
-          <p:cNvPr id="39" name="Shape 37"/>
-          <p:cNvSpPr/>
-          <p:nvPr/>
-        </p:nvSpPr>
-        <p:spPr>
-          <a:xfrm>
-            <a:off x="6455664" y="2377440"/>
-            <a:ext cx="2386584" cy="658368"/>
-          </a:xfrm>
-          <a:prstGeom prst="roundRect">
-            <a:avLst>
-              <a:gd name="adj" fmla="val 11111"/>
-            </a:avLst>
-          </a:prstGeom>
-          <a:solidFill>
-            <a:srgbClr val="F8FAFC"/>
-          </a:solidFill>
-          <a:ln w="12700">
-            <a:solidFill>
-              <a:srgbClr val="CBD5E1"/>
-            </a:solidFill>
-            <a:prstDash val="solid"/>
-          </a:ln>
-        </p:spPr>
-      </p:sp>
-      <p:sp>
-        <p:nvSpPr>
-          <p:cNvPr id="40" name="Text 38"/>
-          <p:cNvSpPr/>
-          <p:nvPr/>
-        </p:nvSpPr>
-        <p:spPr>
-          <a:xfrm>
-            <a:off x="6547104" y="2432304"/>
-            <a:ext cx="2203704" cy="548640"/>
-          </a:xfrm>
-          <a:prstGeom prst="rect">
-            <a:avLst/>
-          </a:prstGeom>
-          <a:noFill/>
-          <a:ln/>
-        </p:spPr>
-        <p:txBody>
-          <a:bodyPr wrap="square" rtlCol="0" anchor="ctr"/>
-          <a:lstStyle/>
-          <a:p>
-            <a:pPr indent="0" marL="0">
-              <a:buNone/>
-            </a:pPr>
-            <a:r>
-              <a:rPr lang="en-US" sz="1600" b="1" dirty="0">
-                <a:solidFill>
-                  <a:srgbClr val="E11D48"/>
-                </a:solidFill>
-              </a:rPr>
-              <a:t>100%
-</a:t>
-            </a:r>
-            <a:pPr indent="0" marL="0">
-              <a:buNone/>
-            </a:pPr>
-            <a:r>
-              <a:rPr lang="en-US" sz="850" b="1" dirty="0">
-                <a:solidFill>
-                  <a:srgbClr val="334155"/>
-                </a:solidFill>
-              </a:rPr>
-              <a:t>Xung nhịp CPU hoạt động tối đa</a:t>
-            </a:r>
-            <a:endParaRPr lang="en-US" sz="1600" dirty="0"/>
-          </a:p>
-        </p:txBody>
-      </p:sp>
-      <p:sp>
-        <p:nvSpPr>
-          <p:cNvPr id="41" name="Shape 39"/>
-          <p:cNvSpPr/>
-          <p:nvPr/>
-        </p:nvSpPr>
-        <p:spPr>
-          <a:xfrm>
-            <a:off x="9025128" y="2377440"/>
-            <a:ext cx="2386584" cy="658368"/>
-          </a:xfrm>
-          <a:prstGeom prst="roundRect">
-            <a:avLst>
-              <a:gd name="adj" fmla="val 11111"/>
-            </a:avLst>
-          </a:prstGeom>
-          <a:solidFill>
-            <a:srgbClr val="F8FAFC"/>
-          </a:solidFill>
-          <a:ln w="12700">
-            <a:solidFill>
-              <a:srgbClr val="CBD5E1"/>
-            </a:solidFill>
-            <a:prstDash val="solid"/>
-          </a:ln>
-        </p:spPr>
-      </p:sp>
-      <p:sp>
-        <p:nvSpPr>
-          <p:cNvPr id="42" name="Text 40"/>
-          <p:cNvSpPr/>
-          <p:nvPr/>
-        </p:nvSpPr>
-        <p:spPr>
-          <a:xfrm>
-            <a:off x="9116568" y="2432304"/>
-            <a:ext cx="2203704" cy="548640"/>
-          </a:xfrm>
-          <a:prstGeom prst="rect">
-            <a:avLst/>
-          </a:prstGeom>
-          <a:noFill/>
-          <a:ln/>
-        </p:spPr>
-        <p:txBody>
-          <a:bodyPr wrap="square" rtlCol="0" anchor="ctr"/>
-          <a:lstStyle/>
-          <a:p>
-            <a:pPr indent="0" marL="0">
-              <a:buNone/>
-            </a:pPr>
-            <a:r>
-              <a:rPr lang="en-US" sz="1600" b="1" dirty="0">
-                <a:solidFill>
-                  <a:srgbClr val="E11D48"/>
-                </a:solidFill>
-              </a:rPr>
-              <a:t>N Lõi
-</a:t>
-            </a:r>
-            <a:pPr indent="0" marL="0">
-              <a:buNone/>
-            </a:pPr>
-            <a:r>
-              <a:rPr lang="en-US" sz="850" b="1" dirty="0">
-                <a:solidFill>
-                  <a:srgbClr val="334155"/>
-                </a:solidFill>
-              </a:rPr>
-              <a:t>Trần cứng giới hạn bởi số core vật lý</a:t>
-            </a:r>
-            <a:endParaRPr lang="en-US" sz="1600" dirty="0"/>
-          </a:p>
-        </p:txBody>
-      </p:sp>
-      <p:sp>
-        <p:nvSpPr>
-          <p:cNvPr id="43" name="Shape 41"/>
-          <p:cNvSpPr/>
-          <p:nvPr/>
-        </p:nvSpPr>
-        <p:spPr>
-          <a:xfrm>
-            <a:off x="6455664" y="3145536"/>
-            <a:ext cx="2409444" cy="868680"/>
-          </a:xfrm>
-          <a:prstGeom prst="roundRect">
-            <a:avLst>
-              <a:gd name="adj" fmla="val 8421"/>
-            </a:avLst>
-          </a:prstGeom>
-          <a:solidFill>
-            <a:srgbClr val="F8FAFC"/>
-          </a:solidFill>
-          <a:ln w="12700">
-            <a:solidFill>
-              <a:srgbClr val="E2E8F0"/>
-            </a:solidFill>
-            <a:prstDash val="solid"/>
-          </a:ln>
-        </p:spPr>
-      </p:sp>
-      <p:sp>
-        <p:nvSpPr>
-          <p:cNvPr id="44" name="Text 42"/>
-          <p:cNvSpPr/>
-          <p:nvPr/>
-        </p:nvSpPr>
-        <p:spPr>
-          <a:xfrm>
-            <a:off x="6547104" y="3218688"/>
-            <a:ext cx="2226564" cy="722376"/>
-          </a:xfrm>
-          <a:prstGeom prst="rect">
-            <a:avLst/>
-          </a:prstGeom>
-          <a:noFill/>
-          <a:ln/>
-        </p:spPr>
-        <p:txBody>
-          <a:bodyPr wrap="square" lIns="25400" tIns="50800" rIns="50800" bIns="25400" rtlCol="0" anchor="t"/>
-          <a:lstStyle/>
-          <a:p>
-            <a:pPr indent="0" marL="0">
-              <a:buNone/>
-            </a:pPr>
-            <a:r>
-              <a:rPr lang="en-US" sz="1000" b="1" dirty="0">
-                <a:solidFill>
-                  <a:srgbClr val="0F172A"/>
-                </a:solidFill>
-              </a:rPr>
-              <a:t>🧱 Ranh Giới Phần Cứng
-</a:t>
-            </a:r>
-            <a:pPr indent="0" marL="0">
-              <a:buNone/>
-            </a:pPr>
-            <a:r>
-              <a:rPr lang="en-US" sz="850" dirty="0">
-                <a:solidFill>
-                  <a:srgbClr val="334155"/>
-                </a:solidFill>
-              </a:rPr>
-              <a:t>Tốc độ xử lý phụ thuộc tuyệt đối vào số lõi CPU vật lý có sẵn trong máy chủ.</a:t>
-            </a:r>
-            <a:endParaRPr lang="en-US" sz="1000" dirty="0"/>
+              <a:t>🛡️ Cảnh báo thiết kế: Không thể tăng tốc CPU-Bound bằng cách đẻ thêm luồng</a:t>
+            </a:r>
+            <a:endParaRPr lang="en-US" sz="880" dirty="0"/>
           </a:p>
         </p:txBody>
       </p:sp>
       <p:sp>
         <p:nvSpPr>
           <p:cNvPr id="45" name="Shape 43"/>
-          <p:cNvSpPr/>
-          <p:nvPr/>
-        </p:nvSpPr>
-        <p:spPr>
-          <a:xfrm>
-            <a:off x="9002268" y="3145536"/>
-            <a:ext cx="2409444" cy="868680"/>
-          </a:xfrm>
-          <a:prstGeom prst="roundRect">
-            <a:avLst>
-              <a:gd name="adj" fmla="val 8421"/>
-            </a:avLst>
-          </a:prstGeom>
-          <a:solidFill>
-            <a:srgbClr val="F8FAFC"/>
-          </a:solidFill>
-          <a:ln w="12700">
-            <a:solidFill>
-              <a:srgbClr val="E2E8F0"/>
-            </a:solidFill>
-            <a:prstDash val="solid"/>
-          </a:ln>
-        </p:spPr>
-      </p:sp>
-      <p:sp>
-        <p:nvSpPr>
-          <p:cNvPr id="46" name="Text 44"/>
-          <p:cNvSpPr/>
-          <p:nvPr/>
-        </p:nvSpPr>
-        <p:spPr>
-          <a:xfrm>
-            <a:off x="9093708" y="3218688"/>
-            <a:ext cx="2226564" cy="722376"/>
-          </a:xfrm>
-          <a:prstGeom prst="rect">
-            <a:avLst/>
-          </a:prstGeom>
-          <a:noFill/>
-          <a:ln/>
-        </p:spPr>
-        <p:txBody>
-          <a:bodyPr wrap="square" lIns="25400" tIns="50800" rIns="50800" bIns="25400" rtlCol="0" anchor="t"/>
-          <a:lstStyle/>
-          <a:p>
-            <a:pPr indent="0" marL="0">
-              <a:buNone/>
-            </a:pPr>
-            <a:r>
-              <a:rPr lang="en-US" sz="1000" b="1" dirty="0">
-                <a:solidFill>
-                  <a:srgbClr val="0F172A"/>
-                </a:solidFill>
-              </a:rPr>
-              <a:t>⚠️ Nghịch Lý Tạo Luồng
-</a:t>
-            </a:r>
-            <a:pPr indent="0" marL="0">
-              <a:buNone/>
-            </a:pPr>
-            <a:r>
-              <a:rPr lang="en-US" sz="850" dirty="0">
-                <a:solidFill>
-                  <a:srgbClr val="334155"/>
-                </a:solidFill>
-              </a:rPr>
-              <a:t>Càng tạo thêm nhiều luồng vượt quá số lõi, hệ thống càng chậm do tranh chấp.</a:t>
-            </a:r>
-            <a:endParaRPr lang="en-US" sz="1000" dirty="0"/>
-          </a:p>
-        </p:txBody>
-      </p:sp>
-      <p:sp>
-        <p:nvSpPr>
-          <p:cNvPr id="47" name="Shape 45"/>
-          <p:cNvSpPr/>
-          <p:nvPr/>
-        </p:nvSpPr>
-        <p:spPr>
-          <a:xfrm>
-            <a:off x="6455664" y="4105656"/>
-            <a:ext cx="2409444" cy="868680"/>
-          </a:xfrm>
-          <a:prstGeom prst="roundRect">
-            <a:avLst>
-              <a:gd name="adj" fmla="val 8421"/>
-            </a:avLst>
-          </a:prstGeom>
-          <a:solidFill>
-            <a:srgbClr val="F8FAFC"/>
-          </a:solidFill>
-          <a:ln w="12700">
-            <a:solidFill>
-              <a:srgbClr val="E2E8F0"/>
-            </a:solidFill>
-            <a:prstDash val="solid"/>
-          </a:ln>
-        </p:spPr>
-      </p:sp>
-      <p:sp>
-        <p:nvSpPr>
-          <p:cNvPr id="48" name="Text 46"/>
-          <p:cNvSpPr/>
-          <p:nvPr/>
-        </p:nvSpPr>
-        <p:spPr>
-          <a:xfrm>
-            <a:off x="6547104" y="4178808"/>
-            <a:ext cx="2226564" cy="722376"/>
-          </a:xfrm>
-          <a:prstGeom prst="rect">
-            <a:avLst/>
-          </a:prstGeom>
-          <a:noFill/>
-          <a:ln/>
-        </p:spPr>
-        <p:txBody>
-          <a:bodyPr wrap="square" lIns="25400" tIns="50800" rIns="50800" bIns="25400" rtlCol="0" anchor="t"/>
-          <a:lstStyle/>
-          <a:p>
-            <a:pPr indent="0" marL="0">
-              <a:buNone/>
-            </a:pPr>
-            <a:r>
-              <a:rPr lang="en-US" sz="1000" b="1" dirty="0">
-                <a:solidFill>
-                  <a:srgbClr val="0F172A"/>
-                </a:solidFill>
-              </a:rPr>
-              <a:t>🔄 Phí Chuyển Ngữ Cảnh
-</a:t>
-            </a:r>
-            <a:pPr indent="0" marL="0">
-              <a:buNone/>
-            </a:pPr>
-            <a:r>
-              <a:rPr lang="en-US" sz="850" dirty="0">
-                <a:solidFill>
-                  <a:srgbClr val="334155"/>
-                </a:solidFill>
-              </a:rPr>
-              <a:t>CPU mất hơn 70% công suất chỉ để dọn và tráo đổi bộ nhớ đệm Cache L1/L2.</a:t>
-            </a:r>
-            <a:endParaRPr lang="en-US" sz="1000" dirty="0"/>
-          </a:p>
-        </p:txBody>
-      </p:sp>
-      <p:sp>
-        <p:nvSpPr>
-          <p:cNvPr id="49" name="Shape 47"/>
-          <p:cNvSpPr/>
-          <p:nvPr/>
-        </p:nvSpPr>
-        <p:spPr>
-          <a:xfrm>
-            <a:off x="9002268" y="4105656"/>
-            <a:ext cx="2409444" cy="868680"/>
-          </a:xfrm>
-          <a:prstGeom prst="roundRect">
-            <a:avLst>
-              <a:gd name="adj" fmla="val 8421"/>
-            </a:avLst>
-          </a:prstGeom>
-          <a:solidFill>
-            <a:srgbClr val="F8FAFC"/>
-          </a:solidFill>
-          <a:ln w="12700">
-            <a:solidFill>
-              <a:srgbClr val="E2E8F0"/>
-            </a:solidFill>
-            <a:prstDash val="solid"/>
-          </a:ln>
-        </p:spPr>
-      </p:sp>
-      <p:sp>
-        <p:nvSpPr>
-          <p:cNvPr id="50" name="Text 48"/>
-          <p:cNvSpPr/>
-          <p:nvPr/>
-        </p:nvSpPr>
-        <p:spPr>
-          <a:xfrm>
-            <a:off x="9093708" y="4178808"/>
-            <a:ext cx="2226564" cy="722376"/>
-          </a:xfrm>
-          <a:prstGeom prst="rect">
-            <a:avLst/>
-          </a:prstGeom>
-          <a:noFill/>
-          <a:ln/>
-        </p:spPr>
-        <p:txBody>
-          <a:bodyPr wrap="square" lIns="25400" tIns="50800" rIns="50800" bIns="25400" rtlCol="0" anchor="t"/>
-          <a:lstStyle/>
-          <a:p>
-            <a:pPr indent="0" marL="0">
-              <a:buNone/>
-            </a:pPr>
-            <a:r>
-              <a:rPr lang="en-US" sz="1000" b="1" dirty="0">
-                <a:solidFill>
-                  <a:srgbClr val="0F172A"/>
-                </a:solidFill>
-              </a:rPr>
-              <a:t>🛠️ Quy Tắc Thiết Kế
-</a:t>
-            </a:r>
-            <a:pPr indent="0" marL="0">
-              <a:buNone/>
-            </a:pPr>
-            <a:r>
-              <a:rPr lang="en-US" sz="850" dirty="0">
-                <a:solidFill>
-                  <a:srgbClr val="334155"/>
-                </a:solidFill>
-              </a:rPr>
-              <a:t>Giới hạn số luồng tối đa bằng đúng số Core phần cứng để đạt hiệu suất cao nhất.</a:t>
-            </a:r>
-            <a:endParaRPr lang="en-US" sz="1000" dirty="0"/>
-          </a:p>
-        </p:txBody>
-      </p:sp>
-      <p:sp>
-        <p:nvSpPr>
-          <p:cNvPr id="51" name="Shape 49"/>
-          <p:cNvSpPr/>
-          <p:nvPr/>
-        </p:nvSpPr>
-        <p:spPr>
-          <a:xfrm>
-            <a:off x="6455664" y="5084064"/>
-            <a:ext cx="4956048" cy="365760"/>
-          </a:xfrm>
-          <a:prstGeom prst="roundRect">
-            <a:avLst>
-              <a:gd name="adj" fmla="val 20000"/>
-            </a:avLst>
-          </a:prstGeom>
-          <a:solidFill>
-            <a:srgbClr val="FFF1F2"/>
-          </a:solidFill>
-          <a:ln w="12700">
-            <a:solidFill>
-              <a:srgbClr val="FECDD3"/>
-            </a:solidFill>
-            <a:prstDash val="solid"/>
-          </a:ln>
-        </p:spPr>
-      </p:sp>
-      <p:sp>
-        <p:nvSpPr>
-          <p:cNvPr id="52" name="Text 50"/>
-          <p:cNvSpPr/>
-          <p:nvPr/>
-        </p:nvSpPr>
-        <p:spPr>
-          <a:xfrm>
-            <a:off x="6547104" y="5084064"/>
-            <a:ext cx="4773168" cy="365760"/>
-          </a:xfrm>
-          <a:prstGeom prst="rect">
-            <a:avLst/>
-          </a:prstGeom>
-          <a:noFill/>
-          <a:ln/>
-        </p:spPr>
-        <p:txBody>
-          <a:bodyPr wrap="square" rtlCol="0" anchor="ctr"/>
-          <a:lstStyle/>
-          <a:p>
-            <a:pPr indent="0" marL="0">
-              <a:buNone/>
-            </a:pPr>
-            <a:r>
-              <a:rPr lang="en-US" sz="880" b="1" dirty="0">
-                <a:solidFill>
-                  <a:srgbClr val="E11D48"/>
-                </a:solidFill>
-                <a:latin typeface="Arial" pitchFamily="34" charset="0"/>
-                <a:ea typeface="Arial" pitchFamily="34" charset="-122"/>
-                <a:cs typeface="Arial" pitchFamily="34" charset="-120"/>
-              </a:rPr>
-              <a:t>🛡️ Cảnh báo thiết kế: Không thể tăng tốc CPU-Bound bằng cách đẻ thêm luồng</a:t>
-            </a:r>
-            <a:endParaRPr lang="en-US" sz="880" dirty="0"/>
-          </a:p>
-        </p:txBody>
-      </p:sp>
-      <p:sp>
-        <p:nvSpPr>
-          <p:cNvPr id="53" name="Shape 51"/>
           <p:cNvSpPr/>
           <p:nvPr/>
         </p:nvSpPr>
@@ -20511,7 +20211,7 @@
       </p:sp>
       <p:sp>
         <p:nvSpPr>
-          <p:cNvPr id="54" name="Shape 52"/>
+          <p:cNvPr id="46" name="Shape 44"/>
           <p:cNvSpPr/>
           <p:nvPr/>
         </p:nvSpPr>
@@ -20531,7 +20231,7 @@
       </p:sp>
       <p:sp>
         <p:nvSpPr>
-          <p:cNvPr id="55" name="Text 53"/>
+          <p:cNvPr id="47" name="Text 45"/>
           <p:cNvSpPr/>
           <p:nvPr/>
         </p:nvSpPr>

--- a/docs/MultiThreading_Patterns_PTIT_T45_Editable.pptx
+++ b/docs/MultiThreading_Patterns_PTIT_T45_Editable.pptx
@@ -2651,7 +2651,7 @@
               <a:buNone/>
             </a:pPr>
             <a:r>
-              <a:rPr lang="en-US" sz="950" b="1" dirty="0">
+              <a:rPr lang="en-US" sz="1200" b="1" dirty="0">
                 <a:solidFill>
                   <a:srgbClr val="475569"/>
                 </a:solidFill>
@@ -2663,7 +2663,7 @@
               <a:buNone/>
             </a:pPr>
             <a:r>
-              <a:rPr lang="en-US" sz="1600" b="1" dirty="0">
+              <a:rPr lang="en-US" sz="2000" b="1" dirty="0">
                 <a:solidFill>
                   <a:srgbClr val="0F172A"/>
                 </a:solidFill>
@@ -2675,14 +2675,14 @@
               <a:buNone/>
             </a:pPr>
             <a:r>
-              <a:rPr lang="en-US" sz="1100" b="1" dirty="0">
+              <a:rPr lang="en-US" sz="1300" b="1" dirty="0">
                 <a:solidFill>
                   <a:srgbClr val="1D4ED8"/>
                 </a:solidFill>
               </a:rPr>
               <a:t>hungdn@ptit.edu.vn</a:t>
             </a:r>
-            <a:endParaRPr lang="en-US" sz="950" dirty="0"/>
+            <a:endParaRPr lang="en-US" sz="1200" dirty="0"/>
           </a:p>
         </p:txBody>
       </p:sp>
@@ -2738,7 +2738,7 @@
               <a:buNone/>
             </a:pPr>
             <a:r>
-              <a:rPr lang="en-US" sz="950" b="1" dirty="0">
+              <a:rPr lang="en-US" sz="1200" b="1" dirty="0">
                 <a:solidFill>
                   <a:srgbClr val="475569"/>
                 </a:solidFill>
@@ -2750,7 +2750,7 @@
               <a:buNone/>
             </a:pPr>
             <a:r>
-              <a:rPr lang="en-US" sz="1600" b="1" dirty="0">
+              <a:rPr lang="en-US" sz="2000" b="1" dirty="0">
                 <a:solidFill>
                   <a:srgbClr val="0F172A"/>
                 </a:solidFill>
@@ -2762,14 +2762,14 @@
               <a:buNone/>
             </a:pPr>
             <a:r>
-              <a:rPr lang="en-US" sz="1100" b="1" dirty="0">
+              <a:rPr lang="en-US" sz="1300" b="1" dirty="0">
                 <a:solidFill>
                   <a:srgbClr val="059669"/>
                 </a:solidFill>
               </a:rPr>
               <a:t>Solo Project (100% A-Z)</a:t>
             </a:r>
-            <a:endParaRPr lang="en-US" sz="950" dirty="0"/>
+            <a:endParaRPr lang="en-US" sz="1200" dirty="0"/>
           </a:p>
         </p:txBody>
       </p:sp>
@@ -2825,7 +2825,7 @@
               <a:buNone/>
             </a:pPr>
             <a:r>
-              <a:rPr lang="en-US" sz="950" b="1" dirty="0">
+              <a:rPr lang="en-US" sz="1200" b="1" dirty="0">
                 <a:solidFill>
                   <a:srgbClr val="475569"/>
                 </a:solidFill>
@@ -2837,7 +2837,7 @@
               <a:buNone/>
             </a:pPr>
             <a:r>
-              <a:rPr lang="en-US" sz="1600" b="1" dirty="0">
+              <a:rPr lang="en-US" sz="2000" b="1" dirty="0">
                 <a:solidFill>
                   <a:srgbClr val="0F172A"/>
                 </a:solidFill>
@@ -2849,14 +2849,14 @@
               <a:buNone/>
             </a:pPr>
             <a:r>
-              <a:rPr lang="en-US" sz="1100" b="1" dirty="0">
+              <a:rPr lang="en-US" sz="1300" b="1" dirty="0">
                 <a:solidFill>
                   <a:srgbClr val="1D4ED8"/>
                 </a:solidFill>
               </a:rPr>
               <a:t>Java 21 LTS (Project Loom)</a:t>
             </a:r>
-            <a:endParaRPr lang="en-US" sz="950" dirty="0"/>
+            <a:endParaRPr lang="en-US" sz="1200" dirty="0"/>
           </a:p>
         </p:txBody>
       </p:sp>
@@ -2908,7 +2908,7 @@
               <a:buNone/>
             </a:pPr>
             <a:r>
-              <a:rPr lang="en-US" sz="1000" b="1" dirty="0">
+              <a:rPr lang="en-US" sz="1200" b="1" dirty="0">
                 <a:solidFill>
                   <a:srgbClr val="475569"/>
                 </a:solidFill>
@@ -2918,7 +2918,7 @@
               </a:rPr>
               <a:t>HỌC VIỆN CÔNG NGHỆ BƯU CHÍNH VIỄN THÔNG (PTIT) • KHOA CÔNG NGHỆ THÔNG TIN • 2026</a:t>
             </a:r>
-            <a:endParaRPr lang="en-US" sz="1000" dirty="0"/>
+            <a:endParaRPr lang="en-US" sz="1200" dirty="0"/>
           </a:p>
         </p:txBody>
       </p:sp>
@@ -3006,7 +3006,7 @@
               <a:buNone/>
             </a:pPr>
             <a:r>
-              <a:rPr lang="en-US" sz="900" b="1" dirty="0">
+              <a:rPr lang="en-US" sz="1100" b="1" dirty="0">
                 <a:solidFill>
                   <a:srgbClr val="1D4ED8"/>
                 </a:solidFill>
@@ -3016,7 +3016,7 @@
               </a:rPr>
               <a:t>ĐỈNH CAO HIGH-CONCURRENCY HIỆN ĐẠI</a:t>
             </a:r>
-            <a:endParaRPr lang="en-US" sz="900" dirty="0"/>
+            <a:endParaRPr lang="en-US" sz="1100" dirty="0"/>
           </a:p>
         </p:txBody>
       </p:sp>
@@ -3084,7 +3084,7 @@
               <a:buNone/>
             </a:pPr>
             <a:r>
-              <a:rPr lang="en-US" sz="1100" b="1" dirty="0">
+              <a:rPr lang="en-US" sz="1350" b="1" dirty="0">
                 <a:solidFill>
                   <a:srgbClr val="334155"/>
                 </a:solidFill>
@@ -3094,7 +3094,7 @@
               </a:rPr>
               <a:t>Cơ chế "Bàn làm việc dùng chung" — Cuộc cách mạng giải phóng hiệu năng mạng</a:t>
             </a:r>
-            <a:endParaRPr lang="en-US" sz="1100" dirty="0"/>
+            <a:endParaRPr lang="en-US" sz="1350" dirty="0"/>
           </a:p>
         </p:txBody>
       </p:sp>
@@ -3150,7 +3150,7 @@
               <a:buNone/>
             </a:pPr>
             <a:r>
-              <a:rPr lang="en-US" sz="1000" b="1" dirty="0">
+              <a:rPr lang="en-US" sz="1150" b="1" dirty="0">
                 <a:solidFill>
                   <a:srgbClr val="1D4ED8"/>
                 </a:solidFill>
@@ -3160,7 +3160,7 @@
               </a:rPr>
               <a:t>11 / 18</a:t>
             </a:r>
-            <a:endParaRPr lang="en-US" sz="1000" dirty="0"/>
+            <a:endParaRPr lang="en-US" sz="1150" dirty="0"/>
           </a:p>
         </p:txBody>
       </p:sp>
@@ -3212,7 +3212,7 @@
               <a:buNone/>
             </a:pPr>
             <a:r>
-              <a:rPr lang="en-US" sz="950" b="1" dirty="0">
+              <a:rPr lang="en-US" sz="1100" b="1" dirty="0">
                 <a:solidFill>
                   <a:srgbClr val="475569"/>
                 </a:solidFill>
@@ -3222,7 +3222,7 @@
               </a:rPr>
               <a:t>PTIT TELECOM • Khoa Công nghệ Thông tin • Đề Tài T45: Multi-Threading Patterns</a:t>
             </a:r>
-            <a:endParaRPr lang="en-US" sz="950" dirty="0"/>
+            <a:endParaRPr lang="en-US" sz="1100" dirty="0"/>
           </a:p>
         </p:txBody>
       </p:sp>
@@ -3251,7 +3251,7 @@
               <a:buNone/>
             </a:pPr>
             <a:r>
-              <a:rPr lang="en-US" sz="950" b="1" dirty="0">
+              <a:rPr lang="en-US" sz="1100" b="1" dirty="0">
                 <a:solidFill>
                   <a:srgbClr val="1D4ED8"/>
                 </a:solidFill>
@@ -3261,7 +3261,7 @@
               </a:rPr>
               <a:t>Slide 11 / 18</a:t>
             </a:r>
-            <a:endParaRPr lang="en-US" sz="950" dirty="0"/>
+            <a:endParaRPr lang="en-US" sz="1100" dirty="0"/>
           </a:p>
         </p:txBody>
       </p:sp>
@@ -3342,7 +3342,7 @@
               <a:buNone/>
             </a:pPr>
             <a:r>
-              <a:rPr lang="en-US" sz="1450" b="1" dirty="0">
+              <a:rPr lang="en-US" sz="1650" b="1" dirty="0">
                 <a:solidFill>
                   <a:srgbClr val="0F172A"/>
                 </a:solidFill>
@@ -3352,7 +3352,7 @@
               </a:rPr>
               <a:t>🍃  Cách Mạng Luồng Ảo Siêu Nhẹ</a:t>
             </a:r>
-            <a:endParaRPr lang="en-US" sz="1450" dirty="0"/>
+            <a:endParaRPr lang="en-US" sz="1650" dirty="0"/>
           </a:p>
         </p:txBody>
       </p:sp>
@@ -3381,7 +3381,7 @@
               <a:buNone/>
             </a:pPr>
             <a:r>
-              <a:rPr lang="en-US" sz="950" b="1" dirty="0">
+              <a:rPr lang="en-US" sz="1250" b="1" dirty="0">
                 <a:solidFill>
                   <a:srgbClr val="334155"/>
                 </a:solidFill>
@@ -3391,7 +3391,7 @@
               </a:rPr>
               <a:t>Đột phá kiến trúc Java 21 Project Loom</a:t>
             </a:r>
-            <a:endParaRPr lang="en-US" sz="950" dirty="0"/>
+            <a:endParaRPr lang="en-US" sz="1250" dirty="0"/>
           </a:p>
         </p:txBody>
       </p:sp>
@@ -3447,7 +3447,7 @@
               <a:buNone/>
             </a:pPr>
             <a:r>
-              <a:rPr lang="en-US" sz="800" b="1" dirty="0">
+              <a:rPr lang="en-US" sz="1150" b="1" dirty="0">
                 <a:solidFill>
                   <a:srgbClr val="059669"/>
                 </a:solidFill>
@@ -3457,7 +3457,7 @@
               </a:rPr>
               <a:t>TIẾT KIỆM BỘ NHỚ x1000</a:t>
             </a:r>
-            <a:endParaRPr lang="en-US" sz="800" dirty="0"/>
+            <a:endParaRPr lang="en-US" sz="1150" dirty="0"/>
           </a:p>
         </p:txBody>
       </p:sp>
@@ -3536,7 +3536,7 @@
               <a:buNone/>
             </a:pPr>
             <a:r>
-              <a:rPr lang="en-US" sz="1600" b="1" dirty="0">
+              <a:rPr lang="en-US" sz="2200" b="1" dirty="0">
                 <a:solidFill>
                   <a:srgbClr val="059669"/>
                 </a:solidFill>
@@ -3548,14 +3548,14 @@
               <a:buNone/>
             </a:pPr>
             <a:r>
-              <a:rPr lang="en-US" sz="850" b="1" dirty="0">
+              <a:rPr lang="en-US" sz="1150" b="1" dirty="0">
                 <a:solidFill>
                   <a:srgbClr val="334155"/>
                 </a:solidFill>
               </a:rPr>
               <a:t>Nhẹ gấp 1,000 lần so với 1MB của luồng OS</a:t>
             </a:r>
-            <a:endParaRPr lang="en-US" sz="1600" dirty="0"/>
+            <a:endParaRPr lang="en-US" sz="2200" dirty="0"/>
           </a:p>
         </p:txBody>
       </p:sp>
@@ -3611,7 +3611,7 @@
               <a:buNone/>
             </a:pPr>
             <a:r>
-              <a:rPr lang="en-US" sz="1600" b="1" dirty="0">
+              <a:rPr lang="en-US" sz="2200" b="1" dirty="0">
                 <a:solidFill>
                   <a:srgbClr val="059669"/>
                 </a:solidFill>
@@ -3623,14 +3623,14 @@
               <a:buNone/>
             </a:pPr>
             <a:r>
-              <a:rPr lang="en-US" sz="850" b="1" dirty="0">
+              <a:rPr lang="en-US" sz="1150" b="1" dirty="0">
                 <a:solidFill>
                   <a:srgbClr val="334155"/>
                 </a:solidFill>
               </a:rPr>
               <a:t>Khởi tạo hàng triệu luồng ảo thoải mái trên Heap</a:t>
             </a:r>
-            <a:endParaRPr lang="en-US" sz="1600" dirty="0"/>
+            <a:endParaRPr lang="en-US" sz="2200" dirty="0"/>
           </a:p>
         </p:txBody>
       </p:sp>
@@ -3643,11 +3643,11 @@
         <p:spPr>
           <a:xfrm>
             <a:off x="777240" y="3145536"/>
-            <a:ext cx="4956048" cy="841248"/>
+            <a:ext cx="4956048" cy="960120"/>
           </a:xfrm>
           <a:prstGeom prst="roundRect">
             <a:avLst>
-              <a:gd name="adj" fmla="val 8696"/>
+              <a:gd name="adj" fmla="val 7619"/>
             </a:avLst>
           </a:prstGeom>
           <a:solidFill>
@@ -3670,7 +3670,7 @@
         <p:spPr>
           <a:xfrm>
             <a:off x="868680" y="3218688"/>
-            <a:ext cx="4773168" cy="694944"/>
+            <a:ext cx="4773168" cy="813816"/>
           </a:xfrm>
           <a:prstGeom prst="rect">
             <a:avLst/>
@@ -3686,7 +3686,7 @@
               <a:buNone/>
             </a:pPr>
             <a:r>
-              <a:rPr lang="en-US" sz="1100" b="1" dirty="0">
+              <a:rPr lang="en-US" sz="1400" b="1" dirty="0">
                 <a:solidFill>
                   <a:srgbClr val="0F172A"/>
                 </a:solidFill>
@@ -3698,14 +3698,14 @@
               <a:buNone/>
             </a:pPr>
             <a:r>
-              <a:rPr lang="en-US" sz="920" dirty="0">
+              <a:rPr lang="en-US" sz="1220" dirty="0">
                 <a:solidFill>
                   <a:srgbClr val="334155"/>
                 </a:solidFill>
               </a:rPr>
               <a:t>Máy ảo Java tự quản lý luồng trong User-Space, không phụ thuộc Kernel OS.</a:t>
             </a:r>
-            <a:endParaRPr lang="en-US" sz="1100" dirty="0"/>
+            <a:endParaRPr lang="en-US" sz="1400" dirty="0"/>
           </a:p>
         </p:txBody>
       </p:sp>
@@ -3717,12 +3717,12 @@
         </p:nvSpPr>
         <p:spPr>
           <a:xfrm>
-            <a:off x="777240" y="4078224"/>
-            <a:ext cx="4956048" cy="841248"/>
+            <a:off x="777240" y="4197096"/>
+            <a:ext cx="4956048" cy="960120"/>
           </a:xfrm>
           <a:prstGeom prst="roundRect">
             <a:avLst>
-              <a:gd name="adj" fmla="val 8696"/>
+              <a:gd name="adj" fmla="val 7619"/>
             </a:avLst>
           </a:prstGeom>
           <a:solidFill>
@@ -3744,8 +3744,8 @@
         </p:nvSpPr>
         <p:spPr>
           <a:xfrm>
-            <a:off x="868680" y="4151376"/>
-            <a:ext cx="4773168" cy="694944"/>
+            <a:off x="868680" y="4270248"/>
+            <a:ext cx="4773168" cy="813816"/>
           </a:xfrm>
           <a:prstGeom prst="rect">
             <a:avLst/>
@@ -3761,7 +3761,7 @@
               <a:buNone/>
             </a:pPr>
             <a:r>
-              <a:rPr lang="en-US" sz="1100" b="1" dirty="0">
+              <a:rPr lang="en-US" sz="1400" b="1" dirty="0">
                 <a:solidFill>
                   <a:srgbClr val="0F172A"/>
                 </a:solidFill>
@@ -3773,14 +3773,14 @@
               <a:buNone/>
             </a:pPr>
             <a:r>
-              <a:rPr lang="en-US" sz="920" dirty="0">
+              <a:rPr lang="en-US" sz="1220" dirty="0">
                 <a:solidFill>
                   <a:srgbClr val="334155"/>
                 </a:solidFill>
               </a:rPr>
               <a:t>Sinh 10,000 luồng ảo nhẹ và nhanh tương đương tạo 10,000 đối tượng Java thông thường.</a:t>
             </a:r>
-            <a:endParaRPr lang="en-US" sz="1100" dirty="0"/>
+            <a:endParaRPr lang="en-US" sz="1400" dirty="0"/>
           </a:p>
         </p:txBody>
       </p:sp>
@@ -3836,7 +3836,7 @@
               <a:buNone/>
             </a:pPr>
             <a:r>
-              <a:rPr lang="en-US" sz="880" b="1" dirty="0">
+              <a:rPr lang="en-US" sz="1150" b="1" dirty="0">
                 <a:solidFill>
                   <a:srgbClr val="059669"/>
                 </a:solidFill>
@@ -3846,7 +3846,7 @@
               </a:rPr>
               <a:t>🚀 Bứt phá: Xóa bỏ hoàn toàn rào cản chi phí bộ nhớ của mô hình Thread-Per-Connection cũ</a:t>
             </a:r>
-            <a:endParaRPr lang="en-US" sz="880" dirty="0"/>
+            <a:endParaRPr lang="en-US" sz="1150" dirty="0"/>
           </a:p>
         </p:txBody>
       </p:sp>
@@ -3927,7 +3927,7 @@
               <a:buNone/>
             </a:pPr>
             <a:r>
-              <a:rPr lang="en-US" sz="1450" b="1" dirty="0">
+              <a:rPr lang="en-US" sz="1650" b="1" dirty="0">
                 <a:solidFill>
                   <a:srgbClr val="0F172A"/>
                 </a:solidFill>
@@ -3937,7 +3937,7 @@
               </a:rPr>
               <a:t>🔄  Cơ Chế Gắn/Nhả (Mount / Unmount)</a:t>
             </a:r>
-            <a:endParaRPr lang="en-US" sz="1450" dirty="0"/>
+            <a:endParaRPr lang="en-US" sz="1650" dirty="0"/>
           </a:p>
         </p:txBody>
       </p:sp>
@@ -3966,7 +3966,7 @@
               <a:buNone/>
             </a:pPr>
             <a:r>
-              <a:rPr lang="en-US" sz="950" b="1" dirty="0">
+              <a:rPr lang="en-US" sz="1250" b="1" dirty="0">
                 <a:solidFill>
                   <a:srgbClr val="334155"/>
                 </a:solidFill>
@@ -3976,7 +3976,7 @@
               </a:rPr>
               <a:t>Tối ưu hóa thời gian chờ mạng đến mức tối đa</a:t>
             </a:r>
-            <a:endParaRPr lang="en-US" sz="950" dirty="0"/>
+            <a:endParaRPr lang="en-US" sz="1250" dirty="0"/>
           </a:p>
         </p:txBody>
       </p:sp>
@@ -4032,7 +4032,7 @@
               <a:buNone/>
             </a:pPr>
             <a:r>
-              <a:rPr lang="en-US" sz="800" b="1" dirty="0">
+              <a:rPr lang="en-US" sz="1150" b="1" dirty="0">
                 <a:solidFill>
                   <a:srgbClr val="059669"/>
                 </a:solidFill>
@@ -4042,7 +4042,7 @@
               </a:rPr>
               <a:t>VÔ ĐỊCH THÔNG LƯỢNG</a:t>
             </a:r>
-            <a:endParaRPr lang="en-US" sz="800" dirty="0"/>
+            <a:endParaRPr lang="en-US" sz="1150" dirty="0"/>
           </a:p>
         </p:txBody>
       </p:sp>
@@ -4121,7 +4121,7 @@
               <a:buNone/>
             </a:pPr>
             <a:r>
-              <a:rPr lang="en-US" sz="1600" b="1" dirty="0">
+              <a:rPr lang="en-US" sz="2200" b="1" dirty="0">
                 <a:solidFill>
                   <a:srgbClr val="059669"/>
                 </a:solidFill>
@@ -4133,14 +4133,14 @@
               <a:buNone/>
             </a:pPr>
             <a:r>
-              <a:rPr lang="en-US" sz="850" b="1" dirty="0">
+              <a:rPr lang="en-US" sz="1150" b="1" dirty="0">
                 <a:solidFill>
                   <a:srgbClr val="334155"/>
                 </a:solidFill>
               </a:rPr>
               <a:t>Thông lượng kỷ lục cao nhất toàn bộ đề tài</a:t>
             </a:r>
-            <a:endParaRPr lang="en-US" sz="1600" dirty="0"/>
+            <a:endParaRPr lang="en-US" sz="2200" dirty="0"/>
           </a:p>
         </p:txBody>
       </p:sp>
@@ -4196,7 +4196,7 @@
               <a:buNone/>
             </a:pPr>
             <a:r>
-              <a:rPr lang="en-US" sz="1600" b="1" dirty="0">
+              <a:rPr lang="en-US" sz="2200" b="1" dirty="0">
                 <a:solidFill>
                   <a:srgbClr val="059669"/>
                 </a:solidFill>
@@ -4208,14 +4208,14 @@
               <a:buNone/>
             </a:pPr>
             <a:r>
-              <a:rPr lang="en-US" sz="850" b="1" dirty="0">
+              <a:rPr lang="en-US" sz="1150" b="1" dirty="0">
                 <a:solidFill>
                   <a:srgbClr val="334155"/>
                 </a:solidFill>
               </a:rPr>
               <a:t>Độ trễ trung bình cực thấp và đồng đều</a:t>
             </a:r>
-            <a:endParaRPr lang="en-US" sz="1600" dirty="0"/>
+            <a:endParaRPr lang="en-US" sz="2200" dirty="0"/>
           </a:p>
         </p:txBody>
       </p:sp>
@@ -4228,11 +4228,11 @@
         <p:spPr>
           <a:xfrm>
             <a:off x="6455664" y="3145536"/>
-            <a:ext cx="4956048" cy="841248"/>
+            <a:ext cx="4956048" cy="960120"/>
           </a:xfrm>
           <a:prstGeom prst="roundRect">
             <a:avLst>
-              <a:gd name="adj" fmla="val 8696"/>
+              <a:gd name="adj" fmla="val 7619"/>
             </a:avLst>
           </a:prstGeom>
           <a:solidFill>
@@ -4255,7 +4255,7 @@
         <p:spPr>
           <a:xfrm>
             <a:off x="6547104" y="3218688"/>
-            <a:ext cx="4773168" cy="694944"/>
+            <a:ext cx="4773168" cy="813816"/>
           </a:xfrm>
           <a:prstGeom prst="rect">
             <a:avLst/>
@@ -4271,7 +4271,7 @@
               <a:buNone/>
             </a:pPr>
             <a:r>
-              <a:rPr lang="en-US" sz="1100" b="1" dirty="0">
+              <a:rPr lang="en-US" sz="1400" b="1" dirty="0">
                 <a:solidFill>
                   <a:srgbClr val="0F172A"/>
                 </a:solidFill>
@@ -4283,14 +4283,14 @@
               <a:buNone/>
             </a:pPr>
             <a:r>
-              <a:rPr lang="en-US" sz="920" dirty="0">
+              <a:rPr lang="en-US" sz="1220" dirty="0">
                 <a:solidFill>
                   <a:srgbClr val="334155"/>
                 </a:solidFill>
               </a:rPr>
               <a:t>Gặp lệnh chờ mạng 100ms, luồng ảo tự rời bàn và cất trạng thái vào Heap.</a:t>
             </a:r>
-            <a:endParaRPr lang="en-US" sz="1100" dirty="0"/>
+            <a:endParaRPr lang="en-US" sz="1400" dirty="0"/>
           </a:p>
         </p:txBody>
       </p:sp>
@@ -4302,12 +4302,12 @@
         </p:nvSpPr>
         <p:spPr>
           <a:xfrm>
-            <a:off x="6455664" y="4078224"/>
-            <a:ext cx="4956048" cy="841248"/>
+            <a:off x="6455664" y="4197096"/>
+            <a:ext cx="4956048" cy="960120"/>
           </a:xfrm>
           <a:prstGeom prst="roundRect">
             <a:avLst>
-              <a:gd name="adj" fmla="val 8696"/>
+              <a:gd name="adj" fmla="val 7619"/>
             </a:avLst>
           </a:prstGeom>
           <a:solidFill>
@@ -4329,8 +4329,8 @@
         </p:nvSpPr>
         <p:spPr>
           <a:xfrm>
-            <a:off x="6547104" y="4151376"/>
-            <a:ext cx="4773168" cy="694944"/>
+            <a:off x="6547104" y="4270248"/>
+            <a:ext cx="4773168" cy="813816"/>
           </a:xfrm>
           <a:prstGeom prst="rect">
             <a:avLst/>
@@ -4346,7 +4346,7 @@
               <a:buNone/>
             </a:pPr>
             <a:r>
-              <a:rPr lang="en-US" sz="1100" b="1" dirty="0">
+              <a:rPr lang="en-US" sz="1400" b="1" dirty="0">
                 <a:solidFill>
                   <a:srgbClr val="0F172A"/>
                 </a:solidFill>
@@ -4358,14 +4358,14 @@
               <a:buNone/>
             </a:pPr>
             <a:r>
-              <a:rPr lang="en-US" sz="920" dirty="0">
+              <a:rPr lang="en-US" sz="1220" dirty="0">
                 <a:solidFill>
                   <a:srgbClr val="334155"/>
                 </a:solidFill>
               </a:rPr>
               <a:t>Lõi CPU vật lý ngay lập tức phục vụ kết nối khác mà không bao giờ phải ngồi chơi.</a:t>
             </a:r>
-            <a:endParaRPr lang="en-US" sz="1100" dirty="0"/>
+            <a:endParaRPr lang="en-US" sz="1400" dirty="0"/>
           </a:p>
         </p:txBody>
       </p:sp>
@@ -4421,7 +4421,7 @@
               <a:buNone/>
             </a:pPr>
             <a:r>
-              <a:rPr lang="en-US" sz="880" b="1" dirty="0">
+              <a:rPr lang="en-US" sz="1150" b="1" dirty="0">
                 <a:solidFill>
                   <a:srgbClr val="059669"/>
                 </a:solidFill>
@@ -4431,7 +4431,7 @@
               </a:rPr>
               <a:t>👑 Ngôi vương: Giữ trọn cách viết code đồng bộ đơn giản nhưng đạt hiệu năng phi đồng bộ</a:t>
             </a:r>
-            <a:endParaRPr lang="en-US" sz="880" dirty="0"/>
+            <a:endParaRPr lang="en-US" sz="1150" dirty="0"/>
           </a:p>
         </p:txBody>
       </p:sp>
@@ -4507,7 +4507,7 @@
               <a:buNone/>
             </a:pPr>
             <a:r>
-              <a:rPr lang="en-US" sz="1100" dirty="0">
+              <a:rPr lang="en-US" sz="1350" dirty="0">
                 <a:solidFill>
                   <a:srgbClr val="0F172A"/>
                 </a:solidFill>
@@ -4517,7 +4517,7 @@
               </a:rPr>
               <a:t>🚀 TƯƠNG LAI CÔNG NGHỆ: Virtual Threads chính thức xóa bỏ cuộc giằng co kéo dài 20 năm giữa "Code dễ đọc (Blocking)" và "Hiệu năng cao (Non-blocking/Reactive)"!</a:t>
             </a:r>
-            <a:endParaRPr lang="en-US" sz="1100" dirty="0"/>
+            <a:endParaRPr lang="en-US" sz="1350" dirty="0"/>
           </a:p>
         </p:txBody>
       </p:sp>
@@ -4605,7 +4605,7 @@
               <a:buNone/>
             </a:pPr>
             <a:r>
-              <a:rPr lang="en-US" sz="900" b="1" dirty="0">
+              <a:rPr lang="en-US" sz="1100" b="1" dirty="0">
                 <a:solidFill>
                   <a:srgbClr val="1D4ED8"/>
                 </a:solidFill>
@@ -4615,7 +4615,7 @@
               </a:rPr>
               <a:t>HẠ TẦNG GIÁM SÁT</a:t>
             </a:r>
-            <a:endParaRPr lang="en-US" sz="900" dirty="0"/>
+            <a:endParaRPr lang="en-US" sz="1100" dirty="0"/>
           </a:p>
         </p:txBody>
       </p:sp>
@@ -4683,7 +4683,7 @@
               <a:buNone/>
             </a:pPr>
             <a:r>
-              <a:rPr lang="en-US" sz="1100" b="1" dirty="0">
+              <a:rPr lang="en-US" sz="1350" b="1" dirty="0">
                 <a:solidFill>
                   <a:srgbClr val="334155"/>
                 </a:solidFill>
@@ -4693,7 +4693,7 @@
               </a:rPr>
               <a:t>Giám sát số liệu trực quan theo thời gian thực với chi phí suy hao phần cứng bằng 0</a:t>
             </a:r>
-            <a:endParaRPr lang="en-US" sz="1100" dirty="0"/>
+            <a:endParaRPr lang="en-US" sz="1350" dirty="0"/>
           </a:p>
         </p:txBody>
       </p:sp>
@@ -4749,7 +4749,7 @@
               <a:buNone/>
             </a:pPr>
             <a:r>
-              <a:rPr lang="en-US" sz="1000" b="1" dirty="0">
+              <a:rPr lang="en-US" sz="1150" b="1" dirty="0">
                 <a:solidFill>
                   <a:srgbClr val="1D4ED8"/>
                 </a:solidFill>
@@ -4759,7 +4759,7 @@
               </a:rPr>
               <a:t>13 / 18</a:t>
             </a:r>
-            <a:endParaRPr lang="en-US" sz="1000" dirty="0"/>
+            <a:endParaRPr lang="en-US" sz="1150" dirty="0"/>
           </a:p>
         </p:txBody>
       </p:sp>
@@ -4811,7 +4811,7 @@
               <a:buNone/>
             </a:pPr>
             <a:r>
-              <a:rPr lang="en-US" sz="950" b="1" dirty="0">
+              <a:rPr lang="en-US" sz="1100" b="1" dirty="0">
                 <a:solidFill>
                   <a:srgbClr val="475569"/>
                 </a:solidFill>
@@ -4821,7 +4821,7 @@
               </a:rPr>
               <a:t>PTIT TELECOM • Khoa Công nghệ Thông tin • Đề Tài T45: Multi-Threading Patterns</a:t>
             </a:r>
-            <a:endParaRPr lang="en-US" sz="950" dirty="0"/>
+            <a:endParaRPr lang="en-US" sz="1100" dirty="0"/>
           </a:p>
         </p:txBody>
       </p:sp>
@@ -4850,7 +4850,7 @@
               <a:buNone/>
             </a:pPr>
             <a:r>
-              <a:rPr lang="en-US" sz="950" b="1" dirty="0">
+              <a:rPr lang="en-US" sz="1100" b="1" dirty="0">
                 <a:solidFill>
                   <a:srgbClr val="1D4ED8"/>
                 </a:solidFill>
@@ -4860,7 +4860,7 @@
               </a:rPr>
               <a:t>Slide 13 / 18</a:t>
             </a:r>
-            <a:endParaRPr lang="en-US" sz="950" dirty="0"/>
+            <a:endParaRPr lang="en-US" sz="1100" dirty="0"/>
           </a:p>
         </p:txBody>
       </p:sp>
@@ -4941,7 +4941,7 @@
               <a:buNone/>
             </a:pPr>
             <a:r>
-              <a:rPr lang="en-US" sz="1450" b="1" dirty="0">
+              <a:rPr lang="en-US" sz="1650" b="1" dirty="0">
                 <a:solidFill>
                   <a:srgbClr val="0F172A"/>
                 </a:solidFill>
@@ -4951,7 +4951,7 @@
               </a:rPr>
               <a:t>🛣️  Đo Lường Không Khóa (Lock-Free)</a:t>
             </a:r>
-            <a:endParaRPr lang="en-US" sz="1450" dirty="0"/>
+            <a:endParaRPr lang="en-US" sz="1650" dirty="0"/>
           </a:p>
         </p:txBody>
       </p:sp>
@@ -4980,7 +4980,7 @@
               <a:buNone/>
             </a:pPr>
             <a:r>
-              <a:rPr lang="en-US" sz="950" b="1" dirty="0">
+              <a:rPr lang="en-US" sz="1250" b="1" dirty="0">
                 <a:solidFill>
                   <a:srgbClr val="334155"/>
                 </a:solidFill>
@@ -4990,7 +4990,7 @@
               </a:rPr>
               <a:t>Nguyên lý trạm thu phí nhiều làn với Atomic LongAdder</a:t>
             </a:r>
-            <a:endParaRPr lang="en-US" sz="950" dirty="0"/>
+            <a:endParaRPr lang="en-US" sz="1250" dirty="0"/>
           </a:p>
         </p:txBody>
       </p:sp>
@@ -5046,7 +5046,7 @@
               <a:buNone/>
             </a:pPr>
             <a:r>
-              <a:rPr lang="en-US" sz="800" b="1" dirty="0">
+              <a:rPr lang="en-US" sz="1150" b="1" dirty="0">
                 <a:solidFill>
                   <a:srgbClr val="1D4ED8"/>
                 </a:solidFill>
@@ -5056,7 +5056,7 @@
               </a:rPr>
               <a:t>ZERO OVERHEAD</a:t>
             </a:r>
-            <a:endParaRPr lang="en-US" sz="800" dirty="0"/>
+            <a:endParaRPr lang="en-US" sz="1150" dirty="0"/>
           </a:p>
         </p:txBody>
       </p:sp>
@@ -5135,7 +5135,7 @@
               <a:buNone/>
             </a:pPr>
             <a:r>
-              <a:rPr lang="en-US" sz="1600" b="1" dirty="0">
+              <a:rPr lang="en-US" sz="2200" b="1" dirty="0">
                 <a:solidFill>
                   <a:srgbClr val="1D4ED8"/>
                 </a:solidFill>
@@ -5147,14 +5147,14 @@
               <a:buNone/>
             </a:pPr>
             <a:r>
-              <a:rPr lang="en-US" sz="850" b="1" dirty="0">
+              <a:rPr lang="en-US" sz="1150" b="1" dirty="0">
                 <a:solidFill>
                   <a:srgbClr val="334155"/>
                 </a:solidFill>
               </a:rPr>
               <a:t>Không dùng lệnh khóa chặn (Lock-Free CAS)</a:t>
             </a:r>
-            <a:endParaRPr lang="en-US" sz="1600" dirty="0"/>
+            <a:endParaRPr lang="en-US" sz="2200" dirty="0"/>
           </a:p>
         </p:txBody>
       </p:sp>
@@ -5210,7 +5210,7 @@
               <a:buNone/>
             </a:pPr>
             <a:r>
-              <a:rPr lang="en-US" sz="1600" b="1" dirty="0">
+              <a:rPr lang="en-US" sz="2200" b="1" dirty="0">
                 <a:solidFill>
                   <a:srgbClr val="1D4ED8"/>
                 </a:solidFill>
@@ -5222,14 +5222,14 @@
               <a:buNone/>
             </a:pPr>
             <a:r>
-              <a:rPr lang="en-US" sz="850" b="1" dirty="0">
+              <a:rPr lang="en-US" sz="1150" b="1" dirty="0">
                 <a:solidFill>
                   <a:srgbClr val="334155"/>
                 </a:solidFill>
               </a:rPr>
               <a:t>Đo đạc số liệu không làm chậm luồng xử lý mạng</a:t>
             </a:r>
-            <a:endParaRPr lang="en-US" sz="1600" dirty="0"/>
+            <a:endParaRPr lang="en-US" sz="2200" dirty="0"/>
           </a:p>
         </p:txBody>
       </p:sp>
@@ -5242,11 +5242,11 @@
         <p:spPr>
           <a:xfrm>
             <a:off x="777240" y="3145536"/>
-            <a:ext cx="4956048" cy="841248"/>
+            <a:ext cx="4956048" cy="960120"/>
           </a:xfrm>
           <a:prstGeom prst="roundRect">
             <a:avLst>
-              <a:gd name="adj" fmla="val 8696"/>
+              <a:gd name="adj" fmla="val 7619"/>
             </a:avLst>
           </a:prstGeom>
           <a:solidFill>
@@ -5269,7 +5269,7 @@
         <p:spPr>
           <a:xfrm>
             <a:off x="868680" y="3218688"/>
-            <a:ext cx="4773168" cy="694944"/>
+            <a:ext cx="4773168" cy="813816"/>
           </a:xfrm>
           <a:prstGeom prst="rect">
             <a:avLst/>
@@ -5285,7 +5285,7 @@
               <a:buNone/>
             </a:pPr>
             <a:r>
-              <a:rPr lang="en-US" sz="1100" b="1" dirty="0">
+              <a:rPr lang="en-US" sz="1400" b="1" dirty="0">
                 <a:solidFill>
                   <a:srgbClr val="0F172A"/>
                 </a:solidFill>
@@ -5297,14 +5297,14 @@
               <a:buNone/>
             </a:pPr>
             <a:r>
-              <a:rPr lang="en-US" sz="920" dirty="0">
+              <a:rPr lang="en-US" sz="1220" dirty="0">
                 <a:solidFill>
                   <a:srgbClr val="334155"/>
                 </a:solidFill>
               </a:rPr>
               <a:t>Mỗi luồng ghi số liệu vào ô nhớ riêng biệt, tránh hoàn toàn tranh chấp biến chung.</a:t>
             </a:r>
-            <a:endParaRPr lang="en-US" sz="1100" dirty="0"/>
+            <a:endParaRPr lang="en-US" sz="1400" dirty="0"/>
           </a:p>
         </p:txBody>
       </p:sp>
@@ -5316,12 +5316,12 @@
         </p:nvSpPr>
         <p:spPr>
           <a:xfrm>
-            <a:off x="777240" y="4078224"/>
-            <a:ext cx="4956048" cy="841248"/>
+            <a:off x="777240" y="4197096"/>
+            <a:ext cx="4956048" cy="960120"/>
           </a:xfrm>
           <a:prstGeom prst="roundRect">
             <a:avLst>
-              <a:gd name="adj" fmla="val 8696"/>
+              <a:gd name="adj" fmla="val 7619"/>
             </a:avLst>
           </a:prstGeom>
           <a:solidFill>
@@ -5343,8 +5343,8 @@
         </p:nvSpPr>
         <p:spPr>
           <a:xfrm>
-            <a:off x="868680" y="4151376"/>
-            <a:ext cx="4773168" cy="694944"/>
+            <a:off x="868680" y="4270248"/>
+            <a:ext cx="4773168" cy="813816"/>
           </a:xfrm>
           <a:prstGeom prst="rect">
             <a:avLst/>
@@ -5360,7 +5360,7 @@
               <a:buNone/>
             </a:pPr>
             <a:r>
-              <a:rPr lang="en-US" sz="1100" b="1" dirty="0">
+              <a:rPr lang="en-US" sz="1400" b="1" dirty="0">
                 <a:solidFill>
                   <a:srgbClr val="0F172A"/>
                 </a:solidFill>
@@ -5372,14 +5372,14 @@
               <a:buNone/>
             </a:pPr>
             <a:r>
-              <a:rPr lang="en-US" sz="920" dirty="0">
+              <a:rPr lang="en-US" sz="1220" dirty="0">
                 <a:solidFill>
                   <a:srgbClr val="334155"/>
                 </a:solidFill>
               </a:rPr>
               <a:t>Trích xuất số lượng luồng thực tế của hệ điều hành, RAM vật lý và xung nhịp CPU.</a:t>
             </a:r>
-            <a:endParaRPr lang="en-US" sz="1100" dirty="0"/>
+            <a:endParaRPr lang="en-US" sz="1400" dirty="0"/>
           </a:p>
         </p:txBody>
       </p:sp>
@@ -5435,7 +5435,7 @@
               <a:buNone/>
             </a:pPr>
             <a:r>
-              <a:rPr lang="en-US" sz="880" b="1" dirty="0">
+              <a:rPr lang="en-US" sz="1150" b="1" dirty="0">
                 <a:solidFill>
                   <a:srgbClr val="1D4ED8"/>
                 </a:solidFill>
@@ -5445,7 +5445,7 @@
               </a:rPr>
               <a:t>✨ Chính xác: Số liệu đo lường trung thực tuyệt đối mà không bóp méo hiệu năng</a:t>
             </a:r>
-            <a:endParaRPr lang="en-US" sz="880" dirty="0"/>
+            <a:endParaRPr lang="en-US" sz="1150" dirty="0"/>
           </a:p>
         </p:txBody>
       </p:sp>
@@ -5526,7 +5526,7 @@
               <a:buNone/>
             </a:pPr>
             <a:r>
-              <a:rPr lang="en-US" sz="1450" b="1" dirty="0">
+              <a:rPr lang="en-US" sz="1650" b="1" dirty="0">
                 <a:solidFill>
                   <a:srgbClr val="0F172A"/>
                 </a:solidFill>
@@ -5536,7 +5536,7 @@
               </a:rPr>
               <a:t>🖥️  Web Dashboard Canvas 60 FPS</a:t>
             </a:r>
-            <a:endParaRPr lang="en-US" sz="1450" dirty="0"/>
+            <a:endParaRPr lang="en-US" sz="1650" dirty="0"/>
           </a:p>
         </p:txBody>
       </p:sp>
@@ -5565,7 +5565,7 @@
               <a:buNone/>
             </a:pPr>
             <a:r>
-              <a:rPr lang="en-US" sz="950" b="1" dirty="0">
+              <a:rPr lang="en-US" sz="1250" b="1" dirty="0">
                 <a:solidFill>
                   <a:srgbClr val="334155"/>
                 </a:solidFill>
@@ -5575,7 +5575,7 @@
               </a:rPr>
               <a:t>Giao diện điều khiển và giám sát trực quan thời gian thực</a:t>
             </a:r>
-            <a:endParaRPr lang="en-US" sz="950" dirty="0"/>
+            <a:endParaRPr lang="en-US" sz="1250" dirty="0"/>
           </a:p>
         </p:txBody>
       </p:sp>
@@ -5631,7 +5631,7 @@
               <a:buNone/>
             </a:pPr>
             <a:r>
-              <a:rPr lang="en-US" sz="800" b="1" dirty="0">
+              <a:rPr lang="en-US" sz="1150" b="1" dirty="0">
                 <a:solidFill>
                   <a:srgbClr val="059669"/>
                 </a:solidFill>
@@ -5641,7 +5641,7 @@
               </a:rPr>
               <a:t>REAL-TIME MONITOR</a:t>
             </a:r>
-            <a:endParaRPr lang="en-US" sz="800" dirty="0"/>
+            <a:endParaRPr lang="en-US" sz="1150" dirty="0"/>
           </a:p>
         </p:txBody>
       </p:sp>
@@ -5720,7 +5720,7 @@
               <a:buNone/>
             </a:pPr>
             <a:r>
-              <a:rPr lang="en-US" sz="1600" b="1" dirty="0">
+              <a:rPr lang="en-US" sz="2200" b="1" dirty="0">
                 <a:solidFill>
                   <a:srgbClr val="059669"/>
                 </a:solidFill>
@@ -5732,14 +5732,14 @@
               <a:buNone/>
             </a:pPr>
             <a:r>
-              <a:rPr lang="en-US" sz="850" b="1" dirty="0">
+              <a:rPr lang="en-US" sz="1150" b="1" dirty="0">
                 <a:solidFill>
                   <a:srgbClr val="334155"/>
                 </a:solidFill>
               </a:rPr>
               <a:t>Động cơ Canvas vẽ biểu đồ sóng mượt mà</a:t>
             </a:r>
-            <a:endParaRPr lang="en-US" sz="1600" dirty="0"/>
+            <a:endParaRPr lang="en-US" sz="2200" dirty="0"/>
           </a:p>
         </p:txBody>
       </p:sp>
@@ -5795,7 +5795,7 @@
               <a:buNone/>
             </a:pPr>
             <a:r>
-              <a:rPr lang="en-US" sz="1600" b="1" dirty="0">
+              <a:rPr lang="en-US" sz="2200" b="1" dirty="0">
                 <a:solidFill>
                   <a:srgbClr val="059669"/>
                 </a:solidFill>
@@ -5807,14 +5807,14 @@
               <a:buNone/>
             </a:pPr>
             <a:r>
-              <a:rPr lang="en-US" sz="850" b="1" dirty="0">
+              <a:rPr lang="en-US" sz="1150" b="1" dirty="0">
                 <a:solidFill>
                   <a:srgbClr val="334155"/>
                 </a:solidFill>
               </a:rPr>
               <a:t>Tần suất làm mới dữ liệu tự động liên tục</a:t>
             </a:r>
-            <a:endParaRPr lang="en-US" sz="1600" dirty="0"/>
+            <a:endParaRPr lang="en-US" sz="2200" dirty="0"/>
           </a:p>
         </p:txBody>
       </p:sp>
@@ -5827,11 +5827,11 @@
         <p:spPr>
           <a:xfrm>
             <a:off x="6455664" y="3145536"/>
-            <a:ext cx="4956048" cy="841248"/>
+            <a:ext cx="4956048" cy="960120"/>
           </a:xfrm>
           <a:prstGeom prst="roundRect">
             <a:avLst>
-              <a:gd name="adj" fmla="val 8696"/>
+              <a:gd name="adj" fmla="val 7619"/>
             </a:avLst>
           </a:prstGeom>
           <a:solidFill>
@@ -5854,7 +5854,7 @@
         <p:spPr>
           <a:xfrm>
             <a:off x="6547104" y="3218688"/>
-            <a:ext cx="4773168" cy="694944"/>
+            <a:ext cx="4773168" cy="813816"/>
           </a:xfrm>
           <a:prstGeom prst="rect">
             <a:avLst/>
@@ -5870,7 +5870,7 @@
               <a:buNone/>
             </a:pPr>
             <a:r>
-              <a:rPr lang="en-US" sz="1100" b="1" dirty="0">
+              <a:rPr lang="en-US" sz="1400" b="1" dirty="0">
                 <a:solidFill>
                   <a:srgbClr val="0F172A"/>
                 </a:solidFill>
@@ -5882,14 +5882,14 @@
               <a:buNone/>
             </a:pPr>
             <a:r>
-              <a:rPr lang="en-US" sz="920" dirty="0">
+              <a:rPr lang="en-US" sz="1220" dirty="0">
                 <a:solidFill>
                   <a:srgbClr val="334155"/>
                 </a:solidFill>
               </a:rPr>
               <a:t>Theo dõi đồng thời: Số kết nối, Luồng OS, Độ trễ mạng và Mức ngốn CPU máy chủ.</a:t>
             </a:r>
-            <a:endParaRPr lang="en-US" sz="1100" dirty="0"/>
+            <a:endParaRPr lang="en-US" sz="1400" dirty="0"/>
           </a:p>
         </p:txBody>
       </p:sp>
@@ -5901,12 +5901,12 @@
         </p:nvSpPr>
         <p:spPr>
           <a:xfrm>
-            <a:off x="6455664" y="4078224"/>
-            <a:ext cx="4956048" cy="841248"/>
+            <a:off x="6455664" y="4197096"/>
+            <a:ext cx="4956048" cy="960120"/>
           </a:xfrm>
           <a:prstGeom prst="roundRect">
             <a:avLst>
-              <a:gd name="adj" fmla="val 8696"/>
+              <a:gd name="adj" fmla="val 7619"/>
             </a:avLst>
           </a:prstGeom>
           <a:solidFill>
@@ -5928,8 +5928,8 @@
         </p:nvSpPr>
         <p:spPr>
           <a:xfrm>
-            <a:off x="6547104" y="4151376"/>
-            <a:ext cx="4773168" cy="694944"/>
+            <a:off x="6547104" y="4270248"/>
+            <a:ext cx="4773168" cy="813816"/>
           </a:xfrm>
           <a:prstGeom prst="rect">
             <a:avLst/>
@@ -5945,7 +5945,7 @@
               <a:buNone/>
             </a:pPr>
             <a:r>
-              <a:rPr lang="en-US" sz="1100" b="1" dirty="0">
+              <a:rPr lang="en-US" sz="1400" b="1" dirty="0">
                 <a:solidFill>
                   <a:srgbClr val="0F172A"/>
                 </a:solidFill>
@@ -5957,14 +5957,14 @@
               <a:buNone/>
             </a:pPr>
             <a:r>
-              <a:rPr lang="en-US" sz="920" dirty="0">
+              <a:rPr lang="en-US" sz="1220" dirty="0">
                 <a:solidFill>
                   <a:srgbClr val="334155"/>
                 </a:solidFill>
               </a:rPr>
               <a:t>Nút bấm kích hoạt tải tức thì, mô phỏng mạng trễ và tải nặng CPU ngay trên web.</a:t>
             </a:r>
-            <a:endParaRPr lang="en-US" sz="1100" dirty="0"/>
+            <a:endParaRPr lang="en-US" sz="1400" dirty="0"/>
           </a:p>
         </p:txBody>
       </p:sp>
@@ -6020,7 +6020,7 @@
               <a:buNone/>
             </a:pPr>
             <a:r>
-              <a:rPr lang="en-US" sz="880" b="1" dirty="0">
+              <a:rPr lang="en-US" sz="1150" b="1" dirty="0">
                 <a:solidFill>
                   <a:srgbClr val="059669"/>
                 </a:solidFill>
@@ -6030,7 +6030,7 @@
               </a:rPr>
               <a:t>🚀 Trực quan: Biến các khái niệm đa luồng vô hình thành biểu đồ sóng chuyển động sống động</a:t>
             </a:r>
-            <a:endParaRPr lang="en-US" sz="880" dirty="0"/>
+            <a:endParaRPr lang="en-US" sz="1150" dirty="0"/>
           </a:p>
         </p:txBody>
       </p:sp>
@@ -6106,7 +6106,7 @@
               <a:buNone/>
             </a:pPr>
             <a:r>
-              <a:rPr lang="en-US" sz="1100" dirty="0">
+              <a:rPr lang="en-US" sz="1350" dirty="0">
                 <a:solidFill>
                   <a:srgbClr val="0F172A"/>
                 </a:solidFill>
@@ -6116,7 +6116,7 @@
               </a:rPr>
               <a:t>🖥️ GIẢI PHÁP ĐO ĐẠC: Hệ thống giám sát được xây dựng hoàn toàn bằng Vanilla JS + Canvas + Server-Sent Events/REST, vận hành tự chủ 100% không cần cài đặt thêm phần mềm giám sát ngoài!</a:t>
             </a:r>
-            <a:endParaRPr lang="en-US" sz="1100" dirty="0"/>
+            <a:endParaRPr lang="en-US" sz="1350" dirty="0"/>
           </a:p>
         </p:txBody>
       </p:sp>
@@ -6204,7 +6204,7 @@
               <a:buNone/>
             </a:pPr>
             <a:r>
-              <a:rPr lang="en-US" sz="900" b="1" dirty="0">
+              <a:rPr lang="en-US" sz="1100" b="1" dirty="0">
                 <a:solidFill>
                   <a:srgbClr val="1D4ED8"/>
                 </a:solidFill>
@@ -6214,7 +6214,7 @@
               </a:rPr>
               <a:t>KIẾN TRÚC ĐỀ TÀI</a:t>
             </a:r>
-            <a:endParaRPr lang="en-US" sz="900" dirty="0"/>
+            <a:endParaRPr lang="en-US" sz="1100" dirty="0"/>
           </a:p>
         </p:txBody>
       </p:sp>
@@ -6282,7 +6282,7 @@
               <a:buNone/>
             </a:pPr>
             <a:r>
-              <a:rPr lang="en-US" sz="1100" b="1" dirty="0">
+              <a:rPr lang="en-US" sz="1350" b="1" dirty="0">
                 <a:solidFill>
                   <a:srgbClr val="334155"/>
                 </a:solidFill>
@@ -6292,7 +6292,7 @@
               </a:rPr>
               <a:t>Bản đồ kiến trúc 5 chiến lược xử lý kết nối Socket được cài đặt độc lập</a:t>
             </a:r>
-            <a:endParaRPr lang="en-US" sz="1100" dirty="0"/>
+            <a:endParaRPr lang="en-US" sz="1350" dirty="0"/>
           </a:p>
         </p:txBody>
       </p:sp>
@@ -6348,7 +6348,7 @@
               <a:buNone/>
             </a:pPr>
             <a:r>
-              <a:rPr lang="en-US" sz="1000" b="1" dirty="0">
+              <a:rPr lang="en-US" sz="1150" b="1" dirty="0">
                 <a:solidFill>
                   <a:srgbClr val="1D4ED8"/>
                 </a:solidFill>
@@ -6358,7 +6358,7 @@
               </a:rPr>
               <a:t>05 / 18</a:t>
             </a:r>
-            <a:endParaRPr lang="en-US" sz="1000" dirty="0"/>
+            <a:endParaRPr lang="en-US" sz="1150" dirty="0"/>
           </a:p>
         </p:txBody>
       </p:sp>
@@ -6410,7 +6410,7 @@
               <a:buNone/>
             </a:pPr>
             <a:r>
-              <a:rPr lang="en-US" sz="950" b="1" dirty="0">
+              <a:rPr lang="en-US" sz="1100" b="1" dirty="0">
                 <a:solidFill>
                   <a:srgbClr val="475569"/>
                 </a:solidFill>
@@ -6420,7 +6420,7 @@
               </a:rPr>
               <a:t>PTIT TELECOM • Khoa Công nghệ Thông tin • Đề Tài T45: Multi-Threading Patterns</a:t>
             </a:r>
-            <a:endParaRPr lang="en-US" sz="950" dirty="0"/>
+            <a:endParaRPr lang="en-US" sz="1100" dirty="0"/>
           </a:p>
         </p:txBody>
       </p:sp>
@@ -6449,7 +6449,7 @@
               <a:buNone/>
             </a:pPr>
             <a:r>
-              <a:rPr lang="en-US" sz="950" b="1" dirty="0">
+              <a:rPr lang="en-US" sz="1100" b="1" dirty="0">
                 <a:solidFill>
                   <a:srgbClr val="1D4ED8"/>
                 </a:solidFill>
@@ -6459,7 +6459,7 @@
               </a:rPr>
               <a:t>Slide 05 / 18</a:t>
             </a:r>
-            <a:endParaRPr lang="en-US" sz="950" dirty="0"/>
+            <a:endParaRPr lang="en-US" sz="1100" dirty="0"/>
           </a:p>
         </p:txBody>
       </p:sp>
@@ -6515,7 +6515,7 @@
               <a:buNone/>
             </a:pPr>
             <a:r>
-              <a:rPr lang="en-US" sz="1250" b="1" dirty="0">
+              <a:rPr lang="en-US" sz="1400" b="1" dirty="0">
                 <a:solidFill>
                   <a:srgbClr val="FFFFFF"/>
                 </a:solidFill>
@@ -6525,7 +6525,7 @@
               </a:rPr>
               <a:t>🌐  LUỒNG KẾT NỐI MẠNG ĐỒNG THỜI TỪ CLIENTS (Hàng nghìn kết nối Socket TCP)</a:t>
             </a:r>
-            <a:endParaRPr lang="en-US" sz="1250" dirty="0"/>
+            <a:endParaRPr lang="en-US" sz="1400" dirty="0"/>
           </a:p>
         </p:txBody>
       </p:sp>
@@ -6554,7 +6554,7 @@
               <a:buNone/>
             </a:pPr>
             <a:r>
-              <a:rPr lang="en-US" sz="1100" b="1" dirty="0">
+              <a:rPr lang="en-US" sz="1250" b="1" dirty="0">
                 <a:solidFill>
                   <a:srgbClr val="475569"/>
                 </a:solidFill>
@@ -6564,7 +6564,7 @@
               </a:rPr>
               <a:t>▼  Phân nhánh chiến lược điều phối 5 kiến trúc luồng  ▼</a:t>
             </a:r>
-            <a:endParaRPr lang="en-US" sz="1100" dirty="0"/>
+            <a:endParaRPr lang="en-US" sz="1250" dirty="0"/>
           </a:p>
         </p:txBody>
       </p:sp>
@@ -6647,7 +6647,7 @@
               <a:buNone/>
             </a:pPr>
             <a:r>
-              <a:rPr lang="en-US" sz="950" b="1" dirty="0">
+              <a:rPr lang="en-US" sz="1100" b="1" dirty="0">
                 <a:solidFill>
                   <a:srgbClr val="64748B"/>
                 </a:solidFill>
@@ -6657,7 +6657,7 @@
               </a:rPr>
               <a:t>MODE 1</a:t>
             </a:r>
-            <a:endParaRPr lang="en-US" sz="950" dirty="0"/>
+            <a:endParaRPr lang="en-US" sz="1100" dirty="0"/>
           </a:p>
         </p:txBody>
       </p:sp>
@@ -6686,7 +6686,7 @@
               <a:buNone/>
             </a:pPr>
             <a:r>
-              <a:rPr lang="en-US" sz="1300" b="1" dirty="0">
+              <a:rPr lang="en-US" sz="1450" b="1" dirty="0">
                 <a:solidFill>
                   <a:srgbClr val="0F172A"/>
                 </a:solidFill>
@@ -6696,14 +6696,14 @@
               </a:rPr>
               <a:t>👤</a:t>
             </a:r>
-            <a:endParaRPr lang="en-US" sz="1300" dirty="0"/>
+            <a:endParaRPr lang="en-US" sz="1450" dirty="0"/>
           </a:p>
           <a:p>
             <a:pPr algn="ctr" indent="0" marL="0">
               <a:buNone/>
             </a:pPr>
             <a:r>
-              <a:rPr lang="en-US" sz="1300" b="1" dirty="0">
+              <a:rPr lang="en-US" sz="1450" b="1" dirty="0">
                 <a:solidFill>
                   <a:srgbClr val="0F172A"/>
                 </a:solidFill>
@@ -6713,7 +6713,7 @@
               </a:rPr>
               <a:t>Đơn Luồng Tuần Tự</a:t>
             </a:r>
-            <a:endParaRPr lang="en-US" sz="1300" dirty="0"/>
+            <a:endParaRPr lang="en-US" sz="1450" dirty="0"/>
           </a:p>
         </p:txBody>
       </p:sp>
@@ -6742,7 +6742,7 @@
               <a:buNone/>
             </a:pPr>
             <a:r>
-              <a:rPr lang="en-US" sz="950" dirty="0">
+              <a:rPr lang="en-US" sz="1150" dirty="0">
                 <a:solidFill>
                   <a:srgbClr val="334155"/>
                 </a:solidFill>
@@ -6752,7 +6752,7 @@
               </a:rPr>
               <a:t>1 luồng duy nhất lặp vòng. Khách sau bị kẹt cứng trong hàng đợi TCP.</a:t>
             </a:r>
-            <a:endParaRPr lang="en-US" sz="950" dirty="0"/>
+            <a:endParaRPr lang="en-US" sz="1150" dirty="0"/>
           </a:p>
         </p:txBody>
       </p:sp>
@@ -6808,7 +6808,7 @@
               <a:buNone/>
             </a:pPr>
             <a:r>
-              <a:rPr lang="en-US" sz="950" b="1" dirty="0">
+              <a:rPr lang="en-US" sz="1100" b="1" dirty="0">
                 <a:solidFill>
                   <a:srgbClr val="64748B"/>
                 </a:solidFill>
@@ -6818,7 +6818,7 @@
               </a:rPr>
               <a:t>~9.8 RPS • Nghẽn</a:t>
             </a:r>
-            <a:endParaRPr lang="en-US" sz="950" dirty="0"/>
+            <a:endParaRPr lang="en-US" sz="1100" dirty="0"/>
           </a:p>
         </p:txBody>
       </p:sp>
@@ -6901,7 +6901,7 @@
               <a:buNone/>
             </a:pPr>
             <a:r>
-              <a:rPr lang="en-US" sz="950" b="1" dirty="0">
+              <a:rPr lang="en-US" sz="1100" b="1" dirty="0">
                 <a:solidFill>
                   <a:srgbClr val="E11D48"/>
                 </a:solidFill>
@@ -6911,7 +6911,7 @@
               </a:rPr>
               <a:t>MODE 2</a:t>
             </a:r>
-            <a:endParaRPr lang="en-US" sz="950" dirty="0"/>
+            <a:endParaRPr lang="en-US" sz="1100" dirty="0"/>
           </a:p>
         </p:txBody>
       </p:sp>
@@ -6940,7 +6940,7 @@
               <a:buNone/>
             </a:pPr>
             <a:r>
-              <a:rPr lang="en-US" sz="1300" b="1" dirty="0">
+              <a:rPr lang="en-US" sz="1450" b="1" dirty="0">
                 <a:solidFill>
                   <a:srgbClr val="0F172A"/>
                 </a:solidFill>
@@ -6950,14 +6950,14 @@
               </a:rPr>
               <a:t>👥</a:t>
             </a:r>
-            <a:endParaRPr lang="en-US" sz="1300" dirty="0"/>
+            <a:endParaRPr lang="en-US" sz="1450" dirty="0"/>
           </a:p>
           <a:p>
             <a:pPr algn="ctr" indent="0" marL="0">
               <a:buNone/>
             </a:pPr>
             <a:r>
-              <a:rPr lang="en-US" sz="1300" b="1" dirty="0">
+              <a:rPr lang="en-US" sz="1450" b="1" dirty="0">
                 <a:solidFill>
                   <a:srgbClr val="0F172A"/>
                 </a:solidFill>
@@ -6967,7 +6967,7 @@
               </a:rPr>
               <a:t>Mỗi Kết Nối 1 Luồng</a:t>
             </a:r>
-            <a:endParaRPr lang="en-US" sz="1300" dirty="0"/>
+            <a:endParaRPr lang="en-US" sz="1450" dirty="0"/>
           </a:p>
         </p:txBody>
       </p:sp>
@@ -6996,7 +6996,7 @@
               <a:buNone/>
             </a:pPr>
             <a:r>
-              <a:rPr lang="en-US" sz="950" dirty="0">
+              <a:rPr lang="en-US" sz="1150" dirty="0">
                 <a:solidFill>
                   <a:srgbClr val="334155"/>
                 </a:solidFill>
@@ -7006,7 +7006,7 @@
               </a:rPr>
               <a:t>Mỗi khách tạo 1 luồng OS mới. Tốn 1MB Stack/khách, dễ chạm trần OOM.</a:t>
             </a:r>
-            <a:endParaRPr lang="en-US" sz="950" dirty="0"/>
+            <a:endParaRPr lang="en-US" sz="1150" dirty="0"/>
           </a:p>
         </p:txBody>
       </p:sp>
@@ -7062,7 +7062,7 @@
               <a:buNone/>
             </a:pPr>
             <a:r>
-              <a:rPr lang="en-US" sz="950" b="1" dirty="0">
+              <a:rPr lang="en-US" sz="1100" b="1" dirty="0">
                 <a:solidFill>
                   <a:srgbClr val="E11D48"/>
                 </a:solidFill>
@@ -7072,7 +7072,7 @@
               </a:rPr>
               <a:t>~285 RPS • Dễ Sập</a:t>
             </a:r>
-            <a:endParaRPr lang="en-US" sz="950" dirty="0"/>
+            <a:endParaRPr lang="en-US" sz="1100" dirty="0"/>
           </a:p>
         </p:txBody>
       </p:sp>
@@ -7155,7 +7155,7 @@
               <a:buNone/>
             </a:pPr>
             <a:r>
-              <a:rPr lang="en-US" sz="950" b="1" dirty="0">
+              <a:rPr lang="en-US" sz="1100" b="1" dirty="0">
                 <a:solidFill>
                   <a:srgbClr val="D97706"/>
                 </a:solidFill>
@@ -7165,7 +7165,7 @@
               </a:rPr>
               <a:t>MODE 3</a:t>
             </a:r>
-            <a:endParaRPr lang="en-US" sz="950" dirty="0"/>
+            <a:endParaRPr lang="en-US" sz="1100" dirty="0"/>
           </a:p>
         </p:txBody>
       </p:sp>
@@ -7194,7 +7194,7 @@
               <a:buNone/>
             </a:pPr>
             <a:r>
-              <a:rPr lang="en-US" sz="1300" b="1" dirty="0">
+              <a:rPr lang="en-US" sz="1450" b="1" dirty="0">
                 <a:solidFill>
                   <a:srgbClr val="0F172A"/>
                 </a:solidFill>
@@ -7204,14 +7204,14 @@
               </a:rPr>
               <a:t>🏢</a:t>
             </a:r>
-            <a:endParaRPr lang="en-US" sz="1300" dirty="0"/>
+            <a:endParaRPr lang="en-US" sz="1450" dirty="0"/>
           </a:p>
           <a:p>
             <a:pPr algn="ctr" indent="0" marL="0">
               <a:buNone/>
             </a:pPr>
             <a:r>
-              <a:rPr lang="en-US" sz="1300" b="1" dirty="0">
+              <a:rPr lang="en-US" sz="1450" b="1" dirty="0">
                 <a:solidFill>
                   <a:srgbClr val="0F172A"/>
                 </a:solidFill>
@@ -7221,7 +7221,7 @@
               </a:rPr>
               <a:t>Worker Thread Pool</a:t>
             </a:r>
-            <a:endParaRPr lang="en-US" sz="1300" dirty="0"/>
+            <a:endParaRPr lang="en-US" sz="1450" dirty="0"/>
           </a:p>
         </p:txBody>
       </p:sp>
@@ -7250,7 +7250,7 @@
               <a:buNone/>
             </a:pPr>
             <a:r>
-              <a:rPr lang="en-US" sz="950" dirty="0">
+              <a:rPr lang="en-US" sz="1150" dirty="0">
                 <a:solidFill>
                   <a:srgbClr val="334155"/>
                 </a:solidFill>
@@ -7260,7 +7260,7 @@
               </a:rPr>
               <a:t>16 luồng cố định + Ghế chờ 1,000 chỗ. Bảo vệ máy chủ an toàn tuyệt đối.</a:t>
             </a:r>
-            <a:endParaRPr lang="en-US" sz="950" dirty="0"/>
+            <a:endParaRPr lang="en-US" sz="1150" dirty="0"/>
           </a:p>
         </p:txBody>
       </p:sp>
@@ -7316,7 +7316,7 @@
               <a:buNone/>
             </a:pPr>
             <a:r>
-              <a:rPr lang="en-US" sz="950" b="1" dirty="0">
+              <a:rPr lang="en-US" sz="1100" b="1" dirty="0">
                 <a:solidFill>
                   <a:srgbClr val="D97706"/>
                 </a:solidFill>
@@ -7326,7 +7326,7 @@
               </a:rPr>
               <a:t>~152 RPS • Ổn Định</a:t>
             </a:r>
-            <a:endParaRPr lang="en-US" sz="950" dirty="0"/>
+            <a:endParaRPr lang="en-US" sz="1100" dirty="0"/>
           </a:p>
         </p:txBody>
       </p:sp>
@@ -7409,7 +7409,7 @@
               <a:buNone/>
             </a:pPr>
             <a:r>
-              <a:rPr lang="en-US" sz="950" b="1" dirty="0">
+              <a:rPr lang="en-US" sz="1100" b="1" dirty="0">
                 <a:solidFill>
                   <a:srgbClr val="7C3AED"/>
                 </a:solidFill>
@@ -7419,7 +7419,7 @@
               </a:rPr>
               <a:t>MODE 5</a:t>
             </a:r>
-            <a:endParaRPr lang="en-US" sz="950" dirty="0"/>
+            <a:endParaRPr lang="en-US" sz="1100" dirty="0"/>
           </a:p>
         </p:txBody>
       </p:sp>
@@ -7448,7 +7448,7 @@
               <a:buNone/>
             </a:pPr>
             <a:r>
-              <a:rPr lang="en-US" sz="1300" b="1" dirty="0">
+              <a:rPr lang="en-US" sz="1450" b="1" dirty="0">
                 <a:solidFill>
                   <a:srgbClr val="0F172A"/>
                 </a:solidFill>
@@ -7458,14 +7458,14 @@
               </a:rPr>
               <a:t>⚙️</a:t>
             </a:r>
-            <a:endParaRPr lang="en-US" sz="1300" dirty="0"/>
+            <a:endParaRPr lang="en-US" sz="1450" dirty="0"/>
           </a:p>
           <a:p>
             <a:pPr algn="ctr" indent="0" marL="0">
               <a:buNone/>
             </a:pPr>
             <a:r>
-              <a:rPr lang="en-US" sz="1300" b="1" dirty="0">
+              <a:rPr lang="en-US" sz="1450" b="1" dirty="0">
                 <a:solidFill>
                   <a:srgbClr val="0F172A"/>
                 </a:solidFill>
@@ -7475,7 +7475,7 @@
               </a:rPr>
               <a:t>Custom Thread Pool</a:t>
             </a:r>
-            <a:endParaRPr lang="en-US" sz="1300" dirty="0"/>
+            <a:endParaRPr lang="en-US" sz="1450" dirty="0"/>
           </a:p>
         </p:txBody>
       </p:sp>
@@ -7504,7 +7504,7 @@
               <a:buNone/>
             </a:pPr>
             <a:r>
-              <a:rPr lang="en-US" sz="950" dirty="0">
+              <a:rPr lang="en-US" sz="1150" dirty="0">
                 <a:solidFill>
                   <a:srgbClr val="334155"/>
                 </a:solidFill>
@@ -7514,7 +7514,7 @@
               </a:rPr>
               <a:t>Tự lập trình mảng vòng O(1) &amp; cơ chế ngủ đông từ con số 0. Điểm sáng 30%.</a:t>
             </a:r>
-            <a:endParaRPr lang="en-US" sz="950" dirty="0"/>
+            <a:endParaRPr lang="en-US" sz="1150" dirty="0"/>
           </a:p>
         </p:txBody>
       </p:sp>
@@ -7570,7 +7570,7 @@
               <a:buNone/>
             </a:pPr>
             <a:r>
-              <a:rPr lang="en-US" sz="950" b="1" dirty="0">
+              <a:rPr lang="en-US" sz="1100" b="1" dirty="0">
                 <a:solidFill>
                   <a:srgbClr val="7C3AED"/>
                 </a:solidFill>
@@ -7580,7 +7580,7 @@
               </a:rPr>
               <a:t>~148 RPS • Tự Chủ</a:t>
             </a:r>
-            <a:endParaRPr lang="en-US" sz="950" dirty="0"/>
+            <a:endParaRPr lang="en-US" sz="1100" dirty="0"/>
           </a:p>
         </p:txBody>
       </p:sp>
@@ -7663,7 +7663,7 @@
               <a:buNone/>
             </a:pPr>
             <a:r>
-              <a:rPr lang="en-US" sz="950" b="1" dirty="0">
+              <a:rPr lang="en-US" sz="1100" b="1" dirty="0">
                 <a:solidFill>
                   <a:srgbClr val="059669"/>
                 </a:solidFill>
@@ -7673,7 +7673,7 @@
               </a:rPr>
               <a:t>MODE 4</a:t>
             </a:r>
-            <a:endParaRPr lang="en-US" sz="950" dirty="0"/>
+            <a:endParaRPr lang="en-US" sz="1100" dirty="0"/>
           </a:p>
         </p:txBody>
       </p:sp>
@@ -7702,7 +7702,7 @@
               <a:buNone/>
             </a:pPr>
             <a:r>
-              <a:rPr lang="en-US" sz="1300" b="1" dirty="0">
+              <a:rPr lang="en-US" sz="1450" b="1" dirty="0">
                 <a:solidFill>
                   <a:srgbClr val="0F172A"/>
                 </a:solidFill>
@@ -7712,14 +7712,14 @@
               </a:rPr>
               <a:t>🚀</a:t>
             </a:r>
-            <a:endParaRPr lang="en-US" sz="1300" dirty="0"/>
+            <a:endParaRPr lang="en-US" sz="1450" dirty="0"/>
           </a:p>
           <a:p>
             <a:pPr algn="ctr" indent="0" marL="0">
               <a:buNone/>
             </a:pPr>
             <a:r>
-              <a:rPr lang="en-US" sz="1300" b="1" dirty="0">
+              <a:rPr lang="en-US" sz="1450" b="1" dirty="0">
                 <a:solidFill>
                   <a:srgbClr val="0F172A"/>
                 </a:solidFill>
@@ -7729,7 +7729,7 @@
               </a:rPr>
               <a:t>Virtual Threads (Loom)</a:t>
             </a:r>
-            <a:endParaRPr lang="en-US" sz="1300" dirty="0"/>
+            <a:endParaRPr lang="en-US" sz="1450" dirty="0"/>
           </a:p>
         </p:txBody>
       </p:sp>
@@ -7758,7 +7758,7 @@
               <a:buNone/>
             </a:pPr>
             <a:r>
-              <a:rPr lang="en-US" sz="950" dirty="0">
+              <a:rPr lang="en-US" sz="1150" dirty="0">
                 <a:solidFill>
                   <a:srgbClr val="334155"/>
                 </a:solidFill>
@@ -7768,7 +7768,7 @@
               </a:rPr>
               <a:t>Luồng ảo siêu nhẹ ở User-space. 1,000 khách chỉ cần 16 luồng Carrier.</a:t>
             </a:r>
-            <a:endParaRPr lang="en-US" sz="950" dirty="0"/>
+            <a:endParaRPr lang="en-US" sz="1150" dirty="0"/>
           </a:p>
         </p:txBody>
       </p:sp>
@@ -7824,7 +7824,7 @@
               <a:buNone/>
             </a:pPr>
             <a:r>
-              <a:rPr lang="en-US" sz="950" b="1" dirty="0">
+              <a:rPr lang="en-US" sz="1100" b="1" dirty="0">
                 <a:solidFill>
                   <a:srgbClr val="059669"/>
                 </a:solidFill>
@@ -7834,7 +7834,7 @@
               </a:rPr>
               <a:t>~1,145+ RPS • Đỉnh Cao</a:t>
             </a:r>
-            <a:endParaRPr lang="en-US" sz="950" dirty="0"/>
+            <a:endParaRPr lang="en-US" sz="1100" dirty="0"/>
           </a:p>
         </p:txBody>
       </p:sp>
@@ -7910,7 +7910,7 @@
               <a:buNone/>
             </a:pPr>
             <a:r>
-              <a:rPr lang="en-US" sz="1100" dirty="0">
+              <a:rPr lang="en-US" sz="1350" dirty="0">
                 <a:solidFill>
                   <a:srgbClr val="0F172A"/>
                 </a:solidFill>
@@ -7920,7 +7920,7 @@
               </a:rPr>
               <a:t>🎯 MỤC TIÊU NGHIÊN CỨU: Tự tay cài đặt độc lập 5/5 kiến trúc luồng để đối chiếu định lượng khoa học từ đơn luồng đến Java 21 Virtual Threads.</a:t>
             </a:r>
-            <a:endParaRPr lang="en-US" sz="1100" dirty="0"/>
+            <a:endParaRPr lang="en-US" sz="1350" dirty="0"/>
           </a:p>
         </p:txBody>
       </p:sp>
@@ -8008,7 +8008,7 @@
               <a:buNone/>
             </a:pPr>
             <a:r>
-              <a:rPr lang="en-US" sz="900" b="1" dirty="0">
+              <a:rPr lang="en-US" sz="1100" b="1" dirty="0">
                 <a:solidFill>
                   <a:srgbClr val="1D4ED8"/>
                 </a:solidFill>
@@ -8018,7 +8018,7 @@
               </a:rPr>
               <a:t>TỔNG HỢP LÝ THUYẾT</a:t>
             </a:r>
-            <a:endParaRPr lang="en-US" sz="900" dirty="0"/>
+            <a:endParaRPr lang="en-US" sz="1100" dirty="0"/>
           </a:p>
         </p:txBody>
       </p:sp>
@@ -8086,7 +8086,7 @@
               <a:buNone/>
             </a:pPr>
             <a:r>
-              <a:rPr lang="en-US" sz="1100" b="1" dirty="0">
+              <a:rPr lang="en-US" sz="1350" b="1" dirty="0">
                 <a:solidFill>
                   <a:srgbClr val="334155"/>
                 </a:solidFill>
@@ -8096,7 +8096,7 @@
               </a:rPr>
               <a:t>So sánh đa chiều về mức độ tiêu hao tài nguyên, cơ chế điều phối và giới hạn chịu tải</a:t>
             </a:r>
-            <a:endParaRPr lang="en-US" sz="1100" dirty="0"/>
+            <a:endParaRPr lang="en-US" sz="1350" dirty="0"/>
           </a:p>
         </p:txBody>
       </p:sp>
@@ -8152,7 +8152,7 @@
               <a:buNone/>
             </a:pPr>
             <a:r>
-              <a:rPr lang="en-US" sz="1000" b="1" dirty="0">
+              <a:rPr lang="en-US" sz="1150" b="1" dirty="0">
                 <a:solidFill>
                   <a:srgbClr val="1D4ED8"/>
                 </a:solidFill>
@@ -8162,7 +8162,7 @@
               </a:rPr>
               <a:t>12 / 18</a:t>
             </a:r>
-            <a:endParaRPr lang="en-US" sz="1000" dirty="0"/>
+            <a:endParaRPr lang="en-US" sz="1150" dirty="0"/>
           </a:p>
         </p:txBody>
       </p:sp>
@@ -8214,7 +8214,7 @@
               <a:buNone/>
             </a:pPr>
             <a:r>
-              <a:rPr lang="en-US" sz="950" b="1" dirty="0">
+              <a:rPr lang="en-US" sz="1100" b="1" dirty="0">
                 <a:solidFill>
                   <a:srgbClr val="475569"/>
                 </a:solidFill>
@@ -8224,7 +8224,7 @@
               </a:rPr>
               <a:t>PTIT TELECOM • Khoa Công nghệ Thông tin • Đề Tài T45: Multi-Threading Patterns</a:t>
             </a:r>
-            <a:endParaRPr lang="en-US" sz="950" dirty="0"/>
+            <a:endParaRPr lang="en-US" sz="1100" dirty="0"/>
           </a:p>
         </p:txBody>
       </p:sp>
@@ -8253,7 +8253,7 @@
               <a:buNone/>
             </a:pPr>
             <a:r>
-              <a:rPr lang="en-US" sz="950" b="1" dirty="0">
+              <a:rPr lang="en-US" sz="1100" b="1" dirty="0">
                 <a:solidFill>
                   <a:srgbClr val="1D4ED8"/>
                 </a:solidFill>
@@ -8263,7 +8263,7 @@
               </a:rPr>
               <a:t>Slide 12 / 18</a:t>
             </a:r>
-            <a:endParaRPr lang="en-US" sz="950" dirty="0"/>
+            <a:endParaRPr lang="en-US" sz="1100" dirty="0"/>
           </a:p>
         </p:txBody>
       </p:sp>
@@ -8307,7 +8307,7 @@
                         <a:buNone/>
                       </a:pPr>
                       <a:r>
-                        <a:rPr lang="en-US" sz="1000" b="1" dirty="0">
+                        <a:rPr lang="en-US" sz="1200" b="1" dirty="0">
                           <a:solidFill>
                             <a:srgbClr val="FFFFFF"/>
                           </a:solidFill>
@@ -8317,7 +8317,7 @@
                         </a:rPr>
                         <a:t>TIÊU CHÍ SO SÁNH</a:t>
                       </a:r>
-                      <a:endParaRPr lang="en-US" sz="1000" dirty="0">
+                      <a:endParaRPr lang="en-US" sz="1200" dirty="0">
                         <a:latin typeface="Arial" charset="0"/>
                         <a:ea typeface="Arial" charset="0"/>
                         <a:cs typeface="Arial" charset="0"/>
@@ -8375,7 +8375,7 @@
                         <a:buNone/>
                       </a:pPr>
                       <a:r>
-                        <a:rPr lang="en-US" sz="1000" b="1" dirty="0">
+                        <a:rPr lang="en-US" sz="1200" b="1" dirty="0">
                           <a:solidFill>
                             <a:srgbClr val="FFFFFF"/>
                           </a:solidFill>
@@ -8385,7 +8385,7 @@
                         </a:rPr>
                         <a:t>MODE 1</a:t>
                       </a:r>
-                      <a:endParaRPr lang="en-US" sz="1000" dirty="0">
+                      <a:endParaRPr lang="en-US" sz="1200" dirty="0">
                         <a:latin typeface="Arial" charset="0"/>
                         <a:ea typeface="Arial" charset="0"/>
                         <a:cs typeface="Arial" charset="0"/>
@@ -8396,7 +8396,7 @@
                         <a:buNone/>
                       </a:pPr>
                       <a:r>
-                        <a:rPr lang="en-US" sz="1000" b="1" dirty="0">
+                        <a:rPr lang="en-US" sz="1200" b="1" dirty="0">
                           <a:solidFill>
                             <a:srgbClr val="FFFFFF"/>
                           </a:solidFill>
@@ -8406,7 +8406,7 @@
                         </a:rPr>
                         <a:t>(Iterative)</a:t>
                       </a:r>
-                      <a:endParaRPr lang="en-US" sz="1000" dirty="0">
+                      <a:endParaRPr lang="en-US" sz="1200" dirty="0">
                         <a:latin typeface="Arial" charset="0"/>
                         <a:ea typeface="Arial" charset="0"/>
                         <a:cs typeface="Arial" charset="0"/>
@@ -8464,7 +8464,7 @@
                         <a:buNone/>
                       </a:pPr>
                       <a:r>
-                        <a:rPr lang="en-US" sz="1000" b="1" dirty="0">
+                        <a:rPr lang="en-US" sz="1200" b="1" dirty="0">
                           <a:solidFill>
                             <a:srgbClr val="FFFFFF"/>
                           </a:solidFill>
@@ -8474,7 +8474,7 @@
                         </a:rPr>
                         <a:t>MODE 2</a:t>
                       </a:r>
-                      <a:endParaRPr lang="en-US" sz="1000" dirty="0">
+                      <a:endParaRPr lang="en-US" sz="1200" dirty="0">
                         <a:latin typeface="Arial" charset="0"/>
                         <a:ea typeface="Arial" charset="0"/>
                         <a:cs typeface="Arial" charset="0"/>
@@ -8485,7 +8485,7 @@
                         <a:buNone/>
                       </a:pPr>
                       <a:r>
-                        <a:rPr lang="en-US" sz="1000" b="1" dirty="0">
+                        <a:rPr lang="en-US" sz="1200" b="1" dirty="0">
                           <a:solidFill>
                             <a:srgbClr val="FFFFFF"/>
                           </a:solidFill>
@@ -8495,7 +8495,7 @@
                         </a:rPr>
                         <a:t>(Thread/Conn)</a:t>
                       </a:r>
-                      <a:endParaRPr lang="en-US" sz="1000" dirty="0">
+                      <a:endParaRPr lang="en-US" sz="1200" dirty="0">
                         <a:latin typeface="Arial" charset="0"/>
                         <a:ea typeface="Arial" charset="0"/>
                         <a:cs typeface="Arial" charset="0"/>
@@ -8553,7 +8553,7 @@
                         <a:buNone/>
                       </a:pPr>
                       <a:r>
-                        <a:rPr lang="en-US" sz="1000" b="1" dirty="0">
+                        <a:rPr lang="en-US" sz="1200" b="1" dirty="0">
                           <a:solidFill>
                             <a:srgbClr val="FFFFFF"/>
                           </a:solidFill>
@@ -8563,7 +8563,7 @@
                         </a:rPr>
                         <a:t>MODE 3</a:t>
                       </a:r>
-                      <a:endParaRPr lang="en-US" sz="1000" dirty="0">
+                      <a:endParaRPr lang="en-US" sz="1200" dirty="0">
                         <a:latin typeface="Arial" charset="0"/>
                         <a:ea typeface="Arial" charset="0"/>
                         <a:cs typeface="Arial" charset="0"/>
@@ -8574,7 +8574,7 @@
                         <a:buNone/>
                       </a:pPr>
                       <a:r>
-                        <a:rPr lang="en-US" sz="1000" b="1" dirty="0">
+                        <a:rPr lang="en-US" sz="1200" b="1" dirty="0">
                           <a:solidFill>
                             <a:srgbClr val="FFFFFF"/>
                           </a:solidFill>
@@ -8584,7 +8584,7 @@
                         </a:rPr>
                         <a:t>(Worker Pool)</a:t>
                       </a:r>
-                      <a:endParaRPr lang="en-US" sz="1000" dirty="0">
+                      <a:endParaRPr lang="en-US" sz="1200" dirty="0">
                         <a:latin typeface="Arial" charset="0"/>
                         <a:ea typeface="Arial" charset="0"/>
                         <a:cs typeface="Arial" charset="0"/>
@@ -8642,7 +8642,7 @@
                         <a:buNone/>
                       </a:pPr>
                       <a:r>
-                        <a:rPr lang="en-US" sz="1000" b="1" dirty="0">
+                        <a:rPr lang="en-US" sz="1200" b="1" dirty="0">
                           <a:solidFill>
                             <a:srgbClr val="FFFFFF"/>
                           </a:solidFill>
@@ -8652,7 +8652,7 @@
                         </a:rPr>
                         <a:t>MODE 5</a:t>
                       </a:r>
-                      <a:endParaRPr lang="en-US" sz="1000" dirty="0">
+                      <a:endParaRPr lang="en-US" sz="1200" dirty="0">
                         <a:latin typeface="Arial" charset="0"/>
                         <a:ea typeface="Arial" charset="0"/>
                         <a:cs typeface="Arial" charset="0"/>
@@ -8663,7 +8663,7 @@
                         <a:buNone/>
                       </a:pPr>
                       <a:r>
-                        <a:rPr lang="en-US" sz="1000" b="1" dirty="0">
+                        <a:rPr lang="en-US" sz="1200" b="1" dirty="0">
                           <a:solidFill>
                             <a:srgbClr val="FFFFFF"/>
                           </a:solidFill>
@@ -8673,7 +8673,7 @@
                         </a:rPr>
                         <a:t>(Custom Pool)</a:t>
                       </a:r>
-                      <a:endParaRPr lang="en-US" sz="1000" dirty="0">
+                      <a:endParaRPr lang="en-US" sz="1200" dirty="0">
                         <a:latin typeface="Arial" charset="0"/>
                         <a:ea typeface="Arial" charset="0"/>
                         <a:cs typeface="Arial" charset="0"/>
@@ -8731,7 +8731,7 @@
                         <a:buNone/>
                       </a:pPr>
                       <a:r>
-                        <a:rPr lang="en-US" sz="1000" b="1" dirty="0">
+                        <a:rPr lang="en-US" sz="1200" b="1" dirty="0">
                           <a:solidFill>
                             <a:srgbClr val="FFFFFF"/>
                           </a:solidFill>
@@ -8741,7 +8741,7 @@
                         </a:rPr>
                         <a:t>MODE 4</a:t>
                       </a:r>
-                      <a:endParaRPr lang="en-US" sz="1000" dirty="0">
+                      <a:endParaRPr lang="en-US" sz="1200" dirty="0">
                         <a:latin typeface="Arial" charset="0"/>
                         <a:ea typeface="Arial" charset="0"/>
                         <a:cs typeface="Arial" charset="0"/>
@@ -8752,7 +8752,7 @@
                         <a:buNone/>
                       </a:pPr>
                       <a:r>
-                        <a:rPr lang="en-US" sz="1000" b="1" dirty="0">
+                        <a:rPr lang="en-US" sz="1200" b="1" dirty="0">
                           <a:solidFill>
                             <a:srgbClr val="FFFFFF"/>
                           </a:solidFill>
@@ -8762,7 +8762,7 @@
                         </a:rPr>
                         <a:t>(Virtual Threads)</a:t>
                       </a:r>
-                      <a:endParaRPr lang="en-US" sz="1000" dirty="0">
+                      <a:endParaRPr lang="en-US" sz="1200" dirty="0">
                         <a:latin typeface="Arial" charset="0"/>
                         <a:ea typeface="Arial" charset="0"/>
                         <a:cs typeface="Arial" charset="0"/>
@@ -8822,7 +8822,7 @@
                         <a:buNone/>
                       </a:pPr>
                       <a:r>
-                        <a:rPr lang="en-US" sz="1000" b="1" dirty="0">
+                        <a:rPr lang="en-US" sz="1200" b="1" dirty="0">
                           <a:solidFill>
                             <a:srgbClr val="000000"/>
                           </a:solidFill>
@@ -8832,7 +8832,7 @@
                         </a:rPr>
                         <a:t>Số luồng OS thực tế</a:t>
                       </a:r>
-                      <a:endParaRPr lang="en-US" sz="1000" dirty="0">
+                      <a:endParaRPr lang="en-US" sz="1200" dirty="0">
                         <a:latin typeface="Arial" charset="0"/>
                         <a:ea typeface="Arial" charset="0"/>
                         <a:cs typeface="Arial" charset="0"/>
@@ -8887,7 +8887,7 @@
                         <a:buNone/>
                       </a:pPr>
                       <a:r>
-                        <a:rPr lang="en-US" sz="1000" dirty="0">
+                        <a:rPr lang="en-US" sz="1200" dirty="0">
                           <a:solidFill>
                             <a:srgbClr val="000000"/>
                           </a:solidFill>
@@ -8897,7 +8897,7 @@
                         </a:rPr>
                         <a:t>Duy nhất 1 luồng</a:t>
                       </a:r>
-                      <a:endParaRPr lang="en-US" sz="1000" dirty="0">
+                      <a:endParaRPr lang="en-US" sz="1200" dirty="0">
                         <a:latin typeface="Arial" charset="0"/>
                         <a:ea typeface="Arial" charset="0"/>
                         <a:cs typeface="Arial" charset="0"/>
@@ -8952,7 +8952,7 @@
                         <a:buNone/>
                       </a:pPr>
                       <a:r>
-                        <a:rPr lang="en-US" sz="1000" b="1" dirty="0">
+                        <a:rPr lang="en-US" sz="1200" b="1" dirty="0">
                           <a:solidFill>
                             <a:srgbClr val="E11D48"/>
                           </a:solidFill>
@@ -8962,7 +8962,7 @@
                         </a:rPr>
                         <a:t>Tỷ lệ 1:1 với kết nối (N)</a:t>
                       </a:r>
-                      <a:endParaRPr lang="en-US" sz="1000" dirty="0">
+                      <a:endParaRPr lang="en-US" sz="1200" dirty="0">
                         <a:latin typeface="Arial" charset="0"/>
                         <a:ea typeface="Arial" charset="0"/>
                         <a:cs typeface="Arial" charset="0"/>
@@ -9017,7 +9017,7 @@
                         <a:buNone/>
                       </a:pPr>
                       <a:r>
-                        <a:rPr lang="en-US" sz="1000" dirty="0">
+                        <a:rPr lang="en-US" sz="1200" dirty="0">
                           <a:solidFill>
                             <a:srgbClr val="000000"/>
                           </a:solidFill>
@@ -9027,7 +9027,7 @@
                         </a:rPr>
                         <a:t>Cố định 16 luồng</a:t>
                       </a:r>
-                      <a:endParaRPr lang="en-US" sz="1000" dirty="0">
+                      <a:endParaRPr lang="en-US" sz="1200" dirty="0">
                         <a:latin typeface="Arial" charset="0"/>
                         <a:ea typeface="Arial" charset="0"/>
                         <a:cs typeface="Arial" charset="0"/>
@@ -9082,7 +9082,7 @@
                         <a:buNone/>
                       </a:pPr>
                       <a:r>
-                        <a:rPr lang="en-US" sz="1000" dirty="0">
+                        <a:rPr lang="en-US" sz="1200" dirty="0">
                           <a:solidFill>
                             <a:srgbClr val="000000"/>
                           </a:solidFill>
@@ -9092,7 +9092,7 @@
                         </a:rPr>
                         <a:t>Cố định 16 luồng</a:t>
                       </a:r>
-                      <a:endParaRPr lang="en-US" sz="1000" dirty="0">
+                      <a:endParaRPr lang="en-US" sz="1200" dirty="0">
                         <a:latin typeface="Arial" charset="0"/>
                         <a:ea typeface="Arial" charset="0"/>
                         <a:cs typeface="Arial" charset="0"/>
@@ -9147,7 +9147,7 @@
                         <a:buNone/>
                       </a:pPr>
                       <a:r>
-                        <a:rPr lang="en-US" sz="1000" b="1" dirty="0">
+                        <a:rPr lang="en-US" sz="1200" b="1" dirty="0">
                           <a:solidFill>
                             <a:srgbClr val="059669"/>
                           </a:solidFill>
@@ -9157,7 +9157,7 @@
                         </a:rPr>
                         <a:t>Cố định 15 — 16 Carrier</a:t>
                       </a:r>
-                      <a:endParaRPr lang="en-US" sz="1000" dirty="0">
+                      <a:endParaRPr lang="en-US" sz="1200" dirty="0">
                         <a:latin typeface="Arial" charset="0"/>
                         <a:ea typeface="Arial" charset="0"/>
                         <a:cs typeface="Arial" charset="0"/>
@@ -9214,7 +9214,7 @@
                         <a:buNone/>
                       </a:pPr>
                       <a:r>
-                        <a:rPr lang="en-US" sz="1000" b="1" dirty="0">
+                        <a:rPr lang="en-US" sz="1200" b="1" dirty="0">
                           <a:solidFill>
                             <a:srgbClr val="000000"/>
                           </a:solidFill>
@@ -9224,7 +9224,7 @@
                         </a:rPr>
                         <a:t>RAM tiêu tốn khi 10K conn</a:t>
                       </a:r>
-                      <a:endParaRPr lang="en-US" sz="1000" dirty="0">
+                      <a:endParaRPr lang="en-US" sz="1200" dirty="0">
                         <a:latin typeface="Arial" charset="0"/>
                         <a:ea typeface="Arial" charset="0"/>
                         <a:cs typeface="Arial" charset="0"/>
@@ -9279,7 +9279,7 @@
                         <a:buNone/>
                       </a:pPr>
                       <a:r>
-                        <a:rPr lang="en-US" sz="1000" dirty="0">
+                        <a:rPr lang="en-US" sz="1200" dirty="0">
                           <a:solidFill>
                             <a:srgbClr val="000000"/>
                           </a:solidFill>
@@ -9289,7 +9289,7 @@
                         </a:rPr>
                         <a:t>~1 MB (Nghẽn)</a:t>
                       </a:r>
-                      <a:endParaRPr lang="en-US" sz="1000" dirty="0">
+                      <a:endParaRPr lang="en-US" sz="1200" dirty="0">
                         <a:latin typeface="Arial" charset="0"/>
                         <a:ea typeface="Arial" charset="0"/>
                         <a:cs typeface="Arial" charset="0"/>
@@ -9344,7 +9344,7 @@
                         <a:buNone/>
                       </a:pPr>
                       <a:r>
-                        <a:rPr lang="en-US" sz="1000" b="1" dirty="0">
+                        <a:rPr lang="en-US" sz="1200" b="1" dirty="0">
                           <a:solidFill>
                             <a:srgbClr val="E11D48"/>
                           </a:solidFill>
@@ -9354,7 +9354,7 @@
                         </a:rPr>
                         <a:t>~10 GB (Sập OOM)</a:t>
                       </a:r>
-                      <a:endParaRPr lang="en-US" sz="1000" dirty="0">
+                      <a:endParaRPr lang="en-US" sz="1200" dirty="0">
                         <a:latin typeface="Arial" charset="0"/>
                         <a:ea typeface="Arial" charset="0"/>
                         <a:cs typeface="Arial" charset="0"/>
@@ -9409,7 +9409,7 @@
                         <a:buNone/>
                       </a:pPr>
                       <a:r>
-                        <a:rPr lang="en-US" sz="1000" dirty="0">
+                        <a:rPr lang="en-US" sz="1200" dirty="0">
                           <a:solidFill>
                             <a:srgbClr val="000000"/>
                           </a:solidFill>
@@ -9419,7 +9419,7 @@
                         </a:rPr>
                         <a:t>~30 MB (An toàn)</a:t>
                       </a:r>
-                      <a:endParaRPr lang="en-US" sz="1000" dirty="0">
+                      <a:endParaRPr lang="en-US" sz="1200" dirty="0">
                         <a:latin typeface="Arial" charset="0"/>
                         <a:ea typeface="Arial" charset="0"/>
                         <a:cs typeface="Arial" charset="0"/>
@@ -9474,7 +9474,7 @@
                         <a:buNone/>
                       </a:pPr>
                       <a:r>
-                        <a:rPr lang="en-US" sz="1000" dirty="0">
+                        <a:rPr lang="en-US" sz="1200" dirty="0">
                           <a:solidFill>
                             <a:srgbClr val="000000"/>
                           </a:solidFill>
@@ -9484,7 +9484,7 @@
                         </a:rPr>
                         <a:t>~28 MB (An toàn)</a:t>
                       </a:r>
-                      <a:endParaRPr lang="en-US" sz="1000" dirty="0">
+                      <a:endParaRPr lang="en-US" sz="1200" dirty="0">
                         <a:latin typeface="Arial" charset="0"/>
                         <a:ea typeface="Arial" charset="0"/>
                         <a:cs typeface="Arial" charset="0"/>
@@ -9539,7 +9539,7 @@
                         <a:buNone/>
                       </a:pPr>
                       <a:r>
-                        <a:rPr lang="en-US" sz="1000" b="1" dirty="0">
+                        <a:rPr lang="en-US" sz="1200" b="1" dirty="0">
                           <a:solidFill>
                             <a:srgbClr val="059669"/>
                           </a:solidFill>
@@ -9549,7 +9549,7 @@
                         </a:rPr>
                         <a:t>~25 MB (Cực nhẹ)</a:t>
                       </a:r>
-                      <a:endParaRPr lang="en-US" sz="1000" dirty="0">
+                      <a:endParaRPr lang="en-US" sz="1200" dirty="0">
                         <a:latin typeface="Arial" charset="0"/>
                         <a:ea typeface="Arial" charset="0"/>
                         <a:cs typeface="Arial" charset="0"/>
@@ -9606,7 +9606,7 @@
                         <a:buNone/>
                       </a:pPr>
                       <a:r>
-                        <a:rPr lang="en-US" sz="1000" b="1" dirty="0">
+                        <a:rPr lang="en-US" sz="1200" b="1" dirty="0">
                           <a:solidFill>
                             <a:srgbClr val="000000"/>
                           </a:solidFill>
@@ -9616,7 +9616,7 @@
                         </a:rPr>
                         <a:t>Cơ chế điều phối (Scheduling)</a:t>
                       </a:r>
-                      <a:endParaRPr lang="en-US" sz="1000" dirty="0">
+                      <a:endParaRPr lang="en-US" sz="1200" dirty="0">
                         <a:latin typeface="Arial" charset="0"/>
                         <a:ea typeface="Arial" charset="0"/>
                         <a:cs typeface="Arial" charset="0"/>
@@ -9671,7 +9671,7 @@
                         <a:buNone/>
                       </a:pPr>
                       <a:r>
-                        <a:rPr lang="en-US" sz="1000" dirty="0">
+                        <a:rPr lang="en-US" sz="1200" dirty="0">
                           <a:solidFill>
                             <a:srgbClr val="000000"/>
                           </a:solidFill>
@@ -9681,7 +9681,7 @@
                         </a:rPr>
                         <a:t>Vòng lặp đơn</a:t>
                       </a:r>
-                      <a:endParaRPr lang="en-US" sz="1000" dirty="0">
+                      <a:endParaRPr lang="en-US" sz="1200" dirty="0">
                         <a:latin typeface="Arial" charset="0"/>
                         <a:ea typeface="Arial" charset="0"/>
                         <a:cs typeface="Arial" charset="0"/>
@@ -9736,7 +9736,7 @@
                         <a:buNone/>
                       </a:pPr>
                       <a:r>
-                        <a:rPr lang="en-US" sz="1000" dirty="0">
+                        <a:rPr lang="en-US" sz="1200" dirty="0">
                           <a:solidFill>
                             <a:srgbClr val="000000"/>
                           </a:solidFill>
@@ -9746,7 +9746,7 @@
                         </a:rPr>
                         <a:t>Kernel OS điều phối</a:t>
                       </a:r>
-                      <a:endParaRPr lang="en-US" sz="1000" dirty="0">
+                      <a:endParaRPr lang="en-US" sz="1200" dirty="0">
                         <a:latin typeface="Arial" charset="0"/>
                         <a:ea typeface="Arial" charset="0"/>
                         <a:cs typeface="Arial" charset="0"/>
@@ -9801,7 +9801,7 @@
                         <a:buNone/>
                       </a:pPr>
                       <a:r>
-                        <a:rPr lang="en-US" sz="1000" dirty="0">
+                        <a:rPr lang="en-US" sz="1200" dirty="0">
                           <a:solidFill>
                             <a:srgbClr val="000000"/>
                           </a:solidFill>
@@ -9811,7 +9811,7 @@
                         </a:rPr>
                         <a:t>Java ExecutorService</a:t>
                       </a:r>
-                      <a:endParaRPr lang="en-US" sz="1000" dirty="0">
+                      <a:endParaRPr lang="en-US" sz="1200" dirty="0">
                         <a:latin typeface="Arial" charset="0"/>
                         <a:ea typeface="Arial" charset="0"/>
                         <a:cs typeface="Arial" charset="0"/>
@@ -9866,7 +9866,7 @@
                         <a:buNone/>
                       </a:pPr>
                       <a:r>
-                        <a:rPr lang="en-US" sz="1000" b="1" dirty="0">
+                        <a:rPr lang="en-US" sz="1200" b="1" dirty="0">
                           <a:solidFill>
                             <a:srgbClr val="7C3AED"/>
                           </a:solidFill>
@@ -9876,7 +9876,7 @@
                         </a:rPr>
                         <a:t>Mảng vòng O(1) tự chế</a:t>
                       </a:r>
-                      <a:endParaRPr lang="en-US" sz="1000" dirty="0">
+                      <a:endParaRPr lang="en-US" sz="1200" dirty="0">
                         <a:latin typeface="Arial" charset="0"/>
                         <a:ea typeface="Arial" charset="0"/>
                         <a:cs typeface="Arial" charset="0"/>
@@ -9931,7 +9931,7 @@
                         <a:buNone/>
                       </a:pPr>
                       <a:r>
-                        <a:rPr lang="en-US" sz="1000" b="1" dirty="0">
+                        <a:rPr lang="en-US" sz="1200" b="1" dirty="0">
                           <a:solidFill>
                             <a:srgbClr val="059669"/>
                           </a:solidFill>
@@ -9941,7 +9941,7 @@
                         </a:rPr>
                         <a:t>JVM User-space (Work-stealing)</a:t>
                       </a:r>
-                      <a:endParaRPr lang="en-US" sz="1000" dirty="0">
+                      <a:endParaRPr lang="en-US" sz="1200" dirty="0">
                         <a:latin typeface="Arial" charset="0"/>
                         <a:ea typeface="Arial" charset="0"/>
                         <a:cs typeface="Arial" charset="0"/>
@@ -9998,7 +9998,7 @@
                         <a:buNone/>
                       </a:pPr>
                       <a:r>
-                        <a:rPr lang="en-US" sz="1000" b="1" dirty="0">
+                        <a:rPr lang="en-US" sz="1200" b="1" dirty="0">
                           <a:solidFill>
                             <a:srgbClr val="000000"/>
                           </a:solidFill>
@@ -10008,7 +10008,7 @@
                         </a:rPr>
                         <a:t>Chi phí Context Switching</a:t>
                       </a:r>
-                      <a:endParaRPr lang="en-US" sz="1000" dirty="0">
+                      <a:endParaRPr lang="en-US" sz="1200" dirty="0">
                         <a:latin typeface="Arial" charset="0"/>
                         <a:ea typeface="Arial" charset="0"/>
                         <a:cs typeface="Arial" charset="0"/>
@@ -10063,7 +10063,7 @@
                         <a:buNone/>
                       </a:pPr>
                       <a:r>
-                        <a:rPr lang="en-US" sz="1000" dirty="0">
+                        <a:rPr lang="en-US" sz="1200" dirty="0">
                           <a:solidFill>
                             <a:srgbClr val="000000"/>
                           </a:solidFill>
@@ -10073,7 +10073,7 @@
                         </a:rPr>
                         <a:t>0 (Không có)</a:t>
                       </a:r>
-                      <a:endParaRPr lang="en-US" sz="1000" dirty="0">
+                      <a:endParaRPr lang="en-US" sz="1200" dirty="0">
                         <a:latin typeface="Arial" charset="0"/>
                         <a:ea typeface="Arial" charset="0"/>
                         <a:cs typeface="Arial" charset="0"/>
@@ -10128,7 +10128,7 @@
                         <a:buNone/>
                       </a:pPr>
                       <a:r>
-                        <a:rPr lang="en-US" sz="1000" b="1" dirty="0">
+                        <a:rPr lang="en-US" sz="1200" b="1" dirty="0">
                           <a:solidFill>
                             <a:srgbClr val="E11D48"/>
                           </a:solidFill>
@@ -10138,7 +10138,7 @@
                         </a:rPr>
                         <a:t>Cực cao (CPU quá tải)</a:t>
                       </a:r>
-                      <a:endParaRPr lang="en-US" sz="1000" dirty="0">
+                      <a:endParaRPr lang="en-US" sz="1200" dirty="0">
                         <a:latin typeface="Arial" charset="0"/>
                         <a:ea typeface="Arial" charset="0"/>
                         <a:cs typeface="Arial" charset="0"/>
@@ -10193,7 +10193,7 @@
                         <a:buNone/>
                       </a:pPr>
                       <a:r>
-                        <a:rPr lang="en-US" sz="1000" dirty="0">
+                        <a:rPr lang="en-US" sz="1200" dirty="0">
                           <a:solidFill>
                             <a:srgbClr val="000000"/>
                           </a:solidFill>
@@ -10203,7 +10203,7 @@
                         </a:rPr>
                         <a:t>Thấp (16 luồng)</a:t>
                       </a:r>
-                      <a:endParaRPr lang="en-US" sz="1000" dirty="0">
+                      <a:endParaRPr lang="en-US" sz="1200" dirty="0">
                         <a:latin typeface="Arial" charset="0"/>
                         <a:ea typeface="Arial" charset="0"/>
                         <a:cs typeface="Arial" charset="0"/>
@@ -10258,7 +10258,7 @@
                         <a:buNone/>
                       </a:pPr>
                       <a:r>
-                        <a:rPr lang="en-US" sz="1000" dirty="0">
+                        <a:rPr lang="en-US" sz="1200" dirty="0">
                           <a:solidFill>
                             <a:srgbClr val="000000"/>
                           </a:solidFill>
@@ -10268,7 +10268,7 @@
                         </a:rPr>
                         <a:t>Thấp (16 luồng)</a:t>
                       </a:r>
-                      <a:endParaRPr lang="en-US" sz="1000" dirty="0">
+                      <a:endParaRPr lang="en-US" sz="1200" dirty="0">
                         <a:latin typeface="Arial" charset="0"/>
                         <a:ea typeface="Arial" charset="0"/>
                         <a:cs typeface="Arial" charset="0"/>
@@ -10323,7 +10323,7 @@
                         <a:buNone/>
                       </a:pPr>
                       <a:r>
-                        <a:rPr lang="en-US" sz="1000" b="1" dirty="0">
+                        <a:rPr lang="en-US" sz="1200" b="1" dirty="0">
                           <a:solidFill>
                             <a:srgbClr val="059669"/>
                           </a:solidFill>
@@ -10333,7 +10333,7 @@
                         </a:rPr>
                         <a:t>Gần như bằng 0 (User-space)</a:t>
                       </a:r>
-                      <a:endParaRPr lang="en-US" sz="1000" dirty="0">
+                      <a:endParaRPr lang="en-US" sz="1200" dirty="0">
                         <a:latin typeface="Arial" charset="0"/>
                         <a:ea typeface="Arial" charset="0"/>
                         <a:cs typeface="Arial" charset="0"/>
@@ -10390,7 +10390,7 @@
                         <a:buNone/>
                       </a:pPr>
                       <a:r>
-                        <a:rPr lang="en-US" sz="1000" b="1" dirty="0">
+                        <a:rPr lang="en-US" sz="1200" b="1" dirty="0">
                           <a:solidFill>
                             <a:srgbClr val="000000"/>
                           </a:solidFill>
@@ -10400,7 +10400,7 @@
                         </a:rPr>
                         <a:t>Khả năng phục hồi quá tải</a:t>
                       </a:r>
-                      <a:endParaRPr lang="en-US" sz="1000" dirty="0">
+                      <a:endParaRPr lang="en-US" sz="1200" dirty="0">
                         <a:latin typeface="Arial" charset="0"/>
                         <a:ea typeface="Arial" charset="0"/>
                         <a:cs typeface="Arial" charset="0"/>
@@ -10455,7 +10455,7 @@
                         <a:buNone/>
                       </a:pPr>
                       <a:r>
-                        <a:rPr lang="en-US" sz="1000" dirty="0">
+                        <a:rPr lang="en-US" sz="1200" dirty="0">
                           <a:solidFill>
                             <a:srgbClr val="000000"/>
                           </a:solidFill>
@@ -10465,7 +10465,7 @@
                         </a:rPr>
                         <a:t>Kém (Nối đuôi vô hạn)</a:t>
                       </a:r>
-                      <a:endParaRPr lang="en-US" sz="1000" dirty="0">
+                      <a:endParaRPr lang="en-US" sz="1200" dirty="0">
                         <a:latin typeface="Arial" charset="0"/>
                         <a:ea typeface="Arial" charset="0"/>
                         <a:cs typeface="Arial" charset="0"/>
@@ -10520,7 +10520,7 @@
                         <a:buNone/>
                       </a:pPr>
                       <a:r>
-                        <a:rPr lang="en-US" sz="1000" b="1" dirty="0">
+                        <a:rPr lang="en-US" sz="1200" b="1" dirty="0">
                           <a:solidFill>
                             <a:srgbClr val="E11D48"/>
                           </a:solidFill>
@@ -10530,7 +10530,7 @@
                         </a:rPr>
                         <a:t>Liệt hệ thống (OOM)</a:t>
                       </a:r>
-                      <a:endParaRPr lang="en-US" sz="1000" dirty="0">
+                      <a:endParaRPr lang="en-US" sz="1200" dirty="0">
                         <a:latin typeface="Arial" charset="0"/>
                         <a:ea typeface="Arial" charset="0"/>
                         <a:cs typeface="Arial" charset="0"/>
@@ -10585,7 +10585,7 @@
                         <a:buNone/>
                       </a:pPr>
                       <a:r>
-                        <a:rPr lang="en-US" sz="1000" dirty="0">
+                        <a:rPr lang="en-US" sz="1200" dirty="0">
                           <a:solidFill>
                             <a:srgbClr val="000000"/>
                           </a:solidFill>
@@ -10595,7 +10595,7 @@
                         </a:rPr>
                         <a:t>Tuyệt vời (Queue + HTTP 503)</a:t>
                       </a:r>
-                      <a:endParaRPr lang="en-US" sz="1000" dirty="0">
+                      <a:endParaRPr lang="en-US" sz="1200" dirty="0">
                         <a:latin typeface="Arial" charset="0"/>
                         <a:ea typeface="Arial" charset="0"/>
                         <a:cs typeface="Arial" charset="0"/>
@@ -10650,7 +10650,7 @@
                         <a:buNone/>
                       </a:pPr>
                       <a:r>
-                        <a:rPr lang="en-US" sz="1000" dirty="0">
+                        <a:rPr lang="en-US" sz="1200" dirty="0">
                           <a:solidFill>
                             <a:srgbClr val="000000"/>
                           </a:solidFill>
@@ -10660,7 +10660,7 @@
                         </a:rPr>
                         <a:t>Tốt (Van từ chối tự chế)</a:t>
                       </a:r>
-                      <a:endParaRPr lang="en-US" sz="1000" dirty="0">
+                      <a:endParaRPr lang="en-US" sz="1200" dirty="0">
                         <a:latin typeface="Arial" charset="0"/>
                         <a:ea typeface="Arial" charset="0"/>
                         <a:cs typeface="Arial" charset="0"/>
@@ -10715,7 +10715,7 @@
                         <a:buNone/>
                       </a:pPr>
                       <a:r>
-                        <a:rPr lang="en-US" sz="1000" b="1" dirty="0">
+                        <a:rPr lang="en-US" sz="1200" b="1" dirty="0">
                           <a:solidFill>
                             <a:srgbClr val="059669"/>
                           </a:solidFill>
@@ -10725,7 +10725,7 @@
                         </a:rPr>
                         <a:t>Tuyệt đối (Mở rộng tự nhiên)</a:t>
                       </a:r>
-                      <a:endParaRPr lang="en-US" sz="1000" dirty="0">
+                      <a:endParaRPr lang="en-US" sz="1200" dirty="0">
                         <a:latin typeface="Arial" charset="0"/>
                         <a:ea typeface="Arial" charset="0"/>
                         <a:cs typeface="Arial" charset="0"/>
@@ -10848,7 +10848,7 @@
               <a:buNone/>
             </a:pPr>
             <a:r>
-              <a:rPr lang="en-US" sz="1100" dirty="0">
+              <a:rPr lang="en-US" sz="1350" dirty="0">
                 <a:solidFill>
                   <a:srgbClr val="0F172A"/>
                 </a:solidFill>
@@ -10858,7 +10858,7 @@
               </a:rPr>
               <a:t>💡 TỔNG KẾT: Virtual Threads (Java 21) hội tụ toàn bộ ưu điểm: giữ nguyên mô hình đồng bộ dễ đọc nhưng tài nguyên siêu nhẹ và hiệu năng vượt trội.</a:t>
             </a:r>
-            <a:endParaRPr lang="en-US" sz="1100" dirty="0"/>
+            <a:endParaRPr lang="en-US" sz="1350" dirty="0"/>
           </a:p>
         </p:txBody>
       </p:sp>
@@ -10946,7 +10946,7 @@
               <a:buNone/>
             </a:pPr>
             <a:r>
-              <a:rPr lang="en-US" sz="900" b="1" dirty="0">
+              <a:rPr lang="en-US" sz="1100" b="1" dirty="0">
                 <a:solidFill>
                   <a:srgbClr val="1D4ED8"/>
                 </a:solidFill>
@@ -10956,7 +10956,7 @@
               </a:rPr>
               <a:t>TRÌNH DIỄN THỰC CHIẾN</a:t>
             </a:r>
-            <a:endParaRPr lang="en-US" sz="900" dirty="0"/>
+            <a:endParaRPr lang="en-US" sz="1100" dirty="0"/>
           </a:p>
         </p:txBody>
       </p:sp>
@@ -11024,7 +11024,7 @@
               <a:buNone/>
             </a:pPr>
             <a:r>
-              <a:rPr lang="en-US" sz="1100" b="1" dirty="0">
+              <a:rPr lang="en-US" sz="1350" b="1" dirty="0">
                 <a:solidFill>
                   <a:srgbClr val="334155"/>
                 </a:solidFill>
@@ -11034,7 +11034,7 @@
               </a:rPr>
               <a:t>Trình diễn 6 bước phân cảnh chứng minh trực quan sự biến thiên của OS Threads và Độ trễ</a:t>
             </a:r>
-            <a:endParaRPr lang="en-US" sz="1100" dirty="0"/>
+            <a:endParaRPr lang="en-US" sz="1350" dirty="0"/>
           </a:p>
         </p:txBody>
       </p:sp>
@@ -11090,7 +11090,7 @@
               <a:buNone/>
             </a:pPr>
             <a:r>
-              <a:rPr lang="en-US" sz="1000" b="1" dirty="0">
+              <a:rPr lang="en-US" sz="1150" b="1" dirty="0">
                 <a:solidFill>
                   <a:srgbClr val="1D4ED8"/>
                 </a:solidFill>
@@ -11100,7 +11100,7 @@
               </a:rPr>
               <a:t>14 / 18</a:t>
             </a:r>
-            <a:endParaRPr lang="en-US" sz="1000" dirty="0"/>
+            <a:endParaRPr lang="en-US" sz="1150" dirty="0"/>
           </a:p>
         </p:txBody>
       </p:sp>
@@ -11152,7 +11152,7 @@
               <a:buNone/>
             </a:pPr>
             <a:r>
-              <a:rPr lang="en-US" sz="950" b="1" dirty="0">
+              <a:rPr lang="en-US" sz="1100" b="1" dirty="0">
                 <a:solidFill>
                   <a:srgbClr val="475569"/>
                 </a:solidFill>
@@ -11162,7 +11162,7 @@
               </a:rPr>
               <a:t>PTIT TELECOM • Khoa Công nghệ Thông tin • Đề Tài T45: Multi-Threading Patterns</a:t>
             </a:r>
-            <a:endParaRPr lang="en-US" sz="950" dirty="0"/>
+            <a:endParaRPr lang="en-US" sz="1100" dirty="0"/>
           </a:p>
         </p:txBody>
       </p:sp>
@@ -11191,7 +11191,7 @@
               <a:buNone/>
             </a:pPr>
             <a:r>
-              <a:rPr lang="en-US" sz="950" b="1" dirty="0">
+              <a:rPr lang="en-US" sz="1100" b="1" dirty="0">
                 <a:solidFill>
                   <a:srgbClr val="1D4ED8"/>
                 </a:solidFill>
@@ -11201,7 +11201,7 @@
               </a:rPr>
               <a:t>Slide 14 / 18</a:t>
             </a:r>
-            <a:endParaRPr lang="en-US" sz="950" dirty="0"/>
+            <a:endParaRPr lang="en-US" sz="1100" dirty="0"/>
           </a:p>
         </p:txBody>
       </p:sp>
@@ -11277,7 +11277,7 @@
               <a:buNone/>
             </a:pPr>
             <a:r>
-              <a:rPr lang="en-US" sz="1200" b="1" dirty="0">
+              <a:rPr lang="en-US" sz="1350" b="1" dirty="0">
                 <a:solidFill>
                   <a:srgbClr val="1D4ED8"/>
                 </a:solidFill>
@@ -11287,7 +11287,7 @@
               </a:rPr>
               <a:t>Bước 1: Khởi Động &amp; Phân Dạng Tải</a:t>
             </a:r>
-            <a:endParaRPr lang="en-US" sz="1200" dirty="0"/>
+            <a:endParaRPr lang="en-US" sz="1350" dirty="0"/>
           </a:p>
         </p:txBody>
       </p:sp>
@@ -11316,7 +11316,7 @@
               <a:buNone/>
             </a:pPr>
             <a:r>
-              <a:rPr lang="en-US" sz="980" dirty="0">
+              <a:rPr lang="en-US" sz="1200" dirty="0">
                 <a:solidFill>
                   <a:srgbClr val="334155"/>
                 </a:solidFill>
@@ -11326,14 +11326,14 @@
               </a:rPr>
               <a:t>• Bật Server, mở Web Dashboard 60fps tại cổng 8080.</a:t>
             </a:r>
-            <a:endParaRPr lang="en-US" sz="980" dirty="0"/>
-          </a:p>
-          <a:p>
-            <a:pPr indent="0" marL="0">
-              <a:buNone/>
-            </a:pPr>
-            <a:r>
-              <a:rPr lang="en-US" sz="980" dirty="0">
+            <a:endParaRPr lang="en-US" sz="1200" dirty="0"/>
+          </a:p>
+          <a:p>
+            <a:pPr indent="0" marL="0">
+              <a:buNone/>
+            </a:pPr>
+            <a:r>
+              <a:rPr lang="en-US" sz="1200" dirty="0">
                 <a:solidFill>
                   <a:srgbClr val="334155"/>
                 </a:solidFill>
@@ -11343,7 +11343,7 @@
               </a:rPr>
               <a:t>• Giới thiệu 6 thẻ đo lường và 3 loại tải: Tức thì, Chờ I/O 100ms, Nghiền CPU.</a:t>
             </a:r>
-            <a:endParaRPr lang="en-US" sz="980" dirty="0"/>
+            <a:endParaRPr lang="en-US" sz="1200" dirty="0"/>
           </a:p>
         </p:txBody>
       </p:sp>
@@ -11419,7 +11419,7 @@
               <a:buNone/>
             </a:pPr>
             <a:r>
-              <a:rPr lang="en-US" sz="1200" b="1" dirty="0">
+              <a:rPr lang="en-US" sz="1350" b="1" dirty="0">
                 <a:solidFill>
                   <a:srgbClr val="E11D48"/>
                 </a:solidFill>
@@ -11429,7 +11429,7 @@
               </a:rPr>
               <a:t>Bước 2: Đối Chứng Mode 1 vs Mode 2</a:t>
             </a:r>
-            <a:endParaRPr lang="en-US" sz="1200" dirty="0"/>
+            <a:endParaRPr lang="en-US" sz="1350" dirty="0"/>
           </a:p>
         </p:txBody>
       </p:sp>
@@ -11458,7 +11458,7 @@
               <a:buNone/>
             </a:pPr>
             <a:r>
-              <a:rPr lang="en-US" sz="980" dirty="0">
+              <a:rPr lang="en-US" sz="1200" dirty="0">
                 <a:solidFill>
                   <a:srgbClr val="334155"/>
                 </a:solidFill>
@@ -11468,14 +11468,14 @@
               </a:rPr>
               <a:t>• Mode 1: 30 kết nối nối đuôi nhau mất 3s tuần tự (~9.8 RPS).</a:t>
             </a:r>
-            <a:endParaRPr lang="en-US" sz="980" dirty="0"/>
-          </a:p>
-          <a:p>
-            <a:pPr indent="0" marL="0">
-              <a:buNone/>
-            </a:pPr>
-            <a:r>
-              <a:rPr lang="en-US" sz="980" dirty="0">
+            <a:endParaRPr lang="en-US" sz="1200" dirty="0"/>
+          </a:p>
+          <a:p>
+            <a:pPr indent="0" marL="0">
+              <a:buNone/>
+            </a:pPr>
+            <a:r>
+              <a:rPr lang="en-US" sz="1200" dirty="0">
                 <a:solidFill>
                   <a:srgbClr val="334155"/>
                 </a:solidFill>
@@ -11485,7 +11485,7 @@
               </a:rPr>
               <a:t>• Mode 2: Nhanh nhưng Luồng OS nhảy vọt lên đỉnh bám sát số kết nối!</a:t>
             </a:r>
-            <a:endParaRPr lang="en-US" sz="980" dirty="0"/>
+            <a:endParaRPr lang="en-US" sz="1200" dirty="0"/>
           </a:p>
         </p:txBody>
       </p:sp>
@@ -11561,7 +11561,7 @@
               <a:buNone/>
             </a:pPr>
             <a:r>
-              <a:rPr lang="en-US" sz="1200" b="1" dirty="0">
+              <a:rPr lang="en-US" sz="1350" b="1" dirty="0">
                 <a:solidFill>
                   <a:srgbClr val="D97706"/>
                 </a:solidFill>
@@ -11571,7 +11571,7 @@
               </a:rPr>
               <a:t>Bước 3: Mode 3 Worker Thread Pool</a:t>
             </a:r>
-            <a:endParaRPr lang="en-US" sz="1200" dirty="0"/>
+            <a:endParaRPr lang="en-US" sz="1350" dirty="0"/>
           </a:p>
         </p:txBody>
       </p:sp>
@@ -11600,7 +11600,7 @@
               <a:buNone/>
             </a:pPr>
             <a:r>
-              <a:rPr lang="en-US" sz="980" dirty="0">
+              <a:rPr lang="en-US" sz="1200" dirty="0">
                 <a:solidFill>
                   <a:srgbClr val="334155"/>
                 </a:solidFill>
@@ -11610,14 +11610,14 @@
               </a:rPr>
               <a:t>• Bắn tải 500 kết nối dồn dập.</a:t>
             </a:r>
-            <a:endParaRPr lang="en-US" sz="980" dirty="0"/>
-          </a:p>
-          <a:p>
-            <a:pPr indent="0" marL="0">
-              <a:buNone/>
-            </a:pPr>
-            <a:r>
-              <a:rPr lang="en-US" sz="980" dirty="0">
+            <a:endParaRPr lang="en-US" sz="1200" dirty="0"/>
+          </a:p>
+          <a:p>
+            <a:pPr indent="0" marL="0">
+              <a:buNone/>
+            </a:pPr>
+            <a:r>
+              <a:rPr lang="en-US" sz="1200" dirty="0">
                 <a:solidFill>
                   <a:srgbClr val="334155"/>
                 </a:solidFill>
@@ -11627,14 +11627,14 @@
               </a:rPr>
               <a:t>• Đường Đỏ bị khóa cứng ở 16 luồng cố định.</a:t>
             </a:r>
-            <a:endParaRPr lang="en-US" sz="980" dirty="0"/>
-          </a:p>
-          <a:p>
-            <a:pPr indent="0" marL="0">
-              <a:buNone/>
-            </a:pPr>
-            <a:r>
-              <a:rPr lang="en-US" sz="980" dirty="0">
+            <a:endParaRPr lang="en-US" sz="1200" dirty="0"/>
+          </a:p>
+          <a:p>
+            <a:pPr indent="0" marL="0">
+              <a:buNone/>
+            </a:pPr>
+            <a:r>
+              <a:rPr lang="en-US" sz="1200" dirty="0">
                 <a:solidFill>
                   <a:srgbClr val="334155"/>
                 </a:solidFill>
@@ -11644,7 +11644,7 @@
               </a:rPr>
               <a:t>• Minh họa van xả HTTP 503 từ chối lịch sự khi vượt 1,000 chỗ chờ.</a:t>
             </a:r>
-            <a:endParaRPr lang="en-US" sz="980" dirty="0"/>
+            <a:endParaRPr lang="en-US" sz="1200" dirty="0"/>
           </a:p>
         </p:txBody>
       </p:sp>
@@ -11720,7 +11720,7 @@
               <a:buNone/>
             </a:pPr>
             <a:r>
-              <a:rPr lang="en-US" sz="1200" b="1" dirty="0">
+              <a:rPr lang="en-US" sz="1350" b="1" dirty="0">
                 <a:solidFill>
                   <a:srgbClr val="7C3AED"/>
                 </a:solidFill>
@@ -11730,7 +11730,7 @@
               </a:rPr>
               <a:t>Bước 3.5: Mode 5 Tự Viết (Sáng 30%)</a:t>
             </a:r>
-            <a:endParaRPr lang="en-US" sz="1200" dirty="0"/>
+            <a:endParaRPr lang="en-US" sz="1350" dirty="0"/>
           </a:p>
         </p:txBody>
       </p:sp>
@@ -11759,7 +11759,7 @@
               <a:buNone/>
             </a:pPr>
             <a:r>
-              <a:rPr lang="en-US" sz="980" dirty="0">
+              <a:rPr lang="en-US" sz="1200" dirty="0">
                 <a:solidFill>
                   <a:srgbClr val="334155"/>
                 </a:solidFill>
@@ -11769,14 +11769,14 @@
               </a:rPr>
               <a:t>• Khởi động mô hình CustomThreadPool tự làm từ số 0.</a:t>
             </a:r>
-            <a:endParaRPr lang="en-US" sz="980" dirty="0"/>
-          </a:p>
-          <a:p>
-            <a:pPr indent="0" marL="0">
-              <a:buNone/>
-            </a:pPr>
-            <a:r>
-              <a:rPr lang="en-US" sz="980" dirty="0">
+            <a:endParaRPr lang="en-US" sz="1200" dirty="0"/>
+          </a:p>
+          <a:p>
+            <a:pPr indent="0" marL="0">
+              <a:buNone/>
+            </a:pPr>
+            <a:r>
+              <a:rPr lang="en-US" sz="1200" dirty="0">
                 <a:solidFill>
                   <a:srgbClr val="334155"/>
                 </a:solidFill>
@@ -11786,7 +11786,7 @@
               </a:rPr>
               <a:t>• Chứng minh băng chuyền xoay vòng O(1) và ngủ đông đạt 98% thư viện chuẩn.</a:t>
             </a:r>
-            <a:endParaRPr lang="en-US" sz="980" dirty="0"/>
+            <a:endParaRPr lang="en-US" sz="1200" dirty="0"/>
           </a:p>
         </p:txBody>
       </p:sp>
@@ -11862,7 +11862,7 @@
               <a:buNone/>
             </a:pPr>
             <a:r>
-              <a:rPr lang="en-US" sz="1200" b="1" dirty="0">
+              <a:rPr lang="en-US" sz="1350" b="1" dirty="0">
                 <a:solidFill>
                   <a:srgbClr val="059669"/>
                 </a:solidFill>
@@ -11872,7 +11872,7 @@
               </a:rPr>
               <a:t>Bước 4: Đỉnh Cao Virtual Threads Java 21</a:t>
             </a:r>
-            <a:endParaRPr lang="en-US" sz="1200" dirty="0"/>
+            <a:endParaRPr lang="en-US" sz="1350" dirty="0"/>
           </a:p>
         </p:txBody>
       </p:sp>
@@ -11901,7 +11901,7 @@
               <a:buNone/>
             </a:pPr>
             <a:r>
-              <a:rPr lang="en-US" sz="980" dirty="0">
+              <a:rPr lang="en-US" sz="1200" dirty="0">
                 <a:solidFill>
                   <a:srgbClr val="334155"/>
                 </a:solidFill>
@@ -11911,14 +11911,14 @@
               </a:rPr>
               <a:t>• Bắn tải cực hạn 1,000 kết nối dồn dập.</a:t>
             </a:r>
-            <a:endParaRPr lang="en-US" sz="980" dirty="0"/>
-          </a:p>
-          <a:p>
-            <a:pPr indent="0" marL="0">
-              <a:buNone/>
-            </a:pPr>
-            <a:r>
-              <a:rPr lang="en-US" sz="980" dirty="0">
+            <a:endParaRPr lang="en-US" sz="1200" dirty="0"/>
+          </a:p>
+          <a:p>
+            <a:pPr indent="0" marL="0">
+              <a:buNone/>
+            </a:pPr>
+            <a:r>
+              <a:rPr lang="en-US" sz="1200" dirty="0">
                 <a:solidFill>
                   <a:srgbClr val="334155"/>
                 </a:solidFill>
@@ -11928,14 +11928,14 @@
               </a:rPr>
               <a:t>• 1,000 khách nhưng chỉ tốn 15 — 16 luồng thật!</a:t>
             </a:r>
-            <a:endParaRPr lang="en-US" sz="980" dirty="0"/>
-          </a:p>
-          <a:p>
-            <a:pPr indent="0" marL="0">
-              <a:buNone/>
-            </a:pPr>
-            <a:r>
-              <a:rPr lang="en-US" sz="980" dirty="0">
+            <a:endParaRPr lang="en-US" sz="1200" dirty="0"/>
+          </a:p>
+          <a:p>
+            <a:pPr indent="0" marL="0">
+              <a:buNone/>
+            </a:pPr>
+            <a:r>
+              <a:rPr lang="en-US" sz="1200" dirty="0">
                 <a:solidFill>
                   <a:srgbClr val="334155"/>
                 </a:solidFill>
@@ -11945,7 +11945,7 @@
               </a:rPr>
               <a:t>• Kỷ lục thông lượng 1,145+ RPS.</a:t>
             </a:r>
-            <a:endParaRPr lang="en-US" sz="980" dirty="0"/>
+            <a:endParaRPr lang="en-US" sz="1200" dirty="0"/>
           </a:p>
         </p:txBody>
       </p:sp>
@@ -12021,7 +12021,7 @@
               <a:buNone/>
             </a:pPr>
             <a:r>
-              <a:rPr lang="en-US" sz="1200" b="1" dirty="0">
+              <a:rPr lang="en-US" sz="1350" b="1" dirty="0">
                 <a:solidFill>
                   <a:srgbClr val="1D4ED8"/>
                 </a:solidFill>
@@ -12031,7 +12031,7 @@
               </a:rPr>
               <a:t>Bước 5: Bảng Ma Trận &amp; Xuất Báo Cáo</a:t>
             </a:r>
-            <a:endParaRPr lang="en-US" sz="1200" dirty="0"/>
+            <a:endParaRPr lang="en-US" sz="1350" dirty="0"/>
           </a:p>
         </p:txBody>
       </p:sp>
@@ -12060,7 +12060,7 @@
               <a:buNone/>
             </a:pPr>
             <a:r>
-              <a:rPr lang="en-US" sz="980" dirty="0">
+              <a:rPr lang="en-US" sz="1200" dirty="0">
                 <a:solidFill>
                   <a:srgbClr val="334155"/>
                 </a:solidFill>
@@ -12070,14 +12070,14 @@
               </a:rPr>
               <a:t>• Xem bảng tổng kết đối sánh trực quan 5 mô hình.</a:t>
             </a:r>
-            <a:endParaRPr lang="en-US" sz="980" dirty="0"/>
-          </a:p>
-          <a:p>
-            <a:pPr indent="0" marL="0">
-              <a:buNone/>
-            </a:pPr>
-            <a:r>
-              <a:rPr lang="en-US" sz="980" dirty="0">
+            <a:endParaRPr lang="en-US" sz="1200" dirty="0"/>
+          </a:p>
+          <a:p>
+            <a:pPr indent="0" marL="0">
+              <a:buNone/>
+            </a:pPr>
+            <a:r>
+              <a:rPr lang="en-US" sz="1200" dirty="0">
                 <a:solidFill>
                   <a:srgbClr val="334155"/>
                 </a:solidFill>
@@ -12087,7 +12087,7 @@
               </a:rPr>
               <a:t>• Trình diễn tải file dữ liệu thống kê kiểm thử JSON/CSV về máy.</a:t>
             </a:r>
-            <a:endParaRPr lang="en-US" sz="980" dirty="0"/>
+            <a:endParaRPr lang="en-US" sz="1200" dirty="0"/>
           </a:p>
         </p:txBody>
       </p:sp>
@@ -12163,7 +12163,7 @@
               <a:buNone/>
             </a:pPr>
             <a:r>
-              <a:rPr lang="en-US" sz="1100" dirty="0">
+              <a:rPr lang="en-US" sz="1350" dirty="0">
                 <a:solidFill>
                   <a:srgbClr val="0F172A"/>
                 </a:solidFill>
@@ -12173,7 +12173,7 @@
               </a:rPr>
               <a:t>🎬 CHUYỂN SANG LIVE DEMO: Mở trình duyệt tại http://localhost:8080/dashboard để thực nghiệm trực tiếp 6 bước kịch bản!</a:t>
             </a:r>
-            <a:endParaRPr lang="en-US" sz="1100" dirty="0"/>
+            <a:endParaRPr lang="en-US" sz="1350" dirty="0"/>
           </a:p>
         </p:txBody>
       </p:sp>
@@ -12261,7 +12261,7 @@
               <a:buNone/>
             </a:pPr>
             <a:r>
-              <a:rPr lang="en-US" sz="900" b="1" dirty="0">
+              <a:rPr lang="en-US" sz="1100" b="1" dirty="0">
                 <a:solidFill>
                   <a:srgbClr val="1D4ED8"/>
                 </a:solidFill>
@@ -12271,7 +12271,7 @@
               </a:rPr>
               <a:t>SỐ LIỆU THỰC NGHIỆM</a:t>
             </a:r>
-            <a:endParaRPr lang="en-US" sz="900" dirty="0"/>
+            <a:endParaRPr lang="en-US" sz="1100" dirty="0"/>
           </a:p>
         </p:txBody>
       </p:sp>
@@ -12339,7 +12339,7 @@
               <a:buNone/>
             </a:pPr>
             <a:r>
-              <a:rPr lang="en-US" sz="1100" b="1" dirty="0">
+              <a:rPr lang="en-US" sz="1350" b="1" dirty="0">
                 <a:solidFill>
                   <a:srgbClr val="334155"/>
                 </a:solidFill>
@@ -12349,7 +12349,7 @@
               </a:rPr>
               <a:t>Dữ liệu thực nghiệm thu thập đồng nhất trên cùng một cấu hình phần cứng (16 Cores, Windows 11)</a:t>
             </a:r>
-            <a:endParaRPr lang="en-US" sz="1100" dirty="0"/>
+            <a:endParaRPr lang="en-US" sz="1350" dirty="0"/>
           </a:p>
         </p:txBody>
       </p:sp>
@@ -12405,7 +12405,7 @@
               <a:buNone/>
             </a:pPr>
             <a:r>
-              <a:rPr lang="en-US" sz="1000" b="1" dirty="0">
+              <a:rPr lang="en-US" sz="1150" b="1" dirty="0">
                 <a:solidFill>
                   <a:srgbClr val="1D4ED8"/>
                 </a:solidFill>
@@ -12415,7 +12415,7 @@
               </a:rPr>
               <a:t>15 / 18</a:t>
             </a:r>
-            <a:endParaRPr lang="en-US" sz="1000" dirty="0"/>
+            <a:endParaRPr lang="en-US" sz="1150" dirty="0"/>
           </a:p>
         </p:txBody>
       </p:sp>
@@ -12467,7 +12467,7 @@
               <a:buNone/>
             </a:pPr>
             <a:r>
-              <a:rPr lang="en-US" sz="950" b="1" dirty="0">
+              <a:rPr lang="en-US" sz="1100" b="1" dirty="0">
                 <a:solidFill>
                   <a:srgbClr val="475569"/>
                 </a:solidFill>
@@ -12477,7 +12477,7 @@
               </a:rPr>
               <a:t>PTIT TELECOM • Khoa Công nghệ Thông tin • Đề Tài T45: Multi-Threading Patterns</a:t>
             </a:r>
-            <a:endParaRPr lang="en-US" sz="950" dirty="0"/>
+            <a:endParaRPr lang="en-US" sz="1100" dirty="0"/>
           </a:p>
         </p:txBody>
       </p:sp>
@@ -12506,7 +12506,7 @@
               <a:buNone/>
             </a:pPr>
             <a:r>
-              <a:rPr lang="en-US" sz="950" b="1" dirty="0">
+              <a:rPr lang="en-US" sz="1100" b="1" dirty="0">
                 <a:solidFill>
                   <a:srgbClr val="1D4ED8"/>
                 </a:solidFill>
@@ -12516,7 +12516,7 @@
               </a:rPr>
               <a:t>Slide 15 / 18</a:t>
             </a:r>
-            <a:endParaRPr lang="en-US" sz="950" dirty="0"/>
+            <a:endParaRPr lang="en-US" sz="1100" dirty="0"/>
           </a:p>
         </p:txBody>
       </p:sp>
@@ -12611,7 +12611,7 @@
               <a:buNone/>
             </a:pPr>
             <a:r>
-              <a:rPr lang="en-US" sz="950" b="1" dirty="0">
+              <a:rPr lang="en-US" sz="1250" b="1" dirty="0">
                 <a:solidFill>
                   <a:srgbClr val="0F172A"/>
                 </a:solidFill>
@@ -12621,7 +12621,7 @@
               </a:rPr>
               <a:t>Mode 1 (Đơn luồng)</a:t>
             </a:r>
-            <a:endParaRPr lang="en-US" sz="950" dirty="0"/>
+            <a:endParaRPr lang="en-US" sz="1250" dirty="0"/>
           </a:p>
         </p:txBody>
       </p:sp>
@@ -12699,7 +12699,7 @@
               <a:buNone/>
             </a:pPr>
             <a:r>
-              <a:rPr lang="en-US" sz="1100" b="1" dirty="0">
+              <a:rPr lang="en-US" sz="1350" b="1" dirty="0">
                 <a:solidFill>
                   <a:srgbClr val="64748B"/>
                 </a:solidFill>
@@ -12709,7 +12709,7 @@
               </a:rPr>
               <a:t>~9.8 RPS</a:t>
             </a:r>
-            <a:endParaRPr lang="en-US" sz="1100" dirty="0"/>
+            <a:endParaRPr lang="en-US" sz="1350" dirty="0"/>
           </a:p>
         </p:txBody>
       </p:sp>
@@ -12738,7 +12738,7 @@
               <a:buNone/>
             </a:pPr>
             <a:r>
-              <a:rPr lang="en-US" sz="950" b="1" dirty="0">
+              <a:rPr lang="en-US" sz="1250" b="1" dirty="0">
                 <a:solidFill>
                   <a:srgbClr val="0F172A"/>
                 </a:solidFill>
@@ -12748,7 +12748,7 @@
               </a:rPr>
               <a:t>Mode 5 (Custom Pool 30%)</a:t>
             </a:r>
-            <a:endParaRPr lang="en-US" sz="950" dirty="0"/>
+            <a:endParaRPr lang="en-US" sz="1250" dirty="0"/>
           </a:p>
         </p:txBody>
       </p:sp>
@@ -12826,7 +12826,7 @@
               <a:buNone/>
             </a:pPr>
             <a:r>
-              <a:rPr lang="en-US" sz="1100" b="1" dirty="0">
+              <a:rPr lang="en-US" sz="1350" b="1" dirty="0">
                 <a:solidFill>
                   <a:srgbClr val="7C3AED"/>
                 </a:solidFill>
@@ -12836,7 +12836,7 @@
               </a:rPr>
               <a:t>~148.6 RPS</a:t>
             </a:r>
-            <a:endParaRPr lang="en-US" sz="1100" dirty="0"/>
+            <a:endParaRPr lang="en-US" sz="1350" dirty="0"/>
           </a:p>
         </p:txBody>
       </p:sp>
@@ -12865,7 +12865,7 @@
               <a:buNone/>
             </a:pPr>
             <a:r>
-              <a:rPr lang="en-US" sz="950" b="1" dirty="0">
+              <a:rPr lang="en-US" sz="1250" b="1" dirty="0">
                 <a:solidFill>
                   <a:srgbClr val="0F172A"/>
                 </a:solidFill>
@@ -12875,7 +12875,7 @@
               </a:rPr>
               <a:t>Mode 3 (Worker Pool)</a:t>
             </a:r>
-            <a:endParaRPr lang="en-US" sz="950" dirty="0"/>
+            <a:endParaRPr lang="en-US" sz="1250" dirty="0"/>
           </a:p>
         </p:txBody>
       </p:sp>
@@ -12953,7 +12953,7 @@
               <a:buNone/>
             </a:pPr>
             <a:r>
-              <a:rPr lang="en-US" sz="1100" b="1" dirty="0">
+              <a:rPr lang="en-US" sz="1350" b="1" dirty="0">
                 <a:solidFill>
                   <a:srgbClr val="D97706"/>
                 </a:solidFill>
@@ -12963,7 +12963,7 @@
               </a:rPr>
               <a:t>~152.0 RPS</a:t>
             </a:r>
-            <a:endParaRPr lang="en-US" sz="1100" dirty="0"/>
+            <a:endParaRPr lang="en-US" sz="1350" dirty="0"/>
           </a:p>
         </p:txBody>
       </p:sp>
@@ -12992,7 +12992,7 @@
               <a:buNone/>
             </a:pPr>
             <a:r>
-              <a:rPr lang="en-US" sz="950" b="1" dirty="0">
+              <a:rPr lang="en-US" sz="1250" b="1" dirty="0">
                 <a:solidFill>
                   <a:srgbClr val="0F172A"/>
                 </a:solidFill>
@@ -13002,7 +13002,7 @@
               </a:rPr>
               <a:t>Mode 2 (Thread/Conn)</a:t>
             </a:r>
-            <a:endParaRPr lang="en-US" sz="950" dirty="0"/>
+            <a:endParaRPr lang="en-US" sz="1250" dirty="0"/>
           </a:p>
         </p:txBody>
       </p:sp>
@@ -13080,7 +13080,7 @@
               <a:buNone/>
             </a:pPr>
             <a:r>
-              <a:rPr lang="en-US" sz="1100" b="1" dirty="0">
+              <a:rPr lang="en-US" sz="1350" b="1" dirty="0">
                 <a:solidFill>
                   <a:srgbClr val="E11D48"/>
                 </a:solidFill>
@@ -13090,7 +13090,7 @@
               </a:rPr>
               <a:t>~285.4 RPS</a:t>
             </a:r>
-            <a:endParaRPr lang="en-US" sz="1100" dirty="0"/>
+            <a:endParaRPr lang="en-US" sz="1350" dirty="0"/>
           </a:p>
         </p:txBody>
       </p:sp>
@@ -13119,7 +13119,7 @@
               <a:buNone/>
             </a:pPr>
             <a:r>
-              <a:rPr lang="en-US" sz="950" b="1" dirty="0">
+              <a:rPr lang="en-US" sz="1250" b="1" dirty="0">
                 <a:solidFill>
                   <a:srgbClr val="0F172A"/>
                 </a:solidFill>
@@ -13129,7 +13129,7 @@
               </a:rPr>
               <a:t>Mode 4 (Virtual Threads)</a:t>
             </a:r>
-            <a:endParaRPr lang="en-US" sz="950" dirty="0"/>
+            <a:endParaRPr lang="en-US" sz="1250" dirty="0"/>
           </a:p>
         </p:txBody>
       </p:sp>
@@ -13207,7 +13207,7 @@
               <a:buNone/>
             </a:pPr>
             <a:r>
-              <a:rPr lang="en-US" sz="1100" b="1" dirty="0">
+              <a:rPr lang="en-US" sz="1350" b="1" dirty="0">
                 <a:solidFill>
                   <a:srgbClr val="059669"/>
                 </a:solidFill>
@@ -13217,7 +13217,7 @@
               </a:rPr>
               <a:t>~1,145.2 RPS</a:t>
             </a:r>
-            <a:endParaRPr lang="en-US" sz="1100" dirty="0"/>
+            <a:endParaRPr lang="en-US" sz="1350" dirty="0"/>
           </a:p>
         </p:txBody>
       </p:sp>
@@ -13293,7 +13293,7 @@
               <a:buNone/>
             </a:pPr>
             <a:r>
-              <a:rPr lang="en-US" sz="1450" b="1" dirty="0">
+              <a:rPr lang="en-US" sz="1650" b="1" dirty="0">
                 <a:solidFill>
                   <a:srgbClr val="0F172A"/>
                 </a:solidFill>
@@ -13303,7 +13303,7 @@
               </a:rPr>
               <a:t>🚀  Đột Phá Thông Lượng (Throughput)</a:t>
             </a:r>
-            <a:endParaRPr lang="en-US" sz="1450" dirty="0"/>
+            <a:endParaRPr lang="en-US" sz="1650" dirty="0"/>
           </a:p>
         </p:txBody>
       </p:sp>
@@ -13359,7 +13359,7 @@
               <a:buNone/>
             </a:pPr>
             <a:r>
-              <a:rPr lang="en-US" sz="1800" b="1" dirty="0">
+              <a:rPr lang="en-US" sz="2400" b="1" dirty="0">
                 <a:solidFill>
                   <a:srgbClr val="059669"/>
                 </a:solidFill>
@@ -13371,14 +13371,14 @@
               <a:buNone/>
             </a:pPr>
             <a:r>
-              <a:rPr lang="en-US" sz="850" b="1" dirty="0">
+              <a:rPr lang="en-US" sz="1150" b="1" dirty="0">
                 <a:solidFill>
                   <a:srgbClr val="334155"/>
                 </a:solidFill>
               </a:rPr>
               <a:t>Dẫn đầu tuyệt đối ở tải cao</a:t>
             </a:r>
-            <a:endParaRPr lang="en-US" sz="1800" dirty="0"/>
+            <a:endParaRPr lang="en-US" sz="2400" dirty="0"/>
           </a:p>
         </p:txBody>
       </p:sp>
@@ -13434,7 +13434,7 @@
               <a:buNone/>
             </a:pPr>
             <a:r>
-              <a:rPr lang="en-US" sz="1800" b="1" dirty="0">
+              <a:rPr lang="en-US" sz="2400" b="1" dirty="0">
                 <a:solidFill>
                   <a:srgbClr val="059669"/>
                 </a:solidFill>
@@ -13446,14 +13446,14 @@
               <a:buNone/>
             </a:pPr>
             <a:r>
-              <a:rPr lang="en-US" sz="850" b="1" dirty="0">
+              <a:rPr lang="en-US" sz="1150" b="1" dirty="0">
                 <a:solidFill>
                   <a:srgbClr val="334155"/>
                 </a:solidFill>
               </a:rPr>
               <a:t>Tăng tốc so với Worker Pool</a:t>
             </a:r>
-            <a:endParaRPr lang="en-US" sz="1800" dirty="0"/>
+            <a:endParaRPr lang="en-US" sz="2400" dirty="0"/>
           </a:p>
         </p:txBody>
       </p:sp>
@@ -13509,7 +13509,7 @@
               <a:buNone/>
             </a:pPr>
             <a:r>
-              <a:rPr lang="en-US" sz="1050" b="1" dirty="0">
+              <a:rPr lang="en-US" sz="1400" b="1" dirty="0">
                 <a:solidFill>
                   <a:srgbClr val="0F172A"/>
                 </a:solidFill>
@@ -13521,14 +13521,14 @@
               <a:buNone/>
             </a:pPr>
             <a:r>
-              <a:rPr lang="en-US" sz="900" dirty="0">
+              <a:rPr lang="en-US" sz="1200" dirty="0">
                 <a:solidFill>
                   <a:srgbClr val="334155"/>
                 </a:solidFill>
               </a:rPr>
               <a:t>Virtual Threads nhả Carrier Thread ngay khi luồng bị block chờ Socket/I/O.</a:t>
             </a:r>
-            <a:endParaRPr lang="en-US" sz="1050" dirty="0"/>
+            <a:endParaRPr lang="en-US" sz="1400" dirty="0"/>
           </a:p>
         </p:txBody>
       </p:sp>
@@ -13584,7 +13584,7 @@
               <a:buNone/>
             </a:pPr>
             <a:r>
-              <a:rPr lang="en-US" sz="1050" b="1" dirty="0">
+              <a:rPr lang="en-US" sz="1400" b="1" dirty="0">
                 <a:solidFill>
                   <a:srgbClr val="0F172A"/>
                 </a:solidFill>
@@ -13596,14 +13596,14 @@
               <a:buNone/>
             </a:pPr>
             <a:r>
-              <a:rPr lang="en-US" sz="900" dirty="0">
+              <a:rPr lang="en-US" sz="1200" dirty="0">
                 <a:solidFill>
                   <a:srgbClr val="334155"/>
                 </a:solidFill>
               </a:rPr>
               <a:t>CustomThreadPool mảng vòng O(1) bám sát năng lực thư viện chuẩn của Oracle.</a:t>
             </a:r>
-            <a:endParaRPr lang="en-US" sz="1050" dirty="0"/>
+            <a:endParaRPr lang="en-US" sz="1400" dirty="0"/>
           </a:p>
         </p:txBody>
       </p:sp>
@@ -13659,7 +13659,7 @@
               <a:buNone/>
             </a:pPr>
             <a:r>
-              <a:rPr lang="en-US" sz="1050" b="1" dirty="0">
+              <a:rPr lang="en-US" sz="1400" b="1" dirty="0">
                 <a:solidFill>
                   <a:srgbClr val="0F172A"/>
                 </a:solidFill>
@@ -13671,14 +13671,14 @@
               <a:buNone/>
             </a:pPr>
             <a:r>
-              <a:rPr lang="en-US" sz="900" dirty="0">
+              <a:rPr lang="en-US" sz="1200" dirty="0">
                 <a:solidFill>
                   <a:srgbClr val="334155"/>
                 </a:solidFill>
               </a:rPr>
               <a:t>Phục vụ hàng chục ngàn kết nối mà không làm sập máy chủ như Mode 2.</a:t>
             </a:r>
-            <a:endParaRPr lang="en-US" sz="1050" dirty="0"/>
+            <a:endParaRPr lang="en-US" sz="1400" dirty="0"/>
           </a:p>
         </p:txBody>
       </p:sp>
@@ -13754,7 +13754,7 @@
               <a:buNone/>
             </a:pPr>
             <a:r>
-              <a:rPr lang="en-US" sz="1100" dirty="0">
+              <a:rPr lang="en-US" sz="1350" dirty="0">
                 <a:solidFill>
                   <a:srgbClr val="0F172A"/>
                 </a:solidFill>
@@ -13764,7 +13764,7 @@
               </a:rPr>
               <a:t>📊 KẾT LUẬN THỰC NGHIỆM: Java 21 Virtual Threads mang lại bước nhảy vọt 7.5x thông lượng so với Pool cố định và 116x so với đơn luồng!</a:t>
             </a:r>
-            <a:endParaRPr lang="en-US" sz="1100" dirty="0"/>
+            <a:endParaRPr lang="en-US" sz="1350" dirty="0"/>
           </a:p>
         </p:txBody>
       </p:sp>
@@ -13852,7 +13852,7 @@
               <a:buNone/>
             </a:pPr>
             <a:r>
-              <a:rPr lang="en-US" sz="900" b="1" dirty="0">
+              <a:rPr lang="en-US" sz="1100" b="1" dirty="0">
                 <a:solidFill>
                   <a:srgbClr val="1D4ED8"/>
                 </a:solidFill>
@@ -13862,7 +13862,7 @@
               </a:rPr>
               <a:t>PHÂN TÍCH CHUYÊN SÂU</a:t>
             </a:r>
-            <a:endParaRPr lang="en-US" sz="900" dirty="0"/>
+            <a:endParaRPr lang="en-US" sz="1100" dirty="0"/>
           </a:p>
         </p:txBody>
       </p:sp>
@@ -13930,7 +13930,7 @@
               <a:buNone/>
             </a:pPr>
             <a:r>
-              <a:rPr lang="en-US" sz="1100" b="1" dirty="0">
+              <a:rPr lang="en-US" sz="1350" b="1" dirty="0">
                 <a:solidFill>
                   <a:srgbClr val="334155"/>
                 </a:solidFill>
@@ -13940,7 +13940,7 @@
               </a:rPr>
               <a:t>Tại sao phân vị độ trễ quan trọng hơn độ trễ trung bình trong cam kết SLA dịch vụ mạng?</a:t>
             </a:r>
-            <a:endParaRPr lang="en-US" sz="1100" dirty="0"/>
+            <a:endParaRPr lang="en-US" sz="1350" dirty="0"/>
           </a:p>
         </p:txBody>
       </p:sp>
@@ -13996,7 +13996,7 @@
               <a:buNone/>
             </a:pPr>
             <a:r>
-              <a:rPr lang="en-US" sz="1000" b="1" dirty="0">
+              <a:rPr lang="en-US" sz="1150" b="1" dirty="0">
                 <a:solidFill>
                   <a:srgbClr val="1D4ED8"/>
                 </a:solidFill>
@@ -14006,7 +14006,7 @@
               </a:rPr>
               <a:t>16 / 18</a:t>
             </a:r>
-            <a:endParaRPr lang="en-US" sz="1000" dirty="0"/>
+            <a:endParaRPr lang="en-US" sz="1150" dirty="0"/>
           </a:p>
         </p:txBody>
       </p:sp>
@@ -14058,7 +14058,7 @@
               <a:buNone/>
             </a:pPr>
             <a:r>
-              <a:rPr lang="en-US" sz="950" b="1" dirty="0">
+              <a:rPr lang="en-US" sz="1100" b="1" dirty="0">
                 <a:solidFill>
                   <a:srgbClr val="475569"/>
                 </a:solidFill>
@@ -14068,7 +14068,7 @@
               </a:rPr>
               <a:t>PTIT TELECOM • Khoa Công nghệ Thông tin • Đề Tài T45: Multi-Threading Patterns</a:t>
             </a:r>
-            <a:endParaRPr lang="en-US" sz="950" dirty="0"/>
+            <a:endParaRPr lang="en-US" sz="1100" dirty="0"/>
           </a:p>
         </p:txBody>
       </p:sp>
@@ -14097,7 +14097,7 @@
               <a:buNone/>
             </a:pPr>
             <a:r>
-              <a:rPr lang="en-US" sz="950" b="1" dirty="0">
+              <a:rPr lang="en-US" sz="1100" b="1" dirty="0">
                 <a:solidFill>
                   <a:srgbClr val="1D4ED8"/>
                 </a:solidFill>
@@ -14107,7 +14107,7 @@
               </a:rPr>
               <a:t>Slide 16 / 18</a:t>
             </a:r>
-            <a:endParaRPr lang="en-US" sz="950" dirty="0"/>
+            <a:endParaRPr lang="en-US" sz="1100" dirty="0"/>
           </a:p>
         </p:txBody>
       </p:sp>
@@ -14151,7 +14151,7 @@
                         <a:buNone/>
                       </a:pPr>
                       <a:r>
-                        <a:rPr lang="en-US" sz="1000" b="1" dirty="0">
+                        <a:rPr lang="en-US" sz="1200" b="1" dirty="0">
                           <a:solidFill>
                             <a:srgbClr val="FFFFFF"/>
                           </a:solidFill>
@@ -14161,7 +14161,7 @@
                         </a:rPr>
                         <a:t>MÔ HÌNH LUỒNG</a:t>
                       </a:r>
-                      <a:endParaRPr lang="en-US" sz="1000" dirty="0">
+                      <a:endParaRPr lang="en-US" sz="1200" dirty="0">
                         <a:latin typeface="Arial" charset="0"/>
                         <a:ea typeface="Arial" charset="0"/>
                         <a:cs typeface="Arial" charset="0"/>
@@ -14219,7 +14219,7 @@
                         <a:buNone/>
                       </a:pPr>
                       <a:r>
-                        <a:rPr lang="en-US" sz="1000" b="1" dirty="0">
+                        <a:rPr lang="en-US" sz="1200" b="1" dirty="0">
                           <a:solidFill>
                             <a:srgbClr val="FFFFFF"/>
                           </a:solidFill>
@@ -14229,7 +14229,7 @@
                         </a:rPr>
                         <a:t>ĐỘ TRỄ TB (Avg)</a:t>
                       </a:r>
-                      <a:endParaRPr lang="en-US" sz="1000" dirty="0">
+                      <a:endParaRPr lang="en-US" sz="1200" dirty="0">
                         <a:latin typeface="Arial" charset="0"/>
                         <a:ea typeface="Arial" charset="0"/>
                         <a:cs typeface="Arial" charset="0"/>
@@ -14287,7 +14287,7 @@
                         <a:buNone/>
                       </a:pPr>
                       <a:r>
-                        <a:rPr lang="en-US" sz="1000" b="1" dirty="0">
+                        <a:rPr lang="en-US" sz="1200" b="1" dirty="0">
                           <a:solidFill>
                             <a:srgbClr val="FFFFFF"/>
                           </a:solidFill>
@@ -14297,7 +14297,7 @@
                         </a:rPr>
                         <a:t>PHÂN VỊ P50</a:t>
                       </a:r>
-                      <a:endParaRPr lang="en-US" sz="1000" dirty="0">
+                      <a:endParaRPr lang="en-US" sz="1200" dirty="0">
                         <a:latin typeface="Arial" charset="0"/>
                         <a:ea typeface="Arial" charset="0"/>
                         <a:cs typeface="Arial" charset="0"/>
@@ -14308,7 +14308,7 @@
                         <a:buNone/>
                       </a:pPr>
                       <a:r>
-                        <a:rPr lang="en-US" sz="1000" b="1" dirty="0">
+                        <a:rPr lang="en-US" sz="1200" b="1" dirty="0">
                           <a:solidFill>
                             <a:srgbClr val="FFFFFF"/>
                           </a:solidFill>
@@ -14318,7 +14318,7 @@
                         </a:rPr>
                         <a:t>(Median)</a:t>
                       </a:r>
-                      <a:endParaRPr lang="en-US" sz="1000" dirty="0">
+                      <a:endParaRPr lang="en-US" sz="1200" dirty="0">
                         <a:latin typeface="Arial" charset="0"/>
                         <a:ea typeface="Arial" charset="0"/>
                         <a:cs typeface="Arial" charset="0"/>
@@ -14376,7 +14376,7 @@
                         <a:buNone/>
                       </a:pPr>
                       <a:r>
-                        <a:rPr lang="en-US" sz="1000" b="1" dirty="0">
+                        <a:rPr lang="en-US" sz="1200" b="1" dirty="0">
                           <a:solidFill>
                             <a:srgbClr val="FFFFFF"/>
                           </a:solidFill>
@@ -14386,7 +14386,7 @@
                         </a:rPr>
                         <a:t>PHÂN VỊ P95</a:t>
                       </a:r>
-                      <a:endParaRPr lang="en-US" sz="1000" dirty="0">
+                      <a:endParaRPr lang="en-US" sz="1200" dirty="0">
                         <a:latin typeface="Arial" charset="0"/>
                         <a:ea typeface="Arial" charset="0"/>
                         <a:cs typeface="Arial" charset="0"/>
@@ -14397,7 +14397,7 @@
                         <a:buNone/>
                       </a:pPr>
                       <a:r>
-                        <a:rPr lang="en-US" sz="1000" b="1" dirty="0">
+                        <a:rPr lang="en-US" sz="1200" b="1" dirty="0">
                           <a:solidFill>
                             <a:srgbClr val="FFFFFF"/>
                           </a:solidFill>
@@ -14407,7 +14407,7 @@
                         </a:rPr>
                         <a:t>(95% Client)</a:t>
                       </a:r>
-                      <a:endParaRPr lang="en-US" sz="1000" dirty="0">
+                      <a:endParaRPr lang="en-US" sz="1200" dirty="0">
                         <a:latin typeface="Arial" charset="0"/>
                         <a:ea typeface="Arial" charset="0"/>
                         <a:cs typeface="Arial" charset="0"/>
@@ -14465,7 +14465,7 @@
                         <a:buNone/>
                       </a:pPr>
                       <a:r>
-                        <a:rPr lang="en-US" sz="1000" b="1" dirty="0">
+                        <a:rPr lang="en-US" sz="1200" b="1" dirty="0">
                           <a:solidFill>
                             <a:srgbClr val="FFFFFF"/>
                           </a:solidFill>
@@ -14475,7 +14475,7 @@
                         </a:rPr>
                         <a:t>PHÂN VỊ P99</a:t>
                       </a:r>
-                      <a:endParaRPr lang="en-US" sz="1000" dirty="0">
+                      <a:endParaRPr lang="en-US" sz="1200" dirty="0">
                         <a:latin typeface="Arial" charset="0"/>
                         <a:ea typeface="Arial" charset="0"/>
                         <a:cs typeface="Arial" charset="0"/>
@@ -14486,7 +14486,7 @@
                         <a:buNone/>
                       </a:pPr>
                       <a:r>
-                        <a:rPr lang="en-US" sz="1000" b="1" dirty="0">
+                        <a:rPr lang="en-US" sz="1200" b="1" dirty="0">
                           <a:solidFill>
                             <a:srgbClr val="FFFFFF"/>
                           </a:solidFill>
@@ -14496,7 +14496,7 @@
                         </a:rPr>
                         <a:t>(Độ trễ đuôi)</a:t>
                       </a:r>
-                      <a:endParaRPr lang="en-US" sz="1000" dirty="0">
+                      <a:endParaRPr lang="en-US" sz="1200" dirty="0">
                         <a:latin typeface="Arial" charset="0"/>
                         <a:ea typeface="Arial" charset="0"/>
                         <a:cs typeface="Arial" charset="0"/>
@@ -14554,7 +14554,7 @@
                         <a:buNone/>
                       </a:pPr>
                       <a:r>
-                        <a:rPr lang="en-US" sz="1000" b="1" dirty="0">
+                        <a:rPr lang="en-US" sz="1200" b="1" dirty="0">
                           <a:solidFill>
                             <a:srgbClr val="FFFFFF"/>
                           </a:solidFill>
@@ -14564,7 +14564,7 @@
                         </a:rPr>
                         <a:t>ĐÁNH GIÁ SLA</a:t>
                       </a:r>
-                      <a:endParaRPr lang="en-US" sz="1000" dirty="0">
+                      <a:endParaRPr lang="en-US" sz="1200" dirty="0">
                         <a:latin typeface="Arial" charset="0"/>
                         <a:ea typeface="Arial" charset="0"/>
                         <a:cs typeface="Arial" charset="0"/>
@@ -14624,7 +14624,7 @@
                         <a:buNone/>
                       </a:pPr>
                       <a:r>
-                        <a:rPr lang="en-US" sz="1000" b="1" dirty="0">
+                        <a:rPr lang="en-US" sz="1200" b="1" dirty="0">
                           <a:solidFill>
                             <a:srgbClr val="000000"/>
                           </a:solidFill>
@@ -14634,7 +14634,7 @@
                         </a:rPr>
                         <a:t>Mode 1 (Iterative Single)</a:t>
                       </a:r>
-                      <a:endParaRPr lang="en-US" sz="1000" dirty="0">
+                      <a:endParaRPr lang="en-US" sz="1200" dirty="0">
                         <a:latin typeface="Arial" charset="0"/>
                         <a:ea typeface="Arial" charset="0"/>
                         <a:cs typeface="Arial" charset="0"/>
@@ -14689,7 +14689,7 @@
                         <a:buNone/>
                       </a:pPr>
                       <a:r>
-                        <a:rPr lang="en-US" sz="1000" dirty="0">
+                        <a:rPr lang="en-US" sz="1200" dirty="0">
                           <a:solidFill>
                             <a:srgbClr val="000000"/>
                           </a:solidFill>
@@ -14699,7 +14699,7 @@
                         </a:rPr>
                         <a:t>3,020 ms</a:t>
                       </a:r>
-                      <a:endParaRPr lang="en-US" sz="1000" dirty="0">
+                      <a:endParaRPr lang="en-US" sz="1200" dirty="0">
                         <a:latin typeface="Arial" charset="0"/>
                         <a:ea typeface="Arial" charset="0"/>
                         <a:cs typeface="Arial" charset="0"/>
@@ -14754,7 +14754,7 @@
                         <a:buNone/>
                       </a:pPr>
                       <a:r>
-                        <a:rPr lang="en-US" sz="1000" dirty="0">
+                        <a:rPr lang="en-US" sz="1200" dirty="0">
                           <a:solidFill>
                             <a:srgbClr val="000000"/>
                           </a:solidFill>
@@ -14764,7 +14764,7 @@
                         </a:rPr>
                         <a:t>3,000 ms</a:t>
                       </a:r>
-                      <a:endParaRPr lang="en-US" sz="1000" dirty="0">
+                      <a:endParaRPr lang="en-US" sz="1200" dirty="0">
                         <a:latin typeface="Arial" charset="0"/>
                         <a:ea typeface="Arial" charset="0"/>
                         <a:cs typeface="Arial" charset="0"/>
@@ -14819,7 +14819,7 @@
                         <a:buNone/>
                       </a:pPr>
                       <a:r>
-                        <a:rPr lang="en-US" sz="1000" dirty="0">
+                        <a:rPr lang="en-US" sz="1200" dirty="0">
                           <a:solidFill>
                             <a:srgbClr val="000000"/>
                           </a:solidFill>
@@ -14829,7 +14829,7 @@
                         </a:rPr>
                         <a:t>3,050 ms</a:t>
                       </a:r>
-                      <a:endParaRPr lang="en-US" sz="1000" dirty="0">
+                      <a:endParaRPr lang="en-US" sz="1200" dirty="0">
                         <a:latin typeface="Arial" charset="0"/>
                         <a:ea typeface="Arial" charset="0"/>
                         <a:cs typeface="Arial" charset="0"/>
@@ -14884,7 +14884,7 @@
                         <a:buNone/>
                       </a:pPr>
                       <a:r>
-                        <a:rPr lang="en-US" sz="1000" dirty="0">
+                        <a:rPr lang="en-US" sz="1200" dirty="0">
                           <a:solidFill>
                             <a:srgbClr val="000000"/>
                           </a:solidFill>
@@ -14894,7 +14894,7 @@
                         </a:rPr>
                         <a:t>3,120 ms</a:t>
                       </a:r>
-                      <a:endParaRPr lang="en-US" sz="1000" dirty="0">
+                      <a:endParaRPr lang="en-US" sz="1200" dirty="0">
                         <a:latin typeface="Arial" charset="0"/>
                         <a:ea typeface="Arial" charset="0"/>
                         <a:cs typeface="Arial" charset="0"/>
@@ -14949,7 +14949,7 @@
                         <a:buNone/>
                       </a:pPr>
                       <a:r>
-                        <a:rPr lang="en-US" sz="1000" b="1" dirty="0">
+                        <a:rPr lang="en-US" sz="1200" b="1" dirty="0">
                           <a:solidFill>
                             <a:srgbClr val="E11D48"/>
                           </a:solidFill>
@@ -14959,7 +14959,7 @@
                         </a:rPr>
                         <a:t>Sập SLA (&gt; 3 giây)</a:t>
                       </a:r>
-                      <a:endParaRPr lang="en-US" sz="1000" dirty="0">
+                      <a:endParaRPr lang="en-US" sz="1200" dirty="0">
                         <a:latin typeface="Arial" charset="0"/>
                         <a:ea typeface="Arial" charset="0"/>
                         <a:cs typeface="Arial" charset="0"/>
@@ -15016,7 +15016,7 @@
                         <a:buNone/>
                       </a:pPr>
                       <a:r>
-                        <a:rPr lang="en-US" sz="1000" b="1" dirty="0">
+                        <a:rPr lang="en-US" sz="1200" b="1" dirty="0">
                           <a:solidFill>
                             <a:srgbClr val="000000"/>
                           </a:solidFill>
@@ -15026,7 +15026,7 @@
                         </a:rPr>
                         <a:t>Mode 2 (Thread-per-Conn)</a:t>
                       </a:r>
-                      <a:endParaRPr lang="en-US" sz="1000" dirty="0">
+                      <a:endParaRPr lang="en-US" sz="1200" dirty="0">
                         <a:latin typeface="Arial" charset="0"/>
                         <a:ea typeface="Arial" charset="0"/>
                         <a:cs typeface="Arial" charset="0"/>
@@ -15081,7 +15081,7 @@
                         <a:buNone/>
                       </a:pPr>
                       <a:r>
-                        <a:rPr lang="en-US" sz="1000" dirty="0">
+                        <a:rPr lang="en-US" sz="1200" dirty="0">
                           <a:solidFill>
                             <a:srgbClr val="000000"/>
                           </a:solidFill>
@@ -15091,7 +15091,7 @@
                         </a:rPr>
                         <a:t>115 ms</a:t>
                       </a:r>
-                      <a:endParaRPr lang="en-US" sz="1000" dirty="0">
+                      <a:endParaRPr lang="en-US" sz="1200" dirty="0">
                         <a:latin typeface="Arial" charset="0"/>
                         <a:ea typeface="Arial" charset="0"/>
                         <a:cs typeface="Arial" charset="0"/>
@@ -15146,7 +15146,7 @@
                         <a:buNone/>
                       </a:pPr>
                       <a:r>
-                        <a:rPr lang="en-US" sz="1000" dirty="0">
+                        <a:rPr lang="en-US" sz="1200" dirty="0">
                           <a:solidFill>
                             <a:srgbClr val="000000"/>
                           </a:solidFill>
@@ -15156,7 +15156,7 @@
                         </a:rPr>
                         <a:t>102 ms</a:t>
                       </a:r>
-                      <a:endParaRPr lang="en-US" sz="1000" dirty="0">
+                      <a:endParaRPr lang="en-US" sz="1200" dirty="0">
                         <a:latin typeface="Arial" charset="0"/>
                         <a:ea typeface="Arial" charset="0"/>
                         <a:cs typeface="Arial" charset="0"/>
@@ -15211,7 +15211,7 @@
                         <a:buNone/>
                       </a:pPr>
                       <a:r>
-                        <a:rPr lang="en-US" sz="1000" dirty="0">
+                        <a:rPr lang="en-US" sz="1200" dirty="0">
                           <a:solidFill>
                             <a:srgbClr val="000000"/>
                           </a:solidFill>
@@ -15221,7 +15221,7 @@
                         </a:rPr>
                         <a:t>210 ms</a:t>
                       </a:r>
-                      <a:endParaRPr lang="en-US" sz="1000" dirty="0">
+                      <a:endParaRPr lang="en-US" sz="1200" dirty="0">
                         <a:latin typeface="Arial" charset="0"/>
                         <a:ea typeface="Arial" charset="0"/>
                         <a:cs typeface="Arial" charset="0"/>
@@ -15276,7 +15276,7 @@
                         <a:buNone/>
                       </a:pPr>
                       <a:r>
-                        <a:rPr lang="en-US" sz="1000" b="1" dirty="0">
+                        <a:rPr lang="en-US" sz="1200" b="1" dirty="0">
                           <a:solidFill>
                             <a:srgbClr val="D97706"/>
                           </a:solidFill>
@@ -15286,7 +15286,7 @@
                         </a:rPr>
                         <a:t>850 ms</a:t>
                       </a:r>
-                      <a:endParaRPr lang="en-US" sz="1000" dirty="0">
+                      <a:endParaRPr lang="en-US" sz="1200" dirty="0">
                         <a:latin typeface="Arial" charset="0"/>
                         <a:ea typeface="Arial" charset="0"/>
                         <a:cs typeface="Arial" charset="0"/>
@@ -15341,7 +15341,7 @@
                         <a:buNone/>
                       </a:pPr>
                       <a:r>
-                        <a:rPr lang="en-US" sz="1000" b="1" dirty="0">
+                        <a:rPr lang="en-US" sz="1200" b="1" dirty="0">
                           <a:solidFill>
                             <a:srgbClr val="D97706"/>
                           </a:solidFill>
@@ -15351,7 +15351,7 @@
                         </a:rPr>
                         <a:t>Đuôi trễ cao (Tranh chấp)</a:t>
                       </a:r>
-                      <a:endParaRPr lang="en-US" sz="1000" dirty="0">
+                      <a:endParaRPr lang="en-US" sz="1200" dirty="0">
                         <a:latin typeface="Arial" charset="0"/>
                         <a:ea typeface="Arial" charset="0"/>
                         <a:cs typeface="Arial" charset="0"/>
@@ -15408,7 +15408,7 @@
                         <a:buNone/>
                       </a:pPr>
                       <a:r>
-                        <a:rPr lang="en-US" sz="1000" b="1" dirty="0">
+                        <a:rPr lang="en-US" sz="1200" b="1" dirty="0">
                           <a:solidFill>
                             <a:srgbClr val="000000"/>
                           </a:solidFill>
@@ -15418,7 +15418,7 @@
                         </a:rPr>
                         <a:t>Mode 3 (Worker Pool)</a:t>
                       </a:r>
-                      <a:endParaRPr lang="en-US" sz="1000" dirty="0">
+                      <a:endParaRPr lang="en-US" sz="1200" dirty="0">
                         <a:latin typeface="Arial" charset="0"/>
                         <a:ea typeface="Arial" charset="0"/>
                         <a:cs typeface="Arial" charset="0"/>
@@ -15473,7 +15473,7 @@
                         <a:buNone/>
                       </a:pPr>
                       <a:r>
-                        <a:rPr lang="en-US" sz="1000" dirty="0">
+                        <a:rPr lang="en-US" sz="1200" dirty="0">
                           <a:solidFill>
                             <a:srgbClr val="000000"/>
                           </a:solidFill>
@@ -15483,7 +15483,7 @@
                         </a:rPr>
                         <a:t>180 ms</a:t>
                       </a:r>
-                      <a:endParaRPr lang="en-US" sz="1000" dirty="0">
+                      <a:endParaRPr lang="en-US" sz="1200" dirty="0">
                         <a:latin typeface="Arial" charset="0"/>
                         <a:ea typeface="Arial" charset="0"/>
                         <a:cs typeface="Arial" charset="0"/>
@@ -15538,7 +15538,7 @@
                         <a:buNone/>
                       </a:pPr>
                       <a:r>
-                        <a:rPr lang="en-US" sz="1000" dirty="0">
+                        <a:rPr lang="en-US" sz="1200" dirty="0">
                           <a:solidFill>
                             <a:srgbClr val="000000"/>
                           </a:solidFill>
@@ -15548,7 +15548,7 @@
                         </a:rPr>
                         <a:t>120 ms</a:t>
                       </a:r>
-                      <a:endParaRPr lang="en-US" sz="1000" dirty="0">
+                      <a:endParaRPr lang="en-US" sz="1200" dirty="0">
                         <a:latin typeface="Arial" charset="0"/>
                         <a:ea typeface="Arial" charset="0"/>
                         <a:cs typeface="Arial" charset="0"/>
@@ -15603,7 +15603,7 @@
                         <a:buNone/>
                       </a:pPr>
                       <a:r>
-                        <a:rPr lang="en-US" sz="1000" dirty="0">
+                        <a:rPr lang="en-US" sz="1200" dirty="0">
                           <a:solidFill>
                             <a:srgbClr val="000000"/>
                           </a:solidFill>
@@ -15613,7 +15613,7 @@
                         </a:rPr>
                         <a:t>350 ms</a:t>
                       </a:r>
-                      <a:endParaRPr lang="en-US" sz="1000" dirty="0">
+                      <a:endParaRPr lang="en-US" sz="1200" dirty="0">
                         <a:latin typeface="Arial" charset="0"/>
                         <a:ea typeface="Arial" charset="0"/>
                         <a:cs typeface="Arial" charset="0"/>
@@ -15668,7 +15668,7 @@
                         <a:buNone/>
                       </a:pPr>
                       <a:r>
-                        <a:rPr lang="en-US" sz="1000" dirty="0">
+                        <a:rPr lang="en-US" sz="1200" dirty="0">
                           <a:solidFill>
                             <a:srgbClr val="000000"/>
                           </a:solidFill>
@@ -15678,7 +15678,7 @@
                         </a:rPr>
                         <a:t>620 ms</a:t>
                       </a:r>
-                      <a:endParaRPr lang="en-US" sz="1000" dirty="0">
+                      <a:endParaRPr lang="en-US" sz="1200" dirty="0">
                         <a:latin typeface="Arial" charset="0"/>
                         <a:ea typeface="Arial" charset="0"/>
                         <a:cs typeface="Arial" charset="0"/>
@@ -15733,7 +15733,7 @@
                         <a:buNone/>
                       </a:pPr>
                       <a:r>
-                        <a:rPr lang="en-US" sz="1000" b="1" dirty="0">
+                        <a:rPr lang="en-US" sz="1200" b="1" dirty="0">
                           <a:solidFill>
                             <a:srgbClr val="1D4ED8"/>
                           </a:solidFill>
@@ -15743,7 +15743,7 @@
                         </a:rPr>
                         <a:t>Ổn định, có kiểm soát</a:t>
                       </a:r>
-                      <a:endParaRPr lang="en-US" sz="1000" dirty="0">
+                      <a:endParaRPr lang="en-US" sz="1200" dirty="0">
                         <a:latin typeface="Arial" charset="0"/>
                         <a:ea typeface="Arial" charset="0"/>
                         <a:cs typeface="Arial" charset="0"/>
@@ -15800,7 +15800,7 @@
                         <a:buNone/>
                       </a:pPr>
                       <a:r>
-                        <a:rPr lang="en-US" sz="1000" b="1" dirty="0">
+                        <a:rPr lang="en-US" sz="1200" b="1" dirty="0">
                           <a:solidFill>
                             <a:srgbClr val="000000"/>
                           </a:solidFill>
@@ -15810,7 +15810,7 @@
                         </a:rPr>
                         <a:t>Mode 5 (Custom Pool 30%)</a:t>
                       </a:r>
-                      <a:endParaRPr lang="en-US" sz="1000" dirty="0">
+                      <a:endParaRPr lang="en-US" sz="1200" dirty="0">
                         <a:latin typeface="Arial" charset="0"/>
                         <a:ea typeface="Arial" charset="0"/>
                         <a:cs typeface="Arial" charset="0"/>
@@ -15865,7 +15865,7 @@
                         <a:buNone/>
                       </a:pPr>
                       <a:r>
-                        <a:rPr lang="en-US" sz="1000" dirty="0">
+                        <a:rPr lang="en-US" sz="1200" dirty="0">
                           <a:solidFill>
                             <a:srgbClr val="000000"/>
                           </a:solidFill>
@@ -15875,7 +15875,7 @@
                         </a:rPr>
                         <a:t>186 ms</a:t>
                       </a:r>
-                      <a:endParaRPr lang="en-US" sz="1000" dirty="0">
+                      <a:endParaRPr lang="en-US" sz="1200" dirty="0">
                         <a:latin typeface="Arial" charset="0"/>
                         <a:ea typeface="Arial" charset="0"/>
                         <a:cs typeface="Arial" charset="0"/>
@@ -15930,7 +15930,7 @@
                         <a:buNone/>
                       </a:pPr>
                       <a:r>
-                        <a:rPr lang="en-US" sz="1000" dirty="0">
+                        <a:rPr lang="en-US" sz="1200" dirty="0">
                           <a:solidFill>
                             <a:srgbClr val="000000"/>
                           </a:solidFill>
@@ -15940,7 +15940,7 @@
                         </a:rPr>
                         <a:t>125 ms</a:t>
                       </a:r>
-                      <a:endParaRPr lang="en-US" sz="1000" dirty="0">
+                      <a:endParaRPr lang="en-US" sz="1200" dirty="0">
                         <a:latin typeface="Arial" charset="0"/>
                         <a:ea typeface="Arial" charset="0"/>
                         <a:cs typeface="Arial" charset="0"/>
@@ -15995,7 +15995,7 @@
                         <a:buNone/>
                       </a:pPr>
                       <a:r>
-                        <a:rPr lang="en-US" sz="1000" dirty="0">
+                        <a:rPr lang="en-US" sz="1200" dirty="0">
                           <a:solidFill>
                             <a:srgbClr val="000000"/>
                           </a:solidFill>
@@ -16005,7 +16005,7 @@
                         </a:rPr>
                         <a:t>360 ms</a:t>
                       </a:r>
-                      <a:endParaRPr lang="en-US" sz="1000" dirty="0">
+                      <a:endParaRPr lang="en-US" sz="1200" dirty="0">
                         <a:latin typeface="Arial" charset="0"/>
                         <a:ea typeface="Arial" charset="0"/>
                         <a:cs typeface="Arial" charset="0"/>
@@ -16060,7 +16060,7 @@
                         <a:buNone/>
                       </a:pPr>
                       <a:r>
-                        <a:rPr lang="en-US" sz="1000" dirty="0">
+                        <a:rPr lang="en-US" sz="1200" dirty="0">
                           <a:solidFill>
                             <a:srgbClr val="000000"/>
                           </a:solidFill>
@@ -16070,7 +16070,7 @@
                         </a:rPr>
                         <a:t>640 ms</a:t>
                       </a:r>
-                      <a:endParaRPr lang="en-US" sz="1000" dirty="0">
+                      <a:endParaRPr lang="en-US" sz="1200" dirty="0">
                         <a:latin typeface="Arial" charset="0"/>
                         <a:ea typeface="Arial" charset="0"/>
                         <a:cs typeface="Arial" charset="0"/>
@@ -16125,7 +16125,7 @@
                         <a:buNone/>
                       </a:pPr>
                       <a:r>
-                        <a:rPr lang="en-US" sz="1000" b="1" dirty="0">
+                        <a:rPr lang="en-US" sz="1200" b="1" dirty="0">
                           <a:solidFill>
                             <a:srgbClr val="7C3AED"/>
                           </a:solidFill>
@@ -16135,7 +16135,7 @@
                         </a:rPr>
                         <a:t>Bám sát 98% Pool chuẩn</a:t>
                       </a:r>
-                      <a:endParaRPr lang="en-US" sz="1000" dirty="0">
+                      <a:endParaRPr lang="en-US" sz="1200" dirty="0">
                         <a:latin typeface="Arial" charset="0"/>
                         <a:ea typeface="Arial" charset="0"/>
                         <a:cs typeface="Arial" charset="0"/>
@@ -16192,7 +16192,7 @@
                         <a:buNone/>
                       </a:pPr>
                       <a:r>
-                        <a:rPr lang="en-US" sz="1000" b="1" dirty="0">
+                        <a:rPr lang="en-US" sz="1200" b="1" dirty="0">
                           <a:solidFill>
                             <a:srgbClr val="059669"/>
                           </a:solidFill>
@@ -16202,7 +16202,7 @@
                         </a:rPr>
                         <a:t>Mode 4 (Virtual Threads)</a:t>
                       </a:r>
-                      <a:endParaRPr lang="en-US" sz="1000" dirty="0">
+                      <a:endParaRPr lang="en-US" sz="1200" dirty="0">
                         <a:latin typeface="Arial" charset="0"/>
                         <a:ea typeface="Arial" charset="0"/>
                         <a:cs typeface="Arial" charset="0"/>
@@ -16257,7 +16257,7 @@
                         <a:buNone/>
                       </a:pPr>
                       <a:r>
-                        <a:rPr lang="en-US" sz="1000" b="1" dirty="0">
+                        <a:rPr lang="en-US" sz="1200" b="1" dirty="0">
                           <a:solidFill>
                             <a:srgbClr val="059669"/>
                           </a:solidFill>
@@ -16267,7 +16267,7 @@
                         </a:rPr>
                         <a:t>104 ms</a:t>
                       </a:r>
-                      <a:endParaRPr lang="en-US" sz="1000" dirty="0">
+                      <a:endParaRPr lang="en-US" sz="1200" dirty="0">
                         <a:latin typeface="Arial" charset="0"/>
                         <a:ea typeface="Arial" charset="0"/>
                         <a:cs typeface="Arial" charset="0"/>
@@ -16322,7 +16322,7 @@
                         <a:buNone/>
                       </a:pPr>
                       <a:r>
-                        <a:rPr lang="en-US" sz="1000" b="1" dirty="0">
+                        <a:rPr lang="en-US" sz="1200" b="1" dirty="0">
                           <a:solidFill>
                             <a:srgbClr val="059669"/>
                           </a:solidFill>
@@ -16332,7 +16332,7 @@
                         </a:rPr>
                         <a:t>101 ms</a:t>
                       </a:r>
-                      <a:endParaRPr lang="en-US" sz="1000" dirty="0">
+                      <a:endParaRPr lang="en-US" sz="1200" dirty="0">
                         <a:latin typeface="Arial" charset="0"/>
                         <a:ea typeface="Arial" charset="0"/>
                         <a:cs typeface="Arial" charset="0"/>
@@ -16387,7 +16387,7 @@
                         <a:buNone/>
                       </a:pPr>
                       <a:r>
-                        <a:rPr lang="en-US" sz="1000" b="1" dirty="0">
+                        <a:rPr lang="en-US" sz="1200" b="1" dirty="0">
                           <a:solidFill>
                             <a:srgbClr val="059669"/>
                           </a:solidFill>
@@ -16397,7 +16397,7 @@
                         </a:rPr>
                         <a:t>112 ms</a:t>
                       </a:r>
-                      <a:endParaRPr lang="en-US" sz="1000" dirty="0">
+                      <a:endParaRPr lang="en-US" sz="1200" dirty="0">
                         <a:latin typeface="Arial" charset="0"/>
                         <a:ea typeface="Arial" charset="0"/>
                         <a:cs typeface="Arial" charset="0"/>
@@ -16452,7 +16452,7 @@
                         <a:buNone/>
                       </a:pPr>
                       <a:r>
-                        <a:rPr lang="en-US" sz="1000" b="1" dirty="0">
+                        <a:rPr lang="en-US" sz="1200" b="1" dirty="0">
                           <a:solidFill>
                             <a:srgbClr val="059669"/>
                           </a:solidFill>
@@ -16462,7 +16462,7 @@
                         </a:rPr>
                         <a:t>128 ms</a:t>
                       </a:r>
-                      <a:endParaRPr lang="en-US" sz="1000" dirty="0">
+                      <a:endParaRPr lang="en-US" sz="1200" dirty="0">
                         <a:latin typeface="Arial" charset="0"/>
                         <a:ea typeface="Arial" charset="0"/>
                         <a:cs typeface="Arial" charset="0"/>
@@ -16517,7 +16517,7 @@
                         <a:buNone/>
                       </a:pPr>
                       <a:r>
-                        <a:rPr lang="en-US" sz="1000" b="1" dirty="0">
+                        <a:rPr lang="en-US" sz="1200" b="1" dirty="0">
                           <a:solidFill>
                             <a:srgbClr val="059669"/>
                           </a:solidFill>
@@ -16527,7 +16527,7 @@
                         </a:rPr>
                         <a:t>Xuất Sắc (P99 cực phẳng)</a:t>
                       </a:r>
-                      <a:endParaRPr lang="en-US" sz="1000" dirty="0">
+                      <a:endParaRPr lang="en-US" sz="1200" dirty="0">
                         <a:latin typeface="Arial" charset="0"/>
                         <a:ea typeface="Arial" charset="0"/>
                         <a:cs typeface="Arial" charset="0"/>
@@ -16650,7 +16650,7 @@
               <a:buNone/>
             </a:pPr>
             <a:r>
-              <a:rPr lang="en-US" sz="1100" dirty="0">
+              <a:rPr lang="en-US" sz="1350" dirty="0">
                 <a:solidFill>
                   <a:srgbClr val="0F172A"/>
                 </a:solidFill>
@@ -16660,7 +16660,7 @@
               </a:rPr>
               <a:t>🎯 ĐỘ TRỄ ĐUÔI (TAIL LATENCY): Virtual Threads giải quyết triệt để hiện tượng trễ đuôi P99 (chỉ 128ms so với 850ms của luồng OS) nhờ loại bỏ hoàn toàn Context Switch!</a:t>
             </a:r>
-            <a:endParaRPr lang="en-US" sz="1100" dirty="0"/>
+            <a:endParaRPr lang="en-US" sz="1350" dirty="0"/>
           </a:p>
         </p:txBody>
       </p:sp>
@@ -16748,7 +16748,7 @@
               <a:buNone/>
             </a:pPr>
             <a:r>
-              <a:rPr lang="en-US" sz="900" b="1" dirty="0">
+              <a:rPr lang="en-US" sz="1100" b="1" dirty="0">
                 <a:solidFill>
                   <a:srgbClr val="1D4ED8"/>
                 </a:solidFill>
@@ -16758,7 +16758,7 @@
               </a:rPr>
               <a:t>TỔNG KẾT ĐỒ ÁN</a:t>
             </a:r>
-            <a:endParaRPr lang="en-US" sz="900" dirty="0"/>
+            <a:endParaRPr lang="en-US" sz="1100" dirty="0"/>
           </a:p>
         </p:txBody>
       </p:sp>
@@ -16826,7 +16826,7 @@
               <a:buNone/>
             </a:pPr>
             <a:r>
-              <a:rPr lang="en-US" sz="1100" b="1" dirty="0">
+              <a:rPr lang="en-US" sz="1350" b="1" dirty="0">
                 <a:solidFill>
                   <a:srgbClr val="334155"/>
                 </a:solidFill>
@@ -16836,7 +16836,7 @@
               </a:rPr>
               <a:t>Tổng kết toàn bộ thành quả đạt được và bài học rút ra trong suốt quá trình nghiên cứu</a:t>
             </a:r>
-            <a:endParaRPr lang="en-US" sz="1100" dirty="0"/>
+            <a:endParaRPr lang="en-US" sz="1350" dirty="0"/>
           </a:p>
         </p:txBody>
       </p:sp>
@@ -16892,7 +16892,7 @@
               <a:buNone/>
             </a:pPr>
             <a:r>
-              <a:rPr lang="en-US" sz="1000" b="1" dirty="0">
+              <a:rPr lang="en-US" sz="1150" b="1" dirty="0">
                 <a:solidFill>
                   <a:srgbClr val="1D4ED8"/>
                 </a:solidFill>
@@ -16902,7 +16902,7 @@
               </a:rPr>
               <a:t>17 / 18</a:t>
             </a:r>
-            <a:endParaRPr lang="en-US" sz="1000" dirty="0"/>
+            <a:endParaRPr lang="en-US" sz="1150" dirty="0"/>
           </a:p>
         </p:txBody>
       </p:sp>
@@ -16954,7 +16954,7 @@
               <a:buNone/>
             </a:pPr>
             <a:r>
-              <a:rPr lang="en-US" sz="950" b="1" dirty="0">
+              <a:rPr lang="en-US" sz="1100" b="1" dirty="0">
                 <a:solidFill>
                   <a:srgbClr val="475569"/>
                 </a:solidFill>
@@ -16964,7 +16964,7 @@
               </a:rPr>
               <a:t>PTIT TELECOM • Khoa Công nghệ Thông tin • Đề Tài T45: Multi-Threading Patterns</a:t>
             </a:r>
-            <a:endParaRPr lang="en-US" sz="950" dirty="0"/>
+            <a:endParaRPr lang="en-US" sz="1100" dirty="0"/>
           </a:p>
         </p:txBody>
       </p:sp>
@@ -16993,7 +16993,7 @@
               <a:buNone/>
             </a:pPr>
             <a:r>
-              <a:rPr lang="en-US" sz="950" b="1" dirty="0">
+              <a:rPr lang="en-US" sz="1100" b="1" dirty="0">
                 <a:solidFill>
                   <a:srgbClr val="1D4ED8"/>
                 </a:solidFill>
@@ -17003,7 +17003,7 @@
               </a:rPr>
               <a:t>Slide 17 / 18</a:t>
             </a:r>
-            <a:endParaRPr lang="en-US" sz="950" dirty="0"/>
+            <a:endParaRPr lang="en-US" sz="1100" dirty="0"/>
           </a:p>
         </p:txBody>
       </p:sp>
@@ -17145,7 +17145,7 @@
               <a:buNone/>
             </a:pPr>
             <a:r>
-              <a:rPr lang="en-US" sz="750" b="1" dirty="0">
+              <a:rPr lang="en-US" sz="1150" b="1" dirty="0">
                 <a:solidFill>
                   <a:srgbClr val="1D4ED8"/>
                 </a:solidFill>
@@ -17155,7 +17155,7 @@
               </a:rPr>
               <a:t>SOCKET NGUYÊN BẢN</a:t>
             </a:r>
-            <a:endParaRPr lang="en-US" sz="750" dirty="0"/>
+            <a:endParaRPr lang="en-US" sz="1150" dirty="0"/>
           </a:p>
         </p:txBody>
       </p:sp>
@@ -17211,7 +17211,7 @@
               <a:buNone/>
             </a:pPr>
             <a:r>
-              <a:rPr lang="en-US" sz="1100" b="1" dirty="0">
+              <a:rPr lang="en-US" sz="1400" b="1" dirty="0">
                 <a:solidFill>
                   <a:srgbClr val="0F172A"/>
                 </a:solidFill>
@@ -17223,14 +17223,14 @@
               <a:buNone/>
             </a:pPr>
             <a:r>
-              <a:rPr lang="en-US" sz="950" dirty="0">
+              <a:rPr lang="en-US" sz="1220" dirty="0">
                 <a:solidFill>
                   <a:srgbClr val="334155"/>
                 </a:solidFill>
               </a:rPr>
               <a:t>Tự tay xây dựng kiến trúc TCP Socket không phụ thuộc bất kỳ framework ngoài nào.</a:t>
             </a:r>
-            <a:endParaRPr lang="en-US" sz="1100" dirty="0"/>
+            <a:endParaRPr lang="en-US" sz="1400" dirty="0"/>
           </a:p>
         </p:txBody>
       </p:sp>
@@ -17286,7 +17286,7 @@
               <a:buNone/>
             </a:pPr>
             <a:r>
-              <a:rPr lang="en-US" sz="1100" b="1" dirty="0">
+              <a:rPr lang="en-US" sz="1400" b="1" dirty="0">
                 <a:solidFill>
                   <a:srgbClr val="0F172A"/>
                 </a:solidFill>
@@ -17298,14 +17298,14 @@
               <a:buNone/>
             </a:pPr>
             <a:r>
-              <a:rPr lang="en-US" sz="950" dirty="0">
+              <a:rPr lang="en-US" sz="1220" dirty="0">
                 <a:solidFill>
                   <a:srgbClr val="334155"/>
                 </a:solidFill>
               </a:rPr>
               <a:t>Làm chủ chi phí Stack RAM 1MB, hàng đợi TCP Backlog và tổn hao chuyển ngữ cảnh CPU.</a:t>
             </a:r>
-            <a:endParaRPr lang="en-US" sz="1100" dirty="0"/>
+            <a:endParaRPr lang="en-US" sz="1400" dirty="0"/>
           </a:p>
         </p:txBody>
       </p:sp>
@@ -17361,7 +17361,7 @@
               <a:buNone/>
             </a:pPr>
             <a:r>
-              <a:rPr lang="en-US" sz="880" b="1" dirty="0">
+              <a:rPr lang="en-US" sz="1150" b="1" dirty="0">
                 <a:solidFill>
                   <a:srgbClr val="1D4ED8"/>
                 </a:solidFill>
@@ -17371,7 +17371,7 @@
               </a:rPr>
               <a:t>💡 Nền tảng: Nắm chắc bản chất vật lý cốt lõi</a:t>
             </a:r>
-            <a:endParaRPr lang="en-US" sz="880" dirty="0"/>
+            <a:endParaRPr lang="en-US" sz="1150" dirty="0"/>
           </a:p>
         </p:txBody>
       </p:sp>
@@ -17513,7 +17513,7 @@
               <a:buNone/>
             </a:pPr>
             <a:r>
-              <a:rPr lang="en-US" sz="750" b="1" dirty="0">
+              <a:rPr lang="en-US" sz="1150" b="1" dirty="0">
                 <a:solidFill>
                   <a:srgbClr val="7C3AED"/>
                 </a:solidFill>
@@ -17523,7 +17523,7 @@
               </a:rPr>
               <a:t>ĐIỂM SÁNG 30%</a:t>
             </a:r>
-            <a:endParaRPr lang="en-US" sz="750" dirty="0"/>
+            <a:endParaRPr lang="en-US" sz="1150" dirty="0"/>
           </a:p>
         </p:txBody>
       </p:sp>
@@ -17579,7 +17579,7 @@
               <a:buNone/>
             </a:pPr>
             <a:r>
-              <a:rPr lang="en-US" sz="1100" b="1" dirty="0">
+              <a:rPr lang="en-US" sz="1400" b="1" dirty="0">
                 <a:solidFill>
                   <a:srgbClr val="0F172A"/>
                 </a:solidFill>
@@ -17591,14 +17591,14 @@
               <a:buNone/>
             </a:pPr>
             <a:r>
-              <a:rPr lang="en-US" sz="950" dirty="0">
+              <a:rPr lang="en-US" sz="1220" dirty="0">
                 <a:solidFill>
                   <a:srgbClr val="334155"/>
                 </a:solidFill>
               </a:rPr>
               <a:t>Tự lập trình giải thuật mảng vòng Circular Buffer và cơ chế ngủ đông luồng độc lập.</a:t>
             </a:r>
-            <a:endParaRPr lang="en-US" sz="1100" dirty="0"/>
+            <a:endParaRPr lang="en-US" sz="1400" dirty="0"/>
           </a:p>
         </p:txBody>
       </p:sp>
@@ -17654,7 +17654,7 @@
               <a:buNone/>
             </a:pPr>
             <a:r>
-              <a:rPr lang="en-US" sz="1100" b="1" dirty="0">
+              <a:rPr lang="en-US" sz="1400" b="1" dirty="0">
                 <a:solidFill>
                   <a:srgbClr val="0F172A"/>
                 </a:solidFill>
@@ -17666,14 +17666,14 @@
               <a:buNone/>
             </a:pPr>
             <a:r>
-              <a:rPr lang="en-US" sz="950" dirty="0">
+              <a:rPr lang="en-US" sz="1220" dirty="0">
                 <a:solidFill>
                   <a:srgbClr val="334155"/>
                 </a:solidFill>
               </a:rPr>
               <a:t>Tự xây dựng trọn gói giao diện điều khiển thời gian thực và công cụ bắn tải đa luồng.</a:t>
             </a:r>
-            <a:endParaRPr lang="en-US" sz="1100" dirty="0"/>
+            <a:endParaRPr lang="en-US" sz="1400" dirty="0"/>
           </a:p>
         </p:txBody>
       </p:sp>
@@ -17729,7 +17729,7 @@
               <a:buNone/>
             </a:pPr>
             <a:r>
-              <a:rPr lang="en-US" sz="880" b="1" dirty="0">
+              <a:rPr lang="en-US" sz="1150" b="1" dirty="0">
                 <a:solidFill>
                   <a:srgbClr val="7C3AED"/>
                 </a:solidFill>
@@ -17739,7 +17739,7 @@
               </a:rPr>
               <a:t>✨ Tự lực: Khẳng định năng lực làm chủ giải thuật</a:t>
             </a:r>
-            <a:endParaRPr lang="en-US" sz="880" dirty="0"/>
+            <a:endParaRPr lang="en-US" sz="1150" dirty="0"/>
           </a:p>
         </p:txBody>
       </p:sp>
@@ -17881,7 +17881,7 @@
               <a:buNone/>
             </a:pPr>
             <a:r>
-              <a:rPr lang="en-US" sz="750" b="1" dirty="0">
+              <a:rPr lang="en-US" sz="1150" b="1" dirty="0">
                 <a:solidFill>
                   <a:srgbClr val="059669"/>
                 </a:solidFill>
@@ -17891,7 +17891,7 @@
               </a:rPr>
               <a:t>JAVA 21 LOOM</a:t>
             </a:r>
-            <a:endParaRPr lang="en-US" sz="750" dirty="0"/>
+            <a:endParaRPr lang="en-US" sz="1150" dirty="0"/>
           </a:p>
         </p:txBody>
       </p:sp>
@@ -17947,7 +17947,7 @@
               <a:buNone/>
             </a:pPr>
             <a:r>
-              <a:rPr lang="en-US" sz="1100" b="1" dirty="0">
+              <a:rPr lang="en-US" sz="1400" b="1" dirty="0">
                 <a:solidFill>
                   <a:srgbClr val="0F172A"/>
                 </a:solidFill>
@@ -17959,14 +17959,14 @@
               <a:buNone/>
             </a:pPr>
             <a:r>
-              <a:rPr lang="en-US" sz="950" dirty="0">
+              <a:rPr lang="en-US" sz="1220" dirty="0">
                 <a:solidFill>
                   <a:srgbClr val="334155"/>
                 </a:solidFill>
               </a:rPr>
               <a:t>Phục vụ hàng chục ngàn kết nối với kỷ lục 1,145+ RPS trên máy tính cá nhân.</a:t>
             </a:r>
-            <a:endParaRPr lang="en-US" sz="1100" dirty="0"/>
+            <a:endParaRPr lang="en-US" sz="1400" dirty="0"/>
           </a:p>
         </p:txBody>
       </p:sp>
@@ -18022,7 +18022,7 @@
               <a:buNone/>
             </a:pPr>
             <a:r>
-              <a:rPr lang="en-US" sz="1100" b="1" dirty="0">
+              <a:rPr lang="en-US" sz="1400" b="1" dirty="0">
                 <a:solidFill>
                   <a:srgbClr val="0F172A"/>
                 </a:solidFill>
@@ -18034,14 +18034,14 @@
               <a:buNone/>
             </a:pPr>
             <a:r>
-              <a:rPr lang="en-US" sz="950" dirty="0">
+              <a:rPr lang="en-US" sz="1220" dirty="0">
                 <a:solidFill>
                   <a:srgbClr val="334155"/>
                 </a:solidFill>
               </a:rPr>
               <a:t>Giữ trọn phong cách code tuần tự dễ bảo trì nhưng đạt hiệu năng phi đồng bộ tối tân.</a:t>
             </a:r>
-            <a:endParaRPr lang="en-US" sz="1100" dirty="0"/>
+            <a:endParaRPr lang="en-US" sz="1400" dirty="0"/>
           </a:p>
         </p:txBody>
       </p:sp>
@@ -18097,7 +18097,7 @@
               <a:buNone/>
             </a:pPr>
             <a:r>
-              <a:rPr lang="en-US" sz="880" b="1" dirty="0">
+              <a:rPr lang="en-US" sz="1150" b="1" dirty="0">
                 <a:solidFill>
                   <a:srgbClr val="059669"/>
                 </a:solidFill>
@@ -18107,7 +18107,7 @@
               </a:rPr>
               <a:t>👑 Tầm nhìn: Sẵn sàng áp dụng cho Backend lớn</a:t>
             </a:r>
-            <a:endParaRPr lang="en-US" sz="880" dirty="0"/>
+            <a:endParaRPr lang="en-US" sz="1150" dirty="0"/>
           </a:p>
         </p:txBody>
       </p:sp>
@@ -18183,7 +18183,7 @@
               <a:buNone/>
             </a:pPr>
             <a:r>
-              <a:rPr lang="en-US" sz="1100" dirty="0">
+              <a:rPr lang="en-US" sz="1350" dirty="0">
                 <a:solidFill>
                   <a:srgbClr val="0F172A"/>
                 </a:solidFill>
@@ -18193,7 +18193,7 @@
               </a:rPr>
               <a:t>🏆 KẾT LUẬN ĐỒ ÁN: Đề tài T45 đã hoàn thành xuất sắc mục tiêu: làm chủ từ Socket thô, sáng tạo giải thuật tự chế, đến đón đầu kỷ nguyên Java 21 Loom!</a:t>
             </a:r>
-            <a:endParaRPr lang="en-US" sz="1100" dirty="0"/>
+            <a:endParaRPr lang="en-US" sz="1350" dirty="0"/>
           </a:p>
         </p:txBody>
       </p:sp>
@@ -18434,7 +18434,7 @@
               <a:buNone/>
             </a:pPr>
             <a:r>
-              <a:rPr lang="en-US" sz="1300" b="1" dirty="0">
+              <a:rPr lang="en-US" sz="1400" b="1" dirty="0">
                 <a:solidFill>
                   <a:srgbClr val="0F172A"/>
                 </a:solidFill>
@@ -18446,14 +18446,14 @@
               <a:buNone/>
             </a:pPr>
             <a:r>
-              <a:rPr lang="en-US" sz="1000" b="1" dirty="0">
+              <a:rPr lang="en-US" sz="1200" b="1" dirty="0">
                 <a:solidFill>
                   <a:srgbClr val="334155"/>
                 </a:solidFill>
               </a:rPr>
               <a:t>Cài đặt từ Socket thô, không dùng framework ngoài</a:t>
             </a:r>
-            <a:endParaRPr lang="en-US" sz="1300" dirty="0"/>
+            <a:endParaRPr lang="en-US" sz="1400" dirty="0"/>
           </a:p>
         </p:txBody>
       </p:sp>
@@ -18509,7 +18509,7 @@
               <a:buNone/>
             </a:pPr>
             <a:r>
-              <a:rPr lang="en-US" sz="1300" b="1" dirty="0">
+              <a:rPr lang="en-US" sz="1400" b="1" dirty="0">
                 <a:solidFill>
                   <a:srgbClr val="0F172A"/>
                 </a:solidFill>
@@ -18521,14 +18521,14 @@
               <a:buNone/>
             </a:pPr>
             <a:r>
-              <a:rPr lang="en-US" sz="1000" b="1" dirty="0">
+              <a:rPr lang="en-US" sz="1200" b="1" dirty="0">
                 <a:solidFill>
                   <a:srgbClr val="334155"/>
                 </a:solidFill>
               </a:rPr>
               <a:t>Tự lập trình mảng vòng O(1) &amp; Thread Pool độc lập</a:t>
             </a:r>
-            <a:endParaRPr lang="en-US" sz="1300" dirty="0"/>
+            <a:endParaRPr lang="en-US" sz="1400" dirty="0"/>
           </a:p>
         </p:txBody>
       </p:sp>
@@ -18584,7 +18584,7 @@
               <a:buNone/>
             </a:pPr>
             <a:r>
-              <a:rPr lang="en-US" sz="1300" b="1" dirty="0">
+              <a:rPr lang="en-US" sz="1400" b="1" dirty="0">
                 <a:solidFill>
                   <a:srgbClr val="0F172A"/>
                 </a:solidFill>
@@ -18596,14 +18596,14 @@
               <a:buNone/>
             </a:pPr>
             <a:r>
-              <a:rPr lang="en-US" sz="1000" b="1" dirty="0">
+              <a:rPr lang="en-US" sz="1200" b="1" dirty="0">
                 <a:solidFill>
                   <a:srgbClr val="334155"/>
                 </a:solidFill>
               </a:rPr>
               <a:t>Vượt thách thức C10K với 1,145+ RPS trên Virtual Threads</a:t>
             </a:r>
-            <a:endParaRPr lang="en-US" sz="1300" dirty="0"/>
+            <a:endParaRPr lang="en-US" sz="1400" dirty="0"/>
           </a:p>
         </p:txBody>
       </p:sp>
@@ -18655,7 +18655,7 @@
               <a:buNone/>
             </a:pPr>
             <a:r>
-              <a:rPr lang="en-US" sz="1050" b="1" dirty="0">
+              <a:rPr lang="en-US" sz="1200" b="1" dirty="0">
                 <a:solidFill>
                   <a:srgbClr val="1D4ED8"/>
                 </a:solidFill>
@@ -18665,7 +18665,7 @@
               </a:rPr>
               <a:t>KÍNH CHÚC THẦY SỨC KHỎE VÀ THÀNH CÔNG • EM XIN SẴN SÀNG LẮNG NGHE CÂU HỎI PHẢN BIỆN!</a:t>
             </a:r>
-            <a:endParaRPr lang="en-US" sz="1050" dirty="0"/>
+            <a:endParaRPr lang="en-US" sz="1200" dirty="0"/>
           </a:p>
         </p:txBody>
       </p:sp>
@@ -18753,7 +18753,7 @@
               <a:buNone/>
             </a:pPr>
             <a:r>
-              <a:rPr lang="en-US" sz="900" b="1" dirty="0">
+              <a:rPr lang="en-US" sz="1100" b="1" dirty="0">
                 <a:solidFill>
                   <a:srgbClr val="1D4ED8"/>
                 </a:solidFill>
@@ -18763,7 +18763,7 @@
               </a:rPr>
               <a:t>BỐI CẢNH &amp; ĐẶT VẤN ĐỀ</a:t>
             </a:r>
-            <a:endParaRPr lang="en-US" sz="900" dirty="0"/>
+            <a:endParaRPr lang="en-US" sz="1100" dirty="0"/>
           </a:p>
         </p:txBody>
       </p:sp>
@@ -18831,7 +18831,7 @@
               <a:buNone/>
             </a:pPr>
             <a:r>
-              <a:rPr lang="en-US" sz="1100" b="1" dirty="0">
+              <a:rPr lang="en-US" sz="1350" b="1" dirty="0">
                 <a:solidFill>
                   <a:srgbClr val="334155"/>
                 </a:solidFill>
@@ -18841,7 +18841,7 @@
               </a:rPr>
               <a:t>Bản chất của các ứng dụng mạng hiện đại và lý do kiến trúc đơn luồng sụp đổ</a:t>
             </a:r>
-            <a:endParaRPr lang="en-US" sz="1100" dirty="0"/>
+            <a:endParaRPr lang="en-US" sz="1350" dirty="0"/>
           </a:p>
         </p:txBody>
       </p:sp>
@@ -18897,7 +18897,7 @@
               <a:buNone/>
             </a:pPr>
             <a:r>
-              <a:rPr lang="en-US" sz="1000" b="1" dirty="0">
+              <a:rPr lang="en-US" sz="1150" b="1" dirty="0">
                 <a:solidFill>
                   <a:srgbClr val="1D4ED8"/>
                 </a:solidFill>
@@ -18907,7 +18907,7 @@
               </a:rPr>
               <a:t>02 / 18</a:t>
             </a:r>
-            <a:endParaRPr lang="en-US" sz="1000" dirty="0"/>
+            <a:endParaRPr lang="en-US" sz="1150" dirty="0"/>
           </a:p>
         </p:txBody>
       </p:sp>
@@ -18959,7 +18959,7 @@
               <a:buNone/>
             </a:pPr>
             <a:r>
-              <a:rPr lang="en-US" sz="950" b="1" dirty="0">
+              <a:rPr lang="en-US" sz="1100" b="1" dirty="0">
                 <a:solidFill>
                   <a:srgbClr val="475569"/>
                 </a:solidFill>
@@ -18969,7 +18969,7 @@
               </a:rPr>
               <a:t>PTIT TELECOM • Khoa Công nghệ Thông tin • Đề Tài T45: Multi-Threading Patterns</a:t>
             </a:r>
-            <a:endParaRPr lang="en-US" sz="950" dirty="0"/>
+            <a:endParaRPr lang="en-US" sz="1100" dirty="0"/>
           </a:p>
         </p:txBody>
       </p:sp>
@@ -18998,7 +18998,7 @@
               <a:buNone/>
             </a:pPr>
             <a:r>
-              <a:rPr lang="en-US" sz="950" b="1" dirty="0">
+              <a:rPr lang="en-US" sz="1100" b="1" dirty="0">
                 <a:solidFill>
                   <a:srgbClr val="1D4ED8"/>
                 </a:solidFill>
@@ -19008,7 +19008,7 @@
               </a:rPr>
               <a:t>Slide 02 / 18</a:t>
             </a:r>
-            <a:endParaRPr lang="en-US" sz="950" dirty="0"/>
+            <a:endParaRPr lang="en-US" sz="1100" dirty="0"/>
           </a:p>
         </p:txBody>
       </p:sp>
@@ -19089,7 +19089,7 @@
               <a:buNone/>
             </a:pPr>
             <a:r>
-              <a:rPr lang="en-US" sz="1450" b="1" dirty="0">
+              <a:rPr lang="en-US" sz="1650" b="1" dirty="0">
                 <a:solidFill>
                   <a:srgbClr val="0F172A"/>
                 </a:solidFill>
@@ -19099,7 +19099,7 @@
               </a:rPr>
               <a:t>🌐  Tác Vụ I/O-Bound</a:t>
             </a:r>
-            <a:endParaRPr lang="en-US" sz="1450" dirty="0"/>
+            <a:endParaRPr lang="en-US" sz="1650" dirty="0"/>
           </a:p>
         </p:txBody>
       </p:sp>
@@ -19128,7 +19128,7 @@
               <a:buNone/>
             </a:pPr>
             <a:r>
-              <a:rPr lang="en-US" sz="950" b="1" dirty="0">
+              <a:rPr lang="en-US" sz="1250" b="1" dirty="0">
                 <a:solidFill>
                   <a:srgbClr val="334155"/>
                 </a:solidFill>
@@ -19138,7 +19138,7 @@
               </a:rPr>
               <a:t>Đọc/Ghi Socket TCP, Database, Microservices</a:t>
             </a:r>
-            <a:endParaRPr lang="en-US" sz="950" dirty="0"/>
+            <a:endParaRPr lang="en-US" sz="1250" dirty="0"/>
           </a:p>
         </p:txBody>
       </p:sp>
@@ -19194,7 +19194,7 @@
               <a:buNone/>
             </a:pPr>
             <a:r>
-              <a:rPr lang="en-US" sz="800" b="1" dirty="0">
+              <a:rPr lang="en-US" sz="1150" b="1" dirty="0">
                 <a:solidFill>
                   <a:srgbClr val="1D4ED8"/>
                 </a:solidFill>
@@ -19204,7 +19204,7 @@
               </a:rPr>
               <a:t>80% — 90% TẢI MẠNG</a:t>
             </a:r>
-            <a:endParaRPr lang="en-US" sz="800" dirty="0"/>
+            <a:endParaRPr lang="en-US" sz="1150" dirty="0"/>
           </a:p>
         </p:txBody>
       </p:sp>
@@ -19283,7 +19283,7 @@
               <a:buNone/>
             </a:pPr>
             <a:r>
-              <a:rPr lang="en-US" sz="1600" b="1" dirty="0">
+              <a:rPr lang="en-US" sz="2200" b="1" dirty="0">
                 <a:solidFill>
                   <a:srgbClr val="1D4ED8"/>
                 </a:solidFill>
@@ -19295,14 +19295,14 @@
               <a:buNone/>
             </a:pPr>
             <a:r>
-              <a:rPr lang="en-US" sz="850" b="1" dirty="0">
+              <a:rPr lang="en-US" sz="1150" b="1" dirty="0">
                 <a:solidFill>
                   <a:srgbClr val="334155"/>
                 </a:solidFill>
               </a:rPr>
               <a:t>Thời gian CPU rảnh rỗi chờ I/O mạng</a:t>
             </a:r>
-            <a:endParaRPr lang="en-US" sz="1600" dirty="0"/>
+            <a:endParaRPr lang="en-US" sz="2200" dirty="0"/>
           </a:p>
         </p:txBody>
       </p:sp>
@@ -19358,7 +19358,7 @@
               <a:buNone/>
             </a:pPr>
             <a:r>
-              <a:rPr lang="en-US" sz="1600" b="1" dirty="0">
+              <a:rPr lang="en-US" sz="2200" b="1" dirty="0">
                 <a:solidFill>
                   <a:srgbClr val="1D4ED8"/>
                 </a:solidFill>
@@ -19370,14 +19370,14 @@
               <a:buNone/>
             </a:pPr>
             <a:r>
-              <a:rPr lang="en-US" sz="850" b="1" dirty="0">
+              <a:rPr lang="en-US" sz="1150" b="1" dirty="0">
                 <a:solidFill>
                   <a:srgbClr val="334155"/>
                 </a:solidFill>
               </a:rPr>
               <a:t>RAM lãng phí / luồng OS bị Blocked</a:t>
             </a:r>
-            <a:endParaRPr lang="en-US" sz="1600" dirty="0"/>
+            <a:endParaRPr lang="en-US" sz="2200" dirty="0"/>
           </a:p>
         </p:txBody>
       </p:sp>
@@ -19390,11 +19390,11 @@
         <p:spPr>
           <a:xfrm>
             <a:off x="777240" y="3145536"/>
-            <a:ext cx="4956048" cy="841248"/>
+            <a:ext cx="4956048" cy="960120"/>
           </a:xfrm>
           <a:prstGeom prst="roundRect">
             <a:avLst>
-              <a:gd name="adj" fmla="val 8696"/>
+              <a:gd name="adj" fmla="val 7619"/>
             </a:avLst>
           </a:prstGeom>
           <a:solidFill>
@@ -19417,7 +19417,7 @@
         <p:spPr>
           <a:xfrm>
             <a:off x="868680" y="3218688"/>
-            <a:ext cx="4773168" cy="694944"/>
+            <a:ext cx="4773168" cy="813816"/>
           </a:xfrm>
           <a:prstGeom prst="rect">
             <a:avLst/>
@@ -19433,7 +19433,7 @@
               <a:buNone/>
             </a:pPr>
             <a:r>
-              <a:rPr lang="en-US" sz="1100" b="1" dirty="0">
+              <a:rPr lang="en-US" sz="1400" b="1" dirty="0">
                 <a:solidFill>
                   <a:srgbClr val="0F172A"/>
                 </a:solidFill>
@@ -19445,14 +19445,14 @@
               <a:buNone/>
             </a:pPr>
             <a:r>
-              <a:rPr lang="en-US" sz="920" dirty="0">
+              <a:rPr lang="en-US" sz="1220" dirty="0">
                 <a:solidFill>
                   <a:srgbClr val="334155"/>
                 </a:solidFill>
               </a:rPr>
               <a:t>CPU nhàn rỗi 96% nhưng vẫn giam cứng 1MB RAM/luồng chỉ để đứng chờ mạng.</a:t>
             </a:r>
-            <a:endParaRPr lang="en-US" sz="1100" dirty="0"/>
+            <a:endParaRPr lang="en-US" sz="1400" dirty="0"/>
           </a:p>
         </p:txBody>
       </p:sp>
@@ -19464,12 +19464,12 @@
         </p:nvSpPr>
         <p:spPr>
           <a:xfrm>
-            <a:off x="777240" y="4078224"/>
-            <a:ext cx="4956048" cy="841248"/>
+            <a:off x="777240" y="4197096"/>
+            <a:ext cx="4956048" cy="960120"/>
           </a:xfrm>
           <a:prstGeom prst="roundRect">
             <a:avLst>
-              <a:gd name="adj" fmla="val 8696"/>
+              <a:gd name="adj" fmla="val 7619"/>
             </a:avLst>
           </a:prstGeom>
           <a:solidFill>
@@ -19491,8 +19491,8 @@
         </p:nvSpPr>
         <p:spPr>
           <a:xfrm>
-            <a:off x="868680" y="4151376"/>
-            <a:ext cx="4773168" cy="694944"/>
+            <a:off x="868680" y="4270248"/>
+            <a:ext cx="4773168" cy="813816"/>
           </a:xfrm>
           <a:prstGeom prst="rect">
             <a:avLst/>
@@ -19508,7 +19508,7 @@
               <a:buNone/>
             </a:pPr>
             <a:r>
-              <a:rPr lang="en-US" sz="1100" b="1" dirty="0">
+              <a:rPr lang="en-US" sz="1400" b="1" dirty="0">
                 <a:solidFill>
                   <a:srgbClr val="0F172A"/>
                 </a:solidFill>
@@ -19520,14 +19520,14 @@
               <a:buNone/>
             </a:pPr>
             <a:r>
-              <a:rPr lang="en-US" sz="920" dirty="0">
+              <a:rPr lang="en-US" sz="1220" dirty="0">
                 <a:solidFill>
                   <a:srgbClr val="334155"/>
                 </a:solidFill>
               </a:rPr>
               <a:t>10,000 kết nối ngốn tới 10GB RAM chỉ để ngủ đông, làm kiệt quệ hệ thống.</a:t>
             </a:r>
-            <a:endParaRPr lang="en-US" sz="1100" dirty="0"/>
+            <a:endParaRPr lang="en-US" sz="1400" dirty="0"/>
           </a:p>
         </p:txBody>
       </p:sp>
@@ -19583,7 +19583,7 @@
               <a:buNone/>
             </a:pPr>
             <a:r>
-              <a:rPr lang="en-US" sz="880" b="1" dirty="0">
+              <a:rPr lang="en-US" sz="1150" b="1" dirty="0">
                 <a:solidFill>
                   <a:srgbClr val="1D4ED8"/>
                 </a:solidFill>
@@ -19593,7 +19593,7 @@
               </a:rPr>
               <a:t>🚀 Sân khấu chính: Nơi Thread Pool &amp; Virtual Threads giải phóng sức mạnh máy chủ</a:t>
             </a:r>
-            <a:endParaRPr lang="en-US" sz="880" dirty="0"/>
+            <a:endParaRPr lang="en-US" sz="1150" dirty="0"/>
           </a:p>
         </p:txBody>
       </p:sp>
@@ -19674,7 +19674,7 @@
               <a:buNone/>
             </a:pPr>
             <a:r>
-              <a:rPr lang="en-US" sz="1450" b="1" dirty="0">
+              <a:rPr lang="en-US" sz="1650" b="1" dirty="0">
                 <a:solidFill>
                   <a:srgbClr val="0F172A"/>
                 </a:solidFill>
@@ -19684,7 +19684,7 @@
               </a:rPr>
               <a:t>⚙️  Tác Vụ CPU-Bound</a:t>
             </a:r>
-            <a:endParaRPr lang="en-US" sz="1450" dirty="0"/>
+            <a:endParaRPr lang="en-US" sz="1650" dirty="0"/>
           </a:p>
         </p:txBody>
       </p:sp>
@@ -19713,7 +19713,7 @@
               <a:buNone/>
             </a:pPr>
             <a:r>
-              <a:rPr lang="en-US" sz="950" b="1" dirty="0">
+              <a:rPr lang="en-US" sz="1250" b="1" dirty="0">
                 <a:solidFill>
                   <a:srgbClr val="334155"/>
                 </a:solidFill>
@@ -19723,7 +19723,7 @@
               </a:rPr>
               <a:t>Mã hóa SSL/TLS, Nén dữ liệu gzip, Thuật toán</a:t>
             </a:r>
-            <a:endParaRPr lang="en-US" sz="950" dirty="0"/>
+            <a:endParaRPr lang="en-US" sz="1250" dirty="0"/>
           </a:p>
         </p:txBody>
       </p:sp>
@@ -19779,7 +19779,7 @@
               <a:buNone/>
             </a:pPr>
             <a:r>
-              <a:rPr lang="en-US" sz="800" b="1" dirty="0">
+              <a:rPr lang="en-US" sz="1150" b="1" dirty="0">
                 <a:solidFill>
                   <a:srgbClr val="E11D48"/>
                 </a:solidFill>
@@ -19789,7 +19789,7 @@
               </a:rPr>
               <a:t>10% — 20% TẢI MẠNG</a:t>
             </a:r>
-            <a:endParaRPr lang="en-US" sz="800" dirty="0"/>
+            <a:endParaRPr lang="en-US" sz="1150" dirty="0"/>
           </a:p>
         </p:txBody>
       </p:sp>
@@ -19868,7 +19868,7 @@
               <a:buNone/>
             </a:pPr>
             <a:r>
-              <a:rPr lang="en-US" sz="1600" b="1" dirty="0">
+              <a:rPr lang="en-US" sz="2200" b="1" dirty="0">
                 <a:solidFill>
                   <a:srgbClr val="E11D48"/>
                 </a:solidFill>
@@ -19880,14 +19880,14 @@
               <a:buNone/>
             </a:pPr>
             <a:r>
-              <a:rPr lang="en-US" sz="850" b="1" dirty="0">
+              <a:rPr lang="en-US" sz="1150" b="1" dirty="0">
                 <a:solidFill>
                   <a:srgbClr val="334155"/>
                 </a:solidFill>
               </a:rPr>
               <a:t>Xung nhịp CPU hoạt động tối đa</a:t>
             </a:r>
-            <a:endParaRPr lang="en-US" sz="1600" dirty="0"/>
+            <a:endParaRPr lang="en-US" sz="2200" dirty="0"/>
           </a:p>
         </p:txBody>
       </p:sp>
@@ -19943,7 +19943,7 @@
               <a:buNone/>
             </a:pPr>
             <a:r>
-              <a:rPr lang="en-US" sz="1600" b="1" dirty="0">
+              <a:rPr lang="en-US" sz="2200" b="1" dirty="0">
                 <a:solidFill>
                   <a:srgbClr val="E11D48"/>
                 </a:solidFill>
@@ -19955,14 +19955,14 @@
               <a:buNone/>
             </a:pPr>
             <a:r>
-              <a:rPr lang="en-US" sz="850" b="1" dirty="0">
+              <a:rPr lang="en-US" sz="1150" b="1" dirty="0">
                 <a:solidFill>
                   <a:srgbClr val="334155"/>
                 </a:solidFill>
               </a:rPr>
               <a:t>Trần cứng giới hạn bởi số core vật lý</a:t>
             </a:r>
-            <a:endParaRPr lang="en-US" sz="1600" dirty="0"/>
+            <a:endParaRPr lang="en-US" sz="2200" dirty="0"/>
           </a:p>
         </p:txBody>
       </p:sp>
@@ -19975,11 +19975,11 @@
         <p:spPr>
           <a:xfrm>
             <a:off x="6455664" y="3145536"/>
-            <a:ext cx="4956048" cy="841248"/>
+            <a:ext cx="4956048" cy="960120"/>
           </a:xfrm>
           <a:prstGeom prst="roundRect">
             <a:avLst>
-              <a:gd name="adj" fmla="val 8696"/>
+              <a:gd name="adj" fmla="val 7619"/>
             </a:avLst>
           </a:prstGeom>
           <a:solidFill>
@@ -20002,7 +20002,7 @@
         <p:spPr>
           <a:xfrm>
             <a:off x="6547104" y="3218688"/>
-            <a:ext cx="4773168" cy="694944"/>
+            <a:ext cx="4773168" cy="813816"/>
           </a:xfrm>
           <a:prstGeom prst="rect">
             <a:avLst/>
@@ -20018,7 +20018,7 @@
               <a:buNone/>
             </a:pPr>
             <a:r>
-              <a:rPr lang="en-US" sz="1100" b="1" dirty="0">
+              <a:rPr lang="en-US" sz="1400" b="1" dirty="0">
                 <a:solidFill>
                   <a:srgbClr val="0F172A"/>
                 </a:solidFill>
@@ -20030,14 +20030,14 @@
               <a:buNone/>
             </a:pPr>
             <a:r>
-              <a:rPr lang="en-US" sz="920" dirty="0">
+              <a:rPr lang="en-US" sz="1220" dirty="0">
                 <a:solidFill>
                   <a:srgbClr val="334155"/>
                 </a:solidFill>
               </a:rPr>
               <a:t>Tốc độ phụ thuộc tuyệt đối vào số core CPU; không thể tăng tốc bằng cách đẻ thêm luồng.</a:t>
             </a:r>
-            <a:endParaRPr lang="en-US" sz="1100" dirty="0"/>
+            <a:endParaRPr lang="en-US" sz="1400" dirty="0"/>
           </a:p>
         </p:txBody>
       </p:sp>
@@ -20049,12 +20049,12 @@
         </p:nvSpPr>
         <p:spPr>
           <a:xfrm>
-            <a:off x="6455664" y="4078224"/>
-            <a:ext cx="4956048" cy="841248"/>
+            <a:off x="6455664" y="4197096"/>
+            <a:ext cx="4956048" cy="960120"/>
           </a:xfrm>
           <a:prstGeom prst="roundRect">
             <a:avLst>
-              <a:gd name="adj" fmla="val 8696"/>
+              <a:gd name="adj" fmla="val 7619"/>
             </a:avLst>
           </a:prstGeom>
           <a:solidFill>
@@ -20076,8 +20076,8 @@
         </p:nvSpPr>
         <p:spPr>
           <a:xfrm>
-            <a:off x="6547104" y="4151376"/>
-            <a:ext cx="4773168" cy="694944"/>
+            <a:off x="6547104" y="4270248"/>
+            <a:ext cx="4773168" cy="813816"/>
           </a:xfrm>
           <a:prstGeom prst="rect">
             <a:avLst/>
@@ -20093,7 +20093,7 @@
               <a:buNone/>
             </a:pPr>
             <a:r>
-              <a:rPr lang="en-US" sz="1100" b="1" dirty="0">
+              <a:rPr lang="en-US" sz="1400" b="1" dirty="0">
                 <a:solidFill>
                   <a:srgbClr val="0F172A"/>
                 </a:solidFill>
@@ -20105,14 +20105,14 @@
               <a:buNone/>
             </a:pPr>
             <a:r>
-              <a:rPr lang="en-US" sz="920" dirty="0">
+              <a:rPr lang="en-US" sz="1220" dirty="0">
                 <a:solidFill>
                   <a:srgbClr val="334155"/>
                 </a:solidFill>
               </a:rPr>
               <a:t>Quá nhiều luồng tranh chấp khiến CPU mất &gt;70% công suất chỉ để tráo Cache L1/L2.</a:t>
             </a:r>
-            <a:endParaRPr lang="en-US" sz="1100" dirty="0"/>
+            <a:endParaRPr lang="en-US" sz="1400" dirty="0"/>
           </a:p>
         </p:txBody>
       </p:sp>
@@ -20168,7 +20168,7 @@
               <a:buNone/>
             </a:pPr>
             <a:r>
-              <a:rPr lang="en-US" sz="880" b="1" dirty="0">
+              <a:rPr lang="en-US" sz="1150" b="1" dirty="0">
                 <a:solidFill>
                   <a:srgbClr val="E11D48"/>
                 </a:solidFill>
@@ -20178,7 +20178,7 @@
               </a:rPr>
               <a:t>🛡️ Cảnh báo thiết kế: Không thể tăng tốc CPU-Bound bằng cách đẻ thêm luồng</a:t>
             </a:r>
-            <a:endParaRPr lang="en-US" sz="880" dirty="0"/>
+            <a:endParaRPr lang="en-US" sz="1150" dirty="0"/>
           </a:p>
         </p:txBody>
       </p:sp>
@@ -20254,7 +20254,7 @@
               <a:buNone/>
             </a:pPr>
             <a:r>
-              <a:rPr lang="en-US" sz="1100" dirty="0">
+              <a:rPr lang="en-US" sz="1350" dirty="0">
                 <a:solidFill>
                   <a:srgbClr val="0F172A"/>
                 </a:solidFill>
@@ -20264,7 +20264,7 @@
               </a:rPr>
               <a:t>💡 KẾT LUẬN KIẾN TRÚC: Hệ thống máy chủ mạng hiện đại phải tối ưu hóa triệt để cho tác vụ I/O-Bound (hơn 95% thời gian chờ mạng) thay vì tăng số lượng luồng vô tội vạ!</a:t>
             </a:r>
-            <a:endParaRPr lang="en-US" sz="1100" dirty="0"/>
+            <a:endParaRPr lang="en-US" sz="1350" dirty="0"/>
           </a:p>
         </p:txBody>
       </p:sp>
@@ -20352,7 +20352,7 @@
               <a:buNone/>
             </a:pPr>
             <a:r>
-              <a:rPr lang="en-US" sz="900" b="1" dirty="0">
+              <a:rPr lang="en-US" sz="1100" b="1" dirty="0">
                 <a:solidFill>
                   <a:srgbClr val="1D4ED8"/>
                 </a:solidFill>
@@ -20362,7 +20362,7 @@
               </a:rPr>
               <a:t>KIẾN TRÚC TẦNG THẤP</a:t>
             </a:r>
-            <a:endParaRPr lang="en-US" sz="900" dirty="0"/>
+            <a:endParaRPr lang="en-US" sz="1100" dirty="0"/>
           </a:p>
         </p:txBody>
       </p:sp>
@@ -20430,7 +20430,7 @@
               <a:buNone/>
             </a:pPr>
             <a:r>
-              <a:rPr lang="en-US" sz="1100" b="1" dirty="0">
+              <a:rPr lang="en-US" sz="1350" b="1" dirty="0">
                 <a:solidFill>
                   <a:srgbClr val="334155"/>
                 </a:solidFill>
@@ -20440,7 +20440,7 @@
               </a:rPr>
               <a:t>Sự chênh lệch khổng lồ giữa tài nguyên của luồng hệ thống và một tác vụ mạng nhỏ</a:t>
             </a:r>
-            <a:endParaRPr lang="en-US" sz="1100" dirty="0"/>
+            <a:endParaRPr lang="en-US" sz="1350" dirty="0"/>
           </a:p>
         </p:txBody>
       </p:sp>
@@ -20496,7 +20496,7 @@
               <a:buNone/>
             </a:pPr>
             <a:r>
-              <a:rPr lang="en-US" sz="1000" b="1" dirty="0">
+              <a:rPr lang="en-US" sz="1150" b="1" dirty="0">
                 <a:solidFill>
                   <a:srgbClr val="1D4ED8"/>
                 </a:solidFill>
@@ -20506,7 +20506,7 @@
               </a:rPr>
               <a:t>03 / 18</a:t>
             </a:r>
-            <a:endParaRPr lang="en-US" sz="1000" dirty="0"/>
+            <a:endParaRPr lang="en-US" sz="1150" dirty="0"/>
           </a:p>
         </p:txBody>
       </p:sp>
@@ -20558,7 +20558,7 @@
               <a:buNone/>
             </a:pPr>
             <a:r>
-              <a:rPr lang="en-US" sz="950" b="1" dirty="0">
+              <a:rPr lang="en-US" sz="1100" b="1" dirty="0">
                 <a:solidFill>
                   <a:srgbClr val="475569"/>
                 </a:solidFill>
@@ -20568,7 +20568,7 @@
               </a:rPr>
               <a:t>PTIT TELECOM • Khoa Công nghệ Thông tin • Đề Tài T45: Multi-Threading Patterns</a:t>
             </a:r>
-            <a:endParaRPr lang="en-US" sz="950" dirty="0"/>
+            <a:endParaRPr lang="en-US" sz="1100" dirty="0"/>
           </a:p>
         </p:txBody>
       </p:sp>
@@ -20597,7 +20597,7 @@
               <a:buNone/>
             </a:pPr>
             <a:r>
-              <a:rPr lang="en-US" sz="950" b="1" dirty="0">
+              <a:rPr lang="en-US" sz="1100" b="1" dirty="0">
                 <a:solidFill>
                   <a:srgbClr val="1D4ED8"/>
                 </a:solidFill>
@@ -20607,7 +20607,7 @@
               </a:rPr>
               <a:t>Slide 03 / 18</a:t>
             </a:r>
-            <a:endParaRPr lang="en-US" sz="950" dirty="0"/>
+            <a:endParaRPr lang="en-US" sz="1100" dirty="0"/>
           </a:p>
         </p:txBody>
       </p:sp>
@@ -20688,7 +20688,7 @@
               <a:buNone/>
             </a:pPr>
             <a:r>
-              <a:rPr lang="en-US" sz="1450" b="1" dirty="0">
+              <a:rPr lang="en-US" sz="1650" b="1" dirty="0">
                 <a:solidFill>
                   <a:srgbClr val="0F172A"/>
                 </a:solidFill>
@@ -20698,7 +20698,7 @@
               </a:rPr>
               <a:t>📦  Sự Lãng Phí Khi Bùng Nổ Kết Nối</a:t>
             </a:r>
-            <a:endParaRPr lang="en-US" sz="1450" dirty="0"/>
+            <a:endParaRPr lang="en-US" sz="1650" dirty="0"/>
           </a:p>
         </p:txBody>
       </p:sp>
@@ -20727,7 +20727,7 @@
               <a:buNone/>
             </a:pPr>
             <a:r>
-              <a:rPr lang="en-US" sz="950" b="1" dirty="0">
+              <a:rPr lang="en-US" sz="1250" b="1" dirty="0">
                 <a:solidFill>
                   <a:srgbClr val="334155"/>
                 </a:solidFill>
@@ -20737,7 +20737,7 @@
               </a:rPr>
               <a:t>Chi phí bộ nhớ Stack và độ trễ khởi tạo cấp hệ điều hành</a:t>
             </a:r>
-            <a:endParaRPr lang="en-US" sz="950" dirty="0"/>
+            <a:endParaRPr lang="en-US" sz="1250" dirty="0"/>
           </a:p>
         </p:txBody>
       </p:sp>
@@ -20793,7 +20793,7 @@
               <a:buNone/>
             </a:pPr>
             <a:r>
-              <a:rPr lang="en-US" sz="800" b="1" dirty="0">
+              <a:rPr lang="en-US" sz="1150" b="1" dirty="0">
                 <a:solidFill>
                   <a:srgbClr val="1D4ED8"/>
                 </a:solidFill>
@@ -20803,7 +20803,7 @@
               </a:rPr>
               <a:t>1 MB / LUỒNG OS</a:t>
             </a:r>
-            <a:endParaRPr lang="en-US" sz="800" dirty="0"/>
+            <a:endParaRPr lang="en-US" sz="1150" dirty="0"/>
           </a:p>
         </p:txBody>
       </p:sp>
@@ -20882,7 +20882,7 @@
               <a:buNone/>
             </a:pPr>
             <a:r>
-              <a:rPr lang="en-US" sz="1600" b="1" dirty="0">
+              <a:rPr lang="en-US" sz="2200" b="1" dirty="0">
                 <a:solidFill>
                   <a:srgbClr val="1D4ED8"/>
                 </a:solidFill>
@@ -20894,14 +20894,14 @@
               <a:buNone/>
             </a:pPr>
             <a:r>
-              <a:rPr lang="en-US" sz="850" b="1" dirty="0">
+              <a:rPr lang="en-US" sz="1150" b="1" dirty="0">
                 <a:solidFill>
                   <a:srgbClr val="334155"/>
                 </a:solidFill>
               </a:rPr>
               <a:t>RAM giam cầm cứng khi có 2,000 kết nối</a:t>
             </a:r>
-            <a:endParaRPr lang="en-US" sz="1600" dirty="0"/>
+            <a:endParaRPr lang="en-US" sz="2200" dirty="0"/>
           </a:p>
         </p:txBody>
       </p:sp>
@@ -20957,7 +20957,7 @@
               <a:buNone/>
             </a:pPr>
             <a:r>
-              <a:rPr lang="en-US" sz="1600" b="1" dirty="0">
+              <a:rPr lang="en-US" sz="2200" b="1" dirty="0">
                 <a:solidFill>
                   <a:srgbClr val="1D4ED8"/>
                 </a:solidFill>
@@ -20969,14 +20969,14 @@
               <a:buNone/>
             </a:pPr>
             <a:r>
-              <a:rPr lang="en-US" sz="850" b="1" dirty="0">
+              <a:rPr lang="en-US" sz="1150" b="1" dirty="0">
                 <a:solidFill>
                   <a:srgbClr val="334155"/>
                 </a:solidFill>
               </a:rPr>
               <a:t>Ẩn dụ: Xe tải 10 tấn chở 1 bức thư tay</a:t>
             </a:r>
-            <a:endParaRPr lang="en-US" sz="1600" dirty="0"/>
+            <a:endParaRPr lang="en-US" sz="2200" dirty="0"/>
           </a:p>
         </p:txBody>
       </p:sp>
@@ -20989,11 +20989,11 @@
         <p:spPr>
           <a:xfrm>
             <a:off x="777240" y="3145536"/>
-            <a:ext cx="4956048" cy="841248"/>
+            <a:ext cx="4956048" cy="960120"/>
           </a:xfrm>
           <a:prstGeom prst="roundRect">
             <a:avLst>
-              <a:gd name="adj" fmla="val 8696"/>
+              <a:gd name="adj" fmla="val 7619"/>
             </a:avLst>
           </a:prstGeom>
           <a:solidFill>
@@ -21016,7 +21016,7 @@
         <p:spPr>
           <a:xfrm>
             <a:off x="868680" y="3218688"/>
-            <a:ext cx="4773168" cy="694944"/>
+            <a:ext cx="4773168" cy="813816"/>
           </a:xfrm>
           <a:prstGeom prst="rect">
             <a:avLst/>
@@ -21032,7 +21032,7 @@
               <a:buNone/>
             </a:pPr>
             <a:r>
-              <a:rPr lang="en-US" sz="1100" b="1" dirty="0">
+              <a:rPr lang="en-US" sz="1400" b="1" dirty="0">
                 <a:solidFill>
                   <a:srgbClr val="0F172A"/>
                 </a:solidFill>
@@ -21044,14 +21044,14 @@
               <a:buNone/>
             </a:pPr>
             <a:r>
-              <a:rPr lang="en-US" sz="920" dirty="0">
+              <a:rPr lang="en-US" sz="1220" dirty="0">
                 <a:solidFill>
                   <a:srgbClr val="334155"/>
                 </a:solidFill>
               </a:rPr>
               <a:t>Cấp riêng cả phòng làm việc 1MB chỉ để xử lý vài chục bytes văn bản nhỏ.</a:t>
             </a:r>
-            <a:endParaRPr lang="en-US" sz="1100" dirty="0"/>
+            <a:endParaRPr lang="en-US" sz="1400" dirty="0"/>
           </a:p>
         </p:txBody>
       </p:sp>
@@ -21063,12 +21063,12 @@
         </p:nvSpPr>
         <p:spPr>
           <a:xfrm>
-            <a:off x="777240" y="4078224"/>
-            <a:ext cx="4956048" cy="841248"/>
+            <a:off x="777240" y="4197096"/>
+            <a:ext cx="4956048" cy="960120"/>
           </a:xfrm>
           <a:prstGeom prst="roundRect">
             <a:avLst>
-              <a:gd name="adj" fmla="val 8696"/>
+              <a:gd name="adj" fmla="val 7619"/>
             </a:avLst>
           </a:prstGeom>
           <a:solidFill>
@@ -21090,8 +21090,8 @@
         </p:nvSpPr>
         <p:spPr>
           <a:xfrm>
-            <a:off x="868680" y="4151376"/>
-            <a:ext cx="4773168" cy="694944"/>
+            <a:off x="868680" y="4270248"/>
+            <a:ext cx="4773168" cy="813816"/>
           </a:xfrm>
           <a:prstGeom prst="rect">
             <a:avLst/>
@@ -21107,7 +21107,7 @@
               <a:buNone/>
             </a:pPr>
             <a:r>
-              <a:rPr lang="en-US" sz="1100" b="1" dirty="0">
+              <a:rPr lang="en-US" sz="1400" b="1" dirty="0">
                 <a:solidFill>
                   <a:srgbClr val="0F172A"/>
                 </a:solidFill>
@@ -21119,14 +21119,14 @@
               <a:buNone/>
             </a:pPr>
             <a:r>
-              <a:rPr lang="en-US" sz="920" dirty="0">
+              <a:rPr lang="en-US" sz="1220" dirty="0">
                 <a:solidFill>
                   <a:srgbClr val="334155"/>
                 </a:solidFill>
               </a:rPr>
               <a:t>Mỗi lần sinh luồng mới phải qua System Call xin phép nhân OS, gây trễ mạng.</a:t>
             </a:r>
-            <a:endParaRPr lang="en-US" sz="1100" dirty="0"/>
+            <a:endParaRPr lang="en-US" sz="1400" dirty="0"/>
           </a:p>
         </p:txBody>
       </p:sp>
@@ -21182,7 +21182,7 @@
               <a:buNone/>
             </a:pPr>
             <a:r>
-              <a:rPr lang="en-US" sz="880" b="1" dirty="0">
+              <a:rPr lang="en-US" sz="1150" b="1" dirty="0">
                 <a:solidFill>
                   <a:srgbClr val="1D4ED8"/>
                 </a:solidFill>
@@ -21192,7 +21192,7 @@
               </a:rPr>
               <a:t>💡 Hậu quả: Bộ nhớ máy chủ cạn kiệt rất nhanh dù CPU hầu như không phải tính toán</a:t>
             </a:r>
-            <a:endParaRPr lang="en-US" sz="880" dirty="0"/>
+            <a:endParaRPr lang="en-US" sz="1150" dirty="0"/>
           </a:p>
         </p:txBody>
       </p:sp>
@@ -21273,7 +21273,7 @@
               <a:buNone/>
             </a:pPr>
             <a:r>
-              <a:rPr lang="en-US" sz="1450" b="1" dirty="0">
+              <a:rPr lang="en-US" sz="1650" b="1" dirty="0">
                 <a:solidFill>
                   <a:srgbClr val="0F172A"/>
                 </a:solidFill>
@@ -21283,7 +21283,7 @@
               </a:rPr>
               <a:t>💣  Nguy Cơ Chạm Trần &amp; Sập Máy Chủ</a:t>
             </a:r>
-            <a:endParaRPr lang="en-US" sz="1450" dirty="0"/>
+            <a:endParaRPr lang="en-US" sz="1650" dirty="0"/>
           </a:p>
         </p:txBody>
       </p:sp>
@@ -21312,7 +21312,7 @@
               <a:buNone/>
             </a:pPr>
             <a:r>
-              <a:rPr lang="en-US" sz="950" b="1" dirty="0">
+              <a:rPr lang="en-US" sz="1250" b="1" dirty="0">
                 <a:solidFill>
                   <a:srgbClr val="334155"/>
                 </a:solidFill>
@@ -21322,7 +21322,7 @@
               </a:rPr>
               <a:t>Giới hạn an toàn của hệ điều hành và thảm họa sập dịch vụ</a:t>
             </a:r>
-            <a:endParaRPr lang="en-US" sz="950" dirty="0"/>
+            <a:endParaRPr lang="en-US" sz="1250" dirty="0"/>
           </a:p>
         </p:txBody>
       </p:sp>
@@ -21378,7 +21378,7 @@
               <a:buNone/>
             </a:pPr>
             <a:r>
-              <a:rPr lang="en-US" sz="800" b="1" dirty="0">
+              <a:rPr lang="en-US" sz="1150" b="1" dirty="0">
                 <a:solidFill>
                   <a:srgbClr val="E11D48"/>
                 </a:solidFill>
@@ -21388,7 +21388,7 @@
               </a:rPr>
               <a:t>CRITICAL LIMIT</a:t>
             </a:r>
-            <a:endParaRPr lang="en-US" sz="800" dirty="0"/>
+            <a:endParaRPr lang="en-US" sz="1150" dirty="0"/>
           </a:p>
         </p:txBody>
       </p:sp>
@@ -21467,7 +21467,7 @@
               <a:buNone/>
             </a:pPr>
             <a:r>
-              <a:rPr lang="en-US" sz="1600" b="1" dirty="0">
+              <a:rPr lang="en-US" sz="2200" b="1" dirty="0">
                 <a:solidFill>
                   <a:srgbClr val="E11D48"/>
                 </a:solidFill>
@@ -21479,14 +21479,14 @@
               <a:buNone/>
             </a:pPr>
             <a:r>
-              <a:rPr lang="en-US" sz="850" b="1" dirty="0">
+              <a:rPr lang="en-US" sz="1150" b="1" dirty="0">
                 <a:solidFill>
                   <a:srgbClr val="334155"/>
                 </a:solidFill>
               </a:rPr>
               <a:t>unable to create native thread</a:t>
             </a:r>
-            <a:endParaRPr lang="en-US" sz="1600" dirty="0"/>
+            <a:endParaRPr lang="en-US" sz="2200" dirty="0"/>
           </a:p>
         </p:txBody>
       </p:sp>
@@ -21542,7 +21542,7 @@
               <a:buNone/>
             </a:pPr>
             <a:r>
-              <a:rPr lang="en-US" sz="1600" b="1" dirty="0">
+              <a:rPr lang="en-US" sz="2200" b="1" dirty="0">
                 <a:solidFill>
                   <a:srgbClr val="E11D48"/>
                 </a:solidFill>
@@ -21554,14 +21554,14 @@
               <a:buNone/>
             </a:pPr>
             <a:r>
-              <a:rPr lang="en-US" sz="850" b="1" dirty="0">
+              <a:rPr lang="en-US" sz="1150" b="1" dirty="0">
                 <a:solidFill>
                   <a:srgbClr val="334155"/>
                 </a:solidFill>
               </a:rPr>
               <a:t>Hạn mức luồng tối đa của hệ điều hành</a:t>
             </a:r>
-            <a:endParaRPr lang="en-US" sz="1600" dirty="0"/>
+            <a:endParaRPr lang="en-US" sz="2200" dirty="0"/>
           </a:p>
         </p:txBody>
       </p:sp>
@@ -21574,11 +21574,11 @@
         <p:spPr>
           <a:xfrm>
             <a:off x="6455664" y="3145536"/>
-            <a:ext cx="4956048" cy="841248"/>
+            <a:ext cx="4956048" cy="960120"/>
           </a:xfrm>
           <a:prstGeom prst="roundRect">
             <a:avLst>
-              <a:gd name="adj" fmla="val 8696"/>
+              <a:gd name="adj" fmla="val 7619"/>
             </a:avLst>
           </a:prstGeom>
           <a:solidFill>
@@ -21601,7 +21601,7 @@
         <p:spPr>
           <a:xfrm>
             <a:off x="6547104" y="3218688"/>
-            <a:ext cx="4773168" cy="694944"/>
+            <a:ext cx="4773168" cy="813816"/>
           </a:xfrm>
           <a:prstGeom prst="rect">
             <a:avLst/>
@@ -21617,7 +21617,7 @@
               <a:buNone/>
             </a:pPr>
             <a:r>
-              <a:rPr lang="en-US" sz="1100" b="1" dirty="0">
+              <a:rPr lang="en-US" sz="1400" b="1" dirty="0">
                 <a:solidFill>
                   <a:srgbClr val="0F172A"/>
                 </a:solidFill>
@@ -21629,14 +21629,14 @@
               <a:buNone/>
             </a:pPr>
             <a:r>
-              <a:rPr lang="en-US" sz="920" dirty="0">
+              <a:rPr lang="en-US" sz="1220" dirty="0">
                 <a:solidFill>
                   <a:srgbClr val="334155"/>
                 </a:solidFill>
               </a:rPr>
               <a:t>Hệ điều hành chặn không cho cấp thêm luồng để tránh treo toàn bộ máy tính.</a:t>
             </a:r>
-            <a:endParaRPr lang="en-US" sz="1100" dirty="0"/>
+            <a:endParaRPr lang="en-US" sz="1400" dirty="0"/>
           </a:p>
         </p:txBody>
       </p:sp>
@@ -21648,12 +21648,12 @@
         </p:nvSpPr>
         <p:spPr>
           <a:xfrm>
-            <a:off x="6455664" y="4078224"/>
-            <a:ext cx="4956048" cy="841248"/>
+            <a:off x="6455664" y="4197096"/>
+            <a:ext cx="4956048" cy="960120"/>
           </a:xfrm>
           <a:prstGeom prst="roundRect">
             <a:avLst>
-              <a:gd name="adj" fmla="val 8696"/>
+              <a:gd name="adj" fmla="val 7619"/>
             </a:avLst>
           </a:prstGeom>
           <a:solidFill>
@@ -21675,8 +21675,8 @@
         </p:nvSpPr>
         <p:spPr>
           <a:xfrm>
-            <a:off x="6547104" y="4151376"/>
-            <a:ext cx="4773168" cy="694944"/>
+            <a:off x="6547104" y="4270248"/>
+            <a:ext cx="4773168" cy="813816"/>
           </a:xfrm>
           <a:prstGeom prst="rect">
             <a:avLst/>
@@ -21692,7 +21692,7 @@
               <a:buNone/>
             </a:pPr>
             <a:r>
-              <a:rPr lang="en-US" sz="1100" b="1" dirty="0">
+              <a:rPr lang="en-US" sz="1400" b="1" dirty="0">
                 <a:solidFill>
                   <a:srgbClr val="0F172A"/>
                 </a:solidFill>
@@ -21704,14 +21704,14 @@
               <a:buNone/>
             </a:pPr>
             <a:r>
-              <a:rPr lang="en-US" sz="920" dirty="0">
+              <a:rPr lang="en-US" sz="1220" dirty="0">
                 <a:solidFill>
                   <a:srgbClr val="334155"/>
                 </a:solidFill>
               </a:rPr>
               <a:t>Ứng dụng ném ngoại lệ dừng đột ngột, ngắt kết nối của toàn bộ người dùng đang online.</a:t>
             </a:r>
-            <a:endParaRPr lang="en-US" sz="1100" dirty="0"/>
+            <a:endParaRPr lang="en-US" sz="1400" dirty="0"/>
           </a:p>
         </p:txBody>
       </p:sp>
@@ -21767,7 +21767,7 @@
               <a:buNone/>
             </a:pPr>
             <a:r>
-              <a:rPr lang="en-US" sz="880" b="1" dirty="0">
+              <a:rPr lang="en-US" sz="1150" b="1" dirty="0">
                 <a:solidFill>
                   <a:srgbClr val="E11D48"/>
                 </a:solidFill>
@@ -21777,7 +21777,7 @@
               </a:rPr>
               <a:t>🛡️ Kết luận: Tuyệt đối không được phục vụ hàng ngàn client bằng cách đẻ luồng vô hạn</a:t>
             </a:r>
-            <a:endParaRPr lang="en-US" sz="880" dirty="0"/>
+            <a:endParaRPr lang="en-US" sz="1150" dirty="0"/>
           </a:p>
         </p:txBody>
       </p:sp>
@@ -21853,7 +21853,7 @@
               <a:buNone/>
             </a:pPr>
             <a:r>
-              <a:rPr lang="en-US" sz="1100" dirty="0">
+              <a:rPr lang="en-US" sz="1350" dirty="0">
                 <a:solidFill>
                   <a:srgbClr val="0F172A"/>
                 </a:solidFill>
@@ -21863,7 +21863,7 @@
               </a:rPr>
               <a:t>🏢 BÀI HỌC CỐT LÕI: Luồng hệ điều hành được thiết kế như những công nhân hạng nặng (Heavyweight), hoàn toàn không phù hợp để ánh xạ trực tiếp 1-1 với các kết nối mạng siêu nhẹ!</a:t>
             </a:r>
-            <a:endParaRPr lang="en-US" sz="1100" dirty="0"/>
+            <a:endParaRPr lang="en-US" sz="1350" dirty="0"/>
           </a:p>
         </p:txBody>
       </p:sp>
@@ -21951,7 +21951,7 @@
               <a:buNone/>
             </a:pPr>
             <a:r>
-              <a:rPr lang="en-US" sz="900" b="1" dirty="0">
+              <a:rPr lang="en-US" sz="1100" b="1" dirty="0">
                 <a:solidFill>
                   <a:srgbClr val="1D4ED8"/>
                 </a:solidFill>
@@ -21961,7 +21961,7 @@
               </a:rPr>
               <a:t>HIỆU NĂNG PHẦN CỨNG</a:t>
             </a:r>
-            <a:endParaRPr lang="en-US" sz="900" dirty="0"/>
+            <a:endParaRPr lang="en-US" sz="1100" dirty="0"/>
           </a:p>
         </p:txBody>
       </p:sp>
@@ -22029,7 +22029,7 @@
               <a:buNone/>
             </a:pPr>
             <a:r>
-              <a:rPr lang="en-US" sz="1100" b="1" dirty="0">
+              <a:rPr lang="en-US" sz="1350" b="1" dirty="0">
                 <a:solidFill>
                   <a:srgbClr val="334155"/>
                 </a:solidFill>
@@ -22039,7 +22039,7 @@
               </a:rPr>
               <a:t>Vòng xoay lãng phí năng lượng khi thời gian tráo đổi luồng vượt qua thời gian làm việc</a:t>
             </a:r>
-            <a:endParaRPr lang="en-US" sz="1100" dirty="0"/>
+            <a:endParaRPr lang="en-US" sz="1350" dirty="0"/>
           </a:p>
         </p:txBody>
       </p:sp>
@@ -22095,7 +22095,7 @@
               <a:buNone/>
             </a:pPr>
             <a:r>
-              <a:rPr lang="en-US" sz="1000" b="1" dirty="0">
+              <a:rPr lang="en-US" sz="1150" b="1" dirty="0">
                 <a:solidFill>
                   <a:srgbClr val="1D4ED8"/>
                 </a:solidFill>
@@ -22105,7 +22105,7 @@
               </a:rPr>
               <a:t>04 / 18</a:t>
             </a:r>
-            <a:endParaRPr lang="en-US" sz="1000" dirty="0"/>
+            <a:endParaRPr lang="en-US" sz="1150" dirty="0"/>
           </a:p>
         </p:txBody>
       </p:sp>
@@ -22157,7 +22157,7 @@
               <a:buNone/>
             </a:pPr>
             <a:r>
-              <a:rPr lang="en-US" sz="950" b="1" dirty="0">
+              <a:rPr lang="en-US" sz="1100" b="1" dirty="0">
                 <a:solidFill>
                   <a:srgbClr val="475569"/>
                 </a:solidFill>
@@ -22167,7 +22167,7 @@
               </a:rPr>
               <a:t>PTIT TELECOM • Khoa Công nghệ Thông tin • Đề Tài T45: Multi-Threading Patterns</a:t>
             </a:r>
-            <a:endParaRPr lang="en-US" sz="950" dirty="0"/>
+            <a:endParaRPr lang="en-US" sz="1100" dirty="0"/>
           </a:p>
         </p:txBody>
       </p:sp>
@@ -22196,7 +22196,7 @@
               <a:buNone/>
             </a:pPr>
             <a:r>
-              <a:rPr lang="en-US" sz="950" b="1" dirty="0">
+              <a:rPr lang="en-US" sz="1100" b="1" dirty="0">
                 <a:solidFill>
                   <a:srgbClr val="1D4ED8"/>
                 </a:solidFill>
@@ -22206,7 +22206,7 @@
               </a:rPr>
               <a:t>Slide 04 / 18</a:t>
             </a:r>
-            <a:endParaRPr lang="en-US" sz="950" dirty="0"/>
+            <a:endParaRPr lang="en-US" sz="1100" dirty="0"/>
           </a:p>
         </p:txBody>
       </p:sp>
@@ -22287,7 +22287,7 @@
               <a:buNone/>
             </a:pPr>
             <a:r>
-              <a:rPr lang="en-US" sz="1450" b="1" dirty="0">
+              <a:rPr lang="en-US" sz="1650" b="1" dirty="0">
                 <a:solidFill>
                   <a:srgbClr val="0F172A"/>
                 </a:solidFill>
@@ -22297,7 +22297,7 @@
               </a:rPr>
               <a:t>📉  Nghẽn Bão Hòa Hiệu Năng</a:t>
             </a:r>
-            <a:endParaRPr lang="en-US" sz="1450" dirty="0"/>
+            <a:endParaRPr lang="en-US" sz="1650" dirty="0"/>
           </a:p>
         </p:txBody>
       </p:sp>
@@ -22326,7 +22326,7 @@
               <a:buNone/>
             </a:pPr>
             <a:r>
-              <a:rPr lang="en-US" sz="950" b="1" dirty="0">
+              <a:rPr lang="en-US" sz="1250" b="1" dirty="0">
                 <a:solidFill>
                   <a:srgbClr val="334155"/>
                 </a:solidFill>
@@ -22336,7 +22336,7 @@
               </a:rPr>
               <a:t>Hiện tượng Thrashing khi CPU chỉ lo đổi công nhân</a:t>
             </a:r>
-            <a:endParaRPr lang="en-US" sz="950" dirty="0"/>
+            <a:endParaRPr lang="en-US" sz="1250" dirty="0"/>
           </a:p>
         </p:txBody>
       </p:sp>
@@ -22392,7 +22392,7 @@
               <a:buNone/>
             </a:pPr>
             <a:r>
-              <a:rPr lang="en-US" sz="800" b="1" dirty="0">
+              <a:rPr lang="en-US" sz="1150" b="1" dirty="0">
                 <a:solidFill>
                   <a:srgbClr val="E11D48"/>
                 </a:solidFill>
@@ -22402,7 +22402,7 @@
               </a:rPr>
               <a:t>&gt; 70% CPU LÃNG PHÍ</a:t>
             </a:r>
-            <a:endParaRPr lang="en-US" sz="800" dirty="0"/>
+            <a:endParaRPr lang="en-US" sz="1150" dirty="0"/>
           </a:p>
         </p:txBody>
       </p:sp>
@@ -22481,7 +22481,7 @@
               <a:buNone/>
             </a:pPr>
             <a:r>
-              <a:rPr lang="en-US" sz="1600" b="1" dirty="0">
+              <a:rPr lang="en-US" sz="2200" b="1" dirty="0">
                 <a:solidFill>
                   <a:srgbClr val="E11D48"/>
                 </a:solidFill>
@@ -22493,14 +22493,14 @@
               <a:buNone/>
             </a:pPr>
             <a:r>
-              <a:rPr lang="en-US" sz="850" b="1" dirty="0">
+              <a:rPr lang="en-US" sz="1150" b="1" dirty="0">
                 <a:solidFill>
                   <a:srgbClr val="334155"/>
                 </a:solidFill>
               </a:rPr>
               <a:t>Chỉ số CPU vọt đỉnh do tranh chấp</a:t>
             </a:r>
-            <a:endParaRPr lang="en-US" sz="1600" dirty="0"/>
+            <a:endParaRPr lang="en-US" sz="2200" dirty="0"/>
           </a:p>
         </p:txBody>
       </p:sp>
@@ -22556,7 +22556,7 @@
               <a:buNone/>
             </a:pPr>
             <a:r>
-              <a:rPr lang="en-US" sz="1600" b="1" dirty="0">
+              <a:rPr lang="en-US" sz="2200" b="1" dirty="0">
                 <a:solidFill>
                   <a:srgbClr val="E11D48"/>
                 </a:solidFill>
@@ -22568,14 +22568,14 @@
               <a:buNone/>
             </a:pPr>
             <a:r>
-              <a:rPr lang="en-US" sz="850" b="1" dirty="0">
+              <a:rPr lang="en-US" sz="1150" b="1" dirty="0">
                 <a:solidFill>
                   <a:srgbClr val="334155"/>
                 </a:solidFill>
               </a:rPr>
               <a:t>Tiến độ công việc thực tế bị đóng băng</a:t>
             </a:r>
-            <a:endParaRPr lang="en-US" sz="1600" dirty="0"/>
+            <a:endParaRPr lang="en-US" sz="2200" dirty="0"/>
           </a:p>
         </p:txBody>
       </p:sp>
@@ -22588,11 +22588,11 @@
         <p:spPr>
           <a:xfrm>
             <a:off x="777240" y="3145536"/>
-            <a:ext cx="4956048" cy="841248"/>
+            <a:ext cx="4956048" cy="960120"/>
           </a:xfrm>
           <a:prstGeom prst="roundRect">
             <a:avLst>
-              <a:gd name="adj" fmla="val 8696"/>
+              <a:gd name="adj" fmla="val 7619"/>
             </a:avLst>
           </a:prstGeom>
           <a:solidFill>
@@ -22615,7 +22615,7 @@
         <p:spPr>
           <a:xfrm>
             <a:off x="868680" y="3218688"/>
-            <a:ext cx="4773168" cy="694944"/>
+            <a:ext cx="4773168" cy="813816"/>
           </a:xfrm>
           <a:prstGeom prst="rect">
             <a:avLst/>
@@ -22631,7 +22631,7 @@
               <a:buNone/>
             </a:pPr>
             <a:r>
-              <a:rPr lang="en-US" sz="1100" b="1" dirty="0">
+              <a:rPr lang="en-US" sz="1400" b="1" dirty="0">
                 <a:solidFill>
                   <a:srgbClr val="0F172A"/>
                 </a:solidFill>
@@ -22643,14 +22643,14 @@
               <a:buNone/>
             </a:pPr>
             <a:r>
-              <a:rPr lang="en-US" sz="920" dirty="0">
+              <a:rPr lang="en-US" sz="1220" dirty="0">
                 <a:solidFill>
                   <a:srgbClr val="334155"/>
                 </a:solidFill>
               </a:rPr>
               <a:t>Bộ nhớ đệm siêu tốc bị hủy sạch mỗi lần tráo đổi luồng làm mất dữ liệu gần.</a:t>
             </a:r>
-            <a:endParaRPr lang="en-US" sz="1100" dirty="0"/>
+            <a:endParaRPr lang="en-US" sz="1400" dirty="0"/>
           </a:p>
         </p:txBody>
       </p:sp>
@@ -22662,12 +22662,12 @@
         </p:nvSpPr>
         <p:spPr>
           <a:xfrm>
-            <a:off x="777240" y="4078224"/>
-            <a:ext cx="4956048" cy="841248"/>
+            <a:off x="777240" y="4197096"/>
+            <a:ext cx="4956048" cy="960120"/>
           </a:xfrm>
           <a:prstGeom prst="roundRect">
             <a:avLst>
-              <a:gd name="adj" fmla="val 8696"/>
+              <a:gd name="adj" fmla="val 7619"/>
             </a:avLst>
           </a:prstGeom>
           <a:solidFill>
@@ -22689,8 +22689,8 @@
         </p:nvSpPr>
         <p:spPr>
           <a:xfrm>
-            <a:off x="868680" y="4151376"/>
-            <a:ext cx="4773168" cy="694944"/>
+            <a:off x="868680" y="4270248"/>
+            <a:ext cx="4773168" cy="813816"/>
           </a:xfrm>
           <a:prstGeom prst="rect">
             <a:avLst/>
@@ -22706,7 +22706,7 @@
               <a:buNone/>
             </a:pPr>
             <a:r>
-              <a:rPr lang="en-US" sz="1100" b="1" dirty="0">
+              <a:rPr lang="en-US" sz="1400" b="1" dirty="0">
                 <a:solidFill>
                   <a:srgbClr val="0F172A"/>
                 </a:solidFill>
@@ -22718,14 +22718,14 @@
               <a:buNone/>
             </a:pPr>
             <a:r>
-              <a:rPr lang="en-US" sz="920" dirty="0">
+              <a:rPr lang="en-US" sz="1220" dirty="0">
                 <a:solidFill>
                   <a:srgbClr val="334155"/>
                 </a:solidFill>
               </a:rPr>
               <a:t>CPU phải chờ đợi hàng trăm chu kỳ xung nhịp để kéo ngữ cảnh luồng mới vào lõi.</a:t>
             </a:r>
-            <a:endParaRPr lang="en-US" sz="1100" dirty="0"/>
+            <a:endParaRPr lang="en-US" sz="1400" dirty="0"/>
           </a:p>
         </p:txBody>
       </p:sp>
@@ -22781,7 +22781,7 @@
               <a:buNone/>
             </a:pPr>
             <a:r>
-              <a:rPr lang="en-US" sz="880" b="1" dirty="0">
+              <a:rPr lang="en-US" sz="1150" b="1" dirty="0">
                 <a:solidFill>
                   <a:srgbClr val="E11D48"/>
                 </a:solidFill>
@@ -22791,7 +22791,7 @@
               </a:rPr>
               <a:t>⚠️ Bi kịch: Máy chủ gào rú 100% CPU nhưng người dùng lại bị treo màn hình!</a:t>
             </a:r>
-            <a:endParaRPr lang="en-US" sz="880" dirty="0"/>
+            <a:endParaRPr lang="en-US" sz="1150" dirty="0"/>
           </a:p>
         </p:txBody>
       </p:sp>
@@ -22872,7 +22872,7 @@
               <a:buNone/>
             </a:pPr>
             <a:r>
-              <a:rPr lang="en-US" sz="1450" b="1" dirty="0">
+              <a:rPr lang="en-US" sz="1650" b="1" dirty="0">
                 <a:solidFill>
                   <a:srgbClr val="0F172A"/>
                 </a:solidFill>
@@ -22882,7 +22882,7 @@
               </a:rPr>
               <a:t>🎯  Quy Tắc Vàng Thiết Kế Hệ Thống</a:t>
             </a:r>
-            <a:endParaRPr lang="en-US" sz="1450" dirty="0"/>
+            <a:endParaRPr lang="en-US" sz="1650" dirty="0"/>
           </a:p>
         </p:txBody>
       </p:sp>
@@ -22911,7 +22911,7 @@
               <a:buNone/>
             </a:pPr>
             <a:r>
-              <a:rPr lang="en-US" sz="950" b="1" dirty="0">
+              <a:rPr lang="en-US" sz="1250" b="1" dirty="0">
                 <a:solidFill>
                   <a:srgbClr val="334155"/>
                 </a:solidFill>
@@ -22921,7 +22921,7 @@
               </a:rPr>
               <a:t>Chiến lược kiểm soát luồng giải cứu máy chủ mạng</a:t>
             </a:r>
-            <a:endParaRPr lang="en-US" sz="950" dirty="0"/>
+            <a:endParaRPr lang="en-US" sz="1250" dirty="0"/>
           </a:p>
         </p:txBody>
       </p:sp>
@@ -22977,7 +22977,7 @@
               <a:buNone/>
             </a:pPr>
             <a:r>
-              <a:rPr lang="en-US" sz="800" b="1" dirty="0">
+              <a:rPr lang="en-US" sz="1150" b="1" dirty="0">
                 <a:solidFill>
                   <a:srgbClr val="D97706"/>
                 </a:solidFill>
@@ -22987,7 +22987,7 @@
               </a:rPr>
               <a:t>KIẾN TRÚC TỐI ƯU</a:t>
             </a:r>
-            <a:endParaRPr lang="en-US" sz="800" dirty="0"/>
+            <a:endParaRPr lang="en-US" sz="1150" dirty="0"/>
           </a:p>
         </p:txBody>
       </p:sp>
@@ -23066,7 +23066,7 @@
               <a:buNone/>
             </a:pPr>
             <a:r>
-              <a:rPr lang="en-US" sz="1600" b="1" dirty="0">
+              <a:rPr lang="en-US" sz="2200" b="1" dirty="0">
                 <a:solidFill>
                   <a:srgbClr val="D97706"/>
                 </a:solidFill>
@@ -23078,14 +23078,14 @@
               <a:buNone/>
             </a:pPr>
             <a:r>
-              <a:rPr lang="en-US" sz="850" b="1" dirty="0">
+              <a:rPr lang="en-US" sz="1150" b="1" dirty="0">
                 <a:solidFill>
                   <a:srgbClr val="334155"/>
                 </a:solidFill>
               </a:rPr>
               <a:t>Nguyên tắc số luồng tương đương lõi CPU</a:t>
             </a:r>
-            <a:endParaRPr lang="en-US" sz="1600" dirty="0"/>
+            <a:endParaRPr lang="en-US" sz="2200" dirty="0"/>
           </a:p>
         </p:txBody>
       </p:sp>
@@ -23141,7 +23141,7 @@
               <a:buNone/>
             </a:pPr>
             <a:r>
-              <a:rPr lang="en-US" sz="1600" b="1" dirty="0">
+              <a:rPr lang="en-US" sz="2200" b="1" dirty="0">
                 <a:solidFill>
                   <a:srgbClr val="D97706"/>
                 </a:solidFill>
@@ -23153,14 +23153,14 @@
               <a:buNone/>
             </a:pPr>
             <a:r>
-              <a:rPr lang="en-US" sz="850" b="1" dirty="0">
+              <a:rPr lang="en-US" sz="1150" b="1" dirty="0">
                 <a:solidFill>
                   <a:srgbClr val="334155"/>
                 </a:solidFill>
               </a:rPr>
               <a:t>Thread Pool &amp; Virtual Threads</a:t>
             </a:r>
-            <a:endParaRPr lang="en-US" sz="1600" dirty="0"/>
+            <a:endParaRPr lang="en-US" sz="2200" dirty="0"/>
           </a:p>
         </p:txBody>
       </p:sp>
@@ -23173,11 +23173,11 @@
         <p:spPr>
           <a:xfrm>
             <a:off x="6455664" y="3145536"/>
-            <a:ext cx="4956048" cy="841248"/>
+            <a:ext cx="4956048" cy="960120"/>
           </a:xfrm>
           <a:prstGeom prst="roundRect">
             <a:avLst>
-              <a:gd name="adj" fmla="val 8696"/>
+              <a:gd name="adj" fmla="val 7619"/>
             </a:avLst>
           </a:prstGeom>
           <a:solidFill>
@@ -23200,7 +23200,7 @@
         <p:spPr>
           <a:xfrm>
             <a:off x="6547104" y="3218688"/>
-            <a:ext cx="4773168" cy="694944"/>
+            <a:ext cx="4773168" cy="813816"/>
           </a:xfrm>
           <a:prstGeom prst="rect">
             <a:avLst/>
@@ -23216,7 +23216,7 @@
               <a:buNone/>
             </a:pPr>
             <a:r>
-              <a:rPr lang="en-US" sz="1100" b="1" dirty="0">
+              <a:rPr lang="en-US" sz="1400" b="1" dirty="0">
                 <a:solidFill>
                   <a:srgbClr val="0F172A"/>
                 </a:solidFill>
@@ -23228,14 +23228,14 @@
               <a:buNone/>
             </a:pPr>
             <a:r>
-              <a:rPr lang="en-US" sz="920" dirty="0">
+              <a:rPr lang="en-US" sz="1220" dirty="0">
                 <a:solidFill>
                   <a:srgbClr val="334155"/>
                 </a:solidFill>
               </a:rPr>
               <a:t>Cố định số lượng công nhân và cho tác vụ xếp hàng đợi ngăn chặn nghẽn CPU.</a:t>
             </a:r>
-            <a:endParaRPr lang="en-US" sz="1100" dirty="0"/>
+            <a:endParaRPr lang="en-US" sz="1400" dirty="0"/>
           </a:p>
         </p:txBody>
       </p:sp>
@@ -23247,12 +23247,12 @@
         </p:nvSpPr>
         <p:spPr>
           <a:xfrm>
-            <a:off x="6455664" y="4078224"/>
-            <a:ext cx="4956048" cy="841248"/>
+            <a:off x="6455664" y="4197096"/>
+            <a:ext cx="4956048" cy="960120"/>
           </a:xfrm>
           <a:prstGeom prst="roundRect">
             <a:avLst>
-              <a:gd name="adj" fmla="val 8696"/>
+              <a:gd name="adj" fmla="val 7619"/>
             </a:avLst>
           </a:prstGeom>
           <a:solidFill>
@@ -23274,8 +23274,8 @@
         </p:nvSpPr>
         <p:spPr>
           <a:xfrm>
-            <a:off x="6547104" y="4151376"/>
-            <a:ext cx="4773168" cy="694944"/>
+            <a:off x="6547104" y="4270248"/>
+            <a:ext cx="4773168" cy="813816"/>
           </a:xfrm>
           <a:prstGeom prst="rect">
             <a:avLst/>
@@ -23291,7 +23291,7 @@
               <a:buNone/>
             </a:pPr>
             <a:r>
-              <a:rPr lang="en-US" sz="1100" b="1" dirty="0">
+              <a:rPr lang="en-US" sz="1400" b="1" dirty="0">
                 <a:solidFill>
                   <a:srgbClr val="0F172A"/>
                 </a:solidFill>
@@ -23303,14 +23303,14 @@
               <a:buNone/>
             </a:pPr>
             <a:r>
-              <a:rPr lang="en-US" sz="920" dirty="0">
+              <a:rPr lang="en-US" sz="1220" dirty="0">
                 <a:solidFill>
                   <a:srgbClr val="334155"/>
                 </a:solidFill>
               </a:rPr>
               <a:t>Chuyển quyền điều phối luồng từ Kernel OS về máy ảo JVM để triệt tiêu chi phí.</a:t>
             </a:r>
-            <a:endParaRPr lang="en-US" sz="1100" dirty="0"/>
+            <a:endParaRPr lang="en-US" sz="1400" dirty="0"/>
           </a:p>
         </p:txBody>
       </p:sp>
@@ -23366,7 +23366,7 @@
               <a:buNone/>
             </a:pPr>
             <a:r>
-              <a:rPr lang="en-US" sz="880" b="1" dirty="0">
+              <a:rPr lang="en-US" sz="1150" b="1" dirty="0">
                 <a:solidFill>
                   <a:srgbClr val="D97706"/>
                 </a:solidFill>
@@ -23376,7 +23376,7 @@
               </a:rPr>
               <a:t>🚀 Mục tiêu: Tối đa hóa công suất CPU mà không phải trả phí chuyển ngữ cảnh của OS</a:t>
             </a:r>
-            <a:endParaRPr lang="en-US" sz="880" dirty="0"/>
+            <a:endParaRPr lang="en-US" sz="1150" dirty="0"/>
           </a:p>
         </p:txBody>
       </p:sp>
@@ -23452,7 +23452,7 @@
               <a:buNone/>
             </a:pPr>
             <a:r>
-              <a:rPr lang="en-US" sz="1100" dirty="0">
+              <a:rPr lang="en-US" sz="1350" dirty="0">
                 <a:solidFill>
                   <a:srgbClr val="0F172A"/>
                 </a:solidFill>
@@ -23462,7 +23462,7 @@
               </a:rPr>
               <a:t>🎯 BẢN CHẤT KỸ THUẬT: Đừng bao giờ nhầm lẫn giữa "nhiều luồng" và "chạy nhanh". Số luồng vượt quá năng lực phần cứng chỉ tạo ra vòng xoáy lãng phí năng lượng vô ích!</a:t>
             </a:r>
-            <a:endParaRPr lang="en-US" sz="1100" dirty="0"/>
+            <a:endParaRPr lang="en-US" sz="1350" dirty="0"/>
           </a:p>
         </p:txBody>
       </p:sp>
@@ -23550,7 +23550,7 @@
               <a:buNone/>
             </a:pPr>
             <a:r>
-              <a:rPr lang="en-US" sz="900" b="1" dirty="0">
+              <a:rPr lang="en-US" sz="1100" b="1" dirty="0">
                 <a:solidFill>
                   <a:srgbClr val="1D4ED8"/>
                 </a:solidFill>
@@ -23560,7 +23560,7 @@
               </a:rPr>
               <a:t>MODE 1 • MỐC ĐỐI CHỨNG</a:t>
             </a:r>
-            <a:endParaRPr lang="en-US" sz="900" dirty="0"/>
+            <a:endParaRPr lang="en-US" sz="1100" dirty="0"/>
           </a:p>
         </p:txBody>
       </p:sp>
@@ -23628,7 +23628,7 @@
               <a:buNone/>
             </a:pPr>
             <a:r>
-              <a:rPr lang="en-US" sz="1100" b="1" dirty="0">
+              <a:rPr lang="en-US" sz="1350" b="1" dirty="0">
                 <a:solidFill>
                   <a:srgbClr val="334155"/>
                 </a:solidFill>
@@ -23638,7 +23638,7 @@
               </a:rPr>
               <a:t>Nguyên lý "Một người phục vụ tất cả" và hiện tượng nghẽn mạng dây chuyền</a:t>
             </a:r>
-            <a:endParaRPr lang="en-US" sz="1100" dirty="0"/>
+            <a:endParaRPr lang="en-US" sz="1350" dirty="0"/>
           </a:p>
         </p:txBody>
       </p:sp>
@@ -23694,7 +23694,7 @@
               <a:buNone/>
             </a:pPr>
             <a:r>
-              <a:rPr lang="en-US" sz="1000" b="1" dirty="0">
+              <a:rPr lang="en-US" sz="1150" b="1" dirty="0">
                 <a:solidFill>
                   <a:srgbClr val="1D4ED8"/>
                 </a:solidFill>
@@ -23704,7 +23704,7 @@
               </a:rPr>
               <a:t>06 / 18</a:t>
             </a:r>
-            <a:endParaRPr lang="en-US" sz="1000" dirty="0"/>
+            <a:endParaRPr lang="en-US" sz="1150" dirty="0"/>
           </a:p>
         </p:txBody>
       </p:sp>
@@ -23756,7 +23756,7 @@
               <a:buNone/>
             </a:pPr>
             <a:r>
-              <a:rPr lang="en-US" sz="950" b="1" dirty="0">
+              <a:rPr lang="en-US" sz="1100" b="1" dirty="0">
                 <a:solidFill>
                   <a:srgbClr val="475569"/>
                 </a:solidFill>
@@ -23766,7 +23766,7 @@
               </a:rPr>
               <a:t>PTIT TELECOM • Khoa Công nghệ Thông tin • Đề Tài T45: Multi-Threading Patterns</a:t>
             </a:r>
-            <a:endParaRPr lang="en-US" sz="950" dirty="0"/>
+            <a:endParaRPr lang="en-US" sz="1100" dirty="0"/>
           </a:p>
         </p:txBody>
       </p:sp>
@@ -23795,7 +23795,7 @@
               <a:buNone/>
             </a:pPr>
             <a:r>
-              <a:rPr lang="en-US" sz="950" b="1" dirty="0">
+              <a:rPr lang="en-US" sz="1100" b="1" dirty="0">
                 <a:solidFill>
                   <a:srgbClr val="1D4ED8"/>
                 </a:solidFill>
@@ -23805,7 +23805,7 @@
               </a:rPr>
               <a:t>Slide 06 / 18</a:t>
             </a:r>
-            <a:endParaRPr lang="en-US" sz="950" dirty="0"/>
+            <a:endParaRPr lang="en-US" sz="1100" dirty="0"/>
           </a:p>
         </p:txBody>
       </p:sp>
@@ -23886,7 +23886,7 @@
               <a:buNone/>
             </a:pPr>
             <a:r>
-              <a:rPr lang="en-US" sz="1450" b="1" dirty="0">
+              <a:rPr lang="en-US" sz="1650" b="1" dirty="0">
                 <a:solidFill>
                   <a:srgbClr val="0F172A"/>
                 </a:solidFill>
@@ -23896,7 +23896,7 @@
               </a:rPr>
               <a:t>🛑  Kẹt Xe Dây Chuyền (Head-of-Line Blocking)</a:t>
             </a:r>
-            <a:endParaRPr lang="en-US" sz="1450" dirty="0"/>
+            <a:endParaRPr lang="en-US" sz="1650" dirty="0"/>
           </a:p>
         </p:txBody>
       </p:sp>
@@ -23925,7 +23925,7 @@
               <a:buNone/>
             </a:pPr>
             <a:r>
-              <a:rPr lang="en-US" sz="950" b="1" dirty="0">
+              <a:rPr lang="en-US" sz="1250" b="1" dirty="0">
                 <a:solidFill>
                   <a:srgbClr val="334155"/>
                 </a:solidFill>
@@ -23935,7 +23935,7 @@
               </a:rPr>
               <a:t>Hiện tượng một kết nối chặn toàn bộ hệ thống</a:t>
             </a:r>
-            <a:endParaRPr lang="en-US" sz="950" dirty="0"/>
+            <a:endParaRPr lang="en-US" sz="1250" dirty="0"/>
           </a:p>
         </p:txBody>
       </p:sp>
@@ -23991,7 +23991,7 @@
               <a:buNone/>
             </a:pPr>
             <a:r>
-              <a:rPr lang="en-US" sz="800" b="1" dirty="0">
+              <a:rPr lang="en-US" sz="1150" b="1" dirty="0">
                 <a:solidFill>
                   <a:srgbClr val="E11D48"/>
                 </a:solidFill>
@@ -24001,7 +24001,7 @@
               </a:rPr>
               <a:t>NGHẼN CỔ CHAI</a:t>
             </a:r>
-            <a:endParaRPr lang="en-US" sz="800" dirty="0"/>
+            <a:endParaRPr lang="en-US" sz="1150" dirty="0"/>
           </a:p>
         </p:txBody>
       </p:sp>
@@ -24080,7 +24080,7 @@
               <a:buNone/>
             </a:pPr>
             <a:r>
-              <a:rPr lang="en-US" sz="1600" b="1" dirty="0">
+              <a:rPr lang="en-US" sz="2200" b="1" dirty="0">
                 <a:solidFill>
                   <a:srgbClr val="E11D48"/>
                 </a:solidFill>
@@ -24092,14 +24092,14 @@
               <a:buNone/>
             </a:pPr>
             <a:r>
-              <a:rPr lang="en-US" sz="850" b="1" dirty="0">
+              <a:rPr lang="en-US" sz="1150" b="1" dirty="0">
                 <a:solidFill>
                   <a:srgbClr val="334155"/>
                 </a:solidFill>
               </a:rPr>
               <a:t>Thông lượng rơi xuống đáy do phục vụ lần lượt</a:t>
             </a:r>
-            <a:endParaRPr lang="en-US" sz="1600" dirty="0"/>
+            <a:endParaRPr lang="en-US" sz="2200" dirty="0"/>
           </a:p>
         </p:txBody>
       </p:sp>
@@ -24155,7 +24155,7 @@
               <a:buNone/>
             </a:pPr>
             <a:r>
-              <a:rPr lang="en-US" sz="1600" b="1" dirty="0">
+              <a:rPr lang="en-US" sz="2200" b="1" dirty="0">
                 <a:solidFill>
                   <a:srgbClr val="E11D48"/>
                 </a:solidFill>
@@ -24167,14 +24167,14 @@
               <a:buNone/>
             </a:pPr>
             <a:r>
-              <a:rPr lang="en-US" sz="850" b="1" dirty="0">
+              <a:rPr lang="en-US" sz="1150" b="1" dirty="0">
                 <a:solidFill>
                   <a:srgbClr val="334155"/>
                 </a:solidFill>
               </a:rPr>
               <a:t>Tổng độ trễ tích lũy khi có 30 kết nối nối đuôi</a:t>
             </a:r>
-            <a:endParaRPr lang="en-US" sz="1600" dirty="0"/>
+            <a:endParaRPr lang="en-US" sz="2200" dirty="0"/>
           </a:p>
         </p:txBody>
       </p:sp>
@@ -24187,11 +24187,11 @@
         <p:spPr>
           <a:xfrm>
             <a:off x="777240" y="3145536"/>
-            <a:ext cx="4956048" cy="841248"/>
+            <a:ext cx="4956048" cy="960120"/>
           </a:xfrm>
           <a:prstGeom prst="roundRect">
             <a:avLst>
-              <a:gd name="adj" fmla="val 8696"/>
+              <a:gd name="adj" fmla="val 7619"/>
             </a:avLst>
           </a:prstGeom>
           <a:solidFill>
@@ -24214,7 +24214,7 @@
         <p:spPr>
           <a:xfrm>
             <a:off x="868680" y="3218688"/>
-            <a:ext cx="4773168" cy="694944"/>
+            <a:ext cx="4773168" cy="813816"/>
           </a:xfrm>
           <a:prstGeom prst="rect">
             <a:avLst/>
@@ -24230,7 +24230,7 @@
               <a:buNone/>
             </a:pPr>
             <a:r>
-              <a:rPr lang="en-US" sz="1100" b="1" dirty="0">
+              <a:rPr lang="en-US" sz="1400" b="1" dirty="0">
                 <a:solidFill>
                   <a:srgbClr val="0F172A"/>
                 </a:solidFill>
@@ -24242,14 +24242,14 @@
               <a:buNone/>
             </a:pPr>
             <a:r>
-              <a:rPr lang="en-US" sz="920" dirty="0">
+              <a:rPr lang="en-US" sz="1220" dirty="0">
                 <a:solidFill>
                   <a:srgbClr val="334155"/>
                 </a:solidFill>
               </a:rPr>
               <a:t>Khách 1 đang phục vụ, 29 khách còn lại bị giam ngoài hàng đợi mạng của OS.</a:t>
             </a:r>
-            <a:endParaRPr lang="en-US" sz="1100" dirty="0"/>
+            <a:endParaRPr lang="en-US" sz="1400" dirty="0"/>
           </a:p>
         </p:txBody>
       </p:sp>
@@ -24261,12 +24261,12 @@
         </p:nvSpPr>
         <p:spPr>
           <a:xfrm>
-            <a:off x="777240" y="4078224"/>
-            <a:ext cx="4956048" cy="841248"/>
+            <a:off x="777240" y="4197096"/>
+            <a:ext cx="4956048" cy="960120"/>
           </a:xfrm>
           <a:prstGeom prst="roundRect">
             <a:avLst>
-              <a:gd name="adj" fmla="val 8696"/>
+              <a:gd name="adj" fmla="val 7619"/>
             </a:avLst>
           </a:prstGeom>
           <a:solidFill>
@@ -24288,8 +24288,8 @@
         </p:nvSpPr>
         <p:spPr>
           <a:xfrm>
-            <a:off x="868680" y="4151376"/>
-            <a:ext cx="4773168" cy="694944"/>
+            <a:off x="868680" y="4270248"/>
+            <a:ext cx="4773168" cy="813816"/>
           </a:xfrm>
           <a:prstGeom prst="rect">
             <a:avLst/>
@@ -24305,7 +24305,7 @@
               <a:buNone/>
             </a:pPr>
             <a:r>
-              <a:rPr lang="en-US" sz="1100" b="1" dirty="0">
+              <a:rPr lang="en-US" sz="1400" b="1" dirty="0">
                 <a:solidFill>
                   <a:srgbClr val="0F172A"/>
                 </a:solidFill>
@@ -24317,14 +24317,14 @@
               <a:buNone/>
             </a:pPr>
             <a:r>
-              <a:rPr lang="en-US" sz="920" dirty="0">
+              <a:rPr lang="en-US" sz="1220" dirty="0">
                 <a:solidFill>
                   <a:srgbClr val="334155"/>
                 </a:solidFill>
               </a:rPr>
               <a:t>1 luồng bị treo chờ I/O mạng 100ms, toàn bộ máy tính bị kéo tụt theo.</a:t>
             </a:r>
-            <a:endParaRPr lang="en-US" sz="1100" dirty="0"/>
+            <a:endParaRPr lang="en-US" sz="1400" dirty="0"/>
           </a:p>
         </p:txBody>
       </p:sp>
@@ -24380,7 +24380,7 @@
               <a:buNone/>
             </a:pPr>
             <a:r>
-              <a:rPr lang="en-US" sz="880" b="1" dirty="0">
+              <a:rPr lang="en-US" sz="1150" b="1" dirty="0">
                 <a:solidFill>
                   <a:srgbClr val="E11D48"/>
                 </a:solidFill>
@@ -24390,7 +24390,7 @@
               </a:rPr>
               <a:t>⚠️ Hạn chế: Chỉ cần 1 khách mạng chậm (Slowloris), toàn bộ máy chủ tê liệt!</a:t>
             </a:r>
-            <a:endParaRPr lang="en-US" sz="880" dirty="0"/>
+            <a:endParaRPr lang="en-US" sz="1150" dirty="0"/>
           </a:p>
         </p:txBody>
       </p:sp>
@@ -24471,7 +24471,7 @@
               <a:buNone/>
             </a:pPr>
             <a:r>
-              <a:rPr lang="en-US" sz="1450" b="1" dirty="0">
+              <a:rPr lang="en-US" sz="1650" b="1" dirty="0">
                 <a:solidFill>
                   <a:srgbClr val="0F172A"/>
                 </a:solidFill>
@@ -24481,7 +24481,7 @@
               </a:rPr>
               <a:t>💡  Ý Nghĩa Khoa Học Trong Đề Tài</a:t>
             </a:r>
-            <a:endParaRPr lang="en-US" sz="1450" dirty="0"/>
+            <a:endParaRPr lang="en-US" sz="1650" dirty="0"/>
           </a:p>
         </p:txBody>
       </p:sp>
@@ -24510,7 +24510,7 @@
               <a:buNone/>
             </a:pPr>
             <a:r>
-              <a:rPr lang="en-US" sz="950" b="1" dirty="0">
+              <a:rPr lang="en-US" sz="1250" b="1" dirty="0">
                 <a:solidFill>
                   <a:srgbClr val="334155"/>
                 </a:solidFill>
@@ -24520,7 +24520,7 @@
               </a:rPr>
               <a:t>Mốc đối chứng cơ bản và tư duy thiết kế đơn luồng</a:t>
             </a:r>
-            <a:endParaRPr lang="en-US" sz="950" dirty="0"/>
+            <a:endParaRPr lang="en-US" sz="1250" dirty="0"/>
           </a:p>
         </p:txBody>
       </p:sp>
@@ -24576,7 +24576,7 @@
               <a:buNone/>
             </a:pPr>
             <a:r>
-              <a:rPr lang="en-US" sz="800" b="1" dirty="0">
+              <a:rPr lang="en-US" sz="1150" b="1" dirty="0">
                 <a:solidFill>
                   <a:srgbClr val="1D4ED8"/>
                 </a:solidFill>
@@ -24586,7 +24586,7 @@
               </a:rPr>
               <a:t>BASELINE CHUẨN</a:t>
             </a:r>
-            <a:endParaRPr lang="en-US" sz="800" dirty="0"/>
+            <a:endParaRPr lang="en-US" sz="1150" dirty="0"/>
           </a:p>
         </p:txBody>
       </p:sp>
@@ -24665,7 +24665,7 @@
               <a:buNone/>
             </a:pPr>
             <a:r>
-              <a:rPr lang="en-US" sz="1600" b="1" dirty="0">
+              <a:rPr lang="en-US" sz="2200" b="1" dirty="0">
                 <a:solidFill>
                   <a:srgbClr val="1D4ED8"/>
                 </a:solidFill>
@@ -24677,14 +24677,14 @@
               <a:buNone/>
             </a:pPr>
             <a:r>
-              <a:rPr lang="en-US" sz="850" b="1" dirty="0">
+              <a:rPr lang="en-US" sz="1150" b="1" dirty="0">
                 <a:solidFill>
                   <a:srgbClr val="334155"/>
                 </a:solidFill>
               </a:rPr>
               <a:t>Chỉ dùng duy nhất 1 luồng OS xuyên suốt</a:t>
             </a:r>
-            <a:endParaRPr lang="en-US" sz="1600" dirty="0"/>
+            <a:endParaRPr lang="en-US" sz="2200" dirty="0"/>
           </a:p>
         </p:txBody>
       </p:sp>
@@ -24740,7 +24740,7 @@
               <a:buNone/>
             </a:pPr>
             <a:r>
-              <a:rPr lang="en-US" sz="1600" b="1" dirty="0">
+              <a:rPr lang="en-US" sz="2200" b="1" dirty="0">
                 <a:solidFill>
                   <a:srgbClr val="1D4ED8"/>
                 </a:solidFill>
@@ -24752,14 +24752,14 @@
               <a:buNone/>
             </a:pPr>
             <a:r>
-              <a:rPr lang="en-US" sz="850" b="1" dirty="0">
+              <a:rPr lang="en-US" sz="1150" b="1" dirty="0">
                 <a:solidFill>
                   <a:srgbClr val="334155"/>
                 </a:solidFill>
               </a:rPr>
               <a:t>Không lo tranh chấp bộ nhớ hay Deadlock</a:t>
             </a:r>
-            <a:endParaRPr lang="en-US" sz="1600" dirty="0"/>
+            <a:endParaRPr lang="en-US" sz="2200" dirty="0"/>
           </a:p>
         </p:txBody>
       </p:sp>
@@ -24772,11 +24772,11 @@
         <p:spPr>
           <a:xfrm>
             <a:off x="6455664" y="3145536"/>
-            <a:ext cx="4956048" cy="841248"/>
+            <a:ext cx="4956048" cy="960120"/>
           </a:xfrm>
           <a:prstGeom prst="roundRect">
             <a:avLst>
-              <a:gd name="adj" fmla="val 8696"/>
+              <a:gd name="adj" fmla="val 7619"/>
             </a:avLst>
           </a:prstGeom>
           <a:solidFill>
@@ -24799,7 +24799,7 @@
         <p:spPr>
           <a:xfrm>
             <a:off x="6547104" y="3218688"/>
-            <a:ext cx="4773168" cy="694944"/>
+            <a:ext cx="4773168" cy="813816"/>
           </a:xfrm>
           <a:prstGeom prst="rect">
             <a:avLst/>
@@ -24815,7 +24815,7 @@
               <a:buNone/>
             </a:pPr>
             <a:r>
-              <a:rPr lang="en-US" sz="1100" b="1" dirty="0">
+              <a:rPr lang="en-US" sz="1400" b="1" dirty="0">
                 <a:solidFill>
                   <a:srgbClr val="0F172A"/>
                 </a:solidFill>
@@ -24827,14 +24827,14 @@
               <a:buNone/>
             </a:pPr>
             <a:r>
-              <a:rPr lang="en-US" sz="920" dirty="0">
+              <a:rPr lang="en-US" sz="1220" dirty="0">
                 <a:solidFill>
                   <a:srgbClr val="334155"/>
                 </a:solidFill>
               </a:rPr>
               <a:t>Làm mốc đối chứng khoa học để đo lường mức bứt phá của 4 mô hình đa luồng.</a:t>
             </a:r>
-            <a:endParaRPr lang="en-US" sz="1100" dirty="0"/>
+            <a:endParaRPr lang="en-US" sz="1400" dirty="0"/>
           </a:p>
         </p:txBody>
       </p:sp>
@@ -24846,12 +24846,12 @@
         </p:nvSpPr>
         <p:spPr>
           <a:xfrm>
-            <a:off x="6455664" y="4078224"/>
-            <a:ext cx="4956048" cy="841248"/>
+            <a:off x="6455664" y="4197096"/>
+            <a:ext cx="4956048" cy="960120"/>
           </a:xfrm>
           <a:prstGeom prst="roundRect">
             <a:avLst>
-              <a:gd name="adj" fmla="val 8696"/>
+              <a:gd name="adj" fmla="val 7619"/>
             </a:avLst>
           </a:prstGeom>
           <a:solidFill>
@@ -24873,8 +24873,8 @@
         </p:nvSpPr>
         <p:spPr>
           <a:xfrm>
-            <a:off x="6547104" y="4151376"/>
-            <a:ext cx="4773168" cy="694944"/>
+            <a:off x="6547104" y="4270248"/>
+            <a:ext cx="4773168" cy="813816"/>
           </a:xfrm>
           <a:prstGeom prst="rect">
             <a:avLst/>
@@ -24890,7 +24890,7 @@
               <a:buNone/>
             </a:pPr>
             <a:r>
-              <a:rPr lang="en-US" sz="1100" b="1" dirty="0">
+              <a:rPr lang="en-US" sz="1400" b="1" dirty="0">
                 <a:solidFill>
                   <a:srgbClr val="0F172A"/>
                 </a:solidFill>
@@ -24902,14 +24902,14 @@
               <a:buNone/>
             </a:pPr>
             <a:r>
-              <a:rPr lang="en-US" sz="920" dirty="0">
+              <a:rPr lang="en-US" sz="1220" dirty="0">
                 <a:solidFill>
                   <a:srgbClr val="334155"/>
                 </a:solidFill>
               </a:rPr>
               <a:t>Chi phí CPU và RAM cực thấp nhưng không thể đáp ứng môi trường mạng hiện đại.</a:t>
             </a:r>
-            <a:endParaRPr lang="en-US" sz="1100" dirty="0"/>
+            <a:endParaRPr lang="en-US" sz="1400" dirty="0"/>
           </a:p>
         </p:txBody>
       </p:sp>
@@ -24965,7 +24965,7 @@
               <a:buNone/>
             </a:pPr>
             <a:r>
-              <a:rPr lang="en-US" sz="880" b="1" dirty="0">
+              <a:rPr lang="en-US" sz="1150" b="1" dirty="0">
                 <a:solidFill>
                   <a:srgbClr val="1D4ED8"/>
                 </a:solidFill>
@@ -24975,7 +24975,7 @@
               </a:rPr>
               <a:t>🎯 Đúc kết: Đơn luồng chỉ thích hợp cho script cục bộ, tối kỵ cho server đồng thời</a:t>
             </a:r>
-            <a:endParaRPr lang="en-US" sz="880" dirty="0"/>
+            <a:endParaRPr lang="en-US" sz="1150" dirty="0"/>
           </a:p>
         </p:txBody>
       </p:sp>
@@ -25051,7 +25051,7 @@
               <a:buNone/>
             </a:pPr>
             <a:r>
-              <a:rPr lang="en-US" sz="1100" dirty="0">
+              <a:rPr lang="en-US" sz="1350" dirty="0">
                 <a:solidFill>
                   <a:srgbClr val="0F172A"/>
                 </a:solidFill>
@@ -25061,7 +25061,7 @@
               </a:rPr>
               <a:t>💡 BÀI HỌC THIẾT KẾ: Mô hình tuần tự thất bại không phải vì thiếu CPU, mà vì thời gian chờ I/O mạng của người trước biến thành thời gian chờ đợi của người sau!</a:t>
             </a:r>
-            <a:endParaRPr lang="en-US" sz="1100" dirty="0"/>
+            <a:endParaRPr lang="en-US" sz="1350" dirty="0"/>
           </a:p>
         </p:txBody>
       </p:sp>
@@ -25149,7 +25149,7 @@
               <a:buNone/>
             </a:pPr>
             <a:r>
-              <a:rPr lang="en-US" sz="900" b="1" dirty="0">
+              <a:rPr lang="en-US" sz="1100" b="1" dirty="0">
                 <a:solidFill>
                   <a:srgbClr val="1D4ED8"/>
                 </a:solidFill>
@@ -25159,7 +25159,7 @@
               </a:rPr>
               <a:t>MODE 2 • ĐA LUỒNG CỔ ĐIỂN</a:t>
             </a:r>
-            <a:endParaRPr lang="en-US" sz="900" dirty="0"/>
+            <a:endParaRPr lang="en-US" sz="1100" dirty="0"/>
           </a:p>
         </p:txBody>
       </p:sp>
@@ -25227,7 +25227,7 @@
               <a:buNone/>
             </a:pPr>
             <a:r>
-              <a:rPr lang="en-US" sz="1100" b="1" dirty="0">
+              <a:rPr lang="en-US" sz="1350" b="1" dirty="0">
                 <a:solidFill>
                   <a:srgbClr val="334155"/>
                 </a:solidFill>
@@ -25237,7 +25237,7 @@
               </a:rPr>
               <a:t>Ý tưởng giải phóng phục vụ song song và cái bẫy bùng nổ tài nguyên</a:t>
             </a:r>
-            <a:endParaRPr lang="en-US" sz="1100" dirty="0"/>
+            <a:endParaRPr lang="en-US" sz="1350" dirty="0"/>
           </a:p>
         </p:txBody>
       </p:sp>
@@ -25293,7 +25293,7 @@
               <a:buNone/>
             </a:pPr>
             <a:r>
-              <a:rPr lang="en-US" sz="1000" b="1" dirty="0">
+              <a:rPr lang="en-US" sz="1150" b="1" dirty="0">
                 <a:solidFill>
                   <a:srgbClr val="1D4ED8"/>
                 </a:solidFill>
@@ -25303,7 +25303,7 @@
               </a:rPr>
               <a:t>07 / 18</a:t>
             </a:r>
-            <a:endParaRPr lang="en-US" sz="1000" dirty="0"/>
+            <a:endParaRPr lang="en-US" sz="1150" dirty="0"/>
           </a:p>
         </p:txBody>
       </p:sp>
@@ -25355,7 +25355,7 @@
               <a:buNone/>
             </a:pPr>
             <a:r>
-              <a:rPr lang="en-US" sz="950" b="1" dirty="0">
+              <a:rPr lang="en-US" sz="1100" b="1" dirty="0">
                 <a:solidFill>
                   <a:srgbClr val="475569"/>
                 </a:solidFill>
@@ -25365,7 +25365,7 @@
               </a:rPr>
               <a:t>PTIT TELECOM • Khoa Công nghệ Thông tin • Đề Tài T45: Multi-Threading Patterns</a:t>
             </a:r>
-            <a:endParaRPr lang="en-US" sz="950" dirty="0"/>
+            <a:endParaRPr lang="en-US" sz="1100" dirty="0"/>
           </a:p>
         </p:txBody>
       </p:sp>
@@ -25394,7 +25394,7 @@
               <a:buNone/>
             </a:pPr>
             <a:r>
-              <a:rPr lang="en-US" sz="950" b="1" dirty="0">
+              <a:rPr lang="en-US" sz="1100" b="1" dirty="0">
                 <a:solidFill>
                   <a:srgbClr val="1D4ED8"/>
                 </a:solidFill>
@@ -25404,7 +25404,7 @@
               </a:rPr>
               <a:t>Slide 07 / 18</a:t>
             </a:r>
-            <a:endParaRPr lang="en-US" sz="950" dirty="0"/>
+            <a:endParaRPr lang="en-US" sz="1100" dirty="0"/>
           </a:p>
         </p:txBody>
       </p:sp>
@@ -25485,7 +25485,7 @@
               <a:buNone/>
             </a:pPr>
             <a:r>
-              <a:rPr lang="en-US" sz="1450" b="1" dirty="0">
+              <a:rPr lang="en-US" sz="1650" b="1" dirty="0">
                 <a:solidFill>
                   <a:srgbClr val="0F172A"/>
                 </a:solidFill>
@@ -25495,7 +25495,7 @@
               </a:rPr>
               <a:t>⚡  Lợi Thế Song Song Tức Thì</a:t>
             </a:r>
-            <a:endParaRPr lang="en-US" sz="1450" dirty="0"/>
+            <a:endParaRPr lang="en-US" sz="1650" dirty="0"/>
           </a:p>
         </p:txBody>
       </p:sp>
@@ -25524,7 +25524,7 @@
               <a:buNone/>
             </a:pPr>
             <a:r>
-              <a:rPr lang="en-US" sz="950" b="1" dirty="0">
+              <a:rPr lang="en-US" sz="1250" b="1" dirty="0">
                 <a:solidFill>
                   <a:srgbClr val="334155"/>
                 </a:solidFill>
@@ -25534,7 +25534,7 @@
               </a:rPr>
               <a:t>Tăng tốc vượt trội ở mức tải đồng thời nhỏ</a:t>
             </a:r>
-            <a:endParaRPr lang="en-US" sz="950" dirty="0"/>
+            <a:endParaRPr lang="en-US" sz="1250" dirty="0"/>
           </a:p>
         </p:txBody>
       </p:sp>
@@ -25590,7 +25590,7 @@
               <a:buNone/>
             </a:pPr>
             <a:r>
-              <a:rPr lang="en-US" sz="800" b="1" dirty="0">
+              <a:rPr lang="en-US" sz="1150" b="1" dirty="0">
                 <a:solidFill>
                   <a:srgbClr val="059669"/>
                 </a:solidFill>
@@ -25600,7 +25600,7 @@
               </a:rPr>
               <a:t>TĂNG TỐC 26x</a:t>
             </a:r>
-            <a:endParaRPr lang="en-US" sz="800" dirty="0"/>
+            <a:endParaRPr lang="en-US" sz="1150" dirty="0"/>
           </a:p>
         </p:txBody>
       </p:sp>
@@ -25679,7 +25679,7 @@
               <a:buNone/>
             </a:pPr>
             <a:r>
-              <a:rPr lang="en-US" sz="1600" b="1" dirty="0">
+              <a:rPr lang="en-US" sz="2200" b="1" dirty="0">
                 <a:solidFill>
                   <a:srgbClr val="059669"/>
                 </a:solidFill>
@@ -25691,14 +25691,14 @@
               <a:buNone/>
             </a:pPr>
             <a:r>
-              <a:rPr lang="en-US" sz="850" b="1" dirty="0">
+              <a:rPr lang="en-US" sz="1150" b="1" dirty="0">
                 <a:solidFill>
                   <a:srgbClr val="334155"/>
                 </a:solidFill>
               </a:rPr>
               <a:t>Thông lượng bứt phá gấp 26 lần so với Mode 1</a:t>
             </a:r>
-            <a:endParaRPr lang="en-US" sz="1600" dirty="0"/>
+            <a:endParaRPr lang="en-US" sz="2200" dirty="0"/>
           </a:p>
         </p:txBody>
       </p:sp>
@@ -25754,7 +25754,7 @@
               <a:buNone/>
             </a:pPr>
             <a:r>
-              <a:rPr lang="en-US" sz="1600" b="1" dirty="0">
+              <a:rPr lang="en-US" sz="2200" b="1" dirty="0">
                 <a:solidFill>
                   <a:srgbClr val="059669"/>
                 </a:solidFill>
@@ -25766,14 +25766,14 @@
               <a:buNone/>
             </a:pPr>
             <a:r>
-              <a:rPr lang="en-US" sz="850" b="1" dirty="0">
+              <a:rPr lang="en-US" sz="1150" b="1" dirty="0">
                 <a:solidFill>
                   <a:srgbClr val="334155"/>
                 </a:solidFill>
               </a:rPr>
               <a:t>30 kết nối hoàn tất song song đồng thời</a:t>
             </a:r>
-            <a:endParaRPr lang="en-US" sz="1600" dirty="0"/>
+            <a:endParaRPr lang="en-US" sz="2200" dirty="0"/>
           </a:p>
         </p:txBody>
       </p:sp>
@@ -25786,11 +25786,11 @@
         <p:spPr>
           <a:xfrm>
             <a:off x="777240" y="3145536"/>
-            <a:ext cx="4956048" cy="841248"/>
+            <a:ext cx="4956048" cy="960120"/>
           </a:xfrm>
           <a:prstGeom prst="roundRect">
             <a:avLst>
-              <a:gd name="adj" fmla="val 8696"/>
+              <a:gd name="adj" fmla="val 7619"/>
             </a:avLst>
           </a:prstGeom>
           <a:solidFill>
@@ -25813,7 +25813,7 @@
         <p:spPr>
           <a:xfrm>
             <a:off x="868680" y="3218688"/>
-            <a:ext cx="4773168" cy="694944"/>
+            <a:ext cx="4773168" cy="813816"/>
           </a:xfrm>
           <a:prstGeom prst="rect">
             <a:avLst/>
@@ -25829,7 +25829,7 @@
               <a:buNone/>
             </a:pPr>
             <a:r>
-              <a:rPr lang="en-US" sz="1100" b="1" dirty="0">
+              <a:rPr lang="en-US" sz="1400" b="1" dirty="0">
                 <a:solidFill>
                   <a:srgbClr val="0F172A"/>
                 </a:solidFill>
@@ -25841,14 +25841,14 @@
               <a:buNone/>
             </a:pPr>
             <a:r>
-              <a:rPr lang="en-US" sz="920" dirty="0">
+              <a:rPr lang="en-US" sz="1220" dirty="0">
                 <a:solidFill>
                   <a:srgbClr val="334155"/>
                 </a:solidFill>
               </a:rPr>
               <a:t>Mỗi khách có 1 công nhân riêng phục vụ, không ai phải đợi ai.</a:t>
             </a:r>
-            <a:endParaRPr lang="en-US" sz="1100" dirty="0"/>
+            <a:endParaRPr lang="en-US" sz="1400" dirty="0"/>
           </a:p>
         </p:txBody>
       </p:sp>
@@ -25860,12 +25860,12 @@
         </p:nvSpPr>
         <p:spPr>
           <a:xfrm>
-            <a:off x="777240" y="4078224"/>
-            <a:ext cx="4956048" cy="841248"/>
+            <a:off x="777240" y="4197096"/>
+            <a:ext cx="4956048" cy="960120"/>
           </a:xfrm>
           <a:prstGeom prst="roundRect">
             <a:avLst>
-              <a:gd name="adj" fmla="val 8696"/>
+              <a:gd name="adj" fmla="val 7619"/>
             </a:avLst>
           </a:prstGeom>
           <a:solidFill>
@@ -25887,8 +25887,8 @@
         </p:nvSpPr>
         <p:spPr>
           <a:xfrm>
-            <a:off x="868680" y="4151376"/>
-            <a:ext cx="4773168" cy="694944"/>
+            <a:off x="868680" y="4270248"/>
+            <a:ext cx="4773168" cy="813816"/>
           </a:xfrm>
           <a:prstGeom prst="rect">
             <a:avLst/>
@@ -25904,7 +25904,7 @@
               <a:buNone/>
             </a:pPr>
             <a:r>
-              <a:rPr lang="en-US" sz="1100" b="1" dirty="0">
+              <a:rPr lang="en-US" sz="1400" b="1" dirty="0">
                 <a:solidFill>
                   <a:srgbClr val="0F172A"/>
                 </a:solidFill>
@@ -25916,14 +25916,14 @@
               <a:buNone/>
             </a:pPr>
             <a:r>
-              <a:rPr lang="en-US" sz="920" dirty="0">
+              <a:rPr lang="en-US" sz="1220" dirty="0">
                 <a:solidFill>
                   <a:srgbClr val="334155"/>
                 </a:solidFill>
               </a:rPr>
               <a:t>Ở quy mô vài chục khách, phản hồi cực kỳ mượt mà và dễ hiểu.</a:t>
             </a:r>
-            <a:endParaRPr lang="en-US" sz="1100" dirty="0"/>
+            <a:endParaRPr lang="en-US" sz="1400" dirty="0"/>
           </a:p>
         </p:txBody>
       </p:sp>
@@ -25979,7 +25979,7 @@
               <a:buNone/>
             </a:pPr>
             <a:r>
-              <a:rPr lang="en-US" sz="880" b="1" dirty="0">
+              <a:rPr lang="en-US" sz="1150" b="1" dirty="0">
                 <a:solidFill>
                   <a:srgbClr val="059669"/>
                 </a:solidFill>
@@ -25989,7 +25989,7 @@
               </a:rPr>
               <a:t>✨ Ưu điểm: Lập trình trực quan, giải quyết triệt để vấn đề Head-of-Line Blocking</a:t>
             </a:r>
-            <a:endParaRPr lang="en-US" sz="880" dirty="0"/>
+            <a:endParaRPr lang="en-US" sz="1150" dirty="0"/>
           </a:p>
         </p:txBody>
       </p:sp>
@@ -26070,7 +26070,7 @@
               <a:buNone/>
             </a:pPr>
             <a:r>
-              <a:rPr lang="en-US" sz="1450" b="1" dirty="0">
+              <a:rPr lang="en-US" sz="1650" b="1" dirty="0">
                 <a:solidFill>
                   <a:srgbClr val="0F172A"/>
                 </a:solidFill>
@@ -26080,7 +26080,7 @@
               </a:rPr>
               <a:t>💣  Cái Bẫy Bùng Nổ Khi Tải Cao</a:t>
             </a:r>
-            <a:endParaRPr lang="en-US" sz="1450" dirty="0"/>
+            <a:endParaRPr lang="en-US" sz="1650" dirty="0"/>
           </a:p>
         </p:txBody>
       </p:sp>
@@ -26109,7 +26109,7 @@
               <a:buNone/>
             </a:pPr>
             <a:r>
-              <a:rPr lang="en-US" sz="950" b="1" dirty="0">
+              <a:rPr lang="en-US" sz="1250" b="1" dirty="0">
                 <a:solidFill>
                   <a:srgbClr val="334155"/>
                 </a:solidFill>
@@ -26119,7 +26119,7 @@
               </a:rPr>
               <a:t>Giới hạn phần cứng và nguy cơ sập máy chủ</a:t>
             </a:r>
-            <a:endParaRPr lang="en-US" sz="950" dirty="0"/>
+            <a:endParaRPr lang="en-US" sz="1250" dirty="0"/>
           </a:p>
         </p:txBody>
       </p:sp>
@@ -26175,7 +26175,7 @@
               <a:buNone/>
             </a:pPr>
             <a:r>
-              <a:rPr lang="en-US" sz="800" b="1" dirty="0">
+              <a:rPr lang="en-US" sz="1150" b="1" dirty="0">
                 <a:solidFill>
                   <a:srgbClr val="E11D48"/>
                 </a:solidFill>
@@ -26185,7 +26185,7 @@
               </a:rPr>
               <a:t>CRITICAL RISK</a:t>
             </a:r>
-            <a:endParaRPr lang="en-US" sz="800" dirty="0"/>
+            <a:endParaRPr lang="en-US" sz="1150" dirty="0"/>
           </a:p>
         </p:txBody>
       </p:sp>
@@ -26264,7 +26264,7 @@
               <a:buNone/>
             </a:pPr>
             <a:r>
-              <a:rPr lang="en-US" sz="1600" b="1" dirty="0">
+              <a:rPr lang="en-US" sz="2200" b="1" dirty="0">
                 <a:solidFill>
                   <a:srgbClr val="E11D48"/>
                 </a:solidFill>
@@ -26276,14 +26276,14 @@
               <a:buNone/>
             </a:pPr>
             <a:r>
-              <a:rPr lang="en-US" sz="850" b="1" dirty="0">
+              <a:rPr lang="en-US" sz="1150" b="1" dirty="0">
                 <a:solidFill>
                   <a:srgbClr val="334155"/>
                 </a:solidFill>
               </a:rPr>
               <a:t>Sập ứng dụng khi vượt ngưỡng luồng OS cho phép</a:t>
             </a:r>
-            <a:endParaRPr lang="en-US" sz="1600" dirty="0"/>
+            <a:endParaRPr lang="en-US" sz="2200" dirty="0"/>
           </a:p>
         </p:txBody>
       </p:sp>
@@ -26339,7 +26339,7 @@
               <a:buNone/>
             </a:pPr>
             <a:r>
-              <a:rPr lang="en-US" sz="1600" b="1" dirty="0">
+              <a:rPr lang="en-US" sz="2200" b="1" dirty="0">
                 <a:solidFill>
                   <a:srgbClr val="E11D48"/>
                 </a:solidFill>
@@ -26351,14 +26351,14 @@
               <a:buNone/>
             </a:pPr>
             <a:r>
-              <a:rPr lang="en-US" sz="850" b="1" dirty="0">
+              <a:rPr lang="en-US" sz="1150" b="1" dirty="0">
                 <a:solidFill>
                   <a:srgbClr val="334155"/>
                 </a:solidFill>
               </a:rPr>
               <a:t>Bộ nhớ RAM giam cứng vô ích khi tải tăng</a:t>
             </a:r>
-            <a:endParaRPr lang="en-US" sz="1600" dirty="0"/>
+            <a:endParaRPr lang="en-US" sz="2200" dirty="0"/>
           </a:p>
         </p:txBody>
       </p:sp>
@@ -26371,11 +26371,11 @@
         <p:spPr>
           <a:xfrm>
             <a:off x="6455664" y="3145536"/>
-            <a:ext cx="4956048" cy="841248"/>
+            <a:ext cx="4956048" cy="960120"/>
           </a:xfrm>
           <a:prstGeom prst="roundRect">
             <a:avLst>
-              <a:gd name="adj" fmla="val 8696"/>
+              <a:gd name="adj" fmla="val 7619"/>
             </a:avLst>
           </a:prstGeom>
           <a:solidFill>
@@ -26398,7 +26398,7 @@
         <p:spPr>
           <a:xfrm>
             <a:off x="6547104" y="3218688"/>
-            <a:ext cx="4773168" cy="694944"/>
+            <a:ext cx="4773168" cy="813816"/>
           </a:xfrm>
           <a:prstGeom prst="rect">
             <a:avLst/>
@@ -26414,7 +26414,7 @@
               <a:buNone/>
             </a:pPr>
             <a:r>
-              <a:rPr lang="en-US" sz="1100" b="1" dirty="0">
+              <a:rPr lang="en-US" sz="1400" b="1" dirty="0">
                 <a:solidFill>
                   <a:srgbClr val="0F172A"/>
                 </a:solidFill>
@@ -26426,14 +26426,14 @@
               <a:buNone/>
             </a:pPr>
             <a:r>
-              <a:rPr lang="en-US" sz="920" dirty="0">
+              <a:rPr lang="en-US" sz="1220" dirty="0">
                 <a:solidFill>
                   <a:srgbClr val="334155"/>
                 </a:solidFill>
               </a:rPr>
               <a:t>Số luồng OS tăng vọt dựng đứng tỉ lệ 1:1 theo lượng khách truy cập.</a:t>
             </a:r>
-            <a:endParaRPr lang="en-US" sz="1100" dirty="0"/>
+            <a:endParaRPr lang="en-US" sz="1400" dirty="0"/>
           </a:p>
         </p:txBody>
       </p:sp>
@@ -26445,12 +26445,12 @@
         </p:nvSpPr>
         <p:spPr>
           <a:xfrm>
-            <a:off x="6455664" y="4078224"/>
-            <a:ext cx="4956048" cy="841248"/>
+            <a:off x="6455664" y="4197096"/>
+            <a:ext cx="4956048" cy="960120"/>
           </a:xfrm>
           <a:prstGeom prst="roundRect">
             <a:avLst>
-              <a:gd name="adj" fmla="val 8696"/>
+              <a:gd name="adj" fmla="val 7619"/>
             </a:avLst>
           </a:prstGeom>
           <a:solidFill>
@@ -26472,8 +26472,8 @@
         </p:nvSpPr>
         <p:spPr>
           <a:xfrm>
-            <a:off x="6547104" y="4151376"/>
-            <a:ext cx="4773168" cy="694944"/>
+            <a:off x="6547104" y="4270248"/>
+            <a:ext cx="4773168" cy="813816"/>
           </a:xfrm>
           <a:prstGeom prst="rect">
             <a:avLst/>
@@ -26489,7 +26489,7 @@
               <a:buNone/>
             </a:pPr>
             <a:r>
-              <a:rPr lang="en-US" sz="1100" b="1" dirty="0">
+              <a:rPr lang="en-US" sz="1400" b="1" dirty="0">
                 <a:solidFill>
                   <a:srgbClr val="0F172A"/>
                 </a:solidFill>
@@ -26501,14 +26501,14 @@
               <a:buNone/>
             </a:pPr>
             <a:r>
-              <a:rPr lang="en-US" sz="920" dirty="0">
+              <a:rPr lang="en-US" sz="1220" dirty="0">
                 <a:solidFill>
                   <a:srgbClr val="334155"/>
                 </a:solidFill>
               </a:rPr>
               <a:t>Hàng nghìn luồng tranh chấp lõi CPU khiến máy chủ quá tải và tự tắt.</a:t>
             </a:r>
-            <a:endParaRPr lang="en-US" sz="1100" dirty="0"/>
+            <a:endParaRPr lang="en-US" sz="1400" dirty="0"/>
           </a:p>
         </p:txBody>
       </p:sp>
@@ -26564,7 +26564,7 @@
               <a:buNone/>
             </a:pPr>
             <a:r>
-              <a:rPr lang="en-US" sz="880" b="1" dirty="0">
+              <a:rPr lang="en-US" sz="1150" b="1" dirty="0">
                 <a:solidFill>
                   <a:srgbClr val="E11D48"/>
                 </a:solidFill>
@@ -26574,7 +26574,7 @@
               </a:rPr>
               <a:t>🛡️ Cảnh báo: Mô hình ngây thơ (Naive Pattern), không thể chạy production!</a:t>
             </a:r>
-            <a:endParaRPr lang="en-US" sz="880" dirty="0"/>
+            <a:endParaRPr lang="en-US" sz="1150" dirty="0"/>
           </a:p>
         </p:txBody>
       </p:sp>
@@ -26650,7 +26650,7 @@
               <a:buNone/>
             </a:pPr>
             <a:r>
-              <a:rPr lang="en-US" sz="1100" dirty="0">
+              <a:rPr lang="en-US" sz="1350" dirty="0">
                 <a:solidFill>
                   <a:srgbClr val="0F172A"/>
                 </a:solidFill>
@@ -26660,7 +26660,7 @@
               </a:rPr>
               <a:t>⚠️ KẾT LUẬN THIẾT KẾ: Mode 2 đánh đổi sự an toàn của cả hệ điều hành để đổi lấy sự tiện lợi nhất thời. Hệ thống sẽ sụp đổ ngay khi có đợt traffic spike!</a:t>
             </a:r>
-            <a:endParaRPr lang="en-US" sz="1100" dirty="0"/>
+            <a:endParaRPr lang="en-US" sz="1350" dirty="0"/>
           </a:p>
         </p:txBody>
       </p:sp>
@@ -26748,7 +26748,7 @@
               <a:buNone/>
             </a:pPr>
             <a:r>
-              <a:rPr lang="en-US" sz="900" b="1" dirty="0">
+              <a:rPr lang="en-US" sz="1100" b="1" dirty="0">
                 <a:solidFill>
                   <a:srgbClr val="1D4ED8"/>
                 </a:solidFill>
@@ -26758,7 +26758,7 @@
               </a:rPr>
               <a:t>MODE 3 • CHUẨN DOANH NGHIỆP</a:t>
             </a:r>
-            <a:endParaRPr lang="en-US" sz="900" dirty="0"/>
+            <a:endParaRPr lang="en-US" sz="1100" dirty="0"/>
           </a:p>
         </p:txBody>
       </p:sp>
@@ -26826,7 +26826,7 @@
               <a:buNone/>
             </a:pPr>
             <a:r>
-              <a:rPr lang="en-US" sz="1100" b="1" dirty="0">
+              <a:rPr lang="en-US" sz="1350" b="1" dirty="0">
                 <a:solidFill>
                   <a:srgbClr val="334155"/>
                 </a:solidFill>
@@ -26836,7 +26836,7 @@
               </a:rPr>
               <a:t>Mẫu thiết kế chuẩn doanh nghiệp giúp kiểm soát tài nguyên an toàn tuyệt đối</a:t>
             </a:r>
-            <a:endParaRPr lang="en-US" sz="1100" dirty="0"/>
+            <a:endParaRPr lang="en-US" sz="1350" dirty="0"/>
           </a:p>
         </p:txBody>
       </p:sp>
@@ -26892,7 +26892,7 @@
               <a:buNone/>
             </a:pPr>
             <a:r>
-              <a:rPr lang="en-US" sz="1000" b="1" dirty="0">
+              <a:rPr lang="en-US" sz="1150" b="1" dirty="0">
                 <a:solidFill>
                   <a:srgbClr val="1D4ED8"/>
                 </a:solidFill>
@@ -26902,7 +26902,7 @@
               </a:rPr>
               <a:t>08 / 18</a:t>
             </a:r>
-            <a:endParaRPr lang="en-US" sz="1000" dirty="0"/>
+            <a:endParaRPr lang="en-US" sz="1150" dirty="0"/>
           </a:p>
         </p:txBody>
       </p:sp>
@@ -26954,7 +26954,7 @@
               <a:buNone/>
             </a:pPr>
             <a:r>
-              <a:rPr lang="en-US" sz="950" b="1" dirty="0">
+              <a:rPr lang="en-US" sz="1100" b="1" dirty="0">
                 <a:solidFill>
                   <a:srgbClr val="475569"/>
                 </a:solidFill>
@@ -26964,7 +26964,7 @@
               </a:rPr>
               <a:t>PTIT TELECOM • Khoa Công nghệ Thông tin • Đề Tài T45: Multi-Threading Patterns</a:t>
             </a:r>
-            <a:endParaRPr lang="en-US" sz="950" dirty="0"/>
+            <a:endParaRPr lang="en-US" sz="1100" dirty="0"/>
           </a:p>
         </p:txBody>
       </p:sp>
@@ -26993,7 +26993,7 @@
               <a:buNone/>
             </a:pPr>
             <a:r>
-              <a:rPr lang="en-US" sz="950" b="1" dirty="0">
+              <a:rPr lang="en-US" sz="1100" b="1" dirty="0">
                 <a:solidFill>
                   <a:srgbClr val="1D4ED8"/>
                 </a:solidFill>
@@ -27003,7 +27003,7 @@
               </a:rPr>
               <a:t>Slide 08 / 18</a:t>
             </a:r>
-            <a:endParaRPr lang="en-US" sz="950" dirty="0"/>
+            <a:endParaRPr lang="en-US" sz="1100" dirty="0"/>
           </a:p>
         </p:txBody>
       </p:sp>
@@ -27084,7 +27084,7 @@
               <a:buNone/>
             </a:pPr>
             <a:r>
-              <a:rPr lang="en-US" sz="1450" b="1" dirty="0">
+              <a:rPr lang="en-US" sz="1650" b="1" dirty="0">
                 <a:solidFill>
                   <a:srgbClr val="0F172A"/>
                 </a:solidFill>
@@ -27094,7 +27094,7 @@
               </a:rPr>
               <a:t>🔒  Khóa Cứng Hạn Mức Tài Nguyên</a:t>
             </a:r>
-            <a:endParaRPr lang="en-US" sz="1450" dirty="0"/>
+            <a:endParaRPr lang="en-US" sz="1650" dirty="0"/>
           </a:p>
         </p:txBody>
       </p:sp>
@@ -27123,7 +27123,7 @@
               <a:buNone/>
             </a:pPr>
             <a:r>
-              <a:rPr lang="en-US" sz="950" b="1" dirty="0">
+              <a:rPr lang="en-US" sz="1250" b="1" dirty="0">
                 <a:solidFill>
                   <a:srgbClr val="334155"/>
                 </a:solidFill>
@@ -27133,7 +27133,7 @@
               </a:rPr>
               <a:t>Chiến lược kiểm soát tuyệt đối công nhân hệ điều hành</a:t>
             </a:r>
-            <a:endParaRPr lang="en-US" sz="950" dirty="0"/>
+            <a:endParaRPr lang="en-US" sz="1250" dirty="0"/>
           </a:p>
         </p:txBody>
       </p:sp>
@@ -27189,7 +27189,7 @@
               <a:buNone/>
             </a:pPr>
             <a:r>
-              <a:rPr lang="en-US" sz="800" b="1" dirty="0">
+              <a:rPr lang="en-US" sz="1150" b="1" dirty="0">
                 <a:solidFill>
                   <a:srgbClr val="1D4ED8"/>
                 </a:solidFill>
@@ -27199,7 +27199,7 @@
               </a:rPr>
               <a:t>CHUẨN DOANH NGHIỆP</a:t>
             </a:r>
-            <a:endParaRPr lang="en-US" sz="800" dirty="0"/>
+            <a:endParaRPr lang="en-US" sz="1150" dirty="0"/>
           </a:p>
         </p:txBody>
       </p:sp>
@@ -27278,7 +27278,7 @@
               <a:buNone/>
             </a:pPr>
             <a:r>
-              <a:rPr lang="en-US" sz="1600" b="1" dirty="0">
+              <a:rPr lang="en-US" sz="2200" b="1" dirty="0">
                 <a:solidFill>
                   <a:srgbClr val="1D4ED8"/>
                 </a:solidFill>
@@ -27290,14 +27290,14 @@
               <a:buNone/>
             </a:pPr>
             <a:r>
-              <a:rPr lang="en-US" sz="850" b="1" dirty="0">
+              <a:rPr lang="en-US" sz="1150" b="1" dirty="0">
                 <a:solidFill>
                   <a:srgbClr val="334155"/>
                 </a:solidFill>
               </a:rPr>
               <a:t>Chặn cứng số công nhân, không bao giờ sinh thêm</a:t>
             </a:r>
-            <a:endParaRPr lang="en-US" sz="1600" dirty="0"/>
+            <a:endParaRPr lang="en-US" sz="2200" dirty="0"/>
           </a:p>
         </p:txBody>
       </p:sp>
@@ -27353,7 +27353,7 @@
               <a:buNone/>
             </a:pPr>
             <a:r>
-              <a:rPr lang="en-US" sz="1600" b="1" dirty="0">
+              <a:rPr lang="en-US" sz="2200" b="1" dirty="0">
                 <a:solidFill>
                   <a:srgbClr val="1D4ED8"/>
                 </a:solidFill>
@@ -27365,14 +27365,14 @@
               <a:buNone/>
             </a:pPr>
             <a:r>
-              <a:rPr lang="en-US" sz="850" b="1" dirty="0">
+              <a:rPr lang="en-US" sz="1150" b="1" dirty="0">
                 <a:solidFill>
                   <a:srgbClr val="334155"/>
                 </a:solidFill>
               </a:rPr>
               <a:t>Thông lượng ổn định bền vững theo thời gian</a:t>
             </a:r>
-            <a:endParaRPr lang="en-US" sz="1600" dirty="0"/>
+            <a:endParaRPr lang="en-US" sz="2200" dirty="0"/>
           </a:p>
         </p:txBody>
       </p:sp>
@@ -27385,11 +27385,11 @@
         <p:spPr>
           <a:xfrm>
             <a:off x="777240" y="3145536"/>
-            <a:ext cx="4956048" cy="841248"/>
+            <a:ext cx="4956048" cy="960120"/>
           </a:xfrm>
           <a:prstGeom prst="roundRect">
             <a:avLst>
-              <a:gd name="adj" fmla="val 8696"/>
+              <a:gd name="adj" fmla="val 7619"/>
             </a:avLst>
           </a:prstGeom>
           <a:solidFill>
@@ -27412,7 +27412,7 @@
         <p:spPr>
           <a:xfrm>
             <a:off x="868680" y="3218688"/>
-            <a:ext cx="4773168" cy="694944"/>
+            <a:ext cx="4773168" cy="813816"/>
           </a:xfrm>
           <a:prstGeom prst="rect">
             <a:avLst/>
@@ -27428,7 +27428,7 @@
               <a:buNone/>
             </a:pPr>
             <a:r>
-              <a:rPr lang="en-US" sz="1100" b="1" dirty="0">
+              <a:rPr lang="en-US" sz="1400" b="1" dirty="0">
                 <a:solidFill>
                   <a:srgbClr val="0F172A"/>
                 </a:solidFill>
@@ -27440,14 +27440,14 @@
               <a:buNone/>
             </a:pPr>
             <a:r>
-              <a:rPr lang="en-US" sz="920" dirty="0">
+              <a:rPr lang="en-US" sz="1220" dirty="0">
                 <a:solidFill>
                   <a:srgbClr val="334155"/>
                 </a:solidFill>
               </a:rPr>
               <a:t>Công nhân làm xong việc không bị hủy mà quay lại nhận việc mới lập tức.</a:t>
             </a:r>
-            <a:endParaRPr lang="en-US" sz="1100" dirty="0"/>
+            <a:endParaRPr lang="en-US" sz="1400" dirty="0"/>
           </a:p>
         </p:txBody>
       </p:sp>
@@ -27459,12 +27459,12 @@
         </p:nvSpPr>
         <p:spPr>
           <a:xfrm>
-            <a:off x="777240" y="4078224"/>
-            <a:ext cx="4956048" cy="841248"/>
+            <a:off x="777240" y="4197096"/>
+            <a:ext cx="4956048" cy="960120"/>
           </a:xfrm>
           <a:prstGeom prst="roundRect">
             <a:avLst>
-              <a:gd name="adj" fmla="val 8696"/>
+              <a:gd name="adj" fmla="val 7619"/>
             </a:avLst>
           </a:prstGeom>
           <a:solidFill>
@@ -27486,8 +27486,8 @@
         </p:nvSpPr>
         <p:spPr>
           <a:xfrm>
-            <a:off x="868680" y="4151376"/>
-            <a:ext cx="4773168" cy="694944"/>
+            <a:off x="868680" y="4270248"/>
+            <a:ext cx="4773168" cy="813816"/>
           </a:xfrm>
           <a:prstGeom prst="rect">
             <a:avLst/>
@@ -27503,7 +27503,7 @@
               <a:buNone/>
             </a:pPr>
             <a:r>
-              <a:rPr lang="en-US" sz="1100" b="1" dirty="0">
+              <a:rPr lang="en-US" sz="1400" b="1" dirty="0">
                 <a:solidFill>
                   <a:srgbClr val="0F172A"/>
                 </a:solidFill>
@@ -27515,14 +27515,14 @@
               <a:buNone/>
             </a:pPr>
             <a:r>
-              <a:rPr lang="en-US" sz="920" dirty="0">
+              <a:rPr lang="en-US" sz="1220" dirty="0">
                 <a:solidFill>
                   <a:srgbClr val="334155"/>
                 </a:solidFill>
               </a:rPr>
               <a:t>Triệt tiêu hoàn toàn chi phí tạo luồng mới và bảo vệ lõi xử lý khỏi nghẽn.</a:t>
             </a:r>
-            <a:endParaRPr lang="en-US" sz="1100" dirty="0"/>
+            <a:endParaRPr lang="en-US" sz="1400" dirty="0"/>
           </a:p>
         </p:txBody>
       </p:sp>
@@ -27578,7 +27578,7 @@
               <a:buNone/>
             </a:pPr>
             <a:r>
-              <a:rPr lang="en-US" sz="880" b="1" dirty="0">
+              <a:rPr lang="en-US" sz="1150" b="1" dirty="0">
                 <a:solidFill>
                   <a:srgbClr val="1D4ED8"/>
                 </a:solidFill>
@@ -27588,7 +27588,7 @@
               </a:rPr>
               <a:t>✨ Ưu điểm: Mẫu thiết kế phòng ngự kinh điển của các hệ thống backend lớn</a:t>
             </a:r>
-            <a:endParaRPr lang="en-US" sz="880" dirty="0"/>
+            <a:endParaRPr lang="en-US" sz="1150" dirty="0"/>
           </a:p>
         </p:txBody>
       </p:sp>
@@ -27669,7 +27669,7 @@
               <a:buNone/>
             </a:pPr>
             <a:r>
-              <a:rPr lang="en-US" sz="1450" b="1" dirty="0">
+              <a:rPr lang="en-US" sz="1650" b="1" dirty="0">
                 <a:solidFill>
                   <a:srgbClr val="0F172A"/>
                 </a:solidFill>
@@ -27679,7 +27679,7 @@
               </a:rPr>
               <a:t>⚖️  Sự Đánh Đổi Thiết Kế (Trade-off)</a:t>
             </a:r>
-            <a:endParaRPr lang="en-US" sz="1450" dirty="0"/>
+            <a:endParaRPr lang="en-US" sz="1650" dirty="0"/>
           </a:p>
         </p:txBody>
       </p:sp>
@@ -27708,7 +27708,7 @@
               <a:buNone/>
             </a:pPr>
             <a:r>
-              <a:rPr lang="en-US" sz="950" b="1" dirty="0">
+              <a:rPr lang="en-US" sz="1250" b="1" dirty="0">
                 <a:solidFill>
                   <a:srgbClr val="334155"/>
                 </a:solidFill>
@@ -27718,7 +27718,7 @@
               </a:rPr>
               <a:t>Độ trễ hàng đợi và sự sống còn của máy chủ</a:t>
             </a:r>
-            <a:endParaRPr lang="en-US" sz="950" dirty="0"/>
+            <a:endParaRPr lang="en-US" sz="1250" dirty="0"/>
           </a:p>
         </p:txBody>
       </p:sp>
@@ -27774,7 +27774,7 @@
               <a:buNone/>
             </a:pPr>
             <a:r>
-              <a:rPr lang="en-US" sz="800" b="1" dirty="0">
+              <a:rPr lang="en-US" sz="1150" b="1" dirty="0">
                 <a:solidFill>
                   <a:srgbClr val="D97706"/>
                 </a:solidFill>
@@ -27784,7 +27784,7 @@
               </a:rPr>
               <a:t>QUEUING DELAY</a:t>
             </a:r>
-            <a:endParaRPr lang="en-US" sz="800" dirty="0"/>
+            <a:endParaRPr lang="en-US" sz="1150" dirty="0"/>
           </a:p>
         </p:txBody>
       </p:sp>
@@ -27863,7 +27863,7 @@
               <a:buNone/>
             </a:pPr>
             <a:r>
-              <a:rPr lang="en-US" sz="1600" b="1" dirty="0">
+              <a:rPr lang="en-US" sz="2200" b="1" dirty="0">
                 <a:solidFill>
                   <a:srgbClr val="D97706"/>
                 </a:solidFill>
@@ -27875,14 +27875,14 @@
               <a:buNone/>
             </a:pPr>
             <a:r>
-              <a:rPr lang="en-US" sz="850" b="1" dirty="0">
+              <a:rPr lang="en-US" sz="1150" b="1" dirty="0">
                 <a:solidFill>
                   <a:srgbClr val="334155"/>
                 </a:solidFill>
               </a:rPr>
               <a:t>Dung lượng hàng ghế chờ đệm an toàn</a:t>
             </a:r>
-            <a:endParaRPr lang="en-US" sz="1600" dirty="0"/>
+            <a:endParaRPr lang="en-US" sz="2200" dirty="0"/>
           </a:p>
         </p:txBody>
       </p:sp>
@@ -27938,7 +27938,7 @@
               <a:buNone/>
             </a:pPr>
             <a:r>
-              <a:rPr lang="en-US" sz="1600" b="1" dirty="0">
+              <a:rPr lang="en-US" sz="2200" b="1" dirty="0">
                 <a:solidFill>
                   <a:srgbClr val="D97706"/>
                 </a:solidFill>
@@ -27950,14 +27950,14 @@
               <a:buNone/>
             </a:pPr>
             <a:r>
-              <a:rPr lang="en-US" sz="850" b="1" dirty="0">
+              <a:rPr lang="en-US" sz="1150" b="1" dirty="0">
                 <a:solidFill>
                   <a:srgbClr val="334155"/>
                 </a:solidFill>
               </a:rPr>
               <a:t>Độ trễ tăng nhẹ khi khách vượt số luồng</a:t>
             </a:r>
-            <a:endParaRPr lang="en-US" sz="1600" dirty="0"/>
+            <a:endParaRPr lang="en-US" sz="2200" dirty="0"/>
           </a:p>
         </p:txBody>
       </p:sp>
@@ -27970,11 +27970,11 @@
         <p:spPr>
           <a:xfrm>
             <a:off x="6455664" y="3145536"/>
-            <a:ext cx="4956048" cy="841248"/>
+            <a:ext cx="4956048" cy="960120"/>
           </a:xfrm>
           <a:prstGeom prst="roundRect">
             <a:avLst>
-              <a:gd name="adj" fmla="val 8696"/>
+              <a:gd name="adj" fmla="val 7619"/>
             </a:avLst>
           </a:prstGeom>
           <a:solidFill>
@@ -27997,7 +27997,7 @@
         <p:spPr>
           <a:xfrm>
             <a:off x="6547104" y="3218688"/>
-            <a:ext cx="4773168" cy="694944"/>
+            <a:ext cx="4773168" cy="813816"/>
           </a:xfrm>
           <a:prstGeom prst="rect">
             <a:avLst/>
@@ -28013,7 +28013,7 @@
               <a:buNone/>
             </a:pPr>
             <a:r>
-              <a:rPr lang="en-US" sz="1100" b="1" dirty="0">
+              <a:rPr lang="en-US" sz="1400" b="1" dirty="0">
                 <a:solidFill>
                   <a:srgbClr val="0F172A"/>
                 </a:solidFill>
@@ -28025,14 +28025,14 @@
               <a:buNone/>
             </a:pPr>
             <a:r>
-              <a:rPr lang="en-US" sz="920" dirty="0">
+              <a:rPr lang="en-US" sz="1220" dirty="0">
                 <a:solidFill>
                   <a:srgbClr val="334155"/>
                 </a:solidFill>
               </a:rPr>
               <a:t>Khách thứ 17 trở đi phải ngồi chờ trong hàng ghế, phát sinh độ trễ xếp hàng.</a:t>
             </a:r>
-            <a:endParaRPr lang="en-US" sz="1100" dirty="0"/>
+            <a:endParaRPr lang="en-US" sz="1400" dirty="0"/>
           </a:p>
         </p:txBody>
       </p:sp>
@@ -28044,12 +28044,12 @@
         </p:nvSpPr>
         <p:spPr>
           <a:xfrm>
-            <a:off x="6455664" y="4078224"/>
-            <a:ext cx="4956048" cy="841248"/>
+            <a:off x="6455664" y="4197096"/>
+            <a:ext cx="4956048" cy="960120"/>
           </a:xfrm>
           <a:prstGeom prst="roundRect">
             <a:avLst>
-              <a:gd name="adj" fmla="val 8696"/>
+              <a:gd name="adj" fmla="val 7619"/>
             </a:avLst>
           </a:prstGeom>
           <a:solidFill>
@@ -28071,8 +28071,8 @@
         </p:nvSpPr>
         <p:spPr>
           <a:xfrm>
-            <a:off x="6547104" y="4151376"/>
-            <a:ext cx="4773168" cy="694944"/>
+            <a:off x="6547104" y="4270248"/>
+            <a:ext cx="4773168" cy="813816"/>
           </a:xfrm>
           <a:prstGeom prst="rect">
             <a:avLst/>
@@ -28088,7 +28088,7 @@
               <a:buNone/>
             </a:pPr>
             <a:r>
-              <a:rPr lang="en-US" sz="1100" b="1" dirty="0">
+              <a:rPr lang="en-US" sz="1400" b="1" dirty="0">
                 <a:solidFill>
                   <a:srgbClr val="0F172A"/>
                 </a:solidFill>
@@ -28100,14 +28100,14 @@
               <a:buNone/>
             </a:pPr>
             <a:r>
-              <a:rPr lang="en-US" sz="920" dirty="0">
+              <a:rPr lang="en-US" sz="1220" dirty="0">
                 <a:solidFill>
                   <a:srgbClr val="334155"/>
                 </a:solidFill>
               </a:rPr>
               <a:t>Thà để khách đợi thêm vài chục mili-giây còn hơn để sập máy chủ toàn diện.</a:t>
             </a:r>
-            <a:endParaRPr lang="en-US" sz="1100" dirty="0"/>
+            <a:endParaRPr lang="en-US" sz="1400" dirty="0"/>
           </a:p>
         </p:txBody>
       </p:sp>
@@ -28163,7 +28163,7 @@
               <a:buNone/>
             </a:pPr>
             <a:r>
-              <a:rPr lang="en-US" sz="880" b="1" dirty="0">
+              <a:rPr lang="en-US" sz="1150" b="1" dirty="0">
                 <a:solidFill>
                   <a:srgbClr val="D97706"/>
                 </a:solidFill>
@@ -28173,7 +28173,7 @@
               </a:rPr>
               <a:t>💡 Cốt lõi: Duy trì tính toàn vẹn và sự sẵn sàng liên tục của dịch vụ</a:t>
             </a:r>
-            <a:endParaRPr lang="en-US" sz="880" dirty="0"/>
+            <a:endParaRPr lang="en-US" sz="1150" dirty="0"/>
           </a:p>
         </p:txBody>
       </p:sp>
@@ -28249,7 +28249,7 @@
               <a:buNone/>
             </a:pPr>
             <a:r>
-              <a:rPr lang="en-US" sz="1100" dirty="0">
+              <a:rPr lang="en-US" sz="1350" dirty="0">
                 <a:solidFill>
                   <a:srgbClr val="0F172A"/>
                 </a:solidFill>
@@ -28259,7 +28259,7 @@
               </a:rPr>
               <a:t>🏢 BÀI HỌC VẬN HÀNH: Thread Pool là lá chắn phòng thủ số 1 của mọi kiến trúc máy chủ mạng. Nó tách rời số lượng khách kết nối ra khỏi số lượng luồng vật lý!</a:t>
             </a:r>
-            <a:endParaRPr lang="en-US" sz="1100" dirty="0"/>
+            <a:endParaRPr lang="en-US" sz="1350" dirty="0"/>
           </a:p>
         </p:txBody>
       </p:sp>
@@ -28347,7 +28347,7 @@
               <a:buNone/>
             </a:pPr>
             <a:r>
-              <a:rPr lang="en-US" sz="900" b="1" dirty="0">
+              <a:rPr lang="en-US" sz="1100" b="1" dirty="0">
                 <a:solidFill>
                   <a:srgbClr val="1D4ED8"/>
                 </a:solidFill>
@@ -28357,7 +28357,7 @@
               </a:rPr>
               <a:t>CƠ CHẾ BẢO VỆ HỆ THỐNG</a:t>
             </a:r>
-            <a:endParaRPr lang="en-US" sz="900" dirty="0"/>
+            <a:endParaRPr lang="en-US" sz="1100" dirty="0"/>
           </a:p>
         </p:txBody>
       </p:sp>
@@ -28425,7 +28425,7 @@
               <a:buNone/>
             </a:pPr>
             <a:r>
-              <a:rPr lang="en-US" sz="1100" b="1" dirty="0">
+              <a:rPr lang="en-US" sz="1350" b="1" dirty="0">
                 <a:solidFill>
                   <a:srgbClr val="334155"/>
                 </a:solidFill>
@@ -28435,7 +28435,7 @@
               </a:rPr>
               <a:t>Bảo vệ máy chủ không bao giờ bị Crash khi đối mặt với các đợt bắn tải đột biến</a:t>
             </a:r>
-            <a:endParaRPr lang="en-US" sz="1100" dirty="0"/>
+            <a:endParaRPr lang="en-US" sz="1350" dirty="0"/>
           </a:p>
         </p:txBody>
       </p:sp>
@@ -28491,7 +28491,7 @@
               <a:buNone/>
             </a:pPr>
             <a:r>
-              <a:rPr lang="en-US" sz="1000" b="1" dirty="0">
+              <a:rPr lang="en-US" sz="1150" b="1" dirty="0">
                 <a:solidFill>
                   <a:srgbClr val="1D4ED8"/>
                 </a:solidFill>
@@ -28501,7 +28501,7 @@
               </a:rPr>
               <a:t>09 / 18</a:t>
             </a:r>
-            <a:endParaRPr lang="en-US" sz="1000" dirty="0"/>
+            <a:endParaRPr lang="en-US" sz="1150" dirty="0"/>
           </a:p>
         </p:txBody>
       </p:sp>
@@ -28553,7 +28553,7 @@
               <a:buNone/>
             </a:pPr>
             <a:r>
-              <a:rPr lang="en-US" sz="950" b="1" dirty="0">
+              <a:rPr lang="en-US" sz="1100" b="1" dirty="0">
                 <a:solidFill>
                   <a:srgbClr val="475569"/>
                 </a:solidFill>
@@ -28563,7 +28563,7 @@
               </a:rPr>
               <a:t>PTIT TELECOM • Khoa Công nghệ Thông tin • Đề Tài T45: Multi-Threading Patterns</a:t>
             </a:r>
-            <a:endParaRPr lang="en-US" sz="950" dirty="0"/>
+            <a:endParaRPr lang="en-US" sz="1100" dirty="0"/>
           </a:p>
         </p:txBody>
       </p:sp>
@@ -28592,7 +28592,7 @@
               <a:buNone/>
             </a:pPr>
             <a:r>
-              <a:rPr lang="en-US" sz="950" b="1" dirty="0">
+              <a:rPr lang="en-US" sz="1100" b="1" dirty="0">
                 <a:solidFill>
                   <a:srgbClr val="1D4ED8"/>
                 </a:solidFill>
@@ -28602,7 +28602,7 @@
               </a:rPr>
               <a:t>Slide 09 / 18</a:t>
             </a:r>
-            <a:endParaRPr lang="en-US" sz="950" dirty="0"/>
+            <a:endParaRPr lang="en-US" sz="1100" dirty="0"/>
           </a:p>
         </p:txBody>
       </p:sp>
@@ -28683,7 +28683,7 @@
               <a:buNone/>
             </a:pPr>
             <a:r>
-              <a:rPr lang="en-US" sz="1450" b="1" dirty="0">
+              <a:rPr lang="en-US" sz="1650" b="1" dirty="0">
                 <a:solidFill>
                   <a:srgbClr val="0F172A"/>
                 </a:solidFill>
@@ -28693,7 +28693,7 @@
               </a:rPr>
               <a:t>⚠️  Hiểm Họa Của Hàng Đợi Vô Hạn</a:t>
             </a:r>
-            <a:endParaRPr lang="en-US" sz="1450" dirty="0"/>
+            <a:endParaRPr lang="en-US" sz="1650" dirty="0"/>
           </a:p>
         </p:txBody>
       </p:sp>
@@ -28722,7 +28722,7 @@
               <a:buNone/>
             </a:pPr>
             <a:r>
-              <a:rPr lang="en-US" sz="950" b="1" dirty="0">
+              <a:rPr lang="en-US" sz="1250" b="1" dirty="0">
                 <a:solidFill>
                   <a:srgbClr val="334155"/>
                 </a:solidFill>
@@ -28732,7 +28732,7 @@
               </a:rPr>
               <a:t>Cái bẫy Unbounded Queue nuốt trọn bộ nhớ RAM</a:t>
             </a:r>
-            <a:endParaRPr lang="en-US" sz="950" dirty="0"/>
+            <a:endParaRPr lang="en-US" sz="1250" dirty="0"/>
           </a:p>
         </p:txBody>
       </p:sp>
@@ -28788,7 +28788,7 @@
               <a:buNone/>
             </a:pPr>
             <a:r>
-              <a:rPr lang="en-US" sz="800" b="1" dirty="0">
+              <a:rPr lang="en-US" sz="1150" b="1" dirty="0">
                 <a:solidFill>
                   <a:srgbClr val="E11D48"/>
                 </a:solidFill>
@@ -28798,7 +28798,7 @@
               </a:rPr>
               <a:t>UNBOUNDED QUEUE</a:t>
             </a:r>
-            <a:endParaRPr lang="en-US" sz="800" dirty="0"/>
+            <a:endParaRPr lang="en-US" sz="1150" dirty="0"/>
           </a:p>
         </p:txBody>
       </p:sp>
@@ -28877,7 +28877,7 @@
               <a:buNone/>
             </a:pPr>
             <a:r>
-              <a:rPr lang="en-US" sz="1600" b="1" dirty="0">
+              <a:rPr lang="en-US" sz="2200" b="1" dirty="0">
                 <a:solidFill>
                   <a:srgbClr val="E11D48"/>
                 </a:solidFill>
@@ -28889,14 +28889,14 @@
               <a:buNone/>
             </a:pPr>
             <a:r>
-              <a:rPr lang="en-US" sz="850" b="1" dirty="0">
+              <a:rPr lang="en-US" sz="1150" b="1" dirty="0">
                 <a:solidFill>
                   <a:srgbClr val="334155"/>
                 </a:solidFill>
               </a:rPr>
               <a:t>Hàng đợi phình to không đáy nuốt trọn bộ nhớ</a:t>
             </a:r>
-            <a:endParaRPr lang="en-US" sz="1600" dirty="0"/>
+            <a:endParaRPr lang="en-US" sz="2200" dirty="0"/>
           </a:p>
         </p:txBody>
       </p:sp>
@@ -28952,7 +28952,7 @@
               <a:buNone/>
             </a:pPr>
             <a:r>
-              <a:rPr lang="en-US" sz="1600" b="1" dirty="0">
+              <a:rPr lang="en-US" sz="2200" b="1" dirty="0">
                 <a:solidFill>
                   <a:srgbClr val="E11D48"/>
                 </a:solidFill>
@@ -28964,14 +28964,14 @@
               <a:buNone/>
             </a:pPr>
             <a:r>
-              <a:rPr lang="en-US" sz="850" b="1" dirty="0">
+              <a:rPr lang="en-US" sz="1150" b="1" dirty="0">
                 <a:solidFill>
                   <a:srgbClr val="334155"/>
                 </a:solidFill>
               </a:rPr>
               <a:t>Khách đợi hàng chục giây nhưng không được xử lý</a:t>
             </a:r>
-            <a:endParaRPr lang="en-US" sz="1600" dirty="0"/>
+            <a:endParaRPr lang="en-US" sz="2200" dirty="0"/>
           </a:p>
         </p:txBody>
       </p:sp>
@@ -28984,11 +28984,11 @@
         <p:spPr>
           <a:xfrm>
             <a:off x="777240" y="3145536"/>
-            <a:ext cx="4956048" cy="841248"/>
+            <a:ext cx="4956048" cy="960120"/>
           </a:xfrm>
           <a:prstGeom prst="roundRect">
             <a:avLst>
-              <a:gd name="adj" fmla="val 8696"/>
+              <a:gd name="adj" fmla="val 7619"/>
             </a:avLst>
           </a:prstGeom>
           <a:solidFill>
@@ -29011,7 +29011,7 @@
         <p:spPr>
           <a:xfrm>
             <a:off x="868680" y="3218688"/>
-            <a:ext cx="4773168" cy="694944"/>
+            <a:ext cx="4773168" cy="813816"/>
           </a:xfrm>
           <a:prstGeom prst="rect">
             <a:avLst/>
@@ -29027,7 +29027,7 @@
               <a:buNone/>
             </a:pPr>
             <a:r>
-              <a:rPr lang="en-US" sz="1100" b="1" dirty="0">
+              <a:rPr lang="en-US" sz="1400" b="1" dirty="0">
                 <a:solidFill>
                   <a:srgbClr val="0F172A"/>
                 </a:solidFill>
@@ -29039,14 +29039,14 @@
               <a:buNone/>
             </a:pPr>
             <a:r>
-              <a:rPr lang="en-US" sz="920" dirty="0">
+              <a:rPr lang="en-US" sz="1220" dirty="0">
                 <a:solidFill>
                   <a:srgbClr val="334155"/>
                 </a:solidFill>
               </a:rPr>
               <a:t>Khi hàng chục ngàn yêu cầu ập vào, bộ nhớ Heap bị quá tải dẫn đến tràn RAM.</a:t>
             </a:r>
-            <a:endParaRPr lang="en-US" sz="1100" dirty="0"/>
+            <a:endParaRPr lang="en-US" sz="1400" dirty="0"/>
           </a:p>
         </p:txBody>
       </p:sp>
@@ -29058,12 +29058,12 @@
         </p:nvSpPr>
         <p:spPr>
           <a:xfrm>
-            <a:off x="777240" y="4078224"/>
-            <a:ext cx="4956048" cy="841248"/>
+            <a:off x="777240" y="4197096"/>
+            <a:ext cx="4956048" cy="960120"/>
           </a:xfrm>
           <a:prstGeom prst="roundRect">
             <a:avLst>
-              <a:gd name="adj" fmla="val 8696"/>
+              <a:gd name="adj" fmla="val 7619"/>
             </a:avLst>
           </a:prstGeom>
           <a:solidFill>
@@ -29085,8 +29085,8 @@
         </p:nvSpPr>
         <p:spPr>
           <a:xfrm>
-            <a:off x="868680" y="4151376"/>
-            <a:ext cx="4773168" cy="694944"/>
+            <a:off x="868680" y="4270248"/>
+            <a:ext cx="4773168" cy="813816"/>
           </a:xfrm>
           <a:prstGeom prst="rect">
             <a:avLst/>
@@ -29102,7 +29102,7 @@
               <a:buNone/>
             </a:pPr>
             <a:r>
-              <a:rPr lang="en-US" sz="1100" b="1" dirty="0">
+              <a:rPr lang="en-US" sz="1400" b="1" dirty="0">
                 <a:solidFill>
                   <a:srgbClr val="0F172A"/>
                 </a:solidFill>
@@ -29114,14 +29114,14 @@
               <a:buNone/>
             </a:pPr>
             <a:r>
-              <a:rPr lang="en-US" sz="920" dirty="0">
+              <a:rPr lang="en-US" sz="1220" dirty="0">
                 <a:solidFill>
                   <a:srgbClr val="334155"/>
                 </a:solidFill>
               </a:rPr>
               <a:t>Máy chủ sập khiến mọi khách hàng đang được phục vụ đều mất kết nối đột ngột.</a:t>
             </a:r>
-            <a:endParaRPr lang="en-US" sz="1100" dirty="0"/>
+            <a:endParaRPr lang="en-US" sz="1400" dirty="0"/>
           </a:p>
         </p:txBody>
       </p:sp>
@@ -29177,7 +29177,7 @@
               <a:buNone/>
             </a:pPr>
             <a:r>
-              <a:rPr lang="en-US" sz="880" b="1" dirty="0">
+              <a:rPr lang="en-US" sz="1150" b="1" dirty="0">
                 <a:solidFill>
                   <a:srgbClr val="E11D48"/>
                 </a:solidFill>
@@ -29187,7 +29187,7 @@
               </a:rPr>
               <a:t>🛑 Sai lầm lớn: Sử dụng hàng đợi không giới hạn (Unbounded) trong sản phẩm thực tế</a:t>
             </a:r>
-            <a:endParaRPr lang="en-US" sz="880" dirty="0"/>
+            <a:endParaRPr lang="en-US" sz="1150" dirty="0"/>
           </a:p>
         </p:txBody>
       </p:sp>
@@ -29268,7 +29268,7 @@
               <a:buNone/>
             </a:pPr>
             <a:r>
-              <a:rPr lang="en-US" sz="1450" b="1" dirty="0">
+              <a:rPr lang="en-US" sz="1650" b="1" dirty="0">
                 <a:solidFill>
                   <a:srgbClr val="0F172A"/>
                 </a:solidFill>
@@ -29278,7 +29278,7 @@
               </a:rPr>
               <a:t>🛡️  Van Xả Áp Chủ Động (Fail-Fast)</a:t>
             </a:r>
-            <a:endParaRPr lang="en-US" sz="1450" dirty="0"/>
+            <a:endParaRPr lang="en-US" sz="1650" dirty="0"/>
           </a:p>
         </p:txBody>
       </p:sp>
@@ -29307,7 +29307,7 @@
               <a:buNone/>
             </a:pPr>
             <a:r>
-              <a:rPr lang="en-US" sz="950" b="1" dirty="0">
+              <a:rPr lang="en-US" sz="1250" b="1" dirty="0">
                 <a:solidFill>
                   <a:srgbClr val="334155"/>
                 </a:solidFill>
@@ -29317,7 +29317,7 @@
               </a:rPr>
               <a:t>Cơ chế từ chối nhanh cứu sống máy chủ</a:t>
             </a:r>
-            <a:endParaRPr lang="en-US" sz="950" dirty="0"/>
+            <a:endParaRPr lang="en-US" sz="1250" dirty="0"/>
           </a:p>
         </p:txBody>
       </p:sp>
@@ -29373,7 +29373,7 @@
               <a:buNone/>
             </a:pPr>
             <a:r>
-              <a:rPr lang="en-US" sz="800" b="1" dirty="0">
+              <a:rPr lang="en-US" sz="1150" b="1" dirty="0">
                 <a:solidFill>
                   <a:srgbClr val="059669"/>
                 </a:solidFill>
@@ -29383,7 +29383,7 @@
               </a:rPr>
               <a:t>HTTP 503 SERVICE UNAVAILABLE</a:t>
             </a:r>
-            <a:endParaRPr lang="en-US" sz="800" dirty="0"/>
+            <a:endParaRPr lang="en-US" sz="1150" dirty="0"/>
           </a:p>
         </p:txBody>
       </p:sp>
@@ -29462,7 +29462,7 @@
               <a:buNone/>
             </a:pPr>
             <a:r>
-              <a:rPr lang="en-US" sz="1600" b="1" dirty="0">
+              <a:rPr lang="en-US" sz="2200" b="1" dirty="0">
                 <a:solidFill>
                   <a:srgbClr val="059669"/>
                 </a:solidFill>
@@ -29474,14 +29474,14 @@
               <a:buNone/>
             </a:pPr>
             <a:r>
-              <a:rPr lang="en-US" sz="850" b="1" dirty="0">
+              <a:rPr lang="en-US" sz="1150" b="1" dirty="0">
                 <a:solidFill>
                   <a:srgbClr val="334155"/>
                 </a:solidFill>
               </a:rPr>
               <a:t>Từ chối dứt khoát ngay lập tức khi ghế chờ đầy</a:t>
             </a:r>
-            <a:endParaRPr lang="en-US" sz="1600" dirty="0"/>
+            <a:endParaRPr lang="en-US" sz="2200" dirty="0"/>
           </a:p>
         </p:txBody>
       </p:sp>
@@ -29537,7 +29537,7 @@
               <a:buNone/>
             </a:pPr>
             <a:r>
-              <a:rPr lang="en-US" sz="1600" b="1" dirty="0">
+              <a:rPr lang="en-US" sz="2200" b="1" dirty="0">
                 <a:solidFill>
                   <a:srgbClr val="059669"/>
                 </a:solidFill>
@@ -29549,14 +29549,14 @@
               <a:buNone/>
             </a:pPr>
             <a:r>
-              <a:rPr lang="en-US" sz="850" b="1" dirty="0">
+              <a:rPr lang="en-US" sz="1150" b="1" dirty="0">
                 <a:solidFill>
                   <a:srgbClr val="334155"/>
                 </a:solidFill>
               </a:rPr>
               <a:t>Bảo vệ an toàn tuyệt đối các khách đang phục vụ</a:t>
             </a:r>
-            <a:endParaRPr lang="en-US" sz="1600" dirty="0"/>
+            <a:endParaRPr lang="en-US" sz="2200" dirty="0"/>
           </a:p>
         </p:txBody>
       </p:sp>
@@ -29569,11 +29569,11 @@
         <p:spPr>
           <a:xfrm>
             <a:off x="6455664" y="3145536"/>
-            <a:ext cx="4956048" cy="841248"/>
+            <a:ext cx="4956048" cy="960120"/>
           </a:xfrm>
           <a:prstGeom prst="roundRect">
             <a:avLst>
-              <a:gd name="adj" fmla="val 8696"/>
+              <a:gd name="adj" fmla="val 7619"/>
             </a:avLst>
           </a:prstGeom>
           <a:solidFill>
@@ -29596,7 +29596,7 @@
         <p:spPr>
           <a:xfrm>
             <a:off x="6547104" y="3218688"/>
-            <a:ext cx="4773168" cy="694944"/>
+            <a:ext cx="4773168" cy="813816"/>
           </a:xfrm>
           <a:prstGeom prst="rect">
             <a:avLst/>
@@ -29612,7 +29612,7 @@
               <a:buNone/>
             </a:pPr>
             <a:r>
-              <a:rPr lang="en-US" sz="1100" b="1" dirty="0">
+              <a:rPr lang="en-US" sz="1400" b="1" dirty="0">
                 <a:solidFill>
                   <a:srgbClr val="0F172A"/>
                 </a:solidFill>
@@ -29624,14 +29624,14 @@
               <a:buNone/>
             </a:pPr>
             <a:r>
-              <a:rPr lang="en-US" sz="920" dirty="0">
+              <a:rPr lang="en-US" sz="1220" dirty="0">
                 <a:solidFill>
                   <a:srgbClr val="334155"/>
                 </a:solidFill>
               </a:rPr>
               <a:t>Trả về mã HTTP 503 cùng hẹn thử lại sau 2s, giúp client biết đường xoay xở.</a:t>
             </a:r>
-            <a:endParaRPr lang="en-US" sz="1100" dirty="0"/>
+            <a:endParaRPr lang="en-US" sz="1400" dirty="0"/>
           </a:p>
         </p:txBody>
       </p:sp>
@@ -29643,12 +29643,12 @@
         </p:nvSpPr>
         <p:spPr>
           <a:xfrm>
-            <a:off x="6455664" y="4078224"/>
-            <a:ext cx="4956048" cy="841248"/>
+            <a:off x="6455664" y="4197096"/>
+            <a:ext cx="4956048" cy="960120"/>
           </a:xfrm>
           <a:prstGeom prst="roundRect">
             <a:avLst>
-              <a:gd name="adj" fmla="val 8696"/>
+              <a:gd name="adj" fmla="val 7619"/>
             </a:avLst>
           </a:prstGeom>
           <a:solidFill>
@@ -29670,8 +29670,8 @@
         </p:nvSpPr>
         <p:spPr>
           <a:xfrm>
-            <a:off x="6547104" y="4151376"/>
-            <a:ext cx="4773168" cy="694944"/>
+            <a:off x="6547104" y="4270248"/>
+            <a:ext cx="4773168" cy="813816"/>
           </a:xfrm>
           <a:prstGeom prst="rect">
             <a:avLst/>
@@ -29687,7 +29687,7 @@
               <a:buNone/>
             </a:pPr>
             <a:r>
-              <a:rPr lang="en-US" sz="1100" b="1" dirty="0">
+              <a:rPr lang="en-US" sz="1400" b="1" dirty="0">
                 <a:solidFill>
                   <a:srgbClr val="0F172A"/>
                 </a:solidFill>
@@ -29699,14 +29699,14 @@
               <a:buNone/>
             </a:pPr>
             <a:r>
-              <a:rPr lang="en-US" sz="920" dirty="0">
+              <a:rPr lang="en-US" sz="1220" dirty="0">
                 <a:solidFill>
                   <a:srgbClr val="334155"/>
                 </a:solidFill>
               </a:rPr>
               <a:t>Hy sinh từ chối yêu cầu vượt ngưỡng để giữ cho máy chủ luôn duy trì nhịp thở.</a:t>
             </a:r>
-            <a:endParaRPr lang="en-US" sz="1100" dirty="0"/>
+            <a:endParaRPr lang="en-US" sz="1400" dirty="0"/>
           </a:p>
         </p:txBody>
       </p:sp>
@@ -29762,7 +29762,7 @@
               <a:buNone/>
             </a:pPr>
             <a:r>
-              <a:rPr lang="en-US" sz="880" b="1" dirty="0">
+              <a:rPr lang="en-US" sz="1150" b="1" dirty="0">
                 <a:solidFill>
                   <a:srgbClr val="059669"/>
                 </a:solidFill>
@@ -29772,7 +29772,7 @@
               </a:rPr>
               <a:t>🚀 Giá trị kỹ thuật: Triệt tiêu nguy cơ sập máy chủ trước các cuộc tấn công đột biến</a:t>
             </a:r>
-            <a:endParaRPr lang="en-US" sz="880" dirty="0"/>
+            <a:endParaRPr lang="en-US" sz="1150" dirty="0"/>
           </a:p>
         </p:txBody>
       </p:sp>
@@ -29848,7 +29848,7 @@
               <a:buNone/>
             </a:pPr>
             <a:r>
-              <a:rPr lang="en-US" sz="1100" dirty="0">
+              <a:rPr lang="en-US" sz="1350" dirty="0">
                 <a:solidFill>
                   <a:srgbClr val="0F172A"/>
                 </a:solidFill>
@@ -29858,7 +29858,7 @@
               </a:rPr>
               <a:t>🛡️ TRIẾT LÝ BACKPRESSURE: Từ chối nhanh (Fail-Fast) một số yêu cầu văn minh hơn nhiều so với việc nhận bừa để rồi sập toàn bộ hệ thống!</a:t>
             </a:r>
-            <a:endParaRPr lang="en-US" sz="1100" dirty="0"/>
+            <a:endParaRPr lang="en-US" sz="1350" dirty="0"/>
           </a:p>
         </p:txBody>
       </p:sp>
@@ -29946,7 +29946,7 @@
               <a:buNone/>
             </a:pPr>
             <a:r>
-              <a:rPr lang="en-US" sz="900" b="1" dirty="0">
+              <a:rPr lang="en-US" sz="1100" b="1" dirty="0">
                 <a:solidFill>
                   <a:srgbClr val="1D4ED8"/>
                 </a:solidFill>
@@ -29956,7 +29956,7 @@
               </a:rPr>
               <a:t>ĐIỂM SÁNG KỸ THUẬT 30% • TỰ CHỦ CÔNG NGHỆ</a:t>
             </a:r>
-            <a:endParaRPr lang="en-US" sz="900" dirty="0"/>
+            <a:endParaRPr lang="en-US" sz="1100" dirty="0"/>
           </a:p>
         </p:txBody>
       </p:sp>
@@ -30024,7 +30024,7 @@
               <a:buNone/>
             </a:pPr>
             <a:r>
-              <a:rPr lang="en-US" sz="1100" b="1" dirty="0">
+              <a:rPr lang="en-US" sz="1350" b="1" dirty="0">
                 <a:solidFill>
                   <a:srgbClr val="334155"/>
                 </a:solidFill>
@@ -30034,7 +30034,7 @@
               </a:rPr>
               <a:t>Điểm sáng kỹ thuật: Tự lập trình trọn vẹn giải thuật và cơ chế điều phối không dùng thư viện có sẵn</a:t>
             </a:r>
-            <a:endParaRPr lang="en-US" sz="1100" dirty="0"/>
+            <a:endParaRPr lang="en-US" sz="1350" dirty="0"/>
           </a:p>
         </p:txBody>
       </p:sp>
@@ -30090,7 +30090,7 @@
               <a:buNone/>
             </a:pPr>
             <a:r>
-              <a:rPr lang="en-US" sz="1000" b="1" dirty="0">
+              <a:rPr lang="en-US" sz="1150" b="1" dirty="0">
                 <a:solidFill>
                   <a:srgbClr val="1D4ED8"/>
                 </a:solidFill>
@@ -30100,7 +30100,7 @@
               </a:rPr>
               <a:t>10 / 18</a:t>
             </a:r>
-            <a:endParaRPr lang="en-US" sz="1000" dirty="0"/>
+            <a:endParaRPr lang="en-US" sz="1150" dirty="0"/>
           </a:p>
         </p:txBody>
       </p:sp>
@@ -30152,7 +30152,7 @@
               <a:buNone/>
             </a:pPr>
             <a:r>
-              <a:rPr lang="en-US" sz="950" b="1" dirty="0">
+              <a:rPr lang="en-US" sz="1100" b="1" dirty="0">
                 <a:solidFill>
                   <a:srgbClr val="475569"/>
                 </a:solidFill>
@@ -30162,7 +30162,7 @@
               </a:rPr>
               <a:t>PTIT TELECOM • Khoa Công nghệ Thông tin • Đề Tài T45: Multi-Threading Patterns</a:t>
             </a:r>
-            <a:endParaRPr lang="en-US" sz="950" dirty="0"/>
+            <a:endParaRPr lang="en-US" sz="1100" dirty="0"/>
           </a:p>
         </p:txBody>
       </p:sp>
@@ -30191,7 +30191,7 @@
               <a:buNone/>
             </a:pPr>
             <a:r>
-              <a:rPr lang="en-US" sz="950" b="1" dirty="0">
+              <a:rPr lang="en-US" sz="1100" b="1" dirty="0">
                 <a:solidFill>
                   <a:srgbClr val="1D4ED8"/>
                 </a:solidFill>
@@ -30201,7 +30201,7 @@
               </a:rPr>
               <a:t>Slide 10 / 18</a:t>
             </a:r>
-            <a:endParaRPr lang="en-US" sz="950" dirty="0"/>
+            <a:endParaRPr lang="en-US" sz="1100" dirty="0"/>
           </a:p>
         </p:txBody>
       </p:sp>
@@ -30282,7 +30282,7 @@
               <a:buNone/>
             </a:pPr>
             <a:r>
-              <a:rPr lang="en-US" sz="1450" b="1" dirty="0">
+              <a:rPr lang="en-US" sz="1650" b="1" dirty="0">
                 <a:solidFill>
                   <a:srgbClr val="0F172A"/>
                 </a:solidFill>
@@ -30292,7 +30292,7 @@
               </a:rPr>
               <a:t>🍣  Băng Chuyền Vòng Khép Kín O(1)</a:t>
             </a:r>
-            <a:endParaRPr lang="en-US" sz="1450" dirty="0"/>
+            <a:endParaRPr lang="en-US" sz="1650" dirty="0"/>
           </a:p>
         </p:txBody>
       </p:sp>
@@ -30321,7 +30321,7 @@
               <a:buNone/>
             </a:pPr>
             <a:r>
-              <a:rPr lang="en-US" sz="950" b="1" dirty="0">
+              <a:rPr lang="en-US" sz="1250" b="1" dirty="0">
                 <a:solidFill>
                   <a:srgbClr val="334155"/>
                 </a:solidFill>
@@ -30331,7 +30331,7 @@
               </a:rPr>
               <a:t>Thuật toán mảng vòng tối ưu bộ nhớ không dùng thư viện ngoài</a:t>
             </a:r>
-            <a:endParaRPr lang="en-US" sz="950" dirty="0"/>
+            <a:endParaRPr lang="en-US" sz="1250" dirty="0"/>
           </a:p>
         </p:txBody>
       </p:sp>
@@ -30387,7 +30387,7 @@
               <a:buNone/>
             </a:pPr>
             <a:r>
-              <a:rPr lang="en-US" sz="800" b="1" dirty="0">
+              <a:rPr lang="en-US" sz="1150" b="1" dirty="0">
                 <a:solidFill>
                   <a:srgbClr val="7C3AED"/>
                 </a:solidFill>
@@ -30397,7 +30397,7 @@
               </a:rPr>
               <a:t>CIRCULAR RING BUFFER</a:t>
             </a:r>
-            <a:endParaRPr lang="en-US" sz="800" dirty="0"/>
+            <a:endParaRPr lang="en-US" sz="1150" dirty="0"/>
           </a:p>
         </p:txBody>
       </p:sp>
@@ -30476,7 +30476,7 @@
               <a:buNone/>
             </a:pPr>
             <a:r>
-              <a:rPr lang="en-US" sz="1600" b="1" dirty="0">
+              <a:rPr lang="en-US" sz="2200" b="1" dirty="0">
                 <a:solidFill>
                   <a:srgbClr val="7C3AED"/>
                 </a:solidFill>
@@ -30488,14 +30488,14 @@
               <a:buNone/>
             </a:pPr>
             <a:r>
-              <a:rPr lang="en-US" sz="850" b="1" dirty="0">
+              <a:rPr lang="en-US" sz="1150" b="1" dirty="0">
                 <a:solidFill>
                   <a:srgbClr val="334155"/>
                 </a:solidFill>
               </a:rPr>
               <a:t>Độ phức tạp thêm việc và rút việc tức thì</a:t>
             </a:r>
-            <a:endParaRPr lang="en-US" sz="1600" dirty="0"/>
+            <a:endParaRPr lang="en-US" sz="2200" dirty="0"/>
           </a:p>
         </p:txBody>
       </p:sp>
@@ -30551,7 +30551,7 @@
               <a:buNone/>
             </a:pPr>
             <a:r>
-              <a:rPr lang="en-US" sz="1600" b="1" dirty="0">
+              <a:rPr lang="en-US" sz="2200" b="1" dirty="0">
                 <a:solidFill>
                   <a:srgbClr val="7C3AED"/>
                 </a:solidFill>
@@ -30563,14 +30563,14 @@
               <a:buNone/>
             </a:pPr>
             <a:r>
-              <a:rPr lang="en-US" sz="850" b="1" dirty="0">
+              <a:rPr lang="en-US" sz="1150" b="1" dirty="0">
                 <a:solidFill>
                   <a:srgbClr val="334155"/>
                 </a:solidFill>
               </a:rPr>
               <a:t>Không bao giờ phải sao chép hay dịch chuyển mảng</a:t>
             </a:r>
-            <a:endParaRPr lang="en-US" sz="1600" dirty="0"/>
+            <a:endParaRPr lang="en-US" sz="2200" dirty="0"/>
           </a:p>
         </p:txBody>
       </p:sp>
@@ -30583,11 +30583,11 @@
         <p:spPr>
           <a:xfrm>
             <a:off x="777240" y="3145536"/>
-            <a:ext cx="4956048" cy="841248"/>
+            <a:ext cx="4956048" cy="960120"/>
           </a:xfrm>
           <a:prstGeom prst="roundRect">
             <a:avLst>
-              <a:gd name="adj" fmla="val 8696"/>
+              <a:gd name="adj" fmla="val 7619"/>
             </a:avLst>
           </a:prstGeom>
           <a:solidFill>
@@ -30610,7 +30610,7 @@
         <p:spPr>
           <a:xfrm>
             <a:off x="868680" y="3218688"/>
-            <a:ext cx="4773168" cy="694944"/>
+            <a:ext cx="4773168" cy="813816"/>
           </a:xfrm>
           <a:prstGeom prst="rect">
             <a:avLst/>
@@ -30626,7 +30626,7 @@
               <a:buNone/>
             </a:pPr>
             <a:r>
-              <a:rPr lang="en-US" sz="1100" b="1" dirty="0">
+              <a:rPr lang="en-US" sz="1400" b="1" dirty="0">
                 <a:solidFill>
                   <a:srgbClr val="0F172A"/>
                 </a:solidFill>
@@ -30638,14 +30638,14 @@
               <a:buNone/>
             </a:pPr>
             <a:r>
-              <a:rPr lang="en-US" sz="920" dirty="0">
+              <a:rPr lang="en-US" sz="1220" dirty="0">
                 <a:solidFill>
                   <a:srgbClr val="334155"/>
                 </a:solidFill>
               </a:rPr>
               <a:t>Đầu nạp việc (Head) và đầu rút việc (Tail) xoay vòng khép kín liên tục.</a:t>
             </a:r>
-            <a:endParaRPr lang="en-US" sz="1100" dirty="0"/>
+            <a:endParaRPr lang="en-US" sz="1400" dirty="0"/>
           </a:p>
         </p:txBody>
       </p:sp>
@@ -30657,12 +30657,12 @@
         </p:nvSpPr>
         <p:spPr>
           <a:xfrm>
-            <a:off x="777240" y="4078224"/>
-            <a:ext cx="4956048" cy="841248"/>
+            <a:off x="777240" y="4197096"/>
+            <a:ext cx="4956048" cy="960120"/>
           </a:xfrm>
           <a:prstGeom prst="roundRect">
             <a:avLst>
-              <a:gd name="adj" fmla="val 8696"/>
+              <a:gd name="adj" fmla="val 7619"/>
             </a:avLst>
           </a:prstGeom>
           <a:solidFill>
@@ -30684,8 +30684,8 @@
         </p:nvSpPr>
         <p:spPr>
           <a:xfrm>
-            <a:off x="868680" y="4151376"/>
-            <a:ext cx="4773168" cy="694944"/>
+            <a:off x="868680" y="4270248"/>
+            <a:ext cx="4773168" cy="813816"/>
           </a:xfrm>
           <a:prstGeom prst="rect">
             <a:avLst/>
@@ -30701,7 +30701,7 @@
               <a:buNone/>
             </a:pPr>
             <a:r>
-              <a:rPr lang="en-US" sz="1100" b="1" dirty="0">
+              <a:rPr lang="en-US" sz="1400" b="1" dirty="0">
                 <a:solidFill>
                   <a:srgbClr val="0F172A"/>
                 </a:solidFill>
@@ -30713,14 +30713,14 @@
               <a:buNone/>
             </a:pPr>
             <a:r>
-              <a:rPr lang="en-US" sz="920" dirty="0">
+              <a:rPr lang="en-US" sz="1220" dirty="0">
                 <a:solidFill>
                   <a:srgbClr val="334155"/>
                 </a:solidFill>
               </a:rPr>
               <a:t>Tự xây dựng cơ chế khóa an toàn ngăn chặn tranh chấp dữ liệu giữa các công nhân.</a:t>
             </a:r>
-            <a:endParaRPr lang="en-US" sz="1100" dirty="0"/>
+            <a:endParaRPr lang="en-US" sz="1400" dirty="0"/>
           </a:p>
         </p:txBody>
       </p:sp>
@@ -30776,7 +30776,7 @@
               <a:buNone/>
             </a:pPr>
             <a:r>
-              <a:rPr lang="en-US" sz="880" b="1" dirty="0">
+              <a:rPr lang="en-US" sz="1150" b="1" dirty="0">
                 <a:solidFill>
                   <a:srgbClr val="7C3AED"/>
                 </a:solidFill>
@@ -30786,7 +30786,7 @@
               </a:rPr>
               <a:t>✨ Tự chủ công nghệ: Tự lập trình 100% cấu trúc dữ liệu cốt lõi từ đầu</a:t>
             </a:r>
-            <a:endParaRPr lang="en-US" sz="880" dirty="0"/>
+            <a:endParaRPr lang="en-US" sz="1150" dirty="0"/>
           </a:p>
         </p:txBody>
       </p:sp>
@@ -30867,7 +30867,7 @@
               <a:buNone/>
             </a:pPr>
             <a:r>
-              <a:rPr lang="en-US" sz="1450" b="1" dirty="0">
+              <a:rPr lang="en-US" sz="1650" b="1" dirty="0">
                 <a:solidFill>
                   <a:srgbClr val="0F172A"/>
                 </a:solidFill>
@@ -30877,7 +30877,7 @@
               </a:rPr>
               <a:t>⏰  Ngủ Đông &amp; Tắt Máy An Toàn</a:t>
             </a:r>
-            <a:endParaRPr lang="en-US" sz="1450" dirty="0"/>
+            <a:endParaRPr lang="en-US" sz="1650" dirty="0"/>
           </a:p>
         </p:txBody>
       </p:sp>
@@ -30906,7 +30906,7 @@
               <a:buNone/>
             </a:pPr>
             <a:r>
-              <a:rPr lang="en-US" sz="950" b="1" dirty="0">
+              <a:rPr lang="en-US" sz="1250" b="1" dirty="0">
                 <a:solidFill>
                   <a:srgbClr val="334155"/>
                 </a:solidFill>
@@ -30916,7 +30916,7 @@
               </a:rPr>
               <a:t>Tối ưu năng lượng CPU và cơ chế dọn dẹp chuẩn mực</a:t>
             </a:r>
-            <a:endParaRPr lang="en-US" sz="950" dirty="0"/>
+            <a:endParaRPr lang="en-US" sz="1250" dirty="0"/>
           </a:p>
         </p:txBody>
       </p:sp>
@@ -30972,7 +30972,7 @@
               <a:buNone/>
             </a:pPr>
             <a:r>
-              <a:rPr lang="en-US" sz="800" b="1" dirty="0">
+              <a:rPr lang="en-US" sz="1150" b="1" dirty="0">
                 <a:solidFill>
                   <a:srgbClr val="7C3AED"/>
                 </a:solidFill>
@@ -30982,7 +30982,7 @@
               </a:rPr>
               <a:t>GRACEFUL SHUTDOWN</a:t>
             </a:r>
-            <a:endParaRPr lang="en-US" sz="800" dirty="0"/>
+            <a:endParaRPr lang="en-US" sz="1150" dirty="0"/>
           </a:p>
         </p:txBody>
       </p:sp>
@@ -31061,7 +31061,7 @@
               <a:buNone/>
             </a:pPr>
             <a:r>
-              <a:rPr lang="en-US" sz="1600" b="1" dirty="0">
+              <a:rPr lang="en-US" sz="2200" b="1" dirty="0">
                 <a:solidFill>
                   <a:srgbClr val="7C3AED"/>
                 </a:solidFill>
@@ -31073,14 +31073,14 @@
               <a:buNone/>
             </a:pPr>
             <a:r>
-              <a:rPr lang="en-US" sz="850" b="1" dirty="0">
+              <a:rPr lang="en-US" sz="1150" b="1" dirty="0">
                 <a:solidFill>
                   <a:srgbClr val="334155"/>
                 </a:solidFill>
               </a:rPr>
               <a:t>Luồng tự động ngủ đông khi hàng đợi trống</a:t>
             </a:r>
-            <a:endParaRPr lang="en-US" sz="1600" dirty="0"/>
+            <a:endParaRPr lang="en-US" sz="2200" dirty="0"/>
           </a:p>
         </p:txBody>
       </p:sp>
@@ -31136,7 +31136,7 @@
               <a:buNone/>
             </a:pPr>
             <a:r>
-              <a:rPr lang="en-US" sz="1600" b="1" dirty="0">
+              <a:rPr lang="en-US" sz="2200" b="1" dirty="0">
                 <a:solidFill>
                   <a:srgbClr val="7C3AED"/>
                 </a:solidFill>
@@ -31148,14 +31148,14 @@
               <a:buNone/>
             </a:pPr>
             <a:r>
-              <a:rPr lang="en-US" sz="850" b="1" dirty="0">
+              <a:rPr lang="en-US" sz="1150" b="1" dirty="0">
                 <a:solidFill>
                   <a:srgbClr val="334155"/>
                 </a:solidFill>
               </a:rPr>
               <a:t>Dừng máy chủ không rơi rớt bất kỳ yêu cầu nào</a:t>
             </a:r>
-            <a:endParaRPr lang="en-US" sz="1600" dirty="0"/>
+            <a:endParaRPr lang="en-US" sz="2200" dirty="0"/>
           </a:p>
         </p:txBody>
       </p:sp>
@@ -31168,11 +31168,11 @@
         <p:spPr>
           <a:xfrm>
             <a:off x="6455664" y="3145536"/>
-            <a:ext cx="4956048" cy="841248"/>
+            <a:ext cx="4956048" cy="960120"/>
           </a:xfrm>
           <a:prstGeom prst="roundRect">
             <a:avLst>
-              <a:gd name="adj" fmla="val 8696"/>
+              <a:gd name="adj" fmla="val 7619"/>
             </a:avLst>
           </a:prstGeom>
           <a:solidFill>
@@ -31195,7 +31195,7 @@
         <p:spPr>
           <a:xfrm>
             <a:off x="6547104" y="3218688"/>
-            <a:ext cx="4773168" cy="694944"/>
+            <a:ext cx="4773168" cy="813816"/>
           </a:xfrm>
           <a:prstGeom prst="rect">
             <a:avLst/>
@@ -31211,7 +31211,7 @@
               <a:buNone/>
             </a:pPr>
             <a:r>
-              <a:rPr lang="en-US" sz="1100" b="1" dirty="0">
+              <a:rPr lang="en-US" sz="1400" b="1" dirty="0">
                 <a:solidFill>
                   <a:srgbClr val="0F172A"/>
                 </a:solidFill>
@@ -31223,14 +31223,14 @@
               <a:buNone/>
             </a:pPr>
             <a:r>
-              <a:rPr lang="en-US" sz="920" dirty="0">
+              <a:rPr lang="en-US" sz="1220" dirty="0">
                 <a:solidFill>
                   <a:srgbClr val="334155"/>
                 </a:solidFill>
               </a:rPr>
               <a:t>Có việc phát tín hiệu gọi dậy, hết việc tự động ngủ để trả lại 100% CPU.</a:t>
             </a:r>
-            <a:endParaRPr lang="en-US" sz="1100" dirty="0"/>
+            <a:endParaRPr lang="en-US" sz="1400" dirty="0"/>
           </a:p>
         </p:txBody>
       </p:sp>
@@ -31242,12 +31242,12 @@
         </p:nvSpPr>
         <p:spPr>
           <a:xfrm>
-            <a:off x="6455664" y="4078224"/>
-            <a:ext cx="4956048" cy="841248"/>
+            <a:off x="6455664" y="4197096"/>
+            <a:ext cx="4956048" cy="960120"/>
           </a:xfrm>
           <a:prstGeom prst="roundRect">
             <a:avLst>
-              <a:gd name="adj" fmla="val 8696"/>
+              <a:gd name="adj" fmla="val 7619"/>
             </a:avLst>
           </a:prstGeom>
           <a:solidFill>
@@ -31269,8 +31269,8 @@
         </p:nvSpPr>
         <p:spPr>
           <a:xfrm>
-            <a:off x="6547104" y="4151376"/>
-            <a:ext cx="4773168" cy="694944"/>
+            <a:off x="6547104" y="4270248"/>
+            <a:ext cx="4773168" cy="813816"/>
           </a:xfrm>
           <a:prstGeom prst="rect">
             <a:avLst/>
@@ -31286,7 +31286,7 @@
               <a:buNone/>
             </a:pPr>
             <a:r>
-              <a:rPr lang="en-US" sz="1100" b="1" dirty="0">
+              <a:rPr lang="en-US" sz="1400" b="1" dirty="0">
                 <a:solidFill>
                   <a:srgbClr val="0F172A"/>
                 </a:solidFill>
@@ -31298,14 +31298,14 @@
               <a:buNone/>
             </a:pPr>
             <a:r>
-              <a:rPr lang="en-US" sz="920" dirty="0">
+              <a:rPr lang="en-US" sz="1220" dirty="0">
                 <a:solidFill>
                   <a:srgbClr val="334155"/>
                 </a:solidFill>
               </a:rPr>
               <a:t>Đợi toàn bộ công việc dang dở làm xong hoàn toàn mới giải phóng tài nguyên.</a:t>
             </a:r>
-            <a:endParaRPr lang="en-US" sz="1100" dirty="0"/>
+            <a:endParaRPr lang="en-US" sz="1400" dirty="0"/>
           </a:p>
         </p:txBody>
       </p:sp>
@@ -31361,7 +31361,7 @@
               <a:buNone/>
             </a:pPr>
             <a:r>
-              <a:rPr lang="en-US" sz="880" b="1" dirty="0">
+              <a:rPr lang="en-US" sz="1150" b="1" dirty="0">
                 <a:solidFill>
                   <a:srgbClr val="7C3AED"/>
                 </a:solidFill>
@@ -31371,7 +31371,7 @@
               </a:rPr>
               <a:t>🎓 Bảo vệ đồ án: Minh chứng khả năng làm chủ giải thuật đa luồng tầng thấp trước hội đồng</a:t>
             </a:r>
-            <a:endParaRPr lang="en-US" sz="880" dirty="0"/>
+            <a:endParaRPr lang="en-US" sz="1150" dirty="0"/>
           </a:p>
         </p:txBody>
       </p:sp>
@@ -31447,7 +31447,7 @@
               <a:buNone/>
             </a:pPr>
             <a:r>
-              <a:rPr lang="en-US" sz="1100" dirty="0">
+              <a:rPr lang="en-US" sz="1350" dirty="0">
                 <a:solidFill>
                   <a:srgbClr val="0F172A"/>
                 </a:solidFill>
@@ -31457,7 +31457,7 @@
               </a:rPr>
               <a:t>⚙️ ĐIỂM SÁNG 30%: Việc tự cài đặt thành công Thread Pool chứng minh sinh viên hiểu sâu sắc cơ chế điều phối luồng ở tầng gốc rễ chứ không chỉ biết gọi thư viện có sẵn!</a:t>
             </a:r>
-            <a:endParaRPr lang="en-US" sz="1100" dirty="0"/>
+            <a:endParaRPr lang="en-US" sz="1350" dirty="0"/>
           </a:p>
         </p:txBody>
       </p:sp>
